--- a/PPTs/Ch4_ARM_Arithmetic_Logic_Exercises_ANS.pptx
+++ b/PPTs/Ch4_ARM_Arithmetic_Logic_Exercises_ANS.pptx
@@ -173,7 +173,7 @@
 <file path=ppt/revisionInfo.xml><?xml version="1.0" encoding="utf-8"?>
 <p1510:revInfo xmlns:a="http://schemas.openxmlformats.org/drawingml/2006/main" xmlns:r="http://schemas.openxmlformats.org/officeDocument/2006/relationships" xmlns:p1510="http://schemas.microsoft.com/office/powerpoint/2015/10/main">
   <p1510:revLst>
-    <p1510:client id="{949F66C0-3357-40C2-B5B1-DCDAC1289C61}" v="285" dt="2025-09-25T01:46:01.007"/>
+    <p1510:client id="{949F66C0-3357-40C2-B5B1-DCDAC1289C61}" v="286" dt="2025-10-02T23:27:39.147"/>
   </p1510:revLst>
 </p1510:revInfo>
 </file>
@@ -183,7 +183,7 @@
   <pc:docChgLst>
     <pc:chgData name="Zonghua Gu" userId="9a7e1853e1951ef5" providerId="LiveId" clId="{CF1FAA12-072C-4ED5-BA76-0FFFAEFDB88A}"/>
     <pc:docChg chg="undo redo custSel addSld delSld modSld sldOrd">
-      <pc:chgData name="Zonghua Gu" userId="9a7e1853e1951ef5" providerId="LiveId" clId="{CF1FAA12-072C-4ED5-BA76-0FFFAEFDB88A}" dt="2025-09-26T20:52:33.122" v="3592" actId="2696"/>
+      <pc:chgData name="Zonghua Gu" userId="9a7e1853e1951ef5" providerId="LiveId" clId="{CF1FAA12-072C-4ED5-BA76-0FFFAEFDB88A}" dt="2025-10-02T23:28:00.177" v="3628" actId="20577"/>
       <pc:docMkLst>
         <pc:docMk/>
       </pc:docMkLst>
@@ -1063,13 +1063,13 @@
         </pc:sldMkLst>
       </pc:sldChg>
       <pc:sldChg chg="addSp delSp modSp add mod">
-        <pc:chgData name="Zonghua Gu" userId="9a7e1853e1951ef5" providerId="LiveId" clId="{CF1FAA12-072C-4ED5-BA76-0FFFAEFDB88A}" dt="2025-09-22T02:11:05.258" v="1618" actId="22"/>
+        <pc:chgData name="Zonghua Gu" userId="9a7e1853e1951ef5" providerId="LiveId" clId="{CF1FAA12-072C-4ED5-BA76-0FFFAEFDB88A}" dt="2025-10-02T23:28:00.177" v="3628" actId="20577"/>
         <pc:sldMkLst>
           <pc:docMk/>
           <pc:sldMk cId="1496054644" sldId="387"/>
         </pc:sldMkLst>
         <pc:spChg chg="mod">
-          <ac:chgData name="Zonghua Gu" userId="9a7e1853e1951ef5" providerId="LiveId" clId="{CF1FAA12-072C-4ED5-BA76-0FFFAEFDB88A}" dt="2025-09-22T02:00:44.352" v="1581" actId="20577"/>
+          <ac:chgData name="Zonghua Gu" userId="9a7e1853e1951ef5" providerId="LiveId" clId="{CF1FAA12-072C-4ED5-BA76-0FFFAEFDB88A}" dt="2025-10-02T23:28:00.177" v="3628" actId="20577"/>
           <ac:spMkLst>
             <pc:docMk/>
             <pc:sldMk cId="1496054644" sldId="387"/>
@@ -1649,36 +1649,12 @@
           <pc:docMk/>
           <pc:sldMk cId="2592113441" sldId="580"/>
         </pc:sldMkLst>
-        <pc:spChg chg="del mod">
-          <ac:chgData name="Zonghua Gu" userId="9a7e1853e1951ef5" providerId="LiveId" clId="{CF1FAA12-072C-4ED5-BA76-0FFFAEFDB88A}" dt="2025-09-25T01:45:58.261" v="3582" actId="478"/>
-          <ac:spMkLst>
-            <pc:docMk/>
-            <pc:sldMk cId="2592113441" sldId="580"/>
-            <ac:spMk id="2" creationId="{1CCBCA61-D8F7-DFBB-5C26-665A64A8A293}"/>
-          </ac:spMkLst>
-        </pc:spChg>
         <pc:spChg chg="mod">
           <ac:chgData name="Zonghua Gu" userId="9a7e1853e1951ef5" providerId="LiveId" clId="{CF1FAA12-072C-4ED5-BA76-0FFFAEFDB88A}" dt="2025-09-25T01:30:48.786" v="3378" actId="1076"/>
           <ac:spMkLst>
             <pc:docMk/>
             <pc:sldMk cId="2592113441" sldId="580"/>
             <ac:spMk id="3" creationId="{6E3554BE-2738-205C-F3A8-BC35BC861743}"/>
-          </ac:spMkLst>
-        </pc:spChg>
-        <pc:spChg chg="del mod">
-          <ac:chgData name="Zonghua Gu" userId="9a7e1853e1951ef5" providerId="LiveId" clId="{CF1FAA12-072C-4ED5-BA76-0FFFAEFDB88A}" dt="2025-09-25T01:31:02.644" v="3381" actId="478"/>
-          <ac:spMkLst>
-            <pc:docMk/>
-            <pc:sldMk cId="2592113441" sldId="580"/>
-            <ac:spMk id="4" creationId="{026B0D7E-A197-07AC-E516-8CD3699C0B0C}"/>
-          </ac:spMkLst>
-        </pc:spChg>
-        <pc:spChg chg="add del mod">
-          <ac:chgData name="Zonghua Gu" userId="9a7e1853e1951ef5" providerId="LiveId" clId="{CF1FAA12-072C-4ED5-BA76-0FFFAEFDB88A}" dt="2025-09-25T01:46:00.739" v="3583" actId="478"/>
-          <ac:spMkLst>
-            <pc:docMk/>
-            <pc:sldMk cId="2592113441" sldId="580"/>
-            <ac:spMk id="12" creationId="{DF6841FB-3EBF-577E-3EA5-E5D034069F98}"/>
           </ac:spMkLst>
         </pc:spChg>
         <pc:spChg chg="add mod">
@@ -1689,14 +1665,6 @@
             <ac:spMk id="13" creationId="{99AD0913-B118-F87E-249C-6E68B0892D1C}"/>
           </ac:spMkLst>
         </pc:spChg>
-        <pc:graphicFrameChg chg="add del mod modGraphic">
-          <ac:chgData name="Zonghua Gu" userId="9a7e1853e1951ef5" providerId="LiveId" clId="{CF1FAA12-072C-4ED5-BA76-0FFFAEFDB88A}" dt="2025-09-25T01:32:19.700" v="3386" actId="478"/>
-          <ac:graphicFrameMkLst>
-            <pc:docMk/>
-            <pc:sldMk cId="2592113441" sldId="580"/>
-            <ac:graphicFrameMk id="5" creationId="{8BE25EB1-4D93-C12D-0191-15C035ED7C85}"/>
-          </ac:graphicFrameMkLst>
-        </pc:graphicFrameChg>
         <pc:graphicFrameChg chg="add mod modGraphic">
           <ac:chgData name="Zonghua Gu" userId="9a7e1853e1951ef5" providerId="LiveId" clId="{CF1FAA12-072C-4ED5-BA76-0FFFAEFDB88A}" dt="2025-09-25T01:46:17.337" v="3588" actId="20577"/>
           <ac:graphicFrameMkLst>
@@ -1721,14 +1689,6 @@
             <ac:graphicFrameMk id="8" creationId="{90108726-902A-C6CC-1647-A81D62B61243}"/>
           </ac:graphicFrameMkLst>
         </pc:graphicFrameChg>
-        <pc:picChg chg="add del mod">
-          <ac:chgData name="Zonghua Gu" userId="9a7e1853e1951ef5" providerId="LiveId" clId="{CF1FAA12-072C-4ED5-BA76-0FFFAEFDB88A}" dt="2025-09-25T01:45:24.275" v="3572" actId="478"/>
-          <ac:picMkLst>
-            <pc:docMk/>
-            <pc:sldMk cId="2592113441" sldId="580"/>
-            <ac:picMk id="10" creationId="{A77D97A0-20AE-62AF-7F60-6935A0C9667B}"/>
-          </ac:picMkLst>
-        </pc:picChg>
       </pc:sldChg>
       <pc:sldChg chg="addSp delSp modSp new del mod">
         <pc:chgData name="Zonghua Gu" userId="9a7e1853e1951ef5" providerId="LiveId" clId="{CF1FAA12-072C-4ED5-BA76-0FFFAEFDB88A}" dt="2025-09-25T01:46:33.923" v="3590" actId="47"/>
@@ -1736,22 +1696,6 @@
           <pc:docMk/>
           <pc:sldMk cId="4257322909" sldId="581"/>
         </pc:sldMkLst>
-        <pc:spChg chg="del">
-          <ac:chgData name="Zonghua Gu" userId="9a7e1853e1951ef5" providerId="LiveId" clId="{CF1FAA12-072C-4ED5-BA76-0FFFAEFDB88A}" dt="2025-09-25T01:29:36.546" v="3355" actId="478"/>
-          <ac:spMkLst>
-            <pc:docMk/>
-            <pc:sldMk cId="4257322909" sldId="581"/>
-            <ac:spMk id="4" creationId="{E9B9295F-A6D0-8227-891A-B0E6EC56A867}"/>
-          </ac:spMkLst>
-        </pc:spChg>
-        <pc:graphicFrameChg chg="add mod modGraphic">
-          <ac:chgData name="Zonghua Gu" userId="9a7e1853e1951ef5" providerId="LiveId" clId="{CF1FAA12-072C-4ED5-BA76-0FFFAEFDB88A}" dt="2025-09-25T01:30:22.938" v="3371" actId="14100"/>
-          <ac:graphicFrameMkLst>
-            <pc:docMk/>
-            <pc:sldMk cId="4257322909" sldId="581"/>
-            <ac:graphicFrameMk id="5" creationId="{2D3D5FF7-AE46-5694-0096-D19AF4FA228A}"/>
-          </ac:graphicFrameMkLst>
-        </pc:graphicFrameChg>
       </pc:sldChg>
       <pc:sldChg chg="addSp delSp modSp add mod ord">
         <pc:chgData name="Zonghua Gu" userId="9a7e1853e1951ef5" providerId="LiveId" clId="{CF1FAA12-072C-4ED5-BA76-0FFFAEFDB88A}" dt="2025-09-25T01:45:52.206" v="3581"/>
@@ -1759,36 +1703,12 @@
           <pc:docMk/>
           <pc:sldMk cId="1535224969" sldId="582"/>
         </pc:sldMkLst>
-        <pc:spChg chg="del">
-          <ac:chgData name="Zonghua Gu" userId="9a7e1853e1951ef5" providerId="LiveId" clId="{CF1FAA12-072C-4ED5-BA76-0FFFAEFDB88A}" dt="2025-09-25T01:45:46.608" v="3575" actId="478"/>
-          <ac:spMkLst>
-            <pc:docMk/>
-            <pc:sldMk cId="1535224969" sldId="582"/>
-            <ac:spMk id="2" creationId="{5B2C3302-0C26-E067-6A67-EE44A39DA76B}"/>
-          </ac:spMkLst>
-        </pc:spChg>
         <pc:spChg chg="add mod">
           <ac:chgData name="Zonghua Gu" userId="9a7e1853e1951ef5" providerId="LiveId" clId="{CF1FAA12-072C-4ED5-BA76-0FFFAEFDB88A}" dt="2025-09-25T01:45:38.633" v="3574" actId="1076"/>
           <ac:spMkLst>
             <pc:docMk/>
             <pc:sldMk cId="1535224969" sldId="582"/>
             <ac:spMk id="4" creationId="{8C172DA9-F89E-86B9-22FF-347E4B139A9D}"/>
-          </ac:spMkLst>
-        </pc:spChg>
-        <pc:spChg chg="add del mod">
-          <ac:chgData name="Zonghua Gu" userId="9a7e1853e1951ef5" providerId="LiveId" clId="{CF1FAA12-072C-4ED5-BA76-0FFFAEFDB88A}" dt="2025-09-25T01:45:49.278" v="3578" actId="478"/>
-          <ac:spMkLst>
-            <pc:docMk/>
-            <pc:sldMk cId="1535224969" sldId="582"/>
-            <ac:spMk id="9" creationId="{A8F37E84-BCFF-9135-978A-E17FEF970A98}"/>
-          </ac:spMkLst>
-        </pc:spChg>
-        <pc:spChg chg="add mod">
-          <ac:chgData name="Zonghua Gu" userId="9a7e1853e1951ef5" providerId="LiveId" clId="{CF1FAA12-072C-4ED5-BA76-0FFFAEFDB88A}" dt="2025-09-25T01:45:47.446" v="3577"/>
-          <ac:spMkLst>
-            <pc:docMk/>
-            <pc:sldMk cId="1535224969" sldId="582"/>
-            <ac:spMk id="10" creationId="{622EFB27-CB55-6A85-C339-D610298DF343}"/>
           </ac:spMkLst>
         </pc:spChg>
         <pc:spChg chg="add mod">
@@ -1799,28 +1719,12 @@
             <ac:spMk id="11" creationId="{BE83309C-FA8B-6F99-8A51-4E5D49379006}"/>
           </ac:spMkLst>
         </pc:spChg>
-        <pc:graphicFrameChg chg="del">
-          <ac:chgData name="Zonghua Gu" userId="9a7e1853e1951ef5" providerId="LiveId" clId="{CF1FAA12-072C-4ED5-BA76-0FFFAEFDB88A}" dt="2025-09-25T01:39:07.856" v="3483" actId="478"/>
-          <ac:graphicFrameMkLst>
-            <pc:docMk/>
-            <pc:sldMk cId="1535224969" sldId="582"/>
-            <ac:graphicFrameMk id="6" creationId="{4505F823-BA46-6ABE-68D3-E3D70E6A8D9C}"/>
-          </ac:graphicFrameMkLst>
-        </pc:graphicFrameChg>
         <pc:graphicFrameChg chg="mod modGraphic">
           <ac:chgData name="Zonghua Gu" userId="9a7e1853e1951ef5" providerId="LiveId" clId="{CF1FAA12-072C-4ED5-BA76-0FFFAEFDB88A}" dt="2025-09-25T01:44:24.186" v="3516" actId="20577"/>
           <ac:graphicFrameMkLst>
             <pc:docMk/>
             <pc:sldMk cId="1535224969" sldId="582"/>
             <ac:graphicFrameMk id="7" creationId="{473EDD55-4B34-E9B0-90CE-5D12E387F5DE}"/>
-          </ac:graphicFrameMkLst>
-        </pc:graphicFrameChg>
-        <pc:graphicFrameChg chg="del">
-          <ac:chgData name="Zonghua Gu" userId="9a7e1853e1951ef5" providerId="LiveId" clId="{CF1FAA12-072C-4ED5-BA76-0FFFAEFDB88A}" dt="2025-09-25T01:39:07.856" v="3483" actId="478"/>
-          <ac:graphicFrameMkLst>
-            <pc:docMk/>
-            <pc:sldMk cId="1535224969" sldId="582"/>
-            <ac:graphicFrameMk id="8" creationId="{336DF400-B5D8-B4F6-03B5-8E85AC58F29C}"/>
           </ac:graphicFrameMkLst>
         </pc:graphicFrameChg>
       </pc:sldChg>
@@ -1912,7 +1816,7 @@
             <a:fld id="{3AC3A17A-95E8-4381-B66B-5D6DE2B3048A}" type="datetimeFigureOut">
               <a:rPr lang="en-US" smtClean="0"/>
               <a:pPr/>
-              <a:t>9/26/2025</a:t>
+              <a:t>10/2/2025</a:t>
             </a:fld>
             <a:endParaRPr lang="en-US"/>
           </a:p>
@@ -3587,7 +3491,7 @@
             <a:fld id="{966FEA0E-C2DF-4252-97AD-54F2B7E07EAC}" type="datetime1">
               <a:rPr lang="en-US" smtClean="0"/>
               <a:pPr eaLnBrk="1" latinLnBrk="0" hangingPunct="1"/>
-              <a:t>9/26/2025</a:t>
+              <a:t>10/2/2025</a:t>
             </a:fld>
             <a:endParaRPr lang="en-US" sz="1600" dirty="0"/>
           </a:p>
@@ -3948,7 +3852,7 @@
             <a:fld id="{69EF9524-0CAA-4F98-BAC2-CE6B712F5E94}" type="datetime1">
               <a:rPr lang="en-US" smtClean="0"/>
               <a:pPr eaLnBrk="1" latinLnBrk="0" hangingPunct="1"/>
-              <a:t>9/26/2025</a:t>
+              <a:t>10/2/2025</a:t>
             </a:fld>
             <a:endParaRPr lang="en-US"/>
           </a:p>
@@ -4125,7 +4029,7 @@
             <a:fld id="{CB20516D-6F89-4C89-8307-32A716E22875}" type="datetime1">
               <a:rPr lang="en-US" smtClean="0"/>
               <a:pPr eaLnBrk="1" latinLnBrk="0" hangingPunct="1"/>
-              <a:t>9/26/2025</a:t>
+              <a:t>10/2/2025</a:t>
             </a:fld>
             <a:endParaRPr lang="en-US"/>
           </a:p>
@@ -4362,7 +4266,7 @@
             <a:fld id="{0CD88620-7329-4FC3-B65D-4EA691138F1B}" type="datetime1">
               <a:rPr lang="en-US" smtClean="0"/>
               <a:pPr eaLnBrk="1" latinLnBrk="0" hangingPunct="1"/>
-              <a:t>9/26/2025</a:t>
+              <a:t>10/2/2025</a:t>
             </a:fld>
             <a:endParaRPr lang="en-US" dirty="0"/>
           </a:p>
@@ -4633,7 +4537,7 @@
             <a:fld id="{0E46F3A1-5653-427D-9F78-56077401431A}" type="datetime1">
               <a:rPr lang="en-US" smtClean="0"/>
               <a:pPr eaLnBrk="1" latinLnBrk="0" hangingPunct="1"/>
-              <a:t>9/26/2025</a:t>
+              <a:t>10/2/2025</a:t>
             </a:fld>
             <a:endParaRPr lang="en-US" dirty="0"/>
           </a:p>
@@ -4855,7 +4759,7 @@
             <a:fld id="{CB67FC03-415A-45F0-B002-DF181377F7DC}" type="datetime1">
               <a:rPr lang="en-US" smtClean="0"/>
               <a:pPr eaLnBrk="1" latinLnBrk="0" hangingPunct="1"/>
-              <a:t>9/26/2025</a:t>
+              <a:t>10/2/2025</a:t>
             </a:fld>
             <a:endParaRPr lang="en-US"/>
           </a:p>
@@ -5209,7 +5113,7 @@
             <a:fld id="{1B6FC726-A0B4-4FC7-90F5-F17415A5C1A3}" type="datetime1">
               <a:rPr lang="en-US" smtClean="0"/>
               <a:pPr eaLnBrk="1" latinLnBrk="0" hangingPunct="1"/>
-              <a:t>9/26/2025</a:t>
+              <a:t>10/2/2025</a:t>
             </a:fld>
             <a:endParaRPr lang="en-US"/>
           </a:p>
@@ -5443,7 +5347,7 @@
             <a:fld id="{BE217211-C3F9-4892-9CC3-C7105638567D}" type="datetime1">
               <a:rPr lang="en-US" smtClean="0"/>
               <a:pPr eaLnBrk="1" latinLnBrk="0" hangingPunct="1"/>
-              <a:t>9/26/2025</a:t>
+              <a:t>10/2/2025</a:t>
             </a:fld>
             <a:endParaRPr lang="en-US"/>
           </a:p>
@@ -5586,7 +5490,7 @@
             <a:fld id="{BA713E6A-6B26-4373-A75B-EF395DC64F9E}" type="datetime1">
               <a:rPr lang="en-US" smtClean="0"/>
               <a:pPr eaLnBrk="1" latinLnBrk="0" hangingPunct="1"/>
-              <a:t>9/26/2025</a:t>
+              <a:t>10/2/2025</a:t>
             </a:fld>
             <a:endParaRPr lang="en-US"/>
           </a:p>
@@ -5865,7 +5769,7 @@
             <a:fld id="{57EB41EF-4260-415A-8DD6-FEDCC46E7EFC}" type="datetime1">
               <a:rPr lang="en-US" smtClean="0"/>
               <a:pPr eaLnBrk="1" latinLnBrk="0" hangingPunct="1"/>
-              <a:t>9/26/2025</a:t>
+              <a:t>10/2/2025</a:t>
             </a:fld>
             <a:endParaRPr lang="en-US"/>
           </a:p>
@@ -6274,7 +6178,7 @@
             <a:fld id="{6BDA80A0-06CC-4492-94A0-E8516751045E}" type="datetime1">
               <a:rPr lang="en-US" smtClean="0"/>
               <a:pPr eaLnBrk="1" latinLnBrk="0" hangingPunct="1"/>
-              <a:t>9/26/2025</a:t>
+              <a:t>10/2/2025</a:t>
             </a:fld>
             <a:endParaRPr lang="en-US"/>
           </a:p>
@@ -6613,7 +6517,7 @@
             <a:fld id="{A25B5B4B-57EE-495D-8E74-A657CFD8BB6C}" type="datetime1">
               <a:rPr lang="en-US" smtClean="0"/>
               <a:pPr eaLnBrk="1" latinLnBrk="0" hangingPunct="1"/>
-              <a:t>9/26/2025</a:t>
+              <a:t>10/2/2025</a:t>
             </a:fld>
             <a:endParaRPr lang="en-US" sz="1400" dirty="0">
               <a:solidFill>
@@ -11761,17 +11665,17 @@
           <a:ln/>
           <a:extLst>
             <a:ext uri="{FAA26D3D-D897-4be2-8F04-BA451C77F1D7}">
-              <ma14:placeholderFlag xmlns:ma14="http://schemas.microsoft.com/office/mac/drawingml/2011/main" xmlns="" val="1"/>
+              <ma14:placeholderFlag xmlns="" xmlns:ma14="http://schemas.microsoft.com/office/mac/drawingml/2011/main" val="1"/>
             </a:ext>
             <a:ext uri="{909E8E84-426E-40dd-AFC4-6F175D3DCCD1}">
-              <a14:hiddenFill xmlns:a14="http://schemas.microsoft.com/office/drawing/2010/main" xmlns="">
+              <a14:hiddenFill xmlns="" xmlns:a14="http://schemas.microsoft.com/office/drawing/2010/main">
                 <a:solidFill>
                   <a:schemeClr val="bg1"/>
                 </a:solidFill>
               </a14:hiddenFill>
             </a:ext>
             <a:ext uri="{91240B29-F687-4f45-9708-019B960494DF}">
-              <a14:hiddenLine xmlns:a14="http://schemas.microsoft.com/office/drawing/2010/main" xmlns="" w="12700">
+              <a14:hiddenLine xmlns="" xmlns:a14="http://schemas.microsoft.com/office/drawing/2010/main" w="12700">
                 <a:pattFill prst="narHorz">
                   <a:fgClr>
                     <a:schemeClr val="tx1"/>
@@ -11786,7 +11690,7 @@
               </a14:hiddenLine>
             </a:ext>
             <a:ext uri="{AF507438-7753-43e0-B8FC-AC1667EBCBE1}">
-              <a14:hiddenEffects xmlns:a14="http://schemas.microsoft.com/office/drawing/2010/main" xmlns="">
+              <a14:hiddenEffects xmlns="" xmlns:a14="http://schemas.microsoft.com/office/drawing/2010/main">
                 <a:effectLst>
                   <a:outerShdw blurRad="63500" dist="38099" dir="2700000" algn="ctr" rotWithShape="0">
                     <a:schemeClr val="bg2">
@@ -19264,14 +19168,22 @@
             <a:pPr lvl="1"/>
             <a:r>
               <a:rPr lang="en-US" dirty="0"/>
-              <a:t>C = 0 (logical operations clear carry flag)</a:t>
+              <a:t>C = previous value, assumed to be 0 (C is unaffected by ANDS)</a:t>
             </a:r>
           </a:p>
           <a:p>
             <a:pPr lvl="1"/>
             <a:r>
               <a:rPr lang="en-US" dirty="0"/>
-              <a:t>V = 0 (logical operations don't affect overflow)</a:t>
+              <a:t>V = previous value</a:t>
+            </a:r>
+            <a:r>
+              <a:rPr lang="en-US"/>
+              <a:t>, assumed to be 0 </a:t>
+            </a:r>
+            <a:r>
+              <a:rPr lang="en-US" dirty="0"/>
+              <a:t>(V is unaffected by ANDS)</a:t>
             </a:r>
           </a:p>
           <a:p>

--- a/PPTs/Ch4_ARM_Arithmetic_Logic_Exercises_ANS.pptx
+++ b/PPTs/Ch4_ARM_Arithmetic_Logic_Exercises_ANS.pptx
@@ -179,7 +179,7 @@
 <file path=ppt/revisionInfo.xml><?xml version="1.0" encoding="utf-8"?>
 <p1510:revInfo xmlns:a="http://schemas.openxmlformats.org/drawingml/2006/main" xmlns:r="http://schemas.openxmlformats.org/officeDocument/2006/relationships" xmlns:p1510="http://schemas.microsoft.com/office/powerpoint/2015/10/main">
   <p1510:revLst>
-    <p1510:client id="{949F66C0-3357-40C2-B5B1-DCDAC1289C61}" v="352" dt="2025-10-09T21:59:29.534"/>
+    <p1510:client id="{949F66C0-3357-40C2-B5B1-DCDAC1289C61}" v="36" dt="2025-10-15T00:15:50.666"/>
   </p1510:revLst>
 </p1510:revInfo>
 </file>
@@ -189,7 +189,7 @@
   <pc:docChgLst>
     <pc:chgData name="Zonghua Gu" userId="9a7e1853e1951ef5" providerId="LiveId" clId="{CF1FAA12-072C-4ED5-BA76-0FFFAEFDB88A}"/>
     <pc:docChg chg="undo redo custSel addSld delSld modSld sldOrd modNotesMaster">
-      <pc:chgData name="Zonghua Gu" userId="9a7e1853e1951ef5" providerId="LiveId" clId="{CF1FAA12-072C-4ED5-BA76-0FFFAEFDB88A}" dt="2025-10-09T21:59:29.534" v="4352" actId="403"/>
+      <pc:chgData name="Zonghua Gu" userId="9a7e1853e1951ef5" providerId="LiveId" clId="{CF1FAA12-072C-4ED5-BA76-0FFFAEFDB88A}" dt="2025-10-15T00:22:35.321" v="4949" actId="1076"/>
       <pc:docMkLst>
         <pc:docMk/>
       </pc:docMkLst>
@@ -1016,22 +1016,6 @@
           <pc:docMk/>
           <pc:sldMk cId="1202265337" sldId="553"/>
         </pc:sldMkLst>
-        <pc:spChg chg="add mod">
-          <ac:chgData name="Zonghua Gu" userId="9a7e1853e1951ef5" providerId="LiveId" clId="{CF1FAA12-072C-4ED5-BA76-0FFFAEFDB88A}" dt="2025-10-09T21:56:42.565" v="4341"/>
-          <ac:spMkLst>
-            <pc:docMk/>
-            <pc:sldMk cId="1202265337" sldId="553"/>
-            <ac:spMk id="3" creationId="{D48C24B2-C142-576C-CE10-D9A6DF0F70B2}"/>
-          </ac:spMkLst>
-        </pc:spChg>
-        <pc:spChg chg="mod">
-          <ac:chgData name="Zonghua Gu" userId="9a7e1853e1951ef5" providerId="LiveId" clId="{CF1FAA12-072C-4ED5-BA76-0FFFAEFDB88A}" dt="2025-10-09T21:56:47.836" v="4344" actId="14100"/>
-          <ac:spMkLst>
-            <pc:docMk/>
-            <pc:sldMk cId="1202265337" sldId="553"/>
-            <ac:spMk id="38914" creationId="{00000000-0000-0000-0000-000000000000}"/>
-          </ac:spMkLst>
-        </pc:spChg>
       </pc:sldChg>
       <pc:sldChg chg="modSp add mod">
         <pc:chgData name="Zonghua Gu" userId="9a7e1853e1951ef5" providerId="LiveId" clId="{CF1FAA12-072C-4ED5-BA76-0FFFAEFDB88A}" dt="2025-10-09T21:59:29.534" v="4352" actId="403"/>
@@ -1732,7 +1716,7 @@
         </pc:graphicFrameChg>
       </pc:sldChg>
       <pc:sldChg chg="addSp delSp modSp new mod">
-        <pc:chgData name="Zonghua Gu" userId="9a7e1853e1951ef5" providerId="LiveId" clId="{CF1FAA12-072C-4ED5-BA76-0FFFAEFDB88A}" dt="2025-10-07T21:12:54.151" v="3908" actId="20577"/>
+        <pc:chgData name="Zonghua Gu" userId="9a7e1853e1951ef5" providerId="LiveId" clId="{CF1FAA12-072C-4ED5-BA76-0FFFAEFDB88A}" dt="2025-10-15T00:22:35.321" v="4949" actId="1076"/>
         <pc:sldMkLst>
           <pc:docMk/>
           <pc:sldMk cId="2830003090" sldId="583"/>
@@ -1746,7 +1730,7 @@
           </ac:spMkLst>
         </pc:spChg>
         <pc:spChg chg="add mod">
-          <ac:chgData name="Zonghua Gu" userId="9a7e1853e1951ef5" providerId="LiveId" clId="{CF1FAA12-072C-4ED5-BA76-0FFFAEFDB88A}" dt="2025-10-07T20:17:36.872" v="3710" actId="20577"/>
+          <ac:chgData name="Zonghua Gu" userId="9a7e1853e1951ef5" providerId="LiveId" clId="{CF1FAA12-072C-4ED5-BA76-0FFFAEFDB88A}" dt="2025-10-15T00:20:26.474" v="4943" actId="20577"/>
           <ac:spMkLst>
             <pc:docMk/>
             <pc:sldMk cId="2830003090" sldId="583"/>
@@ -1754,13 +1738,53 @@
           </ac:spMkLst>
         </pc:spChg>
         <pc:graphicFrameChg chg="add mod modGraphic">
-          <ac:chgData name="Zonghua Gu" userId="9a7e1853e1951ef5" providerId="LiveId" clId="{CF1FAA12-072C-4ED5-BA76-0FFFAEFDB88A}" dt="2025-10-07T20:17:33.090" v="3707" actId="20577"/>
+          <ac:chgData name="Zonghua Gu" userId="9a7e1853e1951ef5" providerId="LiveId" clId="{CF1FAA12-072C-4ED5-BA76-0FFFAEFDB88A}" dt="2025-10-15T00:22:35.321" v="4949" actId="1076"/>
           <ac:graphicFrameMkLst>
             <pc:docMk/>
             <pc:sldMk cId="2830003090" sldId="583"/>
             <ac:graphicFrameMk id="6" creationId="{9B855329-644D-B313-F6DA-A77E9B02AAE4}"/>
           </ac:graphicFrameMkLst>
         </pc:graphicFrameChg>
+        <pc:picChg chg="add del mod">
+          <ac:chgData name="Zonghua Gu" userId="9a7e1853e1951ef5" providerId="LiveId" clId="{CF1FAA12-072C-4ED5-BA76-0FFFAEFDB88A}" dt="2025-10-15T00:19:29.577" v="4875" actId="478"/>
+          <ac:picMkLst>
+            <pc:docMk/>
+            <pc:sldMk cId="2830003090" sldId="583"/>
+            <ac:picMk id="5" creationId="{0485CE79-3D0C-8812-FB99-B4692FB9D18C}"/>
+          </ac:picMkLst>
+        </pc:picChg>
+        <pc:picChg chg="add del mod">
+          <ac:chgData name="Zonghua Gu" userId="9a7e1853e1951ef5" providerId="LiveId" clId="{CF1FAA12-072C-4ED5-BA76-0FFFAEFDB88A}" dt="2025-10-15T00:13:17.015" v="4833" actId="478"/>
+          <ac:picMkLst>
+            <pc:docMk/>
+            <pc:sldMk cId="2830003090" sldId="583"/>
+            <ac:picMk id="5" creationId="{386C4CDA-0ECC-7584-9975-E04C4CD3B7EA}"/>
+          </ac:picMkLst>
+        </pc:picChg>
+        <pc:picChg chg="add del mod">
+          <ac:chgData name="Zonghua Gu" userId="9a7e1853e1951ef5" providerId="LiveId" clId="{CF1FAA12-072C-4ED5-BA76-0FFFAEFDB88A}" dt="2025-10-15T00:13:50.945" v="4840" actId="478"/>
+          <ac:picMkLst>
+            <pc:docMk/>
+            <pc:sldMk cId="2830003090" sldId="583"/>
+            <ac:picMk id="9" creationId="{613FDA46-D26B-03AA-1369-AF6243DFBF91}"/>
+          </ac:picMkLst>
+        </pc:picChg>
+        <pc:picChg chg="add del mod">
+          <ac:chgData name="Zonghua Gu" userId="9a7e1853e1951ef5" providerId="LiveId" clId="{CF1FAA12-072C-4ED5-BA76-0FFFAEFDB88A}" dt="2025-10-15T00:22:17.794" v="4946" actId="478"/>
+          <ac:picMkLst>
+            <pc:docMk/>
+            <pc:sldMk cId="2830003090" sldId="583"/>
+            <ac:picMk id="9" creationId="{70D8F2C0-7031-3693-C043-5F913909DACC}"/>
+          </ac:picMkLst>
+        </pc:picChg>
+        <pc:picChg chg="add del mod">
+          <ac:chgData name="Zonghua Gu" userId="9a7e1853e1951ef5" providerId="LiveId" clId="{CF1FAA12-072C-4ED5-BA76-0FFFAEFDB88A}" dt="2025-10-15T00:14:34.405" v="4844" actId="478"/>
+          <ac:picMkLst>
+            <pc:docMk/>
+            <pc:sldMk cId="2830003090" sldId="583"/>
+            <ac:picMk id="11" creationId="{D007701D-429F-E09B-D42E-144BAC7C1095}"/>
+          </ac:picMkLst>
+        </pc:picChg>
       </pc:sldChg>
       <pc:sldChg chg="modSp new del mod">
         <pc:chgData name="Zonghua Gu" userId="9a7e1853e1951ef5" providerId="LiveId" clId="{CF1FAA12-072C-4ED5-BA76-0FFFAEFDB88A}" dt="2025-10-07T21:15:42.525" v="3910" actId="47"/>
@@ -1770,7 +1794,7 @@
         </pc:sldMkLst>
       </pc:sldChg>
       <pc:sldChg chg="addSp delSp modSp new mod">
-        <pc:chgData name="Zonghua Gu" userId="9a7e1853e1951ef5" providerId="LiveId" clId="{CF1FAA12-072C-4ED5-BA76-0FFFAEFDB88A}" dt="2025-10-07T21:15:51.119" v="3911"/>
+        <pc:chgData name="Zonghua Gu" userId="9a7e1853e1951ef5" providerId="LiveId" clId="{CF1FAA12-072C-4ED5-BA76-0FFFAEFDB88A}" dt="2025-10-15T00:15:20.072" v="4862" actId="571"/>
         <pc:sldMkLst>
           <pc:docMk/>
           <pc:sldMk cId="753812427" sldId="585"/>
@@ -1783,12 +1807,52 @@
             <ac:spMk id="2" creationId="{B2F387BE-21EF-D8F5-98CC-8E638AA4C3CB}"/>
           </ac:spMkLst>
         </pc:spChg>
+        <pc:spChg chg="add del mod">
+          <ac:chgData name="Zonghua Gu" userId="9a7e1853e1951ef5" providerId="LiveId" clId="{CF1FAA12-072C-4ED5-BA76-0FFFAEFDB88A}" dt="2025-10-15T00:15:05.062" v="4858" actId="478"/>
+          <ac:spMkLst>
+            <pc:docMk/>
+            <pc:sldMk cId="753812427" sldId="585"/>
+            <ac:spMk id="4" creationId="{A1C50A87-D16E-04B2-5685-7DBD9EDB8A80}"/>
+          </ac:spMkLst>
+        </pc:spChg>
         <pc:spChg chg="add mod">
           <ac:chgData name="Zonghua Gu" userId="9a7e1853e1951ef5" providerId="LiveId" clId="{CF1FAA12-072C-4ED5-BA76-0FFFAEFDB88A}" dt="2025-10-07T20:20:15.077" v="3750" actId="1076"/>
           <ac:spMkLst>
             <pc:docMk/>
             <pc:sldMk cId="753812427" sldId="585"/>
             <ac:spMk id="7" creationId="{3DC6837D-2422-BFB8-F87C-7FA5B761C9E2}"/>
+          </ac:spMkLst>
+        </pc:spChg>
+        <pc:spChg chg="add mod">
+          <ac:chgData name="Zonghua Gu" userId="9a7e1853e1951ef5" providerId="LiveId" clId="{CF1FAA12-072C-4ED5-BA76-0FFFAEFDB88A}" dt="2025-10-15T00:15:02.630" v="4857" actId="1076"/>
+          <ac:spMkLst>
+            <pc:docMk/>
+            <pc:sldMk cId="753812427" sldId="585"/>
+            <ac:spMk id="8" creationId="{BCCAC2F7-7B48-A7B1-D707-D63B0BCE4A2D}"/>
+          </ac:spMkLst>
+        </pc:spChg>
+        <pc:spChg chg="add mod">
+          <ac:chgData name="Zonghua Gu" userId="9a7e1853e1951ef5" providerId="LiveId" clId="{CF1FAA12-072C-4ED5-BA76-0FFFAEFDB88A}" dt="2025-10-15T00:15:11.266" v="4860" actId="1076"/>
+          <ac:spMkLst>
+            <pc:docMk/>
+            <pc:sldMk cId="753812427" sldId="585"/>
+            <ac:spMk id="9" creationId="{E691C844-4BC0-0B20-B37E-D78145261753}"/>
+          </ac:spMkLst>
+        </pc:spChg>
+        <pc:spChg chg="add mod">
+          <ac:chgData name="Zonghua Gu" userId="9a7e1853e1951ef5" providerId="LiveId" clId="{CF1FAA12-072C-4ED5-BA76-0FFFAEFDB88A}" dt="2025-10-15T00:15:16.403" v="4861" actId="571"/>
+          <ac:spMkLst>
+            <pc:docMk/>
+            <pc:sldMk cId="753812427" sldId="585"/>
+            <ac:spMk id="10" creationId="{EDCEFAB5-9995-5D1A-7108-FE6877E0AFFF}"/>
+          </ac:spMkLst>
+        </pc:spChg>
+        <pc:spChg chg="add mod">
+          <ac:chgData name="Zonghua Gu" userId="9a7e1853e1951ef5" providerId="LiveId" clId="{CF1FAA12-072C-4ED5-BA76-0FFFAEFDB88A}" dt="2025-10-15T00:15:20.072" v="4862" actId="571"/>
+          <ac:spMkLst>
+            <pc:docMk/>
+            <pc:sldMk cId="753812427" sldId="585"/>
+            <ac:spMk id="11" creationId="{91BA33C9-48DD-5A86-81ED-82377FB93AD6}"/>
           </ac:spMkLst>
         </pc:spChg>
         <pc:spChg chg="add mod">
@@ -1840,7 +1904,7 @@
           </ac:graphicFrameMkLst>
         </pc:graphicFrameChg>
         <pc:graphicFrameChg chg="add mod modGraphic">
-          <ac:chgData name="Zonghua Gu" userId="9a7e1853e1951ef5" providerId="LiveId" clId="{CF1FAA12-072C-4ED5-BA76-0FFFAEFDB88A}" dt="2025-10-07T20:50:50.411" v="3775" actId="20577"/>
+          <ac:chgData name="Zonghua Gu" userId="9a7e1853e1951ef5" providerId="LiveId" clId="{CF1FAA12-072C-4ED5-BA76-0FFFAEFDB88A}" dt="2025-10-15T00:13:41.253" v="4839" actId="20577"/>
           <ac:graphicFrameMkLst>
             <pc:docMk/>
             <pc:sldMk cId="753812427" sldId="585"/>
@@ -1881,11 +1945,19 @@
         </pc:cxnChg>
       </pc:sldChg>
       <pc:sldChg chg="addSp delSp modSp add mod">
-        <pc:chgData name="Zonghua Gu" userId="9a7e1853e1951ef5" providerId="LiveId" clId="{CF1FAA12-072C-4ED5-BA76-0FFFAEFDB88A}" dt="2025-10-07T21:16:01.098" v="3913" actId="1076"/>
+        <pc:chgData name="Zonghua Gu" userId="9a7e1853e1951ef5" providerId="LiveId" clId="{CF1FAA12-072C-4ED5-BA76-0FFFAEFDB88A}" dt="2025-10-15T00:15:33.611" v="4867" actId="478"/>
         <pc:sldMkLst>
           <pc:docMk/>
           <pc:sldMk cId="908488964" sldId="586"/>
         </pc:sldMkLst>
+        <pc:spChg chg="add mod">
+          <ac:chgData name="Zonghua Gu" userId="9a7e1853e1951ef5" providerId="LiveId" clId="{CF1FAA12-072C-4ED5-BA76-0FFFAEFDB88A}" dt="2025-10-15T00:15:21.641" v="4863"/>
+          <ac:spMkLst>
+            <pc:docMk/>
+            <pc:sldMk cId="908488964" sldId="586"/>
+            <ac:spMk id="2" creationId="{59936A83-1579-8CB9-0726-27085A2456A7}"/>
+          </ac:spMkLst>
+        </pc:spChg>
         <pc:spChg chg="add mod">
           <ac:chgData name="Zonghua Gu" userId="9a7e1853e1951ef5" providerId="LiveId" clId="{CF1FAA12-072C-4ED5-BA76-0FFFAEFDB88A}" dt="2025-10-07T20:54:05.119" v="3843" actId="1076"/>
           <ac:spMkLst>
@@ -1934,6 +2006,14 @@
             <ac:spMk id="11" creationId="{A0645D20-AFA0-6C43-3DA8-702124B76FCB}"/>
           </ac:spMkLst>
         </pc:spChg>
+        <pc:spChg chg="add mod">
+          <ac:chgData name="Zonghua Gu" userId="9a7e1853e1951ef5" providerId="LiveId" clId="{CF1FAA12-072C-4ED5-BA76-0FFFAEFDB88A}" dt="2025-10-15T00:15:22.929" v="4864"/>
+          <ac:spMkLst>
+            <pc:docMk/>
+            <pc:sldMk cId="908488964" sldId="586"/>
+            <ac:spMk id="12" creationId="{C3C97F72-6D74-AB60-1AAE-60E97F9F0183}"/>
+          </ac:spMkLst>
+        </pc:spChg>
         <pc:spChg chg="mod">
           <ac:chgData name="Zonghua Gu" userId="9a7e1853e1951ef5" providerId="LiveId" clId="{CF1FAA12-072C-4ED5-BA76-0FFFAEFDB88A}" dt="2025-10-07T20:53:45.434" v="3840" actId="20577"/>
           <ac:spMkLst>
@@ -1958,6 +2038,38 @@
             <ac:spMk id="21" creationId="{7BA59ECF-E539-3CF2-7331-F24D28CA3E52}"/>
           </ac:spMkLst>
         </pc:spChg>
+        <pc:spChg chg="add del mod">
+          <ac:chgData name="Zonghua Gu" userId="9a7e1853e1951ef5" providerId="LiveId" clId="{CF1FAA12-072C-4ED5-BA76-0FFFAEFDB88A}" dt="2025-10-15T00:15:33.611" v="4867" actId="478"/>
+          <ac:spMkLst>
+            <pc:docMk/>
+            <pc:sldMk cId="908488964" sldId="586"/>
+            <ac:spMk id="22" creationId="{3E3F775C-D21C-9B2A-47D9-F1B5E472C2EC}"/>
+          </ac:spMkLst>
+        </pc:spChg>
+        <pc:spChg chg="add mod">
+          <ac:chgData name="Zonghua Gu" userId="9a7e1853e1951ef5" providerId="LiveId" clId="{CF1FAA12-072C-4ED5-BA76-0FFFAEFDB88A}" dt="2025-10-15T00:15:29.539" v="4865"/>
+          <ac:spMkLst>
+            <pc:docMk/>
+            <pc:sldMk cId="908488964" sldId="586"/>
+            <ac:spMk id="23" creationId="{7D1CF86A-D4ED-E25F-19E3-E1F021E47C8F}"/>
+          </ac:spMkLst>
+        </pc:spChg>
+        <pc:spChg chg="add mod">
+          <ac:chgData name="Zonghua Gu" userId="9a7e1853e1951ef5" providerId="LiveId" clId="{CF1FAA12-072C-4ED5-BA76-0FFFAEFDB88A}" dt="2025-10-15T00:15:29.539" v="4865"/>
+          <ac:spMkLst>
+            <pc:docMk/>
+            <pc:sldMk cId="908488964" sldId="586"/>
+            <ac:spMk id="24" creationId="{8F7C7F06-67DF-7BC1-E659-4759B0125435}"/>
+          </ac:spMkLst>
+        </pc:spChg>
+        <pc:spChg chg="add mod">
+          <ac:chgData name="Zonghua Gu" userId="9a7e1853e1951ef5" providerId="LiveId" clId="{CF1FAA12-072C-4ED5-BA76-0FFFAEFDB88A}" dt="2025-10-15T00:15:29.539" v="4865"/>
+          <ac:spMkLst>
+            <pc:docMk/>
+            <pc:sldMk cId="908488964" sldId="586"/>
+            <ac:spMk id="25" creationId="{0BE27724-9882-64E4-9FA6-DF613F1C77AE}"/>
+          </ac:spMkLst>
+        </pc:spChg>
         <pc:graphicFrameChg chg="modGraphic">
           <ac:chgData name="Zonghua Gu" userId="9a7e1853e1951ef5" providerId="LiveId" clId="{CF1FAA12-072C-4ED5-BA76-0FFFAEFDB88A}" dt="2025-10-07T20:52:20.289" v="3822" actId="20577"/>
           <ac:graphicFrameMkLst>
@@ -1967,7 +2079,7 @@
           </ac:graphicFrameMkLst>
         </pc:graphicFrameChg>
         <pc:graphicFrameChg chg="modGraphic">
-          <ac:chgData name="Zonghua Gu" userId="9a7e1853e1951ef5" providerId="LiveId" clId="{CF1FAA12-072C-4ED5-BA76-0FFFAEFDB88A}" dt="2025-10-07T20:53:40.203" v="3839" actId="20577"/>
+          <ac:chgData name="Zonghua Gu" userId="9a7e1853e1951ef5" providerId="LiveId" clId="{CF1FAA12-072C-4ED5-BA76-0FFFAEFDB88A}" dt="2025-10-14T23:08:59.529" v="4353" actId="20577"/>
           <ac:graphicFrameMkLst>
             <pc:docMk/>
             <pc:sldMk cId="908488964" sldId="586"/>
@@ -1991,8 +2103,8 @@
           </ac:graphicFrameMkLst>
         </pc:graphicFrameChg>
       </pc:sldChg>
-      <pc:sldChg chg="modSp add mod ord">
-        <pc:chgData name="Zonghua Gu" userId="9a7e1853e1951ef5" providerId="LiveId" clId="{CF1FAA12-072C-4ED5-BA76-0FFFAEFDB88A}" dt="2025-10-07T21:12:48.454" v="3906" actId="20577"/>
+      <pc:sldChg chg="addSp delSp modSp add mod ord">
+        <pc:chgData name="Zonghua Gu" userId="9a7e1853e1951ef5" providerId="LiveId" clId="{CF1FAA12-072C-4ED5-BA76-0FFFAEFDB88A}" dt="2025-10-15T00:15:55.115" v="4871" actId="6549"/>
         <pc:sldMkLst>
           <pc:docMk/>
           <pc:sldMk cId="3350438353" sldId="587"/>
@@ -2005,8 +2117,16 @@
             <ac:spMk id="2" creationId="{7FA9ABE5-E35E-9995-C450-C422553E96B1}"/>
           </ac:spMkLst>
         </pc:spChg>
-        <pc:graphicFrameChg chg="modGraphic">
-          <ac:chgData name="Zonghua Gu" userId="9a7e1853e1951ef5" providerId="LiveId" clId="{CF1FAA12-072C-4ED5-BA76-0FFFAEFDB88A}" dt="2025-10-07T21:11:41.563" v="3880" actId="6549"/>
+        <pc:graphicFrameChg chg="add mod modGraphic">
+          <ac:chgData name="Zonghua Gu" userId="9a7e1853e1951ef5" providerId="LiveId" clId="{CF1FAA12-072C-4ED5-BA76-0FFFAEFDB88A}" dt="2025-10-15T00:15:55.115" v="4871" actId="6549"/>
+          <ac:graphicFrameMkLst>
+            <pc:docMk/>
+            <pc:sldMk cId="3350438353" sldId="587"/>
+            <ac:graphicFrameMk id="4" creationId="{39EE1C15-FF51-08AC-2A57-2CF578AEDA18}"/>
+          </ac:graphicFrameMkLst>
+        </pc:graphicFrameChg>
+        <pc:graphicFrameChg chg="del modGraphic">
+          <ac:chgData name="Zonghua Gu" userId="9a7e1853e1951ef5" providerId="LiveId" clId="{CF1FAA12-072C-4ED5-BA76-0FFFAEFDB88A}" dt="2025-10-15T00:15:50.232" v="4869" actId="478"/>
           <ac:graphicFrameMkLst>
             <pc:docMk/>
             <pc:sldMk cId="3350438353" sldId="587"/>
@@ -2020,22 +2140,6 @@
           <pc:docMk/>
           <pc:sldMk cId="2666113646" sldId="588"/>
         </pc:sldMkLst>
-        <pc:spChg chg="mod">
-          <ac:chgData name="Zonghua Gu" userId="9a7e1853e1951ef5" providerId="LiveId" clId="{CF1FAA12-072C-4ED5-BA76-0FFFAEFDB88A}" dt="2025-10-08T00:54:30.047" v="3928" actId="20577"/>
-          <ac:spMkLst>
-            <pc:docMk/>
-            <pc:sldMk cId="2666113646" sldId="588"/>
-            <ac:spMk id="2" creationId="{36E25079-AE31-90C5-0A2D-B85886E97A98}"/>
-          </ac:spMkLst>
-        </pc:spChg>
-        <pc:spChg chg="mod">
-          <ac:chgData name="Zonghua Gu" userId="9a7e1853e1951ef5" providerId="LiveId" clId="{CF1FAA12-072C-4ED5-BA76-0FFFAEFDB88A}" dt="2025-10-08T01:01:54.434" v="3964" actId="20577"/>
-          <ac:spMkLst>
-            <pc:docMk/>
-            <pc:sldMk cId="2666113646" sldId="588"/>
-            <ac:spMk id="4" creationId="{A2688EF4-6F20-A9F2-6391-5CC20EB7E07C}"/>
-          </ac:spMkLst>
-        </pc:spChg>
       </pc:sldChg>
       <pc:sldChg chg="addSp delSp modSp add mod">
         <pc:chgData name="Zonghua Gu" userId="9a7e1853e1951ef5" providerId="LiveId" clId="{CF1FAA12-072C-4ED5-BA76-0FFFAEFDB88A}" dt="2025-10-08T01:23:45.059" v="4321" actId="20577"/>
@@ -2059,14 +2163,6 @@
             <ac:spMk id="4" creationId="{0A380CFB-3CFF-ED04-FB0F-0B0AEF72870A}"/>
           </ac:spMkLst>
         </pc:spChg>
-        <pc:graphicFrameChg chg="add del mod modGraphic">
-          <ac:chgData name="Zonghua Gu" userId="9a7e1853e1951ef5" providerId="LiveId" clId="{CF1FAA12-072C-4ED5-BA76-0FFFAEFDB88A}" dt="2025-10-08T01:04:10.036" v="4057" actId="478"/>
-          <ac:graphicFrameMkLst>
-            <pc:docMk/>
-            <pc:sldMk cId="3677126747" sldId="589"/>
-            <ac:graphicFrameMk id="5" creationId="{C016290D-5BE3-B632-CE2E-F65179BF44CA}"/>
-          </ac:graphicFrameMkLst>
-        </pc:graphicFrameChg>
         <pc:graphicFrameChg chg="add mod">
           <ac:chgData name="Zonghua Gu" userId="9a7e1853e1951ef5" providerId="LiveId" clId="{CF1FAA12-072C-4ED5-BA76-0FFFAEFDB88A}" dt="2025-10-08T01:08:41.220" v="4112"/>
           <ac:graphicFrameMkLst>
@@ -2090,22 +2186,6 @@
             <ac:spMk id="4" creationId="{80E8719E-6F53-B45E-0478-44C5D8020651}"/>
           </ac:spMkLst>
         </pc:spChg>
-        <pc:spChg chg="add">
-          <ac:chgData name="Zonghua Gu" userId="9a7e1853e1951ef5" providerId="LiveId" clId="{CF1FAA12-072C-4ED5-BA76-0FFFAEFDB88A}" dt="2025-10-08T01:12:14.709" v="4114"/>
-          <ac:spMkLst>
-            <pc:docMk/>
-            <pc:sldMk cId="1060976615" sldId="590"/>
-            <ac:spMk id="6" creationId="{D60E67A2-6498-15FA-B155-D876DB078E9E}"/>
-          </ac:spMkLst>
-        </pc:spChg>
-        <pc:picChg chg="add del mod">
-          <ac:chgData name="Zonghua Gu" userId="9a7e1853e1951ef5" providerId="LiveId" clId="{CF1FAA12-072C-4ED5-BA76-0FFFAEFDB88A}" dt="2025-10-08T01:20:53.671" v="4274" actId="478"/>
-          <ac:picMkLst>
-            <pc:docMk/>
-            <pc:sldMk cId="1060976615" sldId="590"/>
-            <ac:picMk id="7" creationId="{824D1D00-B91E-2CB9-C9DA-7EC45B2736B9}"/>
-          </ac:picMkLst>
-        </pc:picChg>
       </pc:sldChg>
       <pc:sldChg chg="addSp delSp modSp add mod ord">
         <pc:chgData name="Zonghua Gu" userId="9a7e1853e1951ef5" providerId="LiveId" clId="{CF1FAA12-072C-4ED5-BA76-0FFFAEFDB88A}" dt="2025-10-08T01:24:03.105" v="4333" actId="20577"/>
@@ -2121,14 +2201,6 @@
             <ac:spMk id="4" creationId="{7E1BCC50-A76F-3959-218D-71AAD3648525}"/>
           </ac:spMkLst>
         </pc:spChg>
-        <pc:picChg chg="add del mod">
-          <ac:chgData name="Zonghua Gu" userId="9a7e1853e1951ef5" providerId="LiveId" clId="{CF1FAA12-072C-4ED5-BA76-0FFFAEFDB88A}" dt="2025-10-08T01:20:31.099" v="4271" actId="21"/>
-          <ac:picMkLst>
-            <pc:docMk/>
-            <pc:sldMk cId="1206155242" sldId="591"/>
-            <ac:picMk id="7" creationId="{824D1D00-B91E-2CB9-C9DA-7EC45B2736B9}"/>
-          </ac:picMkLst>
-        </pc:picChg>
       </pc:sldChg>
     </pc:docChg>
   </pc:docChgLst>
@@ -2270,7 +2342,7 @@
             <a:fld id="{3AC3A17A-95E8-4381-B66B-5D6DE2B3048A}" type="datetimeFigureOut">
               <a:rPr lang="en-US" smtClean="0"/>
               <a:pPr/>
-              <a:t>10/9/2025</a:t>
+              <a:t>10/14/2025</a:t>
             </a:fld>
             <a:endParaRPr lang="en-US"/>
           </a:p>
@@ -5463,7 +5535,7 @@
             <a:fld id="{966FEA0E-C2DF-4252-97AD-54F2B7E07EAC}" type="datetime1">
               <a:rPr lang="en-US" smtClean="0"/>
               <a:pPr eaLnBrk="1" latinLnBrk="0" hangingPunct="1"/>
-              <a:t>10/9/2025</a:t>
+              <a:t>10/14/2025</a:t>
             </a:fld>
             <a:endParaRPr lang="en-US" sz="1600" dirty="0"/>
           </a:p>
@@ -5824,7 +5896,7 @@
             <a:fld id="{69EF9524-0CAA-4F98-BAC2-CE6B712F5E94}" type="datetime1">
               <a:rPr lang="en-US" smtClean="0"/>
               <a:pPr eaLnBrk="1" latinLnBrk="0" hangingPunct="1"/>
-              <a:t>10/9/2025</a:t>
+              <a:t>10/14/2025</a:t>
             </a:fld>
             <a:endParaRPr lang="en-US"/>
           </a:p>
@@ -6001,7 +6073,7 @@
             <a:fld id="{CB20516D-6F89-4C89-8307-32A716E22875}" type="datetime1">
               <a:rPr lang="en-US" smtClean="0"/>
               <a:pPr eaLnBrk="1" latinLnBrk="0" hangingPunct="1"/>
-              <a:t>10/9/2025</a:t>
+              <a:t>10/14/2025</a:t>
             </a:fld>
             <a:endParaRPr lang="en-US"/>
           </a:p>
@@ -6238,7 +6310,7 @@
             <a:fld id="{0CD88620-7329-4FC3-B65D-4EA691138F1B}" type="datetime1">
               <a:rPr lang="en-US" smtClean="0"/>
               <a:pPr eaLnBrk="1" latinLnBrk="0" hangingPunct="1"/>
-              <a:t>10/9/2025</a:t>
+              <a:t>10/14/2025</a:t>
             </a:fld>
             <a:endParaRPr lang="en-US" dirty="0"/>
           </a:p>
@@ -6509,7 +6581,7 @@
             <a:fld id="{0E46F3A1-5653-427D-9F78-56077401431A}" type="datetime1">
               <a:rPr lang="en-US" smtClean="0"/>
               <a:pPr eaLnBrk="1" latinLnBrk="0" hangingPunct="1"/>
-              <a:t>10/9/2025</a:t>
+              <a:t>10/14/2025</a:t>
             </a:fld>
             <a:endParaRPr lang="en-US" dirty="0"/>
           </a:p>
@@ -6731,7 +6803,7 @@
             <a:fld id="{CB67FC03-415A-45F0-B002-DF181377F7DC}" type="datetime1">
               <a:rPr lang="en-US" smtClean="0"/>
               <a:pPr eaLnBrk="1" latinLnBrk="0" hangingPunct="1"/>
-              <a:t>10/9/2025</a:t>
+              <a:t>10/14/2025</a:t>
             </a:fld>
             <a:endParaRPr lang="en-US"/>
           </a:p>
@@ -7085,7 +7157,7 @@
             <a:fld id="{1B6FC726-A0B4-4FC7-90F5-F17415A5C1A3}" type="datetime1">
               <a:rPr lang="en-US" smtClean="0"/>
               <a:pPr eaLnBrk="1" latinLnBrk="0" hangingPunct="1"/>
-              <a:t>10/9/2025</a:t>
+              <a:t>10/14/2025</a:t>
             </a:fld>
             <a:endParaRPr lang="en-US"/>
           </a:p>
@@ -7319,7 +7391,7 @@
             <a:fld id="{BE217211-C3F9-4892-9CC3-C7105638567D}" type="datetime1">
               <a:rPr lang="en-US" smtClean="0"/>
               <a:pPr eaLnBrk="1" latinLnBrk="0" hangingPunct="1"/>
-              <a:t>10/9/2025</a:t>
+              <a:t>10/14/2025</a:t>
             </a:fld>
             <a:endParaRPr lang="en-US"/>
           </a:p>
@@ -7462,7 +7534,7 @@
             <a:fld id="{BA713E6A-6B26-4373-A75B-EF395DC64F9E}" type="datetime1">
               <a:rPr lang="en-US" smtClean="0"/>
               <a:pPr eaLnBrk="1" latinLnBrk="0" hangingPunct="1"/>
-              <a:t>10/9/2025</a:t>
+              <a:t>10/14/2025</a:t>
             </a:fld>
             <a:endParaRPr lang="en-US"/>
           </a:p>
@@ -7741,7 +7813,7 @@
             <a:fld id="{57EB41EF-4260-415A-8DD6-FEDCC46E7EFC}" type="datetime1">
               <a:rPr lang="en-US" smtClean="0"/>
               <a:pPr eaLnBrk="1" latinLnBrk="0" hangingPunct="1"/>
-              <a:t>10/9/2025</a:t>
+              <a:t>10/14/2025</a:t>
             </a:fld>
             <a:endParaRPr lang="en-US"/>
           </a:p>
@@ -8150,7 +8222,7 @@
             <a:fld id="{6BDA80A0-06CC-4492-94A0-E8516751045E}" type="datetime1">
               <a:rPr lang="en-US" smtClean="0"/>
               <a:pPr eaLnBrk="1" latinLnBrk="0" hangingPunct="1"/>
-              <a:t>10/9/2025</a:t>
+              <a:t>10/14/2025</a:t>
             </a:fld>
             <a:endParaRPr lang="en-US"/>
           </a:p>
@@ -8489,7 +8561,7 @@
             <a:fld id="{A25B5B4B-57EE-495D-8E74-A657CFD8BB6C}" type="datetime1">
               <a:rPr lang="en-US" smtClean="0"/>
               <a:pPr eaLnBrk="1" latinLnBrk="0" hangingPunct="1"/>
-              <a:t>10/9/2025</a:t>
+              <a:t>10/14/2025</a:t>
             </a:fld>
             <a:endParaRPr lang="en-US" sz="1400" dirty="0">
               <a:solidFill>
@@ -21029,12 +21101,45 @@
           </a:p>
         </p:txBody>
       </p:sp>
+      <p:sp>
+        <p:nvSpPr>
+          <p:cNvPr id="7" name="Content Placeholder 3">
+            <a:extLst>
+              <a:ext uri="{FF2B5EF4-FFF2-40B4-BE49-F238E27FC236}">
+                <a16:creationId xmlns:a16="http://schemas.microsoft.com/office/drawing/2014/main" id="{4B89EF58-E7D7-52A9-B76A-D6754B4BB133}"/>
+              </a:ext>
+            </a:extLst>
+          </p:cNvPr>
+          <p:cNvSpPr>
+            <a:spLocks noGrp="1"/>
+          </p:cNvSpPr>
+          <p:nvPr>
+            <p:ph sz="quarter" idx="1"/>
+          </p:nvPr>
+        </p:nvSpPr>
+        <p:spPr>
+          <a:xfrm>
+            <a:off x="457200" y="1219200"/>
+            <a:ext cx="8229600" cy="4937760"/>
+          </a:xfrm>
+        </p:spPr>
+        <p:txBody>
+          <a:bodyPr/>
+          <a:lstStyle/>
+          <a:p>
+            <a:r>
+              <a:rPr lang="en-US" dirty="0"/>
+              <a:t>For a 4-bit system, calculate the result of summation, setting C and V flags</a:t>
+            </a:r>
+          </a:p>
+        </p:txBody>
+      </p:sp>
       <p:graphicFrame>
         <p:nvGraphicFramePr>
-          <p:cNvPr id="6" name="Table 5">
+          <p:cNvPr id="4" name="Table 3">
             <a:extLst>
               <a:ext uri="{FF2B5EF4-FFF2-40B4-BE49-F238E27FC236}">
-                <a16:creationId xmlns:a16="http://schemas.microsoft.com/office/drawing/2014/main" id="{B0565DDE-CFDA-64B0-7C1A-5C1F5D8B93A0}"/>
+                <a16:creationId xmlns:a16="http://schemas.microsoft.com/office/drawing/2014/main" id="{39EE1C15-FF51-08AC-2A57-2CF578AEDA18}"/>
               </a:ext>
             </a:extLst>
           </p:cNvPr>
@@ -21044,52 +21149,66 @@
           <p:nvPr>
             <p:extLst>
               <p:ext uri="{D42A27DB-BD31-4B8C-83A1-F6EECF244321}">
-                <p14:modId xmlns:p14="http://schemas.microsoft.com/office/powerpoint/2010/main" val="518666222"/>
+                <p14:modId xmlns:p14="http://schemas.microsoft.com/office/powerpoint/2010/main" val="3399844450"/>
               </p:ext>
             </p:extLst>
           </p:nvPr>
         </p:nvGraphicFramePr>
         <p:xfrm>
-          <a:off x="1094263" y="2333942"/>
-          <a:ext cx="6955473" cy="3304858"/>
+          <a:off x="381000" y="2178748"/>
+          <a:ext cx="8610600" cy="3356166"/>
         </p:xfrm>
         <a:graphic>
           <a:graphicData uri="http://schemas.openxmlformats.org/drawingml/2006/table">
             <a:tbl>
               <a:tblPr firstRow="1" bandRow="1"/>
               <a:tblGrid>
-                <a:gridCol w="1702524">
+                <a:gridCol w="1524000">
                   <a:extLst>
                     <a:ext uri="{9D8B030D-6E8A-4147-A177-3AD203B41FA5}">
                       <a16:colId xmlns:a16="http://schemas.microsoft.com/office/drawing/2014/main" val="2359662815"/>
                     </a:ext>
                   </a:extLst>
                 </a:gridCol>
-                <a:gridCol w="1144345">
+                <a:gridCol w="762000">
                   <a:extLst>
                     <a:ext uri="{9D8B030D-6E8A-4147-A177-3AD203B41FA5}">
                       <a16:colId xmlns:a16="http://schemas.microsoft.com/office/drawing/2014/main" val="1212662852"/>
                     </a:ext>
                   </a:extLst>
                 </a:gridCol>
-                <a:gridCol w="1173887">
+                <a:gridCol w="533400">
                   <a:extLst>
                     <a:ext uri="{9D8B030D-6E8A-4147-A177-3AD203B41FA5}">
                       <a16:colId xmlns:a16="http://schemas.microsoft.com/office/drawing/2014/main" val="4290731535"/>
                     </a:ext>
                   </a:extLst>
                 </a:gridCol>
-                <a:gridCol w="1191767">
+                <a:gridCol w="457200">
                   <a:extLst>
                     <a:ext uri="{9D8B030D-6E8A-4147-A177-3AD203B41FA5}">
                       <a16:colId xmlns:a16="http://schemas.microsoft.com/office/drawing/2014/main" val="4234417883"/>
                     </a:ext>
                   </a:extLst>
                 </a:gridCol>
-                <a:gridCol w="1742950">
+                <a:gridCol w="914400">
                   <a:extLst>
                     <a:ext uri="{9D8B030D-6E8A-4147-A177-3AD203B41FA5}">
                       <a16:colId xmlns:a16="http://schemas.microsoft.com/office/drawing/2014/main" val="1819084519"/>
+                    </a:ext>
+                  </a:extLst>
+                </a:gridCol>
+                <a:gridCol w="2133600">
+                  <a:extLst>
+                    <a:ext uri="{9D8B030D-6E8A-4147-A177-3AD203B41FA5}">
+                      <a16:colId xmlns:a16="http://schemas.microsoft.com/office/drawing/2014/main" val="3514109378"/>
+                    </a:ext>
+                  </a:extLst>
+                </a:gridCol>
+                <a:gridCol w="2286000">
+                  <a:extLst>
+                    <a:ext uri="{9D8B030D-6E8A-4147-A177-3AD203B41FA5}">
+                      <a16:colId xmlns:a16="http://schemas.microsoft.com/office/drawing/2014/main" val="3173739672"/>
                     </a:ext>
                   </a:extLst>
                 </a:gridCol>
@@ -21100,17 +21219,17 @@
                     <a:bodyPr/>
                     <a:lstStyle/>
                     <a:p>
-                      <a:pPr indent="139700">
+                      <a:pPr indent="0">
                         <a:lnSpc>
                           <a:spcPct val="115000"/>
                         </a:lnSpc>
                         <a:spcAft>
-                          <a:spcPts val="800"/>
+                          <a:spcPts val="0"/>
                         </a:spcAft>
                         <a:buNone/>
                       </a:pPr>
                       <a:r>
-                        <a:rPr lang="en-US" sz="1600" kern="100">
+                        <a:rPr lang="en-US" sz="1600" kern="100" dirty="0">
                           <a:solidFill>
                             <a:srgbClr val="000000"/>
                           </a:solidFill>
@@ -21121,7 +21240,7 @@
                         </a:rPr>
                         <a:t>Expression</a:t>
                       </a:r>
-                      <a:endParaRPr lang="en-US" sz="1800" kern="100">
+                      <a:endParaRPr lang="en-US" sz="1800" kern="100" dirty="0">
                         <a:effectLst/>
                         <a:latin typeface="Aptos" panose="020B0004020202020204" pitchFamily="34" charset="0"/>
                         <a:ea typeface="DengXian" panose="02010600030101010101" pitchFamily="2" charset="-122"/>
@@ -21176,17 +21295,17 @@
                     <a:bodyPr/>
                     <a:lstStyle/>
                     <a:p>
-                      <a:pPr indent="139700">
+                      <a:pPr indent="0">
                         <a:lnSpc>
                           <a:spcPct val="115000"/>
                         </a:lnSpc>
                         <a:spcAft>
-                          <a:spcPts val="800"/>
+                          <a:spcPts val="0"/>
                         </a:spcAft>
                         <a:buNone/>
                       </a:pPr>
                       <a:r>
-                        <a:rPr lang="en-US" sz="1600" kern="100">
+                        <a:rPr lang="en-US" sz="1600" kern="100" dirty="0">
                           <a:solidFill>
                             <a:srgbClr val="000000"/>
                           </a:solidFill>
@@ -21197,7 +21316,7 @@
                         </a:rPr>
                         <a:t>Result</a:t>
                       </a:r>
-                      <a:endParaRPr lang="en-US" sz="1800" kern="100">
+                      <a:endParaRPr lang="en-US" sz="1800" kern="100" dirty="0">
                         <a:effectLst/>
                         <a:latin typeface="Aptos" panose="020B0004020202020204" pitchFamily="34" charset="0"/>
                         <a:ea typeface="DengXian" panose="02010600030101010101" pitchFamily="2" charset="-122"/>
@@ -21252,12 +21371,12 @@
                     <a:bodyPr/>
                     <a:lstStyle/>
                     <a:p>
-                      <a:pPr indent="139700">
+                      <a:pPr indent="0">
                         <a:lnSpc>
                           <a:spcPct val="115000"/>
                         </a:lnSpc>
                         <a:spcAft>
-                          <a:spcPts val="800"/>
+                          <a:spcPts val="0"/>
                         </a:spcAft>
                         <a:buNone/>
                       </a:pPr>
@@ -21328,12 +21447,12 @@
                     <a:bodyPr/>
                     <a:lstStyle/>
                     <a:p>
-                      <a:pPr>
+                      <a:pPr indent="0">
                         <a:lnSpc>
                           <a:spcPct val="115000"/>
                         </a:lnSpc>
                         <a:spcAft>
-                          <a:spcPts val="800"/>
+                          <a:spcPts val="0"/>
                         </a:spcAft>
                         <a:buNone/>
                       </a:pPr>
@@ -21404,12 +21523,12 @@
                     <a:bodyPr/>
                     <a:lstStyle/>
                     <a:p>
-                      <a:pPr indent="139700">
+                      <a:pPr indent="0">
                         <a:lnSpc>
-                          <a:spcPct val="115000"/>
+                          <a:spcPct val="100000"/>
                         </a:lnSpc>
                         <a:spcAft>
-                          <a:spcPts val="800"/>
+                          <a:spcPts val="0"/>
                         </a:spcAft>
                         <a:buNone/>
                       </a:pPr>
@@ -21423,7 +21542,7 @@
                           <a:ea typeface="Times New Roman" panose="02020603050405020304" pitchFamily="18" charset="0"/>
                           <a:cs typeface="Times New Roman" panose="02020603050405020304" pitchFamily="18" charset="0"/>
                         </a:rPr>
-                        <a:t>Correct Result?</a:t>
+                        <a:t>Correct? Unsigned/ Signed</a:t>
                       </a:r>
                       <a:endParaRPr lang="en-US" sz="1800" kern="100" dirty="0">
                         <a:effectLst/>
@@ -21432,34 +21551,153 @@
                         <a:cs typeface="Times New Roman" panose="02020603050405020304" pitchFamily="18" charset="0"/>
                       </a:endParaRPr>
                     </a:p>
+                  </a:txBody>
+                  <a:tcPr marL="68580" marR="68580" marT="0" marB="0" anchor="ctr">
+                    <a:lnL w="12700" cap="flat" cmpd="sng" algn="ctr">
+                      <a:solidFill>
+                        <a:srgbClr val="000000"/>
+                      </a:solidFill>
+                      <a:prstDash val="solid"/>
+                      <a:round/>
+                      <a:headEnd type="none" w="med" len="med"/>
+                      <a:tailEnd type="none" w="med" len="med"/>
+                    </a:lnL>
+                    <a:lnR w="12700" cap="flat" cmpd="sng" algn="ctr">
+                      <a:solidFill>
+                        <a:srgbClr val="000000"/>
+                      </a:solidFill>
+                      <a:prstDash val="solid"/>
+                      <a:round/>
+                      <a:headEnd type="none" w="med" len="med"/>
+                      <a:tailEnd type="none" w="med" len="med"/>
+                    </a:lnR>
+                    <a:lnT w="12700" cap="flat" cmpd="sng" algn="ctr">
+                      <a:solidFill>
+                        <a:srgbClr val="000000"/>
+                      </a:solidFill>
+                      <a:prstDash val="solid"/>
+                      <a:round/>
+                      <a:headEnd type="none" w="med" len="med"/>
+                      <a:tailEnd type="none" w="med" len="med"/>
+                    </a:lnT>
+                    <a:lnB w="12700" cap="flat" cmpd="sng" algn="ctr">
+                      <a:solidFill>
+                        <a:srgbClr val="000000"/>
+                      </a:solidFill>
+                      <a:prstDash val="solid"/>
+                      <a:round/>
+                      <a:headEnd type="none" w="med" len="med"/>
+                      <a:tailEnd type="none" w="med" len="med"/>
+                    </a:lnB>
+                    <a:solidFill>
+                      <a:srgbClr val="FFFFFF"/>
+                    </a:solidFill>
+                  </a:tcPr>
+                </a:tc>
+                <a:tc>
+                  <a:txBody>
+                    <a:bodyPr/>
+                    <a:lstStyle/>
                     <a:p>
-                      <a:pPr indent="139700">
+                      <a:pPr indent="0">
                         <a:lnSpc>
                           <a:spcPct val="115000"/>
                         </a:lnSpc>
                         <a:spcAft>
-                          <a:spcPts val="800"/>
+                          <a:spcPts val="0"/>
                         </a:spcAft>
                         <a:buNone/>
                       </a:pPr>
                       <a:r>
-                        <a:rPr lang="en-US" sz="1600" kern="100" dirty="0">
+                        <a:rPr kumimoji="0" lang="en-US" sz="1600" kern="100" dirty="0">
                           <a:solidFill>
                             <a:srgbClr val="000000"/>
                           </a:solidFill>
                           <a:effectLst/>
                           <a:latin typeface="Calibri" panose="020F0502020204030204" pitchFamily="34" charset="0"/>
-                          <a:ea typeface="Times New Roman" panose="02020603050405020304" pitchFamily="18" charset="0"/>
+                          <a:ea typeface="DengXian" panose="02010600030101010101" pitchFamily="2" charset="-122"/>
                           <a:cs typeface="Times New Roman" panose="02020603050405020304" pitchFamily="18" charset="0"/>
                         </a:rPr>
-                        <a:t>Unsigned/Signed</a:t>
+                        <a:t>Decimal Unsigned       (GT: Ground Truth)</a:t>
                       </a:r>
-                      <a:endParaRPr lang="en-US" sz="1800" kern="100" dirty="0">
-                        <a:effectLst/>
-                        <a:latin typeface="Aptos" panose="020B0004020202020204" pitchFamily="34" charset="0"/>
-                        <a:ea typeface="DengXian" panose="02010600030101010101" pitchFamily="2" charset="-122"/>
-                        <a:cs typeface="Times New Roman" panose="02020603050405020304" pitchFamily="18" charset="0"/>
-                      </a:endParaRPr>
+                    </a:p>
+                  </a:txBody>
+                  <a:tcPr marL="68580" marR="68580" marT="0" marB="0" anchor="ctr">
+                    <a:lnL w="12700" cap="flat" cmpd="sng" algn="ctr">
+                      <a:solidFill>
+                        <a:srgbClr val="000000"/>
+                      </a:solidFill>
+                      <a:prstDash val="solid"/>
+                      <a:round/>
+                      <a:headEnd type="none" w="med" len="med"/>
+                      <a:tailEnd type="none" w="med" len="med"/>
+                    </a:lnL>
+                    <a:lnR w="12700" cap="flat" cmpd="sng" algn="ctr">
+                      <a:solidFill>
+                        <a:srgbClr val="000000"/>
+                      </a:solidFill>
+                      <a:prstDash val="solid"/>
+                      <a:round/>
+                      <a:headEnd type="none" w="med" len="med"/>
+                      <a:tailEnd type="none" w="med" len="med"/>
+                    </a:lnR>
+                    <a:lnT w="12700" cap="flat" cmpd="sng" algn="ctr">
+                      <a:solidFill>
+                        <a:srgbClr val="000000"/>
+                      </a:solidFill>
+                      <a:prstDash val="solid"/>
+                      <a:round/>
+                      <a:headEnd type="none" w="med" len="med"/>
+                      <a:tailEnd type="none" w="med" len="med"/>
+                    </a:lnT>
+                    <a:lnB w="12700" cap="flat" cmpd="sng" algn="ctr">
+                      <a:solidFill>
+                        <a:srgbClr val="000000"/>
+                      </a:solidFill>
+                      <a:prstDash val="solid"/>
+                      <a:round/>
+                      <a:headEnd type="none" w="med" len="med"/>
+                      <a:tailEnd type="none" w="med" len="med"/>
+                    </a:lnB>
+                    <a:solidFill>
+                      <a:srgbClr val="FFFFFF"/>
+                    </a:solidFill>
+                  </a:tcPr>
+                </a:tc>
+                <a:tc>
+                  <a:txBody>
+                    <a:bodyPr/>
+                    <a:lstStyle/>
+                    <a:p>
+                      <a:pPr marL="0" marR="0" lvl="0" indent="0" algn="l" defTabSz="914400" rtl="0" eaLnBrk="1" fontAlgn="auto" latinLnBrk="0" hangingPunct="1">
+                        <a:lnSpc>
+                          <a:spcPct val="115000"/>
+                        </a:lnSpc>
+                        <a:spcBef>
+                          <a:spcPts val="0"/>
+                        </a:spcBef>
+                        <a:spcAft>
+                          <a:spcPts val="0"/>
+                        </a:spcAft>
+                        <a:buClrTx/>
+                        <a:buSzTx/>
+                        <a:buFontTx/>
+                        <a:buNone/>
+                        <a:tabLst/>
+                        <a:defRPr/>
+                      </a:pPr>
+                      <a:r>
+                        <a:rPr kumimoji="0" lang="en-US" sz="1600" kern="100" dirty="0">
+                          <a:solidFill>
+                            <a:srgbClr val="000000"/>
+                          </a:solidFill>
+                          <a:effectLst/>
+                          <a:latin typeface="Calibri" panose="020F0502020204030204" pitchFamily="34" charset="0"/>
+                          <a:ea typeface="DengXian" panose="02010600030101010101" pitchFamily="2" charset="-122"/>
+                          <a:cs typeface="Times New Roman" panose="02020603050405020304" pitchFamily="18" charset="0"/>
+                        </a:rPr>
+                        <a:t>Decimal Signed           (GT: Ground Truth)</a:t>
+                      </a:r>
                     </a:p>
                   </a:txBody>
                   <a:tcPr marL="68580" marR="68580" marT="0" marB="0" anchor="ctr">
@@ -21516,12 +21754,12 @@
                     <a:bodyPr/>
                     <a:lstStyle/>
                     <a:p>
-                      <a:pPr indent="140335">
+                      <a:pPr indent="0">
                         <a:lnSpc>
                           <a:spcPct val="115000"/>
                         </a:lnSpc>
                         <a:spcAft>
-                          <a:spcPts val="800"/>
+                          <a:spcPts val="0"/>
                         </a:spcAft>
                         <a:buNone/>
                       </a:pPr>
@@ -21592,12 +21830,12 @@
                     <a:bodyPr/>
                     <a:lstStyle/>
                     <a:p>
-                      <a:pPr indent="140335">
+                      <a:pPr indent="0">
                         <a:lnSpc>
                           <a:spcPct val="115000"/>
                         </a:lnSpc>
                         <a:spcAft>
-                          <a:spcPts val="800"/>
+                          <a:spcPts val="0"/>
                         </a:spcAft>
                         <a:buNone/>
                       </a:pPr>
@@ -21668,12 +21906,12 @@
                     <a:bodyPr/>
                     <a:lstStyle/>
                     <a:p>
-                      <a:pPr indent="140335">
+                      <a:pPr indent="0">
                         <a:lnSpc>
                           <a:spcPct val="115000"/>
                         </a:lnSpc>
                         <a:spcAft>
-                          <a:spcPts val="800"/>
+                          <a:spcPts val="0"/>
                         </a:spcAft>
                         <a:buNone/>
                       </a:pPr>
@@ -21732,12 +21970,12 @@
                     <a:bodyPr/>
                     <a:lstStyle/>
                     <a:p>
-                      <a:pPr indent="140335">
+                      <a:pPr indent="0">
                         <a:lnSpc>
                           <a:spcPct val="115000"/>
                         </a:lnSpc>
                         <a:spcAft>
-                          <a:spcPts val="800"/>
+                          <a:spcPts val="0"/>
                         </a:spcAft>
                         <a:buNone/>
                       </a:pPr>
@@ -21796,18 +22034,152 @@
                     <a:bodyPr/>
                     <a:lstStyle/>
                     <a:p>
-                      <a:pPr indent="140335">
+                      <a:pPr indent="0">
                         <a:lnSpc>
                           <a:spcPct val="115000"/>
                         </a:lnSpc>
                         <a:spcAft>
-                          <a:spcPts val="800"/>
+                          <a:spcPts val="0"/>
                         </a:spcAft>
                         <a:buNone/>
                       </a:pPr>
                       <a:endParaRPr lang="en-US" sz="1800" kern="100" dirty="0">
                         <a:effectLst/>
                         <a:latin typeface="Aptos" panose="020B0004020202020204" pitchFamily="34" charset="0"/>
+                        <a:ea typeface="DengXian" panose="02010600030101010101" pitchFamily="2" charset="-122"/>
+                        <a:cs typeface="Times New Roman" panose="02020603050405020304" pitchFamily="18" charset="0"/>
+                      </a:endParaRPr>
+                    </a:p>
+                  </a:txBody>
+                  <a:tcPr marL="68580" marR="68580" marT="0" marB="0" anchor="ctr">
+                    <a:lnL w="12700" cap="flat" cmpd="sng" algn="ctr">
+                      <a:solidFill>
+                        <a:srgbClr val="000000"/>
+                      </a:solidFill>
+                      <a:prstDash val="solid"/>
+                      <a:round/>
+                      <a:headEnd type="none" w="med" len="med"/>
+                      <a:tailEnd type="none" w="med" len="med"/>
+                    </a:lnL>
+                    <a:lnR w="12700" cap="flat" cmpd="sng" algn="ctr">
+                      <a:solidFill>
+                        <a:srgbClr val="000000"/>
+                      </a:solidFill>
+                      <a:prstDash val="solid"/>
+                      <a:round/>
+                      <a:headEnd type="none" w="med" len="med"/>
+                      <a:tailEnd type="none" w="med" len="med"/>
+                    </a:lnR>
+                    <a:lnT w="12700" cap="flat" cmpd="sng" algn="ctr">
+                      <a:solidFill>
+                        <a:srgbClr val="000000"/>
+                      </a:solidFill>
+                      <a:prstDash val="solid"/>
+                      <a:round/>
+                      <a:headEnd type="none" w="med" len="med"/>
+                      <a:tailEnd type="none" w="med" len="med"/>
+                    </a:lnT>
+                    <a:lnB w="12700" cap="flat" cmpd="sng" algn="ctr">
+                      <a:solidFill>
+                        <a:srgbClr val="000000"/>
+                      </a:solidFill>
+                      <a:prstDash val="solid"/>
+                      <a:round/>
+                      <a:headEnd type="none" w="med" len="med"/>
+                      <a:tailEnd type="none" w="med" len="med"/>
+                    </a:lnB>
+                    <a:solidFill>
+                      <a:srgbClr val="FFFFFF"/>
+                    </a:solidFill>
+                  </a:tcPr>
+                </a:tc>
+                <a:tc>
+                  <a:txBody>
+                    <a:bodyPr/>
+                    <a:lstStyle/>
+                    <a:p>
+                      <a:pPr indent="0">
+                        <a:lnSpc>
+                          <a:spcPct val="115000"/>
+                        </a:lnSpc>
+                        <a:spcAft>
+                          <a:spcPts val="0"/>
+                        </a:spcAft>
+                        <a:buNone/>
+                      </a:pPr>
+                      <a:endParaRPr kumimoji="0" lang="en-US" sz="1600" b="1" kern="100" dirty="0">
+                        <a:solidFill>
+                          <a:srgbClr val="FF0000"/>
+                        </a:solidFill>
+                        <a:effectLst/>
+                        <a:latin typeface="Calibri" panose="020F0502020204030204" pitchFamily="34" charset="0"/>
+                        <a:ea typeface="DengXian" panose="02010600030101010101" pitchFamily="2" charset="-122"/>
+                        <a:cs typeface="Times New Roman" panose="02020603050405020304" pitchFamily="18" charset="0"/>
+                      </a:endParaRPr>
+                    </a:p>
+                  </a:txBody>
+                  <a:tcPr marL="68580" marR="68580" marT="0" marB="0" anchor="ctr">
+                    <a:lnL w="12700" cap="flat" cmpd="sng" algn="ctr">
+                      <a:solidFill>
+                        <a:srgbClr val="000000"/>
+                      </a:solidFill>
+                      <a:prstDash val="solid"/>
+                      <a:round/>
+                      <a:headEnd type="none" w="med" len="med"/>
+                      <a:tailEnd type="none" w="med" len="med"/>
+                    </a:lnL>
+                    <a:lnR w="12700" cap="flat" cmpd="sng" algn="ctr">
+                      <a:solidFill>
+                        <a:srgbClr val="000000"/>
+                      </a:solidFill>
+                      <a:prstDash val="solid"/>
+                      <a:round/>
+                      <a:headEnd type="none" w="med" len="med"/>
+                      <a:tailEnd type="none" w="med" len="med"/>
+                    </a:lnR>
+                    <a:lnT w="12700" cap="flat" cmpd="sng" algn="ctr">
+                      <a:solidFill>
+                        <a:srgbClr val="000000"/>
+                      </a:solidFill>
+                      <a:prstDash val="solid"/>
+                      <a:round/>
+                      <a:headEnd type="none" w="med" len="med"/>
+                      <a:tailEnd type="none" w="med" len="med"/>
+                    </a:lnT>
+                    <a:lnB w="12700" cap="flat" cmpd="sng" algn="ctr">
+                      <a:solidFill>
+                        <a:srgbClr val="000000"/>
+                      </a:solidFill>
+                      <a:prstDash val="solid"/>
+                      <a:round/>
+                      <a:headEnd type="none" w="med" len="med"/>
+                      <a:tailEnd type="none" w="med" len="med"/>
+                    </a:lnB>
+                    <a:solidFill>
+                      <a:srgbClr val="FFFFFF"/>
+                    </a:solidFill>
+                  </a:tcPr>
+                </a:tc>
+                <a:tc>
+                  <a:txBody>
+                    <a:bodyPr/>
+                    <a:lstStyle/>
+                    <a:p>
+                      <a:pPr indent="0">
+                        <a:lnSpc>
+                          <a:spcPct val="115000"/>
+                        </a:lnSpc>
+                        <a:spcAft>
+                          <a:spcPts val="0"/>
+                        </a:spcAft>
+                        <a:buNone/>
+                      </a:pPr>
+                      <a:endParaRPr kumimoji="0" lang="en-US" sz="1600" b="1" kern="100" dirty="0">
+                        <a:solidFill>
+                          <a:srgbClr val="FF0000"/>
+                        </a:solidFill>
+                        <a:effectLst/>
+                        <a:latin typeface="Calibri" panose="020F0502020204030204" pitchFamily="34" charset="0"/>
                         <a:ea typeface="DengXian" panose="02010600030101010101" pitchFamily="2" charset="-122"/>
                         <a:cs typeface="Times New Roman" panose="02020603050405020304" pitchFamily="18" charset="0"/>
                       </a:endParaRPr>
@@ -21867,12 +22239,12 @@
                     <a:bodyPr/>
                     <a:lstStyle/>
                     <a:p>
-                      <a:pPr indent="140335">
+                      <a:pPr indent="0">
                         <a:lnSpc>
                           <a:spcPct val="115000"/>
                         </a:lnSpc>
                         <a:spcAft>
-                          <a:spcPts val="800"/>
+                          <a:spcPts val="0"/>
                         </a:spcAft>
                         <a:buNone/>
                       </a:pPr>
@@ -21943,12 +22315,12 @@
                     <a:bodyPr/>
                     <a:lstStyle/>
                     <a:p>
-                      <a:pPr indent="140335">
+                      <a:pPr indent="0">
                         <a:lnSpc>
                           <a:spcPct val="115000"/>
                         </a:lnSpc>
                         <a:spcAft>
-                          <a:spcPts val="800"/>
+                          <a:spcPts val="0"/>
                         </a:spcAft>
                         <a:buNone/>
                       </a:pPr>
@@ -22019,12 +22391,12 @@
                     <a:bodyPr/>
                     <a:lstStyle/>
                     <a:p>
-                      <a:pPr indent="140335">
+                      <a:pPr indent="0">
                         <a:lnSpc>
                           <a:spcPct val="115000"/>
                         </a:lnSpc>
                         <a:spcAft>
-                          <a:spcPts val="800"/>
+                          <a:spcPts val="0"/>
                         </a:spcAft>
                         <a:buNone/>
                       </a:pPr>
@@ -22083,12 +22455,12 @@
                     <a:bodyPr/>
                     <a:lstStyle/>
                     <a:p>
-                      <a:pPr indent="140335">
+                      <a:pPr indent="0">
                         <a:lnSpc>
                           <a:spcPct val="115000"/>
                         </a:lnSpc>
                         <a:spcAft>
-                          <a:spcPts val="800"/>
+                          <a:spcPts val="0"/>
                         </a:spcAft>
                         <a:buNone/>
                       </a:pPr>
@@ -22147,18 +22519,152 @@
                     <a:bodyPr/>
                     <a:lstStyle/>
                     <a:p>
-                      <a:pPr indent="140335">
+                      <a:pPr indent="0">
                         <a:lnSpc>
                           <a:spcPct val="115000"/>
                         </a:lnSpc>
                         <a:spcAft>
-                          <a:spcPts val="800"/>
+                          <a:spcPts val="0"/>
                         </a:spcAft>
                         <a:buNone/>
                       </a:pPr>
                       <a:endParaRPr lang="en-US" sz="1800" kern="100" dirty="0">
                         <a:effectLst/>
                         <a:latin typeface="Aptos" panose="020B0004020202020204" pitchFamily="34" charset="0"/>
+                        <a:ea typeface="DengXian" panose="02010600030101010101" pitchFamily="2" charset="-122"/>
+                        <a:cs typeface="Times New Roman" panose="02020603050405020304" pitchFamily="18" charset="0"/>
+                      </a:endParaRPr>
+                    </a:p>
+                  </a:txBody>
+                  <a:tcPr marL="68580" marR="68580" marT="0" marB="0" anchor="ctr">
+                    <a:lnL w="12700" cap="flat" cmpd="sng" algn="ctr">
+                      <a:solidFill>
+                        <a:srgbClr val="000000"/>
+                      </a:solidFill>
+                      <a:prstDash val="solid"/>
+                      <a:round/>
+                      <a:headEnd type="none" w="med" len="med"/>
+                      <a:tailEnd type="none" w="med" len="med"/>
+                    </a:lnL>
+                    <a:lnR w="12700" cap="flat" cmpd="sng" algn="ctr">
+                      <a:solidFill>
+                        <a:srgbClr val="000000"/>
+                      </a:solidFill>
+                      <a:prstDash val="solid"/>
+                      <a:round/>
+                      <a:headEnd type="none" w="med" len="med"/>
+                      <a:tailEnd type="none" w="med" len="med"/>
+                    </a:lnR>
+                    <a:lnT w="12700" cap="flat" cmpd="sng" algn="ctr">
+                      <a:solidFill>
+                        <a:srgbClr val="000000"/>
+                      </a:solidFill>
+                      <a:prstDash val="solid"/>
+                      <a:round/>
+                      <a:headEnd type="none" w="med" len="med"/>
+                      <a:tailEnd type="none" w="med" len="med"/>
+                    </a:lnT>
+                    <a:lnB w="12700" cap="flat" cmpd="sng" algn="ctr">
+                      <a:solidFill>
+                        <a:srgbClr val="000000"/>
+                      </a:solidFill>
+                      <a:prstDash val="solid"/>
+                      <a:round/>
+                      <a:headEnd type="none" w="med" len="med"/>
+                      <a:tailEnd type="none" w="med" len="med"/>
+                    </a:lnB>
+                    <a:solidFill>
+                      <a:srgbClr val="FFFFFF"/>
+                    </a:solidFill>
+                  </a:tcPr>
+                </a:tc>
+                <a:tc>
+                  <a:txBody>
+                    <a:bodyPr/>
+                    <a:lstStyle/>
+                    <a:p>
+                      <a:pPr indent="0">
+                        <a:lnSpc>
+                          <a:spcPct val="115000"/>
+                        </a:lnSpc>
+                        <a:spcAft>
+                          <a:spcPts val="0"/>
+                        </a:spcAft>
+                        <a:buNone/>
+                      </a:pPr>
+                      <a:endParaRPr kumimoji="0" lang="en-US" sz="1600" b="1" kern="100" dirty="0">
+                        <a:solidFill>
+                          <a:srgbClr val="FF0000"/>
+                        </a:solidFill>
+                        <a:effectLst/>
+                        <a:latin typeface="Calibri" panose="020F0502020204030204" pitchFamily="34" charset="0"/>
+                        <a:ea typeface="DengXian" panose="02010600030101010101" pitchFamily="2" charset="-122"/>
+                        <a:cs typeface="Times New Roman" panose="02020603050405020304" pitchFamily="18" charset="0"/>
+                      </a:endParaRPr>
+                    </a:p>
+                  </a:txBody>
+                  <a:tcPr marL="68580" marR="68580" marT="0" marB="0" anchor="ctr">
+                    <a:lnL w="12700" cap="flat" cmpd="sng" algn="ctr">
+                      <a:solidFill>
+                        <a:srgbClr val="000000"/>
+                      </a:solidFill>
+                      <a:prstDash val="solid"/>
+                      <a:round/>
+                      <a:headEnd type="none" w="med" len="med"/>
+                      <a:tailEnd type="none" w="med" len="med"/>
+                    </a:lnL>
+                    <a:lnR w="12700" cap="flat" cmpd="sng" algn="ctr">
+                      <a:solidFill>
+                        <a:srgbClr val="000000"/>
+                      </a:solidFill>
+                      <a:prstDash val="solid"/>
+                      <a:round/>
+                      <a:headEnd type="none" w="med" len="med"/>
+                      <a:tailEnd type="none" w="med" len="med"/>
+                    </a:lnR>
+                    <a:lnT w="12700" cap="flat" cmpd="sng" algn="ctr">
+                      <a:solidFill>
+                        <a:srgbClr val="000000"/>
+                      </a:solidFill>
+                      <a:prstDash val="solid"/>
+                      <a:round/>
+                      <a:headEnd type="none" w="med" len="med"/>
+                      <a:tailEnd type="none" w="med" len="med"/>
+                    </a:lnT>
+                    <a:lnB w="12700" cap="flat" cmpd="sng" algn="ctr">
+                      <a:solidFill>
+                        <a:srgbClr val="000000"/>
+                      </a:solidFill>
+                      <a:prstDash val="solid"/>
+                      <a:round/>
+                      <a:headEnd type="none" w="med" len="med"/>
+                      <a:tailEnd type="none" w="med" len="med"/>
+                    </a:lnB>
+                    <a:solidFill>
+                      <a:srgbClr val="FFFFFF"/>
+                    </a:solidFill>
+                  </a:tcPr>
+                </a:tc>
+                <a:tc>
+                  <a:txBody>
+                    <a:bodyPr/>
+                    <a:lstStyle/>
+                    <a:p>
+                      <a:pPr indent="0">
+                        <a:lnSpc>
+                          <a:spcPct val="115000"/>
+                        </a:lnSpc>
+                        <a:spcAft>
+                          <a:spcPts val="0"/>
+                        </a:spcAft>
+                        <a:buNone/>
+                      </a:pPr>
+                      <a:endParaRPr kumimoji="0" lang="en-US" sz="1600" b="1" kern="100" dirty="0">
+                        <a:solidFill>
+                          <a:srgbClr val="FF0000"/>
+                        </a:solidFill>
+                        <a:effectLst/>
+                        <a:latin typeface="Calibri" panose="020F0502020204030204" pitchFamily="34" charset="0"/>
                         <a:ea typeface="DengXian" panose="02010600030101010101" pitchFamily="2" charset="-122"/>
                         <a:cs typeface="Times New Roman" panose="02020603050405020304" pitchFamily="18" charset="0"/>
                       </a:endParaRPr>
@@ -22218,12 +22724,12 @@
                     <a:bodyPr/>
                     <a:lstStyle/>
                     <a:p>
-                      <a:pPr indent="140335">
+                      <a:pPr indent="0">
                         <a:lnSpc>
                           <a:spcPct val="115000"/>
                         </a:lnSpc>
                         <a:spcAft>
-                          <a:spcPts val="800"/>
+                          <a:spcPts val="0"/>
                         </a:spcAft>
                         <a:buNone/>
                       </a:pPr>
@@ -22294,12 +22800,12 @@
                     <a:bodyPr/>
                     <a:lstStyle/>
                     <a:p>
-                      <a:pPr indent="140335">
+                      <a:pPr indent="0">
                         <a:lnSpc>
                           <a:spcPct val="115000"/>
                         </a:lnSpc>
                         <a:spcAft>
-                          <a:spcPts val="800"/>
+                          <a:spcPts val="0"/>
                         </a:spcAft>
                         <a:buNone/>
                       </a:pPr>
@@ -22370,12 +22876,12 @@
                     <a:bodyPr/>
                     <a:lstStyle/>
                     <a:p>
-                      <a:pPr indent="140335">
+                      <a:pPr indent="0">
                         <a:lnSpc>
                           <a:spcPct val="115000"/>
                         </a:lnSpc>
                         <a:spcAft>
-                          <a:spcPts val="800"/>
+                          <a:spcPts val="0"/>
                         </a:spcAft>
                         <a:buNone/>
                       </a:pPr>
@@ -22434,76 +22940,12 @@
                     <a:bodyPr/>
                     <a:lstStyle/>
                     <a:p>
-                      <a:pPr indent="140335">
+                      <a:pPr indent="0">
                         <a:lnSpc>
                           <a:spcPct val="115000"/>
                         </a:lnSpc>
                         <a:spcAft>
-                          <a:spcPts val="800"/>
-                        </a:spcAft>
-                        <a:buNone/>
-                      </a:pPr>
-                      <a:endParaRPr lang="en-US" sz="1800" kern="100">
-                        <a:effectLst/>
-                        <a:latin typeface="Aptos" panose="020B0004020202020204" pitchFamily="34" charset="0"/>
-                        <a:ea typeface="DengXian" panose="02010600030101010101" pitchFamily="2" charset="-122"/>
-                        <a:cs typeface="Times New Roman" panose="02020603050405020304" pitchFamily="18" charset="0"/>
-                      </a:endParaRPr>
-                    </a:p>
-                  </a:txBody>
-                  <a:tcPr marL="68580" marR="68580" marT="0" marB="0" anchor="ctr">
-                    <a:lnL w="12700" cap="flat" cmpd="sng" algn="ctr">
-                      <a:solidFill>
-                        <a:srgbClr val="000000"/>
-                      </a:solidFill>
-                      <a:prstDash val="solid"/>
-                      <a:round/>
-                      <a:headEnd type="none" w="med" len="med"/>
-                      <a:tailEnd type="none" w="med" len="med"/>
-                    </a:lnL>
-                    <a:lnR w="12700" cap="flat" cmpd="sng" algn="ctr">
-                      <a:solidFill>
-                        <a:srgbClr val="000000"/>
-                      </a:solidFill>
-                      <a:prstDash val="solid"/>
-                      <a:round/>
-                      <a:headEnd type="none" w="med" len="med"/>
-                      <a:tailEnd type="none" w="med" len="med"/>
-                    </a:lnR>
-                    <a:lnT w="12700" cap="flat" cmpd="sng" algn="ctr">
-                      <a:solidFill>
-                        <a:srgbClr val="000000"/>
-                      </a:solidFill>
-                      <a:prstDash val="solid"/>
-                      <a:round/>
-                      <a:headEnd type="none" w="med" len="med"/>
-                      <a:tailEnd type="none" w="med" len="med"/>
-                    </a:lnT>
-                    <a:lnB w="12700" cap="flat" cmpd="sng" algn="ctr">
-                      <a:solidFill>
-                        <a:srgbClr val="000000"/>
-                      </a:solidFill>
-                      <a:prstDash val="solid"/>
-                      <a:round/>
-                      <a:headEnd type="none" w="med" len="med"/>
-                      <a:tailEnd type="none" w="med" len="med"/>
-                    </a:lnB>
-                    <a:solidFill>
-                      <a:srgbClr val="FFFFFF"/>
-                    </a:solidFill>
-                  </a:tcPr>
-                </a:tc>
-                <a:tc>
-                  <a:txBody>
-                    <a:bodyPr/>
-                    <a:lstStyle/>
-                    <a:p>
-                      <a:pPr indent="140335">
-                        <a:lnSpc>
-                          <a:spcPct val="115000"/>
-                        </a:lnSpc>
-                        <a:spcAft>
-                          <a:spcPts val="800"/>
+                          <a:spcPts val="0"/>
                         </a:spcAft>
                         <a:buNone/>
                       </a:pPr>
@@ -22557,24 +22999,222 @@
                     </a:solidFill>
                   </a:tcPr>
                 </a:tc>
+                <a:tc>
+                  <a:txBody>
+                    <a:bodyPr/>
+                    <a:lstStyle/>
+                    <a:p>
+                      <a:pPr indent="0">
+                        <a:lnSpc>
+                          <a:spcPct val="115000"/>
+                        </a:lnSpc>
+                        <a:spcAft>
+                          <a:spcPts val="0"/>
+                        </a:spcAft>
+                        <a:buNone/>
+                      </a:pPr>
+                      <a:endParaRPr lang="en-US" sz="1800" kern="100" dirty="0">
+                        <a:effectLst/>
+                        <a:latin typeface="Aptos" panose="020B0004020202020204" pitchFamily="34" charset="0"/>
+                        <a:ea typeface="DengXian" panose="02010600030101010101" pitchFamily="2" charset="-122"/>
+                        <a:cs typeface="Times New Roman" panose="02020603050405020304" pitchFamily="18" charset="0"/>
+                      </a:endParaRPr>
+                    </a:p>
+                  </a:txBody>
+                  <a:tcPr marL="68580" marR="68580" marT="0" marB="0" anchor="ctr">
+                    <a:lnL w="12700" cap="flat" cmpd="sng" algn="ctr">
+                      <a:solidFill>
+                        <a:srgbClr val="000000"/>
+                      </a:solidFill>
+                      <a:prstDash val="solid"/>
+                      <a:round/>
+                      <a:headEnd type="none" w="med" len="med"/>
+                      <a:tailEnd type="none" w="med" len="med"/>
+                    </a:lnL>
+                    <a:lnR w="12700" cap="flat" cmpd="sng" algn="ctr">
+                      <a:solidFill>
+                        <a:srgbClr val="000000"/>
+                      </a:solidFill>
+                      <a:prstDash val="solid"/>
+                      <a:round/>
+                      <a:headEnd type="none" w="med" len="med"/>
+                      <a:tailEnd type="none" w="med" len="med"/>
+                    </a:lnR>
+                    <a:lnT w="12700" cap="flat" cmpd="sng" algn="ctr">
+                      <a:solidFill>
+                        <a:srgbClr val="000000"/>
+                      </a:solidFill>
+                      <a:prstDash val="solid"/>
+                      <a:round/>
+                      <a:headEnd type="none" w="med" len="med"/>
+                      <a:tailEnd type="none" w="med" len="med"/>
+                    </a:lnT>
+                    <a:lnB w="12700" cap="flat" cmpd="sng" algn="ctr">
+                      <a:solidFill>
+                        <a:srgbClr val="000000"/>
+                      </a:solidFill>
+                      <a:prstDash val="solid"/>
+                      <a:round/>
+                      <a:headEnd type="none" w="med" len="med"/>
+                      <a:tailEnd type="none" w="med" len="med"/>
+                    </a:lnB>
+                    <a:solidFill>
+                      <a:srgbClr val="FFFFFF"/>
+                    </a:solidFill>
+                  </a:tcPr>
+                </a:tc>
+                <a:tc>
+                  <a:txBody>
+                    <a:bodyPr/>
+                    <a:lstStyle/>
+                    <a:p>
+                      <a:pPr marL="0" indent="0" algn="l" rtl="0" eaLnBrk="1" latinLnBrk="0" hangingPunct="1">
+                        <a:lnSpc>
+                          <a:spcPct val="115000"/>
+                        </a:lnSpc>
+                        <a:spcAft>
+                          <a:spcPts val="0"/>
+                        </a:spcAft>
+                        <a:buNone/>
+                      </a:pPr>
+                      <a:endParaRPr kumimoji="0" lang="en-US" sz="1600" b="1" kern="100" dirty="0">
+                        <a:solidFill>
+                          <a:srgbClr val="FF0000"/>
+                        </a:solidFill>
+                        <a:effectLst/>
+                        <a:latin typeface="Calibri" panose="020F0502020204030204" pitchFamily="34" charset="0"/>
+                        <a:ea typeface="DengXian" panose="02010600030101010101" pitchFamily="2" charset="-122"/>
+                        <a:cs typeface="Times New Roman" panose="02020603050405020304" pitchFamily="18" charset="0"/>
+                      </a:endParaRPr>
+                    </a:p>
+                  </a:txBody>
+                  <a:tcPr marL="68580" marR="68580" marT="0" marB="0" anchor="ctr">
+                    <a:lnL w="12700" cap="flat" cmpd="sng" algn="ctr">
+                      <a:solidFill>
+                        <a:srgbClr val="000000"/>
+                      </a:solidFill>
+                      <a:prstDash val="solid"/>
+                      <a:round/>
+                      <a:headEnd type="none" w="med" len="med"/>
+                      <a:tailEnd type="none" w="med" len="med"/>
+                    </a:lnL>
+                    <a:lnR w="12700" cap="flat" cmpd="sng" algn="ctr">
+                      <a:solidFill>
+                        <a:srgbClr val="000000"/>
+                      </a:solidFill>
+                      <a:prstDash val="solid"/>
+                      <a:round/>
+                      <a:headEnd type="none" w="med" len="med"/>
+                      <a:tailEnd type="none" w="med" len="med"/>
+                    </a:lnR>
+                    <a:lnT w="12700" cap="flat" cmpd="sng" algn="ctr">
+                      <a:solidFill>
+                        <a:srgbClr val="000000"/>
+                      </a:solidFill>
+                      <a:prstDash val="solid"/>
+                      <a:round/>
+                      <a:headEnd type="none" w="med" len="med"/>
+                      <a:tailEnd type="none" w="med" len="med"/>
+                    </a:lnT>
+                    <a:lnB w="12700" cap="flat" cmpd="sng" algn="ctr">
+                      <a:solidFill>
+                        <a:srgbClr val="000000"/>
+                      </a:solidFill>
+                      <a:prstDash val="solid"/>
+                      <a:round/>
+                      <a:headEnd type="none" w="med" len="med"/>
+                      <a:tailEnd type="none" w="med" len="med"/>
+                    </a:lnB>
+                    <a:solidFill>
+                      <a:srgbClr val="FFFFFF"/>
+                    </a:solidFill>
+                  </a:tcPr>
+                </a:tc>
+                <a:tc>
+                  <a:txBody>
+                    <a:bodyPr/>
+                    <a:lstStyle/>
+                    <a:p>
+                      <a:pPr marL="0" indent="0" algn="l" rtl="0" eaLnBrk="1" latinLnBrk="0" hangingPunct="1">
+                        <a:lnSpc>
+                          <a:spcPct val="115000"/>
+                        </a:lnSpc>
+                        <a:spcAft>
+                          <a:spcPts val="0"/>
+                        </a:spcAft>
+                        <a:buNone/>
+                      </a:pPr>
+                      <a:endParaRPr kumimoji="0" lang="en-US" sz="1600" b="1" kern="100" dirty="0">
+                        <a:solidFill>
+                          <a:srgbClr val="FF0000"/>
+                        </a:solidFill>
+                        <a:effectLst/>
+                        <a:latin typeface="Calibri" panose="020F0502020204030204" pitchFamily="34" charset="0"/>
+                        <a:ea typeface="DengXian" panose="02010600030101010101" pitchFamily="2" charset="-122"/>
+                        <a:cs typeface="Times New Roman" panose="02020603050405020304" pitchFamily="18" charset="0"/>
+                      </a:endParaRPr>
+                    </a:p>
+                  </a:txBody>
+                  <a:tcPr marL="68580" marR="68580" marT="0" marB="0" anchor="ctr">
+                    <a:lnL w="12700" cap="flat" cmpd="sng" algn="ctr">
+                      <a:solidFill>
+                        <a:srgbClr val="000000"/>
+                      </a:solidFill>
+                      <a:prstDash val="solid"/>
+                      <a:round/>
+                      <a:headEnd type="none" w="med" len="med"/>
+                      <a:tailEnd type="none" w="med" len="med"/>
+                    </a:lnL>
+                    <a:lnR w="12700" cap="flat" cmpd="sng" algn="ctr">
+                      <a:solidFill>
+                        <a:srgbClr val="000000"/>
+                      </a:solidFill>
+                      <a:prstDash val="solid"/>
+                      <a:round/>
+                      <a:headEnd type="none" w="med" len="med"/>
+                      <a:tailEnd type="none" w="med" len="med"/>
+                    </a:lnR>
+                    <a:lnT w="12700" cap="flat" cmpd="sng" algn="ctr">
+                      <a:solidFill>
+                        <a:srgbClr val="000000"/>
+                      </a:solidFill>
+                      <a:prstDash val="solid"/>
+                      <a:round/>
+                      <a:headEnd type="none" w="med" len="med"/>
+                      <a:tailEnd type="none" w="med" len="med"/>
+                    </a:lnT>
+                    <a:lnB w="12700" cap="flat" cmpd="sng" algn="ctr">
+                      <a:solidFill>
+                        <a:srgbClr val="000000"/>
+                      </a:solidFill>
+                      <a:prstDash val="solid"/>
+                      <a:round/>
+                      <a:headEnd type="none" w="med" len="med"/>
+                      <a:tailEnd type="none" w="med" len="med"/>
+                    </a:lnB>
+                    <a:solidFill>
+                      <a:srgbClr val="FFFFFF"/>
+                    </a:solidFill>
+                  </a:tcPr>
+                </a:tc>
                 <a:extLst>
                   <a:ext uri="{0D108BD9-81ED-4DB2-BD59-A6C34878D82A}">
                     <a16:rowId xmlns:a16="http://schemas.microsoft.com/office/drawing/2014/main" val="4096703682"/>
                   </a:ext>
                 </a:extLst>
               </a:tr>
-              <a:tr h="332105">
+              <a:tr h="0">
                 <a:tc>
                   <a:txBody>
                     <a:bodyPr/>
                     <a:lstStyle/>
                     <a:p>
-                      <a:pPr indent="140335">
+                      <a:pPr indent="0">
                         <a:lnSpc>
                           <a:spcPct val="115000"/>
                         </a:lnSpc>
                         <a:spcAft>
-                          <a:spcPts val="800"/>
+                          <a:spcPts val="0"/>
                         </a:spcAft>
                         <a:buNone/>
                       </a:pPr>
@@ -22645,12 +23285,12 @@
                     <a:bodyPr/>
                     <a:lstStyle/>
                     <a:p>
-                      <a:pPr indent="140335">
+                      <a:pPr indent="0">
                         <a:lnSpc>
                           <a:spcPct val="115000"/>
                         </a:lnSpc>
                         <a:spcAft>
-                          <a:spcPts val="800"/>
+                          <a:spcPts val="0"/>
                         </a:spcAft>
                         <a:buNone/>
                       </a:pPr>
@@ -22721,12 +23361,12 @@
                     <a:bodyPr/>
                     <a:lstStyle/>
                     <a:p>
-                      <a:pPr indent="140335">
+                      <a:pPr indent="0">
                         <a:lnSpc>
                           <a:spcPct val="115000"/>
                         </a:lnSpc>
                         <a:spcAft>
-                          <a:spcPts val="800"/>
+                          <a:spcPts val="0"/>
                         </a:spcAft>
                         <a:buNone/>
                       </a:pPr>
@@ -22785,12 +23425,12 @@
                     <a:bodyPr/>
                     <a:lstStyle/>
                     <a:p>
-                      <a:pPr indent="140335">
+                      <a:pPr indent="0">
                         <a:lnSpc>
                           <a:spcPct val="115000"/>
                         </a:lnSpc>
                         <a:spcAft>
-                          <a:spcPts val="800"/>
+                          <a:spcPts val="0"/>
                         </a:spcAft>
                         <a:buNone/>
                       </a:pPr>
@@ -22849,18 +23489,152 @@
                     <a:bodyPr/>
                     <a:lstStyle/>
                     <a:p>
-                      <a:pPr indent="140335">
+                      <a:pPr indent="0">
                         <a:lnSpc>
                           <a:spcPct val="115000"/>
                         </a:lnSpc>
                         <a:spcAft>
-                          <a:spcPts val="800"/>
+                          <a:spcPts val="0"/>
                         </a:spcAft>
                         <a:buNone/>
                       </a:pPr>
                       <a:endParaRPr lang="en-US" sz="1800" kern="100" dirty="0">
                         <a:effectLst/>
                         <a:latin typeface="Aptos" panose="020B0004020202020204" pitchFamily="34" charset="0"/>
+                        <a:ea typeface="DengXian" panose="02010600030101010101" pitchFamily="2" charset="-122"/>
+                        <a:cs typeface="Times New Roman" panose="02020603050405020304" pitchFamily="18" charset="0"/>
+                      </a:endParaRPr>
+                    </a:p>
+                  </a:txBody>
+                  <a:tcPr marL="68580" marR="68580" marT="0" marB="0" anchor="ctr">
+                    <a:lnL w="12700" cap="flat" cmpd="sng" algn="ctr">
+                      <a:solidFill>
+                        <a:srgbClr val="000000"/>
+                      </a:solidFill>
+                      <a:prstDash val="solid"/>
+                      <a:round/>
+                      <a:headEnd type="none" w="med" len="med"/>
+                      <a:tailEnd type="none" w="med" len="med"/>
+                    </a:lnL>
+                    <a:lnR w="12700" cap="flat" cmpd="sng" algn="ctr">
+                      <a:solidFill>
+                        <a:srgbClr val="000000"/>
+                      </a:solidFill>
+                      <a:prstDash val="solid"/>
+                      <a:round/>
+                      <a:headEnd type="none" w="med" len="med"/>
+                      <a:tailEnd type="none" w="med" len="med"/>
+                    </a:lnR>
+                    <a:lnT w="12700" cap="flat" cmpd="sng" algn="ctr">
+                      <a:solidFill>
+                        <a:srgbClr val="000000"/>
+                      </a:solidFill>
+                      <a:prstDash val="solid"/>
+                      <a:round/>
+                      <a:headEnd type="none" w="med" len="med"/>
+                      <a:tailEnd type="none" w="med" len="med"/>
+                    </a:lnT>
+                    <a:lnB w="12700" cap="flat" cmpd="sng" algn="ctr">
+                      <a:solidFill>
+                        <a:srgbClr val="000000"/>
+                      </a:solidFill>
+                      <a:prstDash val="solid"/>
+                      <a:round/>
+                      <a:headEnd type="none" w="med" len="med"/>
+                      <a:tailEnd type="none" w="med" len="med"/>
+                    </a:lnB>
+                    <a:solidFill>
+                      <a:srgbClr val="FFFFFF"/>
+                    </a:solidFill>
+                  </a:tcPr>
+                </a:tc>
+                <a:tc>
+                  <a:txBody>
+                    <a:bodyPr/>
+                    <a:lstStyle/>
+                    <a:p>
+                      <a:pPr marL="0" indent="0" algn="l" rtl="0" eaLnBrk="1" latinLnBrk="0" hangingPunct="1">
+                        <a:lnSpc>
+                          <a:spcPct val="115000"/>
+                        </a:lnSpc>
+                        <a:spcAft>
+                          <a:spcPts val="0"/>
+                        </a:spcAft>
+                        <a:buNone/>
+                      </a:pPr>
+                      <a:endParaRPr kumimoji="0" lang="en-US" sz="1600" b="1" kern="100" dirty="0">
+                        <a:solidFill>
+                          <a:srgbClr val="FF0000"/>
+                        </a:solidFill>
+                        <a:effectLst/>
+                        <a:latin typeface="Calibri" panose="020F0502020204030204" pitchFamily="34" charset="0"/>
+                        <a:ea typeface="DengXian" panose="02010600030101010101" pitchFamily="2" charset="-122"/>
+                        <a:cs typeface="Times New Roman" panose="02020603050405020304" pitchFamily="18" charset="0"/>
+                      </a:endParaRPr>
+                    </a:p>
+                  </a:txBody>
+                  <a:tcPr marL="68580" marR="68580" marT="0" marB="0" anchor="ctr">
+                    <a:lnL w="12700" cap="flat" cmpd="sng" algn="ctr">
+                      <a:solidFill>
+                        <a:srgbClr val="000000"/>
+                      </a:solidFill>
+                      <a:prstDash val="solid"/>
+                      <a:round/>
+                      <a:headEnd type="none" w="med" len="med"/>
+                      <a:tailEnd type="none" w="med" len="med"/>
+                    </a:lnL>
+                    <a:lnR w="12700" cap="flat" cmpd="sng" algn="ctr">
+                      <a:solidFill>
+                        <a:srgbClr val="000000"/>
+                      </a:solidFill>
+                      <a:prstDash val="solid"/>
+                      <a:round/>
+                      <a:headEnd type="none" w="med" len="med"/>
+                      <a:tailEnd type="none" w="med" len="med"/>
+                    </a:lnR>
+                    <a:lnT w="12700" cap="flat" cmpd="sng" algn="ctr">
+                      <a:solidFill>
+                        <a:srgbClr val="000000"/>
+                      </a:solidFill>
+                      <a:prstDash val="solid"/>
+                      <a:round/>
+                      <a:headEnd type="none" w="med" len="med"/>
+                      <a:tailEnd type="none" w="med" len="med"/>
+                    </a:lnT>
+                    <a:lnB w="12700" cap="flat" cmpd="sng" algn="ctr">
+                      <a:solidFill>
+                        <a:srgbClr val="000000"/>
+                      </a:solidFill>
+                      <a:prstDash val="solid"/>
+                      <a:round/>
+                      <a:headEnd type="none" w="med" len="med"/>
+                      <a:tailEnd type="none" w="med" len="med"/>
+                    </a:lnB>
+                    <a:solidFill>
+                      <a:srgbClr val="FFFFFF"/>
+                    </a:solidFill>
+                  </a:tcPr>
+                </a:tc>
+                <a:tc>
+                  <a:txBody>
+                    <a:bodyPr/>
+                    <a:lstStyle/>
+                    <a:p>
+                      <a:pPr marL="0" indent="0" algn="l" rtl="0" eaLnBrk="1" latinLnBrk="0" hangingPunct="1">
+                        <a:lnSpc>
+                          <a:spcPct val="115000"/>
+                        </a:lnSpc>
+                        <a:spcAft>
+                          <a:spcPts val="0"/>
+                        </a:spcAft>
+                        <a:buNone/>
+                      </a:pPr>
+                      <a:endParaRPr kumimoji="0" lang="en-US" sz="1600" b="1" kern="100" dirty="0">
+                        <a:solidFill>
+                          <a:srgbClr val="FF0000"/>
+                        </a:solidFill>
+                        <a:effectLst/>
+                        <a:latin typeface="Calibri" panose="020F0502020204030204" pitchFamily="34" charset="0"/>
                         <a:ea typeface="DengXian" panose="02010600030101010101" pitchFamily="2" charset="-122"/>
                         <a:cs typeface="Times New Roman" panose="02020603050405020304" pitchFamily="18" charset="0"/>
                       </a:endParaRPr>
@@ -22920,12 +23694,12 @@
                     <a:bodyPr/>
                     <a:lstStyle/>
                     <a:p>
-                      <a:pPr indent="140335">
+                      <a:pPr indent="0">
                         <a:lnSpc>
                           <a:spcPct val="115000"/>
                         </a:lnSpc>
                         <a:spcAft>
-                          <a:spcPts val="800"/>
+                          <a:spcPts val="0"/>
                         </a:spcAft>
                         <a:buNone/>
                       </a:pPr>
@@ -22996,12 +23770,12 @@
                     <a:bodyPr/>
                     <a:lstStyle/>
                     <a:p>
-                      <a:pPr indent="140335">
+                      <a:pPr indent="0">
                         <a:lnSpc>
                           <a:spcPct val="115000"/>
                         </a:lnSpc>
                         <a:spcAft>
-                          <a:spcPts val="800"/>
+                          <a:spcPts val="0"/>
                         </a:spcAft>
                         <a:buNone/>
                       </a:pPr>
@@ -23072,12 +23846,12 @@
                     <a:bodyPr/>
                     <a:lstStyle/>
                     <a:p>
-                      <a:pPr indent="140335">
+                      <a:pPr indent="0">
                         <a:lnSpc>
                           <a:spcPct val="115000"/>
                         </a:lnSpc>
                         <a:spcAft>
-                          <a:spcPts val="800"/>
+                          <a:spcPts val="0"/>
                         </a:spcAft>
                         <a:buNone/>
                       </a:pPr>
@@ -23136,12 +23910,12 @@
                     <a:bodyPr/>
                     <a:lstStyle/>
                     <a:p>
-                      <a:pPr indent="140335">
+                      <a:pPr indent="0">
                         <a:lnSpc>
                           <a:spcPct val="115000"/>
                         </a:lnSpc>
                         <a:spcAft>
-                          <a:spcPts val="800"/>
+                          <a:spcPts val="0"/>
                         </a:spcAft>
                         <a:buNone/>
                       </a:pPr>
@@ -23200,18 +23974,152 @@
                     <a:bodyPr/>
                     <a:lstStyle/>
                     <a:p>
-                      <a:pPr indent="140335">
+                      <a:pPr indent="0">
                         <a:lnSpc>
                           <a:spcPct val="115000"/>
                         </a:lnSpc>
                         <a:spcAft>
-                          <a:spcPts val="800"/>
+                          <a:spcPts val="0"/>
                         </a:spcAft>
                         <a:buNone/>
                       </a:pPr>
                       <a:endParaRPr lang="en-US" sz="1800" kern="100" dirty="0">
                         <a:effectLst/>
                         <a:latin typeface="Aptos" panose="020B0004020202020204" pitchFamily="34" charset="0"/>
+                        <a:ea typeface="DengXian" panose="02010600030101010101" pitchFamily="2" charset="-122"/>
+                        <a:cs typeface="Times New Roman" panose="02020603050405020304" pitchFamily="18" charset="0"/>
+                      </a:endParaRPr>
+                    </a:p>
+                  </a:txBody>
+                  <a:tcPr marL="68580" marR="68580" marT="0" marB="0" anchor="ctr">
+                    <a:lnL w="12700" cap="flat" cmpd="sng" algn="ctr">
+                      <a:solidFill>
+                        <a:srgbClr val="000000"/>
+                      </a:solidFill>
+                      <a:prstDash val="solid"/>
+                      <a:round/>
+                      <a:headEnd type="none" w="med" len="med"/>
+                      <a:tailEnd type="none" w="med" len="med"/>
+                    </a:lnL>
+                    <a:lnR w="12700" cap="flat" cmpd="sng" algn="ctr">
+                      <a:solidFill>
+                        <a:srgbClr val="000000"/>
+                      </a:solidFill>
+                      <a:prstDash val="solid"/>
+                      <a:round/>
+                      <a:headEnd type="none" w="med" len="med"/>
+                      <a:tailEnd type="none" w="med" len="med"/>
+                    </a:lnR>
+                    <a:lnT w="12700" cap="flat" cmpd="sng" algn="ctr">
+                      <a:solidFill>
+                        <a:srgbClr val="000000"/>
+                      </a:solidFill>
+                      <a:prstDash val="solid"/>
+                      <a:round/>
+                      <a:headEnd type="none" w="med" len="med"/>
+                      <a:tailEnd type="none" w="med" len="med"/>
+                    </a:lnT>
+                    <a:lnB w="12700" cap="flat" cmpd="sng" algn="ctr">
+                      <a:solidFill>
+                        <a:srgbClr val="000000"/>
+                      </a:solidFill>
+                      <a:prstDash val="solid"/>
+                      <a:round/>
+                      <a:headEnd type="none" w="med" len="med"/>
+                      <a:tailEnd type="none" w="med" len="med"/>
+                    </a:lnB>
+                    <a:solidFill>
+                      <a:srgbClr val="FFFFFF"/>
+                    </a:solidFill>
+                  </a:tcPr>
+                </a:tc>
+                <a:tc>
+                  <a:txBody>
+                    <a:bodyPr/>
+                    <a:lstStyle/>
+                    <a:p>
+                      <a:pPr indent="0">
+                        <a:lnSpc>
+                          <a:spcPct val="115000"/>
+                        </a:lnSpc>
+                        <a:spcAft>
+                          <a:spcPts val="0"/>
+                        </a:spcAft>
+                        <a:buNone/>
+                      </a:pPr>
+                      <a:endParaRPr kumimoji="0" lang="en-US" sz="1600" b="1" kern="100" dirty="0">
+                        <a:solidFill>
+                          <a:srgbClr val="FF0000"/>
+                        </a:solidFill>
+                        <a:effectLst/>
+                        <a:latin typeface="Calibri" panose="020F0502020204030204" pitchFamily="34" charset="0"/>
+                        <a:ea typeface="DengXian" panose="02010600030101010101" pitchFamily="2" charset="-122"/>
+                        <a:cs typeface="Times New Roman" panose="02020603050405020304" pitchFamily="18" charset="0"/>
+                      </a:endParaRPr>
+                    </a:p>
+                  </a:txBody>
+                  <a:tcPr marL="68580" marR="68580" marT="0" marB="0" anchor="ctr">
+                    <a:lnL w="12700" cap="flat" cmpd="sng" algn="ctr">
+                      <a:solidFill>
+                        <a:srgbClr val="000000"/>
+                      </a:solidFill>
+                      <a:prstDash val="solid"/>
+                      <a:round/>
+                      <a:headEnd type="none" w="med" len="med"/>
+                      <a:tailEnd type="none" w="med" len="med"/>
+                    </a:lnL>
+                    <a:lnR w="12700" cap="flat" cmpd="sng" algn="ctr">
+                      <a:solidFill>
+                        <a:srgbClr val="000000"/>
+                      </a:solidFill>
+                      <a:prstDash val="solid"/>
+                      <a:round/>
+                      <a:headEnd type="none" w="med" len="med"/>
+                      <a:tailEnd type="none" w="med" len="med"/>
+                    </a:lnR>
+                    <a:lnT w="12700" cap="flat" cmpd="sng" algn="ctr">
+                      <a:solidFill>
+                        <a:srgbClr val="000000"/>
+                      </a:solidFill>
+                      <a:prstDash val="solid"/>
+                      <a:round/>
+                      <a:headEnd type="none" w="med" len="med"/>
+                      <a:tailEnd type="none" w="med" len="med"/>
+                    </a:lnT>
+                    <a:lnB w="12700" cap="flat" cmpd="sng" algn="ctr">
+                      <a:solidFill>
+                        <a:srgbClr val="000000"/>
+                      </a:solidFill>
+                      <a:prstDash val="solid"/>
+                      <a:round/>
+                      <a:headEnd type="none" w="med" len="med"/>
+                      <a:tailEnd type="none" w="med" len="med"/>
+                    </a:lnB>
+                    <a:solidFill>
+                      <a:srgbClr val="FFFFFF"/>
+                    </a:solidFill>
+                  </a:tcPr>
+                </a:tc>
+                <a:tc>
+                  <a:txBody>
+                    <a:bodyPr/>
+                    <a:lstStyle/>
+                    <a:p>
+                      <a:pPr indent="0">
+                        <a:lnSpc>
+                          <a:spcPct val="115000"/>
+                        </a:lnSpc>
+                        <a:spcAft>
+                          <a:spcPts val="0"/>
+                        </a:spcAft>
+                        <a:buNone/>
+                      </a:pPr>
+                      <a:endParaRPr kumimoji="0" lang="en-US" sz="1600" b="1" kern="100" dirty="0">
+                        <a:solidFill>
+                          <a:srgbClr val="FF0000"/>
+                        </a:solidFill>
+                        <a:effectLst/>
+                        <a:latin typeface="Calibri" panose="020F0502020204030204" pitchFamily="34" charset="0"/>
                         <a:ea typeface="DengXian" panose="02010600030101010101" pitchFamily="2" charset="-122"/>
                         <a:cs typeface="Times New Roman" panose="02020603050405020304" pitchFamily="18" charset="0"/>
                       </a:endParaRPr>
@@ -23271,12 +24179,12 @@
                     <a:bodyPr/>
                     <a:lstStyle/>
                     <a:p>
-                      <a:pPr indent="140335">
+                      <a:pPr indent="0">
                         <a:lnSpc>
                           <a:spcPct val="115000"/>
                         </a:lnSpc>
                         <a:spcAft>
-                          <a:spcPts val="800"/>
+                          <a:spcPts val="0"/>
                         </a:spcAft>
                         <a:buNone/>
                       </a:pPr>
@@ -23347,12 +24255,12 @@
                     <a:bodyPr/>
                     <a:lstStyle/>
                     <a:p>
-                      <a:pPr indent="140335">
+                      <a:pPr indent="0">
                         <a:lnSpc>
                           <a:spcPct val="115000"/>
                         </a:lnSpc>
                         <a:spcAft>
-                          <a:spcPts val="800"/>
+                          <a:spcPts val="0"/>
                         </a:spcAft>
                         <a:buNone/>
                       </a:pPr>
@@ -23423,12 +24331,12 @@
                     <a:bodyPr/>
                     <a:lstStyle/>
                     <a:p>
-                      <a:pPr indent="140335">
+                      <a:pPr indent="0">
                         <a:lnSpc>
                           <a:spcPct val="115000"/>
                         </a:lnSpc>
                         <a:spcAft>
-                          <a:spcPts val="800"/>
+                          <a:spcPts val="0"/>
                         </a:spcAft>
                         <a:buNone/>
                       </a:pPr>
@@ -23487,12 +24395,12 @@
                     <a:bodyPr/>
                     <a:lstStyle/>
                     <a:p>
-                      <a:pPr indent="140335">
+                      <a:pPr indent="0">
                         <a:lnSpc>
                           <a:spcPct val="115000"/>
                         </a:lnSpc>
                         <a:spcAft>
-                          <a:spcPts val="800"/>
+                          <a:spcPts val="0"/>
                         </a:spcAft>
                         <a:buNone/>
                       </a:pPr>
@@ -23551,18 +24459,152 @@
                     <a:bodyPr/>
                     <a:lstStyle/>
                     <a:p>
-                      <a:pPr indent="140335">
+                      <a:pPr indent="0">
                         <a:lnSpc>
                           <a:spcPct val="115000"/>
                         </a:lnSpc>
                         <a:spcAft>
-                          <a:spcPts val="800"/>
+                          <a:spcPts val="0"/>
                         </a:spcAft>
                         <a:buNone/>
                       </a:pPr>
                       <a:endParaRPr lang="en-US" sz="1800" kern="100" dirty="0">
                         <a:effectLst/>
                         <a:latin typeface="Aptos" panose="020B0004020202020204" pitchFamily="34" charset="0"/>
+                        <a:ea typeface="DengXian" panose="02010600030101010101" pitchFamily="2" charset="-122"/>
+                        <a:cs typeface="Times New Roman" panose="02020603050405020304" pitchFamily="18" charset="0"/>
+                      </a:endParaRPr>
+                    </a:p>
+                  </a:txBody>
+                  <a:tcPr marL="68580" marR="68580" marT="0" marB="0" anchor="ctr">
+                    <a:lnL w="12700" cap="flat" cmpd="sng" algn="ctr">
+                      <a:solidFill>
+                        <a:srgbClr val="000000"/>
+                      </a:solidFill>
+                      <a:prstDash val="solid"/>
+                      <a:round/>
+                      <a:headEnd type="none" w="med" len="med"/>
+                      <a:tailEnd type="none" w="med" len="med"/>
+                    </a:lnL>
+                    <a:lnR w="12700" cap="flat" cmpd="sng" algn="ctr">
+                      <a:solidFill>
+                        <a:srgbClr val="000000"/>
+                      </a:solidFill>
+                      <a:prstDash val="solid"/>
+                      <a:round/>
+                      <a:headEnd type="none" w="med" len="med"/>
+                      <a:tailEnd type="none" w="med" len="med"/>
+                    </a:lnR>
+                    <a:lnT w="12700" cap="flat" cmpd="sng" algn="ctr">
+                      <a:solidFill>
+                        <a:srgbClr val="000000"/>
+                      </a:solidFill>
+                      <a:prstDash val="solid"/>
+                      <a:round/>
+                      <a:headEnd type="none" w="med" len="med"/>
+                      <a:tailEnd type="none" w="med" len="med"/>
+                    </a:lnT>
+                    <a:lnB w="12700" cap="flat" cmpd="sng" algn="ctr">
+                      <a:solidFill>
+                        <a:srgbClr val="000000"/>
+                      </a:solidFill>
+                      <a:prstDash val="solid"/>
+                      <a:round/>
+                      <a:headEnd type="none" w="med" len="med"/>
+                      <a:tailEnd type="none" w="med" len="med"/>
+                    </a:lnB>
+                    <a:solidFill>
+                      <a:srgbClr val="FFFFFF"/>
+                    </a:solidFill>
+                  </a:tcPr>
+                </a:tc>
+                <a:tc>
+                  <a:txBody>
+                    <a:bodyPr/>
+                    <a:lstStyle/>
+                    <a:p>
+                      <a:pPr indent="0">
+                        <a:lnSpc>
+                          <a:spcPct val="115000"/>
+                        </a:lnSpc>
+                        <a:spcAft>
+                          <a:spcPts val="0"/>
+                        </a:spcAft>
+                        <a:buNone/>
+                      </a:pPr>
+                      <a:endParaRPr kumimoji="0" lang="en-US" sz="1600" b="1" kern="100" dirty="0">
+                        <a:solidFill>
+                          <a:srgbClr val="FF0000"/>
+                        </a:solidFill>
+                        <a:effectLst/>
+                        <a:latin typeface="Calibri" panose="020F0502020204030204" pitchFamily="34" charset="0"/>
+                        <a:ea typeface="DengXian" panose="02010600030101010101" pitchFamily="2" charset="-122"/>
+                        <a:cs typeface="Times New Roman" panose="02020603050405020304" pitchFamily="18" charset="0"/>
+                      </a:endParaRPr>
+                    </a:p>
+                  </a:txBody>
+                  <a:tcPr marL="68580" marR="68580" marT="0" marB="0" anchor="ctr">
+                    <a:lnL w="12700" cap="flat" cmpd="sng" algn="ctr">
+                      <a:solidFill>
+                        <a:srgbClr val="000000"/>
+                      </a:solidFill>
+                      <a:prstDash val="solid"/>
+                      <a:round/>
+                      <a:headEnd type="none" w="med" len="med"/>
+                      <a:tailEnd type="none" w="med" len="med"/>
+                    </a:lnL>
+                    <a:lnR w="12700" cap="flat" cmpd="sng" algn="ctr">
+                      <a:solidFill>
+                        <a:srgbClr val="000000"/>
+                      </a:solidFill>
+                      <a:prstDash val="solid"/>
+                      <a:round/>
+                      <a:headEnd type="none" w="med" len="med"/>
+                      <a:tailEnd type="none" w="med" len="med"/>
+                    </a:lnR>
+                    <a:lnT w="12700" cap="flat" cmpd="sng" algn="ctr">
+                      <a:solidFill>
+                        <a:srgbClr val="000000"/>
+                      </a:solidFill>
+                      <a:prstDash val="solid"/>
+                      <a:round/>
+                      <a:headEnd type="none" w="med" len="med"/>
+                      <a:tailEnd type="none" w="med" len="med"/>
+                    </a:lnT>
+                    <a:lnB w="12700" cap="flat" cmpd="sng" algn="ctr">
+                      <a:solidFill>
+                        <a:srgbClr val="000000"/>
+                      </a:solidFill>
+                      <a:prstDash val="solid"/>
+                      <a:round/>
+                      <a:headEnd type="none" w="med" len="med"/>
+                      <a:tailEnd type="none" w="med" len="med"/>
+                    </a:lnB>
+                    <a:solidFill>
+                      <a:srgbClr val="FFFFFF"/>
+                    </a:solidFill>
+                  </a:tcPr>
+                </a:tc>
+                <a:tc>
+                  <a:txBody>
+                    <a:bodyPr/>
+                    <a:lstStyle/>
+                    <a:p>
+                      <a:pPr indent="0">
+                        <a:lnSpc>
+                          <a:spcPct val="115000"/>
+                        </a:lnSpc>
+                        <a:spcAft>
+                          <a:spcPts val="0"/>
+                        </a:spcAft>
+                        <a:buNone/>
+                      </a:pPr>
+                      <a:endParaRPr kumimoji="0" lang="en-US" sz="1600" b="1" kern="100" dirty="0">
+                        <a:solidFill>
+                          <a:srgbClr val="FF0000"/>
+                        </a:solidFill>
+                        <a:effectLst/>
+                        <a:latin typeface="Calibri" panose="020F0502020204030204" pitchFamily="34" charset="0"/>
                         <a:ea typeface="DengXian" panose="02010600030101010101" pitchFamily="2" charset="-122"/>
                         <a:cs typeface="Times New Roman" panose="02020603050405020304" pitchFamily="18" charset="0"/>
                       </a:endParaRPr>
@@ -23622,12 +24664,12 @@
                     <a:bodyPr/>
                     <a:lstStyle/>
                     <a:p>
-                      <a:pPr indent="140335">
+                      <a:pPr indent="0">
                         <a:lnSpc>
                           <a:spcPct val="115000"/>
                         </a:lnSpc>
                         <a:spcAft>
-                          <a:spcPts val="800"/>
+                          <a:spcPts val="0"/>
                         </a:spcAft>
                         <a:buNone/>
                       </a:pPr>
@@ -23698,12 +24740,12 @@
                     <a:bodyPr/>
                     <a:lstStyle/>
                     <a:p>
-                      <a:pPr indent="140335">
+                      <a:pPr indent="0">
                         <a:lnSpc>
                           <a:spcPct val="115000"/>
                         </a:lnSpc>
                         <a:spcAft>
-                          <a:spcPts val="800"/>
+                          <a:spcPts val="0"/>
                         </a:spcAft>
                         <a:buNone/>
                       </a:pPr>
@@ -23774,12 +24816,12 @@
                     <a:bodyPr/>
                     <a:lstStyle/>
                     <a:p>
-                      <a:pPr indent="140335">
+                      <a:pPr indent="0">
                         <a:lnSpc>
                           <a:spcPct val="115000"/>
                         </a:lnSpc>
                         <a:spcAft>
-                          <a:spcPts val="800"/>
+                          <a:spcPts val="0"/>
                         </a:spcAft>
                         <a:buNone/>
                       </a:pPr>
@@ -23838,12 +24880,12 @@
                     <a:bodyPr/>
                     <a:lstStyle/>
                     <a:p>
-                      <a:pPr indent="140335">
+                      <a:pPr indent="0">
                         <a:lnSpc>
                           <a:spcPct val="115000"/>
                         </a:lnSpc>
                         <a:spcAft>
-                          <a:spcPts val="800"/>
+                          <a:spcPts val="0"/>
                         </a:spcAft>
                         <a:buNone/>
                       </a:pPr>
@@ -23902,18 +24944,152 @@
                     <a:bodyPr/>
                     <a:lstStyle/>
                     <a:p>
-                      <a:pPr indent="140335">
+                      <a:pPr indent="0">
                         <a:lnSpc>
                           <a:spcPct val="115000"/>
                         </a:lnSpc>
                         <a:spcAft>
-                          <a:spcPts val="800"/>
+                          <a:spcPts val="0"/>
                         </a:spcAft>
                         <a:buNone/>
                       </a:pPr>
                       <a:endParaRPr lang="en-US" sz="1800" kern="100" dirty="0">
                         <a:effectLst/>
                         <a:latin typeface="Aptos" panose="020B0004020202020204" pitchFamily="34" charset="0"/>
+                        <a:ea typeface="DengXian" panose="02010600030101010101" pitchFamily="2" charset="-122"/>
+                        <a:cs typeface="Times New Roman" panose="02020603050405020304" pitchFamily="18" charset="0"/>
+                      </a:endParaRPr>
+                    </a:p>
+                  </a:txBody>
+                  <a:tcPr marL="68580" marR="68580" marT="0" marB="0" anchor="ctr">
+                    <a:lnL w="12700" cap="flat" cmpd="sng" algn="ctr">
+                      <a:solidFill>
+                        <a:srgbClr val="000000"/>
+                      </a:solidFill>
+                      <a:prstDash val="solid"/>
+                      <a:round/>
+                      <a:headEnd type="none" w="med" len="med"/>
+                      <a:tailEnd type="none" w="med" len="med"/>
+                    </a:lnL>
+                    <a:lnR w="12700" cap="flat" cmpd="sng" algn="ctr">
+                      <a:solidFill>
+                        <a:srgbClr val="000000"/>
+                      </a:solidFill>
+                      <a:prstDash val="solid"/>
+                      <a:round/>
+                      <a:headEnd type="none" w="med" len="med"/>
+                      <a:tailEnd type="none" w="med" len="med"/>
+                    </a:lnR>
+                    <a:lnT w="12700" cap="flat" cmpd="sng" algn="ctr">
+                      <a:solidFill>
+                        <a:srgbClr val="000000"/>
+                      </a:solidFill>
+                      <a:prstDash val="solid"/>
+                      <a:round/>
+                      <a:headEnd type="none" w="med" len="med"/>
+                      <a:tailEnd type="none" w="med" len="med"/>
+                    </a:lnT>
+                    <a:lnB w="12700" cap="flat" cmpd="sng" algn="ctr">
+                      <a:solidFill>
+                        <a:srgbClr val="000000"/>
+                      </a:solidFill>
+                      <a:prstDash val="solid"/>
+                      <a:round/>
+                      <a:headEnd type="none" w="med" len="med"/>
+                      <a:tailEnd type="none" w="med" len="med"/>
+                    </a:lnB>
+                    <a:solidFill>
+                      <a:srgbClr val="FFFFFF"/>
+                    </a:solidFill>
+                  </a:tcPr>
+                </a:tc>
+                <a:tc>
+                  <a:txBody>
+                    <a:bodyPr/>
+                    <a:lstStyle/>
+                    <a:p>
+                      <a:pPr indent="0">
+                        <a:lnSpc>
+                          <a:spcPct val="115000"/>
+                        </a:lnSpc>
+                        <a:spcAft>
+                          <a:spcPts val="0"/>
+                        </a:spcAft>
+                        <a:buNone/>
+                      </a:pPr>
+                      <a:endParaRPr kumimoji="0" lang="en-US" sz="1600" b="1" kern="100" dirty="0">
+                        <a:solidFill>
+                          <a:srgbClr val="FF0000"/>
+                        </a:solidFill>
+                        <a:effectLst/>
+                        <a:latin typeface="Calibri" panose="020F0502020204030204" pitchFamily="34" charset="0"/>
+                        <a:ea typeface="DengXian" panose="02010600030101010101" pitchFamily="2" charset="-122"/>
+                        <a:cs typeface="Times New Roman" panose="02020603050405020304" pitchFamily="18" charset="0"/>
+                      </a:endParaRPr>
+                    </a:p>
+                  </a:txBody>
+                  <a:tcPr marL="68580" marR="68580" marT="0" marB="0" anchor="ctr">
+                    <a:lnL w="12700" cap="flat" cmpd="sng" algn="ctr">
+                      <a:solidFill>
+                        <a:srgbClr val="000000"/>
+                      </a:solidFill>
+                      <a:prstDash val="solid"/>
+                      <a:round/>
+                      <a:headEnd type="none" w="med" len="med"/>
+                      <a:tailEnd type="none" w="med" len="med"/>
+                    </a:lnL>
+                    <a:lnR w="12700" cap="flat" cmpd="sng" algn="ctr">
+                      <a:solidFill>
+                        <a:srgbClr val="000000"/>
+                      </a:solidFill>
+                      <a:prstDash val="solid"/>
+                      <a:round/>
+                      <a:headEnd type="none" w="med" len="med"/>
+                      <a:tailEnd type="none" w="med" len="med"/>
+                    </a:lnR>
+                    <a:lnT w="12700" cap="flat" cmpd="sng" algn="ctr">
+                      <a:solidFill>
+                        <a:srgbClr val="000000"/>
+                      </a:solidFill>
+                      <a:prstDash val="solid"/>
+                      <a:round/>
+                      <a:headEnd type="none" w="med" len="med"/>
+                      <a:tailEnd type="none" w="med" len="med"/>
+                    </a:lnT>
+                    <a:lnB w="12700" cap="flat" cmpd="sng" algn="ctr">
+                      <a:solidFill>
+                        <a:srgbClr val="000000"/>
+                      </a:solidFill>
+                      <a:prstDash val="solid"/>
+                      <a:round/>
+                      <a:headEnd type="none" w="med" len="med"/>
+                      <a:tailEnd type="none" w="med" len="med"/>
+                    </a:lnB>
+                    <a:solidFill>
+                      <a:srgbClr val="FFFFFF"/>
+                    </a:solidFill>
+                  </a:tcPr>
+                </a:tc>
+                <a:tc>
+                  <a:txBody>
+                    <a:bodyPr/>
+                    <a:lstStyle/>
+                    <a:p>
+                      <a:pPr indent="0">
+                        <a:lnSpc>
+                          <a:spcPct val="115000"/>
+                        </a:lnSpc>
+                        <a:spcAft>
+                          <a:spcPts val="0"/>
+                        </a:spcAft>
+                        <a:buNone/>
+                      </a:pPr>
+                      <a:endParaRPr kumimoji="0" lang="en-US" sz="1600" b="1" kern="100" dirty="0">
+                        <a:solidFill>
+                          <a:srgbClr val="FF0000"/>
+                        </a:solidFill>
+                        <a:effectLst/>
+                        <a:latin typeface="Calibri" panose="020F0502020204030204" pitchFamily="34" charset="0"/>
                         <a:ea typeface="DengXian" panose="02010600030101010101" pitchFamily="2" charset="-122"/>
                         <a:cs typeface="Times New Roman" panose="02020603050405020304" pitchFamily="18" charset="0"/>
                       </a:endParaRPr>
@@ -23973,12 +25149,12 @@
                     <a:bodyPr/>
                     <a:lstStyle/>
                     <a:p>
-                      <a:pPr indent="140335">
+                      <a:pPr indent="0">
                         <a:lnSpc>
                           <a:spcPct val="115000"/>
                         </a:lnSpc>
                         <a:spcAft>
-                          <a:spcPts val="800"/>
+                          <a:spcPts val="0"/>
                         </a:spcAft>
                         <a:buNone/>
                       </a:pPr>
@@ -24049,12 +25225,12 @@
                     <a:bodyPr/>
                     <a:lstStyle/>
                     <a:p>
-                      <a:pPr indent="140335">
+                      <a:pPr indent="0">
                         <a:lnSpc>
                           <a:spcPct val="115000"/>
                         </a:lnSpc>
                         <a:spcAft>
-                          <a:spcPts val="800"/>
+                          <a:spcPts val="0"/>
                         </a:spcAft>
                         <a:buNone/>
                       </a:pPr>
@@ -24125,12 +25301,12 @@
                     <a:bodyPr/>
                     <a:lstStyle/>
                     <a:p>
-                      <a:pPr indent="140335">
+                      <a:pPr indent="0">
                         <a:lnSpc>
                           <a:spcPct val="115000"/>
                         </a:lnSpc>
                         <a:spcAft>
-                          <a:spcPts val="800"/>
+                          <a:spcPts val="0"/>
                         </a:spcAft>
                         <a:buNone/>
                       </a:pPr>
@@ -24189,12 +25365,12 @@
                     <a:bodyPr/>
                     <a:lstStyle/>
                     <a:p>
-                      <a:pPr indent="140335">
+                      <a:pPr indent="0">
                         <a:lnSpc>
                           <a:spcPct val="115000"/>
                         </a:lnSpc>
                         <a:spcAft>
-                          <a:spcPts val="800"/>
+                          <a:spcPts val="0"/>
                         </a:spcAft>
                         <a:buNone/>
                       </a:pPr>
@@ -24253,18 +25429,155 @@
                     <a:bodyPr/>
                     <a:lstStyle/>
                     <a:p>
-                      <a:pPr indent="140335">
+                      <a:pPr indent="0">
                         <a:lnSpc>
                           <a:spcPct val="115000"/>
                         </a:lnSpc>
                         <a:spcAft>
-                          <a:spcPts val="800"/>
+                          <a:spcPts val="0"/>
                         </a:spcAft>
                         <a:buNone/>
                       </a:pPr>
-                      <a:endParaRPr lang="en-US" sz="1800" kern="100" dirty="0">
+                      <a:endParaRPr kumimoji="0" lang="en-US" sz="1600" b="1" kern="100" dirty="0">
+                        <a:solidFill>
+                          <a:srgbClr val="FF0000"/>
+                        </a:solidFill>
                         <a:effectLst/>
-                        <a:latin typeface="Aptos" panose="020B0004020202020204" pitchFamily="34" charset="0"/>
+                        <a:latin typeface="Calibri" panose="020F0502020204030204" pitchFamily="34" charset="0"/>
+                        <a:ea typeface="DengXian" panose="02010600030101010101" pitchFamily="2" charset="-122"/>
+                        <a:cs typeface="Times New Roman" panose="02020603050405020304" pitchFamily="18" charset="0"/>
+                      </a:endParaRPr>
+                    </a:p>
+                  </a:txBody>
+                  <a:tcPr marL="68580" marR="68580" marT="0" marB="0" anchor="ctr">
+                    <a:lnL w="12700" cap="flat" cmpd="sng" algn="ctr">
+                      <a:solidFill>
+                        <a:srgbClr val="000000"/>
+                      </a:solidFill>
+                      <a:prstDash val="solid"/>
+                      <a:round/>
+                      <a:headEnd type="none" w="med" len="med"/>
+                      <a:tailEnd type="none" w="med" len="med"/>
+                    </a:lnL>
+                    <a:lnR w="12700" cap="flat" cmpd="sng" algn="ctr">
+                      <a:solidFill>
+                        <a:srgbClr val="000000"/>
+                      </a:solidFill>
+                      <a:prstDash val="solid"/>
+                      <a:round/>
+                      <a:headEnd type="none" w="med" len="med"/>
+                      <a:tailEnd type="none" w="med" len="med"/>
+                    </a:lnR>
+                    <a:lnT w="12700" cap="flat" cmpd="sng" algn="ctr">
+                      <a:solidFill>
+                        <a:srgbClr val="000000"/>
+                      </a:solidFill>
+                      <a:prstDash val="solid"/>
+                      <a:round/>
+                      <a:headEnd type="none" w="med" len="med"/>
+                      <a:tailEnd type="none" w="med" len="med"/>
+                    </a:lnT>
+                    <a:lnB w="12700" cap="flat" cmpd="sng" algn="ctr">
+                      <a:solidFill>
+                        <a:srgbClr val="000000"/>
+                      </a:solidFill>
+                      <a:prstDash val="solid"/>
+                      <a:round/>
+                      <a:headEnd type="none" w="med" len="med"/>
+                      <a:tailEnd type="none" w="med" len="med"/>
+                    </a:lnB>
+                    <a:solidFill>
+                      <a:srgbClr val="FFFFFF"/>
+                    </a:solidFill>
+                  </a:tcPr>
+                </a:tc>
+                <a:tc>
+                  <a:txBody>
+                    <a:bodyPr/>
+                    <a:lstStyle/>
+                    <a:p>
+                      <a:pPr indent="0">
+                        <a:lnSpc>
+                          <a:spcPct val="115000"/>
+                        </a:lnSpc>
+                        <a:spcAft>
+                          <a:spcPts val="0"/>
+                        </a:spcAft>
+                        <a:buNone/>
+                      </a:pPr>
+                      <a:endParaRPr kumimoji="0" lang="en-US" sz="1600" b="1" kern="100" dirty="0">
+                        <a:solidFill>
+                          <a:srgbClr val="FF0000"/>
+                        </a:solidFill>
+                        <a:effectLst/>
+                        <a:latin typeface="Calibri" panose="020F0502020204030204" pitchFamily="34" charset="0"/>
+                        <a:ea typeface="DengXian" panose="02010600030101010101" pitchFamily="2" charset="-122"/>
+                        <a:cs typeface="Times New Roman" panose="02020603050405020304" pitchFamily="18" charset="0"/>
+                      </a:endParaRPr>
+                    </a:p>
+                  </a:txBody>
+                  <a:tcPr marL="68580" marR="68580" marT="0" marB="0" anchor="ctr">
+                    <a:lnL w="12700" cap="flat" cmpd="sng" algn="ctr">
+                      <a:solidFill>
+                        <a:srgbClr val="000000"/>
+                      </a:solidFill>
+                      <a:prstDash val="solid"/>
+                      <a:round/>
+                      <a:headEnd type="none" w="med" len="med"/>
+                      <a:tailEnd type="none" w="med" len="med"/>
+                    </a:lnL>
+                    <a:lnR w="12700" cap="flat" cmpd="sng" algn="ctr">
+                      <a:solidFill>
+                        <a:srgbClr val="000000"/>
+                      </a:solidFill>
+                      <a:prstDash val="solid"/>
+                      <a:round/>
+                      <a:headEnd type="none" w="med" len="med"/>
+                      <a:tailEnd type="none" w="med" len="med"/>
+                    </a:lnR>
+                    <a:lnT w="12700" cap="flat" cmpd="sng" algn="ctr">
+                      <a:solidFill>
+                        <a:srgbClr val="000000"/>
+                      </a:solidFill>
+                      <a:prstDash val="solid"/>
+                      <a:round/>
+                      <a:headEnd type="none" w="med" len="med"/>
+                      <a:tailEnd type="none" w="med" len="med"/>
+                    </a:lnT>
+                    <a:lnB w="12700" cap="flat" cmpd="sng" algn="ctr">
+                      <a:solidFill>
+                        <a:srgbClr val="000000"/>
+                      </a:solidFill>
+                      <a:prstDash val="solid"/>
+                      <a:round/>
+                      <a:headEnd type="none" w="med" len="med"/>
+                      <a:tailEnd type="none" w="med" len="med"/>
+                    </a:lnB>
+                    <a:solidFill>
+                      <a:srgbClr val="FFFFFF"/>
+                    </a:solidFill>
+                  </a:tcPr>
+                </a:tc>
+                <a:tc>
+                  <a:txBody>
+                    <a:bodyPr/>
+                    <a:lstStyle/>
+                    <a:p>
+                      <a:pPr indent="0">
+                        <a:lnSpc>
+                          <a:spcPct val="115000"/>
+                        </a:lnSpc>
+                        <a:spcAft>
+                          <a:spcPts val="0"/>
+                        </a:spcAft>
+                        <a:buNone/>
+                      </a:pPr>
+                      <a:endParaRPr kumimoji="0" lang="en-US" sz="1600" b="1" kern="100" dirty="0">
+                        <a:solidFill>
+                          <a:srgbClr val="FF0000"/>
+                        </a:solidFill>
+                        <a:effectLst/>
+                        <a:latin typeface="Calibri" panose="020F0502020204030204" pitchFamily="34" charset="0"/>
                         <a:ea typeface="DengXian" panose="02010600030101010101" pitchFamily="2" charset="-122"/>
                         <a:cs typeface="Times New Roman" panose="02020603050405020304" pitchFamily="18" charset="0"/>
                       </a:endParaRPr>
@@ -24322,39 +25635,6 @@
           </a:graphicData>
         </a:graphic>
       </p:graphicFrame>
-      <p:sp>
-        <p:nvSpPr>
-          <p:cNvPr id="7" name="Content Placeholder 3">
-            <a:extLst>
-              <a:ext uri="{FF2B5EF4-FFF2-40B4-BE49-F238E27FC236}">
-                <a16:creationId xmlns:a16="http://schemas.microsoft.com/office/drawing/2014/main" id="{4B89EF58-E7D7-52A9-B76A-D6754B4BB133}"/>
-              </a:ext>
-            </a:extLst>
-          </p:cNvPr>
-          <p:cNvSpPr>
-            <a:spLocks noGrp="1"/>
-          </p:cNvSpPr>
-          <p:nvPr>
-            <p:ph sz="quarter" idx="1"/>
-          </p:nvPr>
-        </p:nvSpPr>
-        <p:spPr>
-          <a:xfrm>
-            <a:off x="457200" y="1219200"/>
-            <a:ext cx="8229600" cy="4937760"/>
-          </a:xfrm>
-        </p:spPr>
-        <p:txBody>
-          <a:bodyPr/>
-          <a:lstStyle/>
-          <a:p>
-            <a:r>
-              <a:rPr lang="en-US" dirty="0"/>
-              <a:t>For a 4-bit system, calculate the result of summation, setting C and V flags</a:t>
-            </a:r>
-          </a:p>
-        </p:txBody>
-      </p:sp>
     </p:spTree>
     <p:extLst>
       <p:ext uri="{BB962C8B-B14F-4D97-AF65-F5344CB8AC3E}">
@@ -24458,52 +25738,66 @@
           <p:nvPr>
             <p:extLst>
               <p:ext uri="{D42A27DB-BD31-4B8C-83A1-F6EECF244321}">
-                <p14:modId xmlns:p14="http://schemas.microsoft.com/office/powerpoint/2010/main" val="1176341518"/>
+                <p14:modId xmlns:p14="http://schemas.microsoft.com/office/powerpoint/2010/main" val="3986812572"/>
               </p:ext>
             </p:extLst>
           </p:nvPr>
         </p:nvGraphicFramePr>
         <p:xfrm>
-          <a:off x="1094263" y="2333942"/>
-          <a:ext cx="6955473" cy="3304858"/>
+          <a:off x="266700" y="2146852"/>
+          <a:ext cx="8610600" cy="3322257"/>
         </p:xfrm>
         <a:graphic>
           <a:graphicData uri="http://schemas.openxmlformats.org/drawingml/2006/table">
             <a:tbl>
               <a:tblPr firstRow="1" bandRow="1"/>
               <a:tblGrid>
-                <a:gridCol w="1702524">
+                <a:gridCol w="1524000">
                   <a:extLst>
                     <a:ext uri="{9D8B030D-6E8A-4147-A177-3AD203B41FA5}">
                       <a16:colId xmlns:a16="http://schemas.microsoft.com/office/drawing/2014/main" val="2359662815"/>
                     </a:ext>
                   </a:extLst>
                 </a:gridCol>
-                <a:gridCol w="1144345">
+                <a:gridCol w="762000">
                   <a:extLst>
                     <a:ext uri="{9D8B030D-6E8A-4147-A177-3AD203B41FA5}">
                       <a16:colId xmlns:a16="http://schemas.microsoft.com/office/drawing/2014/main" val="1212662852"/>
                     </a:ext>
                   </a:extLst>
                 </a:gridCol>
-                <a:gridCol w="1173887">
+                <a:gridCol w="533400">
                   <a:extLst>
                     <a:ext uri="{9D8B030D-6E8A-4147-A177-3AD203B41FA5}">
                       <a16:colId xmlns:a16="http://schemas.microsoft.com/office/drawing/2014/main" val="4290731535"/>
                     </a:ext>
                   </a:extLst>
                 </a:gridCol>
-                <a:gridCol w="1191767">
+                <a:gridCol w="457200">
                   <a:extLst>
                     <a:ext uri="{9D8B030D-6E8A-4147-A177-3AD203B41FA5}">
                       <a16:colId xmlns:a16="http://schemas.microsoft.com/office/drawing/2014/main" val="4234417883"/>
                     </a:ext>
                   </a:extLst>
                 </a:gridCol>
-                <a:gridCol w="1742950">
+                <a:gridCol w="914400">
                   <a:extLst>
                     <a:ext uri="{9D8B030D-6E8A-4147-A177-3AD203B41FA5}">
                       <a16:colId xmlns:a16="http://schemas.microsoft.com/office/drawing/2014/main" val="1819084519"/>
+                    </a:ext>
+                  </a:extLst>
+                </a:gridCol>
+                <a:gridCol w="2209800">
+                  <a:extLst>
+                    <a:ext uri="{9D8B030D-6E8A-4147-A177-3AD203B41FA5}">
+                      <a16:colId xmlns:a16="http://schemas.microsoft.com/office/drawing/2014/main" val="3514109378"/>
+                    </a:ext>
+                  </a:extLst>
+                </a:gridCol>
+                <a:gridCol w="2209800">
+                  <a:extLst>
+                    <a:ext uri="{9D8B030D-6E8A-4147-A177-3AD203B41FA5}">
+                      <a16:colId xmlns:a16="http://schemas.microsoft.com/office/drawing/2014/main" val="3173739672"/>
                     </a:ext>
                   </a:extLst>
                 </a:gridCol>
@@ -24514,17 +25808,17 @@
                     <a:bodyPr/>
                     <a:lstStyle/>
                     <a:p>
-                      <a:pPr indent="139700">
+                      <a:pPr indent="0">
                         <a:lnSpc>
                           <a:spcPct val="115000"/>
                         </a:lnSpc>
                         <a:spcAft>
-                          <a:spcPts val="800"/>
+                          <a:spcPts val="0"/>
                         </a:spcAft>
                         <a:buNone/>
                       </a:pPr>
                       <a:r>
-                        <a:rPr lang="en-US" sz="1600" kern="100">
+                        <a:rPr lang="en-US" sz="1600" kern="100" dirty="0">
                           <a:solidFill>
                             <a:srgbClr val="000000"/>
                           </a:solidFill>
@@ -24535,7 +25829,7 @@
                         </a:rPr>
                         <a:t>Expression</a:t>
                       </a:r>
-                      <a:endParaRPr lang="en-US" sz="1800" kern="100">
+                      <a:endParaRPr lang="en-US" sz="1800" kern="100" dirty="0">
                         <a:effectLst/>
                         <a:latin typeface="Aptos" panose="020B0004020202020204" pitchFamily="34" charset="0"/>
                         <a:ea typeface="DengXian" panose="02010600030101010101" pitchFamily="2" charset="-122"/>
@@ -24590,17 +25884,17 @@
                     <a:bodyPr/>
                     <a:lstStyle/>
                     <a:p>
-                      <a:pPr indent="139700">
+                      <a:pPr indent="0">
                         <a:lnSpc>
                           <a:spcPct val="115000"/>
                         </a:lnSpc>
                         <a:spcAft>
-                          <a:spcPts val="800"/>
+                          <a:spcPts val="0"/>
                         </a:spcAft>
                         <a:buNone/>
                       </a:pPr>
                       <a:r>
-                        <a:rPr lang="en-US" sz="1600" kern="100">
+                        <a:rPr lang="en-US" sz="1600" kern="100" dirty="0">
                           <a:solidFill>
                             <a:srgbClr val="000000"/>
                           </a:solidFill>
@@ -24611,7 +25905,7 @@
                         </a:rPr>
                         <a:t>Result</a:t>
                       </a:r>
-                      <a:endParaRPr lang="en-US" sz="1800" kern="100">
+                      <a:endParaRPr lang="en-US" sz="1800" kern="100" dirty="0">
                         <a:effectLst/>
                         <a:latin typeface="Aptos" panose="020B0004020202020204" pitchFamily="34" charset="0"/>
                         <a:ea typeface="DengXian" panose="02010600030101010101" pitchFamily="2" charset="-122"/>
@@ -24666,12 +25960,12 @@
                     <a:bodyPr/>
                     <a:lstStyle/>
                     <a:p>
-                      <a:pPr indent="139700">
+                      <a:pPr indent="0">
                         <a:lnSpc>
                           <a:spcPct val="115000"/>
                         </a:lnSpc>
                         <a:spcAft>
-                          <a:spcPts val="800"/>
+                          <a:spcPts val="0"/>
                         </a:spcAft>
                         <a:buNone/>
                       </a:pPr>
@@ -24742,12 +26036,12 @@
                     <a:bodyPr/>
                     <a:lstStyle/>
                     <a:p>
-                      <a:pPr>
+                      <a:pPr indent="0">
                         <a:lnSpc>
                           <a:spcPct val="115000"/>
                         </a:lnSpc>
                         <a:spcAft>
-                          <a:spcPts val="800"/>
+                          <a:spcPts val="0"/>
                         </a:spcAft>
                         <a:buNone/>
                       </a:pPr>
@@ -24818,12 +26112,12 @@
                     <a:bodyPr/>
                     <a:lstStyle/>
                     <a:p>
-                      <a:pPr indent="139700">
+                      <a:pPr indent="0">
                         <a:lnSpc>
-                          <a:spcPct val="115000"/>
+                          <a:spcPct val="100000"/>
                         </a:lnSpc>
                         <a:spcAft>
-                          <a:spcPts val="800"/>
+                          <a:spcPts val="0"/>
                         </a:spcAft>
                         <a:buNone/>
                       </a:pPr>
@@ -24837,7 +26131,7 @@
                           <a:ea typeface="Times New Roman" panose="02020603050405020304" pitchFamily="18" charset="0"/>
                           <a:cs typeface="Times New Roman" panose="02020603050405020304" pitchFamily="18" charset="0"/>
                         </a:rPr>
-                        <a:t>Correct Result?</a:t>
+                        <a:t>Correct? Unsigned/ Signed</a:t>
                       </a:r>
                       <a:endParaRPr lang="en-US" sz="1800" kern="100" dirty="0">
                         <a:effectLst/>
@@ -24846,34 +26140,153 @@
                         <a:cs typeface="Times New Roman" panose="02020603050405020304" pitchFamily="18" charset="0"/>
                       </a:endParaRPr>
                     </a:p>
+                  </a:txBody>
+                  <a:tcPr marL="68580" marR="68580" marT="0" marB="0" anchor="ctr">
+                    <a:lnL w="12700" cap="flat" cmpd="sng" algn="ctr">
+                      <a:solidFill>
+                        <a:srgbClr val="000000"/>
+                      </a:solidFill>
+                      <a:prstDash val="solid"/>
+                      <a:round/>
+                      <a:headEnd type="none" w="med" len="med"/>
+                      <a:tailEnd type="none" w="med" len="med"/>
+                    </a:lnL>
+                    <a:lnR w="12700" cap="flat" cmpd="sng" algn="ctr">
+                      <a:solidFill>
+                        <a:srgbClr val="000000"/>
+                      </a:solidFill>
+                      <a:prstDash val="solid"/>
+                      <a:round/>
+                      <a:headEnd type="none" w="med" len="med"/>
+                      <a:tailEnd type="none" w="med" len="med"/>
+                    </a:lnR>
+                    <a:lnT w="12700" cap="flat" cmpd="sng" algn="ctr">
+                      <a:solidFill>
+                        <a:srgbClr val="000000"/>
+                      </a:solidFill>
+                      <a:prstDash val="solid"/>
+                      <a:round/>
+                      <a:headEnd type="none" w="med" len="med"/>
+                      <a:tailEnd type="none" w="med" len="med"/>
+                    </a:lnT>
+                    <a:lnB w="12700" cap="flat" cmpd="sng" algn="ctr">
+                      <a:solidFill>
+                        <a:srgbClr val="000000"/>
+                      </a:solidFill>
+                      <a:prstDash val="solid"/>
+                      <a:round/>
+                      <a:headEnd type="none" w="med" len="med"/>
+                      <a:tailEnd type="none" w="med" len="med"/>
+                    </a:lnB>
+                    <a:solidFill>
+                      <a:srgbClr val="FFFFFF"/>
+                    </a:solidFill>
+                  </a:tcPr>
+                </a:tc>
+                <a:tc>
+                  <a:txBody>
+                    <a:bodyPr/>
+                    <a:lstStyle/>
                     <a:p>
-                      <a:pPr indent="139700">
+                      <a:pPr indent="0">
                         <a:lnSpc>
                           <a:spcPct val="115000"/>
                         </a:lnSpc>
                         <a:spcAft>
-                          <a:spcPts val="800"/>
+                          <a:spcPts val="0"/>
                         </a:spcAft>
                         <a:buNone/>
                       </a:pPr>
                       <a:r>
-                        <a:rPr lang="en-US" sz="1600" kern="100" dirty="0">
+                        <a:rPr kumimoji="0" lang="en-US" sz="1600" kern="100" dirty="0">
                           <a:solidFill>
                             <a:srgbClr val="000000"/>
                           </a:solidFill>
                           <a:effectLst/>
                           <a:latin typeface="Calibri" panose="020F0502020204030204" pitchFamily="34" charset="0"/>
-                          <a:ea typeface="Times New Roman" panose="02020603050405020304" pitchFamily="18" charset="0"/>
+                          <a:ea typeface="DengXian" panose="02010600030101010101" pitchFamily="2" charset="-122"/>
                           <a:cs typeface="Times New Roman" panose="02020603050405020304" pitchFamily="18" charset="0"/>
                         </a:rPr>
-                        <a:t>Unsigned/Signed</a:t>
+                        <a:t>Decimal Unsigned       (GT: Ground Truth)</a:t>
                       </a:r>
-                      <a:endParaRPr lang="en-US" sz="1800" kern="100" dirty="0">
-                        <a:effectLst/>
-                        <a:latin typeface="Aptos" panose="020B0004020202020204" pitchFamily="34" charset="0"/>
-                        <a:ea typeface="DengXian" panose="02010600030101010101" pitchFamily="2" charset="-122"/>
-                        <a:cs typeface="Times New Roman" panose="02020603050405020304" pitchFamily="18" charset="0"/>
-                      </a:endParaRPr>
+                    </a:p>
+                  </a:txBody>
+                  <a:tcPr marL="68580" marR="68580" marT="0" marB="0" anchor="ctr">
+                    <a:lnL w="12700" cap="flat" cmpd="sng" algn="ctr">
+                      <a:solidFill>
+                        <a:srgbClr val="000000"/>
+                      </a:solidFill>
+                      <a:prstDash val="solid"/>
+                      <a:round/>
+                      <a:headEnd type="none" w="med" len="med"/>
+                      <a:tailEnd type="none" w="med" len="med"/>
+                    </a:lnL>
+                    <a:lnR w="12700" cap="flat" cmpd="sng" algn="ctr">
+                      <a:solidFill>
+                        <a:srgbClr val="000000"/>
+                      </a:solidFill>
+                      <a:prstDash val="solid"/>
+                      <a:round/>
+                      <a:headEnd type="none" w="med" len="med"/>
+                      <a:tailEnd type="none" w="med" len="med"/>
+                    </a:lnR>
+                    <a:lnT w="12700" cap="flat" cmpd="sng" algn="ctr">
+                      <a:solidFill>
+                        <a:srgbClr val="000000"/>
+                      </a:solidFill>
+                      <a:prstDash val="solid"/>
+                      <a:round/>
+                      <a:headEnd type="none" w="med" len="med"/>
+                      <a:tailEnd type="none" w="med" len="med"/>
+                    </a:lnT>
+                    <a:lnB w="12700" cap="flat" cmpd="sng" algn="ctr">
+                      <a:solidFill>
+                        <a:srgbClr val="000000"/>
+                      </a:solidFill>
+                      <a:prstDash val="solid"/>
+                      <a:round/>
+                      <a:headEnd type="none" w="med" len="med"/>
+                      <a:tailEnd type="none" w="med" len="med"/>
+                    </a:lnB>
+                    <a:solidFill>
+                      <a:srgbClr val="FFFFFF"/>
+                    </a:solidFill>
+                  </a:tcPr>
+                </a:tc>
+                <a:tc>
+                  <a:txBody>
+                    <a:bodyPr/>
+                    <a:lstStyle/>
+                    <a:p>
+                      <a:pPr marL="0" marR="0" lvl="0" indent="0" algn="l" defTabSz="914400" rtl="0" eaLnBrk="1" fontAlgn="auto" latinLnBrk="0" hangingPunct="1">
+                        <a:lnSpc>
+                          <a:spcPct val="115000"/>
+                        </a:lnSpc>
+                        <a:spcBef>
+                          <a:spcPts val="0"/>
+                        </a:spcBef>
+                        <a:spcAft>
+                          <a:spcPts val="0"/>
+                        </a:spcAft>
+                        <a:buClrTx/>
+                        <a:buSzTx/>
+                        <a:buFontTx/>
+                        <a:buNone/>
+                        <a:tabLst/>
+                        <a:defRPr/>
+                      </a:pPr>
+                      <a:r>
+                        <a:rPr kumimoji="0" lang="en-US" sz="1600" kern="100" dirty="0">
+                          <a:solidFill>
+                            <a:srgbClr val="000000"/>
+                          </a:solidFill>
+                          <a:effectLst/>
+                          <a:latin typeface="Calibri" panose="020F0502020204030204" pitchFamily="34" charset="0"/>
+                          <a:ea typeface="DengXian" panose="02010600030101010101" pitchFamily="2" charset="-122"/>
+                          <a:cs typeface="Times New Roman" panose="02020603050405020304" pitchFamily="18" charset="0"/>
+                        </a:rPr>
+                        <a:t>Decimal Signed           (GT: Ground Truth)</a:t>
+                      </a:r>
                     </a:p>
                   </a:txBody>
                   <a:tcPr marL="68580" marR="68580" marT="0" marB="0" anchor="ctr">
@@ -24930,12 +26343,12 @@
                     <a:bodyPr/>
                     <a:lstStyle/>
                     <a:p>
-                      <a:pPr indent="140335">
+                      <a:pPr indent="0">
                         <a:lnSpc>
                           <a:spcPct val="115000"/>
                         </a:lnSpc>
                         <a:spcAft>
-                          <a:spcPts val="800"/>
+                          <a:spcPts val="0"/>
                         </a:spcAft>
                         <a:buNone/>
                       </a:pPr>
@@ -25006,12 +26419,12 @@
                     <a:bodyPr/>
                     <a:lstStyle/>
                     <a:p>
-                      <a:pPr indent="140335">
+                      <a:pPr indent="0">
                         <a:lnSpc>
                           <a:spcPct val="115000"/>
                         </a:lnSpc>
                         <a:spcAft>
-                          <a:spcPts val="800"/>
+                          <a:spcPts val="0"/>
                         </a:spcAft>
                         <a:buNone/>
                       </a:pPr>
@@ -25082,12 +26495,12 @@
                     <a:bodyPr/>
                     <a:lstStyle/>
                     <a:p>
-                      <a:pPr indent="140335">
+                      <a:pPr indent="0">
                         <a:lnSpc>
                           <a:spcPct val="115000"/>
                         </a:lnSpc>
                         <a:spcAft>
-                          <a:spcPts val="800"/>
+                          <a:spcPts val="0"/>
                         </a:spcAft>
                         <a:buNone/>
                       </a:pPr>
@@ -25158,12 +26571,12 @@
                     <a:bodyPr/>
                     <a:lstStyle/>
                     <a:p>
-                      <a:pPr indent="140335">
+                      <a:pPr indent="0">
                         <a:lnSpc>
                           <a:spcPct val="115000"/>
                         </a:lnSpc>
                         <a:spcAft>
-                          <a:spcPts val="800"/>
+                          <a:spcPts val="0"/>
                         </a:spcAft>
                         <a:buNone/>
                       </a:pPr>
@@ -25234,12 +26647,12 @@
                     <a:bodyPr/>
                     <a:lstStyle/>
                     <a:p>
-                      <a:pPr indent="140335">
+                      <a:pPr indent="0">
                         <a:lnSpc>
                           <a:spcPct val="115000"/>
                         </a:lnSpc>
                         <a:spcAft>
-                          <a:spcPts val="800"/>
+                          <a:spcPts val="0"/>
                         </a:spcAft>
                         <a:buNone/>
                       </a:pPr>
@@ -25305,6 +26718,146 @@
                     </a:solidFill>
                   </a:tcPr>
                 </a:tc>
+                <a:tc>
+                  <a:txBody>
+                    <a:bodyPr/>
+                    <a:lstStyle/>
+                    <a:p>
+                      <a:pPr indent="0">
+                        <a:lnSpc>
+                          <a:spcPct val="115000"/>
+                        </a:lnSpc>
+                        <a:spcAft>
+                          <a:spcPts val="0"/>
+                        </a:spcAft>
+                        <a:buNone/>
+                      </a:pPr>
+                      <a:r>
+                        <a:rPr kumimoji="0" lang="en-US" sz="1600" b="1" kern="100" dirty="0">
+                          <a:solidFill>
+                            <a:srgbClr val="FF0000"/>
+                          </a:solidFill>
+                          <a:effectLst/>
+                          <a:latin typeface="Calibri" panose="020F0502020204030204" pitchFamily="34" charset="0"/>
+                          <a:ea typeface="DengXian" panose="02010600030101010101" pitchFamily="2" charset="-122"/>
+                          <a:cs typeface="Times New Roman" panose="02020603050405020304" pitchFamily="18" charset="0"/>
+                        </a:rPr>
+                        <a:t>4 + 2 = 6</a:t>
+                      </a:r>
+                    </a:p>
+                  </a:txBody>
+                  <a:tcPr marL="68580" marR="68580" marT="0" marB="0" anchor="ctr">
+                    <a:lnL w="12700" cap="flat" cmpd="sng" algn="ctr">
+                      <a:solidFill>
+                        <a:srgbClr val="000000"/>
+                      </a:solidFill>
+                      <a:prstDash val="solid"/>
+                      <a:round/>
+                      <a:headEnd type="none" w="med" len="med"/>
+                      <a:tailEnd type="none" w="med" len="med"/>
+                    </a:lnL>
+                    <a:lnR w="12700" cap="flat" cmpd="sng" algn="ctr">
+                      <a:solidFill>
+                        <a:srgbClr val="000000"/>
+                      </a:solidFill>
+                      <a:prstDash val="solid"/>
+                      <a:round/>
+                      <a:headEnd type="none" w="med" len="med"/>
+                      <a:tailEnd type="none" w="med" len="med"/>
+                    </a:lnR>
+                    <a:lnT w="12700" cap="flat" cmpd="sng" algn="ctr">
+                      <a:solidFill>
+                        <a:srgbClr val="000000"/>
+                      </a:solidFill>
+                      <a:prstDash val="solid"/>
+                      <a:round/>
+                      <a:headEnd type="none" w="med" len="med"/>
+                      <a:tailEnd type="none" w="med" len="med"/>
+                    </a:lnT>
+                    <a:lnB w="12700" cap="flat" cmpd="sng" algn="ctr">
+                      <a:solidFill>
+                        <a:srgbClr val="000000"/>
+                      </a:solidFill>
+                      <a:prstDash val="solid"/>
+                      <a:round/>
+                      <a:headEnd type="none" w="med" len="med"/>
+                      <a:tailEnd type="none" w="med" len="med"/>
+                    </a:lnB>
+                    <a:solidFill>
+                      <a:srgbClr val="FFFFFF"/>
+                    </a:solidFill>
+                  </a:tcPr>
+                </a:tc>
+                <a:tc>
+                  <a:txBody>
+                    <a:bodyPr/>
+                    <a:lstStyle/>
+                    <a:p>
+                      <a:pPr indent="0">
+                        <a:lnSpc>
+                          <a:spcPct val="115000"/>
+                        </a:lnSpc>
+                        <a:spcAft>
+                          <a:spcPts val="0"/>
+                        </a:spcAft>
+                        <a:buNone/>
+                      </a:pPr>
+                      <a:r>
+                        <a:rPr kumimoji="0" lang="en-US" sz="1600" b="1" kern="100" dirty="0">
+                          <a:solidFill>
+                            <a:srgbClr val="FF0000"/>
+                          </a:solidFill>
+                          <a:effectLst/>
+                          <a:latin typeface="Calibri" panose="020F0502020204030204" pitchFamily="34" charset="0"/>
+                          <a:ea typeface="DengXian" panose="02010600030101010101" pitchFamily="2" charset="-122"/>
+                          <a:cs typeface="Times New Roman" panose="02020603050405020304" pitchFamily="18" charset="0"/>
+                        </a:rPr>
+                        <a:t>4 + 2 = 6</a:t>
+                      </a:r>
+                    </a:p>
+                  </a:txBody>
+                  <a:tcPr marL="68580" marR="68580" marT="0" marB="0" anchor="ctr">
+                    <a:lnL w="12700" cap="flat" cmpd="sng" algn="ctr">
+                      <a:solidFill>
+                        <a:srgbClr val="000000"/>
+                      </a:solidFill>
+                      <a:prstDash val="solid"/>
+                      <a:round/>
+                      <a:headEnd type="none" w="med" len="med"/>
+                      <a:tailEnd type="none" w="med" len="med"/>
+                    </a:lnL>
+                    <a:lnR w="12700" cap="flat" cmpd="sng" algn="ctr">
+                      <a:solidFill>
+                        <a:srgbClr val="000000"/>
+                      </a:solidFill>
+                      <a:prstDash val="solid"/>
+                      <a:round/>
+                      <a:headEnd type="none" w="med" len="med"/>
+                      <a:tailEnd type="none" w="med" len="med"/>
+                    </a:lnR>
+                    <a:lnT w="12700" cap="flat" cmpd="sng" algn="ctr">
+                      <a:solidFill>
+                        <a:srgbClr val="000000"/>
+                      </a:solidFill>
+                      <a:prstDash val="solid"/>
+                      <a:round/>
+                      <a:headEnd type="none" w="med" len="med"/>
+                      <a:tailEnd type="none" w="med" len="med"/>
+                    </a:lnT>
+                    <a:lnB w="12700" cap="flat" cmpd="sng" algn="ctr">
+                      <a:solidFill>
+                        <a:srgbClr val="000000"/>
+                      </a:solidFill>
+                      <a:prstDash val="solid"/>
+                      <a:round/>
+                      <a:headEnd type="none" w="med" len="med"/>
+                      <a:tailEnd type="none" w="med" len="med"/>
+                    </a:lnB>
+                    <a:solidFill>
+                      <a:srgbClr val="FFFFFF"/>
+                    </a:solidFill>
+                  </a:tcPr>
+                </a:tc>
                 <a:extLst>
                   <a:ext uri="{0D108BD9-81ED-4DB2-BD59-A6C34878D82A}">
                     <a16:rowId xmlns:a16="http://schemas.microsoft.com/office/drawing/2014/main" val="3994890508"/>
@@ -25317,12 +26870,12 @@
                     <a:bodyPr/>
                     <a:lstStyle/>
                     <a:p>
-                      <a:pPr indent="140335">
+                      <a:pPr indent="0">
                         <a:lnSpc>
                           <a:spcPct val="115000"/>
                         </a:lnSpc>
                         <a:spcAft>
-                          <a:spcPts val="800"/>
+                          <a:spcPts val="0"/>
                         </a:spcAft>
                         <a:buNone/>
                       </a:pPr>
@@ -25393,12 +26946,12 @@
                     <a:bodyPr/>
                     <a:lstStyle/>
                     <a:p>
-                      <a:pPr indent="140335">
+                      <a:pPr indent="0">
                         <a:lnSpc>
                           <a:spcPct val="115000"/>
                         </a:lnSpc>
                         <a:spcAft>
-                          <a:spcPts val="800"/>
+                          <a:spcPts val="0"/>
                         </a:spcAft>
                         <a:buNone/>
                       </a:pPr>
@@ -25469,12 +27022,12 @@
                     <a:bodyPr/>
                     <a:lstStyle/>
                     <a:p>
-                      <a:pPr indent="140335">
+                      <a:pPr indent="0">
                         <a:lnSpc>
                           <a:spcPct val="115000"/>
                         </a:lnSpc>
                         <a:spcAft>
-                          <a:spcPts val="800"/>
+                          <a:spcPts val="0"/>
                         </a:spcAft>
                         <a:buNone/>
                       </a:pPr>
@@ -25545,12 +27098,12 @@
                     <a:bodyPr/>
                     <a:lstStyle/>
                     <a:p>
-                      <a:pPr indent="140335">
+                      <a:pPr indent="0">
                         <a:lnSpc>
                           <a:spcPct val="115000"/>
                         </a:lnSpc>
                         <a:spcAft>
-                          <a:spcPts val="800"/>
+                          <a:spcPts val="0"/>
                         </a:spcAft>
                         <a:buNone/>
                       </a:pPr>
@@ -25621,12 +27174,12 @@
                     <a:bodyPr/>
                     <a:lstStyle/>
                     <a:p>
-                      <a:pPr indent="140335">
+                      <a:pPr indent="0">
                         <a:lnSpc>
                           <a:spcPct val="115000"/>
                         </a:lnSpc>
                         <a:spcAft>
-                          <a:spcPts val="800"/>
+                          <a:spcPts val="0"/>
                         </a:spcAft>
                         <a:buNone/>
                       </a:pPr>
@@ -25692,6 +27245,146 @@
                     </a:solidFill>
                   </a:tcPr>
                 </a:tc>
+                <a:tc>
+                  <a:txBody>
+                    <a:bodyPr/>
+                    <a:lstStyle/>
+                    <a:p>
+                      <a:pPr indent="0">
+                        <a:lnSpc>
+                          <a:spcPct val="115000"/>
+                        </a:lnSpc>
+                        <a:spcAft>
+                          <a:spcPts val="0"/>
+                        </a:spcAft>
+                        <a:buNone/>
+                      </a:pPr>
+                      <a:r>
+                        <a:rPr kumimoji="0" lang="en-US" sz="1600" b="1" kern="100" dirty="0">
+                          <a:solidFill>
+                            <a:srgbClr val="FF0000"/>
+                          </a:solidFill>
+                          <a:effectLst/>
+                          <a:latin typeface="Calibri" panose="020F0502020204030204" pitchFamily="34" charset="0"/>
+                          <a:ea typeface="DengXian" panose="02010600030101010101" pitchFamily="2" charset="-122"/>
+                          <a:cs typeface="Times New Roman" panose="02020603050405020304" pitchFamily="18" charset="0"/>
+                        </a:rPr>
+                        <a:t>4 + 6 = 10</a:t>
+                      </a:r>
+                    </a:p>
+                  </a:txBody>
+                  <a:tcPr marL="68580" marR="68580" marT="0" marB="0" anchor="ctr">
+                    <a:lnL w="12700" cap="flat" cmpd="sng" algn="ctr">
+                      <a:solidFill>
+                        <a:srgbClr val="000000"/>
+                      </a:solidFill>
+                      <a:prstDash val="solid"/>
+                      <a:round/>
+                      <a:headEnd type="none" w="med" len="med"/>
+                      <a:tailEnd type="none" w="med" len="med"/>
+                    </a:lnL>
+                    <a:lnR w="12700" cap="flat" cmpd="sng" algn="ctr">
+                      <a:solidFill>
+                        <a:srgbClr val="000000"/>
+                      </a:solidFill>
+                      <a:prstDash val="solid"/>
+                      <a:round/>
+                      <a:headEnd type="none" w="med" len="med"/>
+                      <a:tailEnd type="none" w="med" len="med"/>
+                    </a:lnR>
+                    <a:lnT w="12700" cap="flat" cmpd="sng" algn="ctr">
+                      <a:solidFill>
+                        <a:srgbClr val="000000"/>
+                      </a:solidFill>
+                      <a:prstDash val="solid"/>
+                      <a:round/>
+                      <a:headEnd type="none" w="med" len="med"/>
+                      <a:tailEnd type="none" w="med" len="med"/>
+                    </a:lnT>
+                    <a:lnB w="12700" cap="flat" cmpd="sng" algn="ctr">
+                      <a:solidFill>
+                        <a:srgbClr val="000000"/>
+                      </a:solidFill>
+                      <a:prstDash val="solid"/>
+                      <a:round/>
+                      <a:headEnd type="none" w="med" len="med"/>
+                      <a:tailEnd type="none" w="med" len="med"/>
+                    </a:lnB>
+                    <a:solidFill>
+                      <a:srgbClr val="FFFFFF"/>
+                    </a:solidFill>
+                  </a:tcPr>
+                </a:tc>
+                <a:tc>
+                  <a:txBody>
+                    <a:bodyPr/>
+                    <a:lstStyle/>
+                    <a:p>
+                      <a:pPr indent="0">
+                        <a:lnSpc>
+                          <a:spcPct val="115000"/>
+                        </a:lnSpc>
+                        <a:spcAft>
+                          <a:spcPts val="0"/>
+                        </a:spcAft>
+                        <a:buNone/>
+                      </a:pPr>
+                      <a:r>
+                        <a:rPr kumimoji="0" lang="en-US" sz="1600" b="1" kern="100" dirty="0">
+                          <a:solidFill>
+                            <a:srgbClr val="FF0000"/>
+                          </a:solidFill>
+                          <a:effectLst/>
+                          <a:latin typeface="Calibri" panose="020F0502020204030204" pitchFamily="34" charset="0"/>
+                          <a:ea typeface="DengXian" panose="02010600030101010101" pitchFamily="2" charset="-122"/>
+                          <a:cs typeface="Times New Roman" panose="02020603050405020304" pitchFamily="18" charset="0"/>
+                        </a:rPr>
+                        <a:t>4 + 6 = -6 (GT 10)</a:t>
+                      </a:r>
+                    </a:p>
+                  </a:txBody>
+                  <a:tcPr marL="68580" marR="68580" marT="0" marB="0" anchor="ctr">
+                    <a:lnL w="12700" cap="flat" cmpd="sng" algn="ctr">
+                      <a:solidFill>
+                        <a:srgbClr val="000000"/>
+                      </a:solidFill>
+                      <a:prstDash val="solid"/>
+                      <a:round/>
+                      <a:headEnd type="none" w="med" len="med"/>
+                      <a:tailEnd type="none" w="med" len="med"/>
+                    </a:lnL>
+                    <a:lnR w="12700" cap="flat" cmpd="sng" algn="ctr">
+                      <a:solidFill>
+                        <a:srgbClr val="000000"/>
+                      </a:solidFill>
+                      <a:prstDash val="solid"/>
+                      <a:round/>
+                      <a:headEnd type="none" w="med" len="med"/>
+                      <a:tailEnd type="none" w="med" len="med"/>
+                    </a:lnR>
+                    <a:lnT w="12700" cap="flat" cmpd="sng" algn="ctr">
+                      <a:solidFill>
+                        <a:srgbClr val="000000"/>
+                      </a:solidFill>
+                      <a:prstDash val="solid"/>
+                      <a:round/>
+                      <a:headEnd type="none" w="med" len="med"/>
+                      <a:tailEnd type="none" w="med" len="med"/>
+                    </a:lnT>
+                    <a:lnB w="12700" cap="flat" cmpd="sng" algn="ctr">
+                      <a:solidFill>
+                        <a:srgbClr val="000000"/>
+                      </a:solidFill>
+                      <a:prstDash val="solid"/>
+                      <a:round/>
+                      <a:headEnd type="none" w="med" len="med"/>
+                      <a:tailEnd type="none" w="med" len="med"/>
+                    </a:lnB>
+                    <a:solidFill>
+                      <a:srgbClr val="FFFFFF"/>
+                    </a:solidFill>
+                  </a:tcPr>
+                </a:tc>
                 <a:extLst>
                   <a:ext uri="{0D108BD9-81ED-4DB2-BD59-A6C34878D82A}">
                     <a16:rowId xmlns:a16="http://schemas.microsoft.com/office/drawing/2014/main" val="4189663783"/>
@@ -25704,12 +27397,12 @@
                     <a:bodyPr/>
                     <a:lstStyle/>
                     <a:p>
-                      <a:pPr indent="140335">
+                      <a:pPr indent="0">
                         <a:lnSpc>
                           <a:spcPct val="115000"/>
                         </a:lnSpc>
                         <a:spcAft>
-                          <a:spcPts val="800"/>
+                          <a:spcPts val="0"/>
                         </a:spcAft>
                         <a:buNone/>
                       </a:pPr>
@@ -25780,12 +27473,12 @@
                     <a:bodyPr/>
                     <a:lstStyle/>
                     <a:p>
-                      <a:pPr indent="140335">
+                      <a:pPr indent="0">
                         <a:lnSpc>
                           <a:spcPct val="115000"/>
                         </a:lnSpc>
                         <a:spcAft>
-                          <a:spcPts val="800"/>
+                          <a:spcPts val="0"/>
                         </a:spcAft>
                         <a:buNone/>
                       </a:pPr>
@@ -25856,12 +27549,12 @@
                     <a:bodyPr/>
                     <a:lstStyle/>
                     <a:p>
-                      <a:pPr indent="140335">
+                      <a:pPr indent="0">
                         <a:lnSpc>
                           <a:spcPct val="115000"/>
                         </a:lnSpc>
                         <a:spcAft>
-                          <a:spcPts val="800"/>
+                          <a:spcPts val="0"/>
                         </a:spcAft>
                         <a:buNone/>
                       </a:pPr>
@@ -25932,12 +27625,1066 @@
                     <a:bodyPr/>
                     <a:lstStyle/>
                     <a:p>
-                      <a:pPr indent="140335">
+                      <a:pPr indent="0">
                         <a:lnSpc>
                           <a:spcPct val="115000"/>
                         </a:lnSpc>
                         <a:spcAft>
-                          <a:spcPts val="800"/>
+                          <a:spcPts val="0"/>
+                        </a:spcAft>
+                        <a:buNone/>
+                      </a:pPr>
+                      <a:r>
+                        <a:rPr lang="en-US" sz="1600" b="1" kern="100" dirty="0">
+                          <a:solidFill>
+                            <a:srgbClr val="FF0000"/>
+                          </a:solidFill>
+                          <a:effectLst/>
+                          <a:latin typeface="Calibri" panose="020F0502020204030204" pitchFamily="34" charset="0"/>
+                          <a:ea typeface="Times New Roman" panose="02020603050405020304" pitchFamily="18" charset="0"/>
+                          <a:cs typeface="Times New Roman" panose="02020603050405020304" pitchFamily="18" charset="0"/>
+                        </a:rPr>
+                        <a:t>0</a:t>
+                      </a:r>
+                      <a:endParaRPr lang="en-US" sz="1800" kern="100" dirty="0">
+                        <a:effectLst/>
+                        <a:latin typeface="Aptos" panose="020B0004020202020204" pitchFamily="34" charset="0"/>
+                        <a:ea typeface="DengXian" panose="02010600030101010101" pitchFamily="2" charset="-122"/>
+                        <a:cs typeface="Times New Roman" panose="02020603050405020304" pitchFamily="18" charset="0"/>
+                      </a:endParaRPr>
+                    </a:p>
+                  </a:txBody>
+                  <a:tcPr marL="68580" marR="68580" marT="0" marB="0" anchor="ctr">
+                    <a:lnL w="12700" cap="flat" cmpd="sng" algn="ctr">
+                      <a:solidFill>
+                        <a:srgbClr val="000000"/>
+                      </a:solidFill>
+                      <a:prstDash val="solid"/>
+                      <a:round/>
+                      <a:headEnd type="none" w="med" len="med"/>
+                      <a:tailEnd type="none" w="med" len="med"/>
+                    </a:lnL>
+                    <a:lnR w="12700" cap="flat" cmpd="sng" algn="ctr">
+                      <a:solidFill>
+                        <a:srgbClr val="000000"/>
+                      </a:solidFill>
+                      <a:prstDash val="solid"/>
+                      <a:round/>
+                      <a:headEnd type="none" w="med" len="med"/>
+                      <a:tailEnd type="none" w="med" len="med"/>
+                    </a:lnR>
+                    <a:lnT w="12700" cap="flat" cmpd="sng" algn="ctr">
+                      <a:solidFill>
+                        <a:srgbClr val="000000"/>
+                      </a:solidFill>
+                      <a:prstDash val="solid"/>
+                      <a:round/>
+                      <a:headEnd type="none" w="med" len="med"/>
+                      <a:tailEnd type="none" w="med" len="med"/>
+                    </a:lnT>
+                    <a:lnB w="12700" cap="flat" cmpd="sng" algn="ctr">
+                      <a:solidFill>
+                        <a:srgbClr val="000000"/>
+                      </a:solidFill>
+                      <a:prstDash val="solid"/>
+                      <a:round/>
+                      <a:headEnd type="none" w="med" len="med"/>
+                      <a:tailEnd type="none" w="med" len="med"/>
+                    </a:lnB>
+                    <a:solidFill>
+                      <a:srgbClr val="FFFFFF"/>
+                    </a:solidFill>
+                  </a:tcPr>
+                </a:tc>
+                <a:tc>
+                  <a:txBody>
+                    <a:bodyPr/>
+                    <a:lstStyle/>
+                    <a:p>
+                      <a:pPr indent="0">
+                        <a:lnSpc>
+                          <a:spcPct val="115000"/>
+                        </a:lnSpc>
+                        <a:spcAft>
+                          <a:spcPts val="0"/>
+                        </a:spcAft>
+                        <a:buNone/>
+                      </a:pPr>
+                      <a:r>
+                        <a:rPr lang="en-US" sz="1600" b="1" kern="100" dirty="0">
+                          <a:solidFill>
+                            <a:srgbClr val="FF0000"/>
+                          </a:solidFill>
+                          <a:effectLst/>
+                          <a:latin typeface="Calibri" panose="020F0502020204030204" pitchFamily="34" charset="0"/>
+                          <a:ea typeface="Times New Roman" panose="02020603050405020304" pitchFamily="18" charset="0"/>
+                          <a:cs typeface="Times New Roman" panose="02020603050405020304" pitchFamily="18" charset="0"/>
+                        </a:rPr>
+                        <a:t>N / Y</a:t>
+                      </a:r>
+                      <a:endParaRPr lang="en-US" sz="1800" kern="100" dirty="0">
+                        <a:effectLst/>
+                        <a:latin typeface="Aptos" panose="020B0004020202020204" pitchFamily="34" charset="0"/>
+                        <a:ea typeface="DengXian" panose="02010600030101010101" pitchFamily="2" charset="-122"/>
+                        <a:cs typeface="Times New Roman" panose="02020603050405020304" pitchFamily="18" charset="0"/>
+                      </a:endParaRPr>
+                    </a:p>
+                  </a:txBody>
+                  <a:tcPr marL="68580" marR="68580" marT="0" marB="0" anchor="ctr">
+                    <a:lnL w="12700" cap="flat" cmpd="sng" algn="ctr">
+                      <a:solidFill>
+                        <a:srgbClr val="000000"/>
+                      </a:solidFill>
+                      <a:prstDash val="solid"/>
+                      <a:round/>
+                      <a:headEnd type="none" w="med" len="med"/>
+                      <a:tailEnd type="none" w="med" len="med"/>
+                    </a:lnL>
+                    <a:lnR w="12700" cap="flat" cmpd="sng" algn="ctr">
+                      <a:solidFill>
+                        <a:srgbClr val="000000"/>
+                      </a:solidFill>
+                      <a:prstDash val="solid"/>
+                      <a:round/>
+                      <a:headEnd type="none" w="med" len="med"/>
+                      <a:tailEnd type="none" w="med" len="med"/>
+                    </a:lnR>
+                    <a:lnT w="12700" cap="flat" cmpd="sng" algn="ctr">
+                      <a:solidFill>
+                        <a:srgbClr val="000000"/>
+                      </a:solidFill>
+                      <a:prstDash val="solid"/>
+                      <a:round/>
+                      <a:headEnd type="none" w="med" len="med"/>
+                      <a:tailEnd type="none" w="med" len="med"/>
+                    </a:lnT>
+                    <a:lnB w="12700" cap="flat" cmpd="sng" algn="ctr">
+                      <a:solidFill>
+                        <a:srgbClr val="000000"/>
+                      </a:solidFill>
+                      <a:prstDash val="solid"/>
+                      <a:round/>
+                      <a:headEnd type="none" w="med" len="med"/>
+                      <a:tailEnd type="none" w="med" len="med"/>
+                    </a:lnB>
+                    <a:solidFill>
+                      <a:srgbClr val="FFFFFF"/>
+                    </a:solidFill>
+                  </a:tcPr>
+                </a:tc>
+                <a:tc>
+                  <a:txBody>
+                    <a:bodyPr/>
+                    <a:lstStyle/>
+                    <a:p>
+                      <a:pPr marL="0" indent="0" algn="l" rtl="0" eaLnBrk="1" latinLnBrk="0" hangingPunct="1">
+                        <a:lnSpc>
+                          <a:spcPct val="115000"/>
+                        </a:lnSpc>
+                        <a:spcAft>
+                          <a:spcPts val="0"/>
+                        </a:spcAft>
+                        <a:buNone/>
+                      </a:pPr>
+                      <a:r>
+                        <a:rPr kumimoji="0" lang="en-US" sz="1600" b="1" kern="100" dirty="0">
+                          <a:solidFill>
+                            <a:srgbClr val="FF0000"/>
+                          </a:solidFill>
+                          <a:effectLst/>
+                          <a:latin typeface="Calibri" panose="020F0502020204030204" pitchFamily="34" charset="0"/>
+                          <a:ea typeface="DengXian" panose="02010600030101010101" pitchFamily="2" charset="-122"/>
+                          <a:cs typeface="Times New Roman" panose="02020603050405020304" pitchFamily="18" charset="0"/>
+                        </a:rPr>
+                        <a:t>12 + 14 = 10 (GT 26)</a:t>
+                      </a:r>
+                    </a:p>
+                  </a:txBody>
+                  <a:tcPr marL="68580" marR="68580" marT="0" marB="0" anchor="ctr">
+                    <a:lnL w="12700" cap="flat" cmpd="sng" algn="ctr">
+                      <a:solidFill>
+                        <a:srgbClr val="000000"/>
+                      </a:solidFill>
+                      <a:prstDash val="solid"/>
+                      <a:round/>
+                      <a:headEnd type="none" w="med" len="med"/>
+                      <a:tailEnd type="none" w="med" len="med"/>
+                    </a:lnL>
+                    <a:lnR w="12700" cap="flat" cmpd="sng" algn="ctr">
+                      <a:solidFill>
+                        <a:srgbClr val="000000"/>
+                      </a:solidFill>
+                      <a:prstDash val="solid"/>
+                      <a:round/>
+                      <a:headEnd type="none" w="med" len="med"/>
+                      <a:tailEnd type="none" w="med" len="med"/>
+                    </a:lnR>
+                    <a:lnT w="12700" cap="flat" cmpd="sng" algn="ctr">
+                      <a:solidFill>
+                        <a:srgbClr val="000000"/>
+                      </a:solidFill>
+                      <a:prstDash val="solid"/>
+                      <a:round/>
+                      <a:headEnd type="none" w="med" len="med"/>
+                      <a:tailEnd type="none" w="med" len="med"/>
+                    </a:lnT>
+                    <a:lnB w="12700" cap="flat" cmpd="sng" algn="ctr">
+                      <a:solidFill>
+                        <a:srgbClr val="000000"/>
+                      </a:solidFill>
+                      <a:prstDash val="solid"/>
+                      <a:round/>
+                      <a:headEnd type="none" w="med" len="med"/>
+                      <a:tailEnd type="none" w="med" len="med"/>
+                    </a:lnB>
+                    <a:solidFill>
+                      <a:srgbClr val="FFFFFF"/>
+                    </a:solidFill>
+                  </a:tcPr>
+                </a:tc>
+                <a:tc>
+                  <a:txBody>
+                    <a:bodyPr/>
+                    <a:lstStyle/>
+                    <a:p>
+                      <a:pPr marL="0" indent="0" algn="l" rtl="0" eaLnBrk="1" latinLnBrk="0" hangingPunct="1">
+                        <a:lnSpc>
+                          <a:spcPct val="115000"/>
+                        </a:lnSpc>
+                        <a:spcAft>
+                          <a:spcPts val="0"/>
+                        </a:spcAft>
+                        <a:buNone/>
+                      </a:pPr>
+                      <a:r>
+                        <a:rPr kumimoji="0" lang="en-US" sz="1600" b="1" kern="100" dirty="0">
+                          <a:solidFill>
+                            <a:srgbClr val="FF0000"/>
+                          </a:solidFill>
+                          <a:effectLst/>
+                          <a:latin typeface="Calibri" panose="020F0502020204030204" pitchFamily="34" charset="0"/>
+                          <a:ea typeface="DengXian" panose="02010600030101010101" pitchFamily="2" charset="-122"/>
+                          <a:cs typeface="Times New Roman" panose="02020603050405020304" pitchFamily="18" charset="0"/>
+                        </a:rPr>
+                        <a:t>-4 + (– 2) = -6</a:t>
+                      </a:r>
+                    </a:p>
+                  </a:txBody>
+                  <a:tcPr marL="68580" marR="68580" marT="0" marB="0" anchor="ctr">
+                    <a:lnL w="12700" cap="flat" cmpd="sng" algn="ctr">
+                      <a:solidFill>
+                        <a:srgbClr val="000000"/>
+                      </a:solidFill>
+                      <a:prstDash val="solid"/>
+                      <a:round/>
+                      <a:headEnd type="none" w="med" len="med"/>
+                      <a:tailEnd type="none" w="med" len="med"/>
+                    </a:lnL>
+                    <a:lnR w="12700" cap="flat" cmpd="sng" algn="ctr">
+                      <a:solidFill>
+                        <a:srgbClr val="000000"/>
+                      </a:solidFill>
+                      <a:prstDash val="solid"/>
+                      <a:round/>
+                      <a:headEnd type="none" w="med" len="med"/>
+                      <a:tailEnd type="none" w="med" len="med"/>
+                    </a:lnR>
+                    <a:lnT w="12700" cap="flat" cmpd="sng" algn="ctr">
+                      <a:solidFill>
+                        <a:srgbClr val="000000"/>
+                      </a:solidFill>
+                      <a:prstDash val="solid"/>
+                      <a:round/>
+                      <a:headEnd type="none" w="med" len="med"/>
+                      <a:tailEnd type="none" w="med" len="med"/>
+                    </a:lnT>
+                    <a:lnB w="12700" cap="flat" cmpd="sng" algn="ctr">
+                      <a:solidFill>
+                        <a:srgbClr val="000000"/>
+                      </a:solidFill>
+                      <a:prstDash val="solid"/>
+                      <a:round/>
+                      <a:headEnd type="none" w="med" len="med"/>
+                      <a:tailEnd type="none" w="med" len="med"/>
+                    </a:lnB>
+                    <a:solidFill>
+                      <a:srgbClr val="FFFFFF"/>
+                    </a:solidFill>
+                  </a:tcPr>
+                </a:tc>
+                <a:extLst>
+                  <a:ext uri="{0D108BD9-81ED-4DB2-BD59-A6C34878D82A}">
+                    <a16:rowId xmlns:a16="http://schemas.microsoft.com/office/drawing/2014/main" val="4096703682"/>
+                  </a:ext>
+                </a:extLst>
+              </a:tr>
+              <a:tr h="0">
+                <a:tc>
+                  <a:txBody>
+                    <a:bodyPr/>
+                    <a:lstStyle/>
+                    <a:p>
+                      <a:pPr indent="0">
+                        <a:lnSpc>
+                          <a:spcPct val="115000"/>
+                        </a:lnSpc>
+                        <a:spcAft>
+                          <a:spcPts val="0"/>
+                        </a:spcAft>
+                        <a:buNone/>
+                      </a:pPr>
+                      <a:r>
+                        <a:rPr lang="en-US" sz="1600" b="1" kern="100">
+                          <a:solidFill>
+                            <a:srgbClr val="000000"/>
+                          </a:solidFill>
+                          <a:effectLst/>
+                          <a:latin typeface="Consolas" panose="020B0609020204030204" pitchFamily="49" charset="0"/>
+                          <a:ea typeface="Times New Roman" panose="02020603050405020304" pitchFamily="18" charset="0"/>
+                          <a:cs typeface="Consolas" panose="020B0609020204030204" pitchFamily="49" charset="0"/>
+                        </a:rPr>
+                        <a:t>1100 + 1010</a:t>
+                      </a:r>
+                      <a:endParaRPr lang="en-US" sz="1800" kern="100">
+                        <a:effectLst/>
+                        <a:latin typeface="Aptos" panose="020B0004020202020204" pitchFamily="34" charset="0"/>
+                        <a:ea typeface="DengXian" panose="02010600030101010101" pitchFamily="2" charset="-122"/>
+                        <a:cs typeface="Times New Roman" panose="02020603050405020304" pitchFamily="18" charset="0"/>
+                      </a:endParaRPr>
+                    </a:p>
+                  </a:txBody>
+                  <a:tcPr marL="68580" marR="68580" marT="0" marB="0" anchor="ctr">
+                    <a:lnL w="12700" cap="flat" cmpd="sng" algn="ctr">
+                      <a:solidFill>
+                        <a:srgbClr val="000000"/>
+                      </a:solidFill>
+                      <a:prstDash val="solid"/>
+                      <a:round/>
+                      <a:headEnd type="none" w="med" len="med"/>
+                      <a:tailEnd type="none" w="med" len="med"/>
+                    </a:lnL>
+                    <a:lnR w="12700" cap="flat" cmpd="sng" algn="ctr">
+                      <a:solidFill>
+                        <a:srgbClr val="000000"/>
+                      </a:solidFill>
+                      <a:prstDash val="solid"/>
+                      <a:round/>
+                      <a:headEnd type="none" w="med" len="med"/>
+                      <a:tailEnd type="none" w="med" len="med"/>
+                    </a:lnR>
+                    <a:lnT w="12700" cap="flat" cmpd="sng" algn="ctr">
+                      <a:solidFill>
+                        <a:srgbClr val="000000"/>
+                      </a:solidFill>
+                      <a:prstDash val="solid"/>
+                      <a:round/>
+                      <a:headEnd type="none" w="med" len="med"/>
+                      <a:tailEnd type="none" w="med" len="med"/>
+                    </a:lnT>
+                    <a:lnB w="12700" cap="flat" cmpd="sng" algn="ctr">
+                      <a:solidFill>
+                        <a:srgbClr val="000000"/>
+                      </a:solidFill>
+                      <a:prstDash val="solid"/>
+                      <a:round/>
+                      <a:headEnd type="none" w="med" len="med"/>
+                      <a:tailEnd type="none" w="med" len="med"/>
+                    </a:lnB>
+                    <a:solidFill>
+                      <a:srgbClr val="FFFFFF"/>
+                    </a:solidFill>
+                  </a:tcPr>
+                </a:tc>
+                <a:tc>
+                  <a:txBody>
+                    <a:bodyPr/>
+                    <a:lstStyle/>
+                    <a:p>
+                      <a:pPr indent="0">
+                        <a:lnSpc>
+                          <a:spcPct val="115000"/>
+                        </a:lnSpc>
+                        <a:spcAft>
+                          <a:spcPts val="0"/>
+                        </a:spcAft>
+                        <a:buNone/>
+                      </a:pPr>
+                      <a:r>
+                        <a:rPr lang="en-US" sz="1600" b="1" kern="100">
+                          <a:solidFill>
+                            <a:srgbClr val="000000"/>
+                          </a:solidFill>
+                          <a:effectLst/>
+                          <a:latin typeface="Consolas" panose="020B0609020204030204" pitchFamily="49" charset="0"/>
+                          <a:ea typeface="Times New Roman" panose="02020603050405020304" pitchFamily="18" charset="0"/>
+                          <a:cs typeface="Consolas" panose="020B0609020204030204" pitchFamily="49" charset="0"/>
+                        </a:rPr>
+                        <a:t>0110</a:t>
+                      </a:r>
+                      <a:endParaRPr lang="en-US" sz="1800" kern="100">
+                        <a:effectLst/>
+                        <a:latin typeface="Aptos" panose="020B0004020202020204" pitchFamily="34" charset="0"/>
+                        <a:ea typeface="DengXian" panose="02010600030101010101" pitchFamily="2" charset="-122"/>
+                        <a:cs typeface="Times New Roman" panose="02020603050405020304" pitchFamily="18" charset="0"/>
+                      </a:endParaRPr>
+                    </a:p>
+                  </a:txBody>
+                  <a:tcPr marL="68580" marR="68580" marT="0" marB="0" anchor="ctr">
+                    <a:lnL w="12700" cap="flat" cmpd="sng" algn="ctr">
+                      <a:solidFill>
+                        <a:srgbClr val="000000"/>
+                      </a:solidFill>
+                      <a:prstDash val="solid"/>
+                      <a:round/>
+                      <a:headEnd type="none" w="med" len="med"/>
+                      <a:tailEnd type="none" w="med" len="med"/>
+                    </a:lnL>
+                    <a:lnR w="12700" cap="flat" cmpd="sng" algn="ctr">
+                      <a:solidFill>
+                        <a:srgbClr val="000000"/>
+                      </a:solidFill>
+                      <a:prstDash val="solid"/>
+                      <a:round/>
+                      <a:headEnd type="none" w="med" len="med"/>
+                      <a:tailEnd type="none" w="med" len="med"/>
+                    </a:lnR>
+                    <a:lnT w="12700" cap="flat" cmpd="sng" algn="ctr">
+                      <a:solidFill>
+                        <a:srgbClr val="000000"/>
+                      </a:solidFill>
+                      <a:prstDash val="solid"/>
+                      <a:round/>
+                      <a:headEnd type="none" w="med" len="med"/>
+                      <a:tailEnd type="none" w="med" len="med"/>
+                    </a:lnT>
+                    <a:lnB w="12700" cap="flat" cmpd="sng" algn="ctr">
+                      <a:solidFill>
+                        <a:srgbClr val="000000"/>
+                      </a:solidFill>
+                      <a:prstDash val="solid"/>
+                      <a:round/>
+                      <a:headEnd type="none" w="med" len="med"/>
+                      <a:tailEnd type="none" w="med" len="med"/>
+                    </a:lnB>
+                    <a:solidFill>
+                      <a:srgbClr val="FFFFFF"/>
+                    </a:solidFill>
+                  </a:tcPr>
+                </a:tc>
+                <a:tc>
+                  <a:txBody>
+                    <a:bodyPr/>
+                    <a:lstStyle/>
+                    <a:p>
+                      <a:pPr indent="0">
+                        <a:lnSpc>
+                          <a:spcPct val="115000"/>
+                        </a:lnSpc>
+                        <a:spcAft>
+                          <a:spcPts val="0"/>
+                        </a:spcAft>
+                        <a:buNone/>
+                      </a:pPr>
+                      <a:r>
+                        <a:rPr lang="en-US" sz="1600" b="1" kern="100">
+                          <a:solidFill>
+                            <a:srgbClr val="FF0000"/>
+                          </a:solidFill>
+                          <a:effectLst/>
+                          <a:latin typeface="Calibri" panose="020F0502020204030204" pitchFamily="34" charset="0"/>
+                          <a:ea typeface="Times New Roman" panose="02020603050405020304" pitchFamily="18" charset="0"/>
+                          <a:cs typeface="Times New Roman" panose="02020603050405020304" pitchFamily="18" charset="0"/>
+                        </a:rPr>
+                        <a:t>1</a:t>
+                      </a:r>
+                      <a:endParaRPr lang="en-US" sz="1800" kern="100">
+                        <a:effectLst/>
+                        <a:latin typeface="Aptos" panose="020B0004020202020204" pitchFamily="34" charset="0"/>
+                        <a:ea typeface="DengXian" panose="02010600030101010101" pitchFamily="2" charset="-122"/>
+                        <a:cs typeface="Times New Roman" panose="02020603050405020304" pitchFamily="18" charset="0"/>
+                      </a:endParaRPr>
+                    </a:p>
+                  </a:txBody>
+                  <a:tcPr marL="68580" marR="68580" marT="0" marB="0" anchor="ctr">
+                    <a:lnL w="12700" cap="flat" cmpd="sng" algn="ctr">
+                      <a:solidFill>
+                        <a:srgbClr val="000000"/>
+                      </a:solidFill>
+                      <a:prstDash val="solid"/>
+                      <a:round/>
+                      <a:headEnd type="none" w="med" len="med"/>
+                      <a:tailEnd type="none" w="med" len="med"/>
+                    </a:lnL>
+                    <a:lnR w="12700" cap="flat" cmpd="sng" algn="ctr">
+                      <a:solidFill>
+                        <a:srgbClr val="000000"/>
+                      </a:solidFill>
+                      <a:prstDash val="solid"/>
+                      <a:round/>
+                      <a:headEnd type="none" w="med" len="med"/>
+                      <a:tailEnd type="none" w="med" len="med"/>
+                    </a:lnR>
+                    <a:lnT w="12700" cap="flat" cmpd="sng" algn="ctr">
+                      <a:solidFill>
+                        <a:srgbClr val="000000"/>
+                      </a:solidFill>
+                      <a:prstDash val="solid"/>
+                      <a:round/>
+                      <a:headEnd type="none" w="med" len="med"/>
+                      <a:tailEnd type="none" w="med" len="med"/>
+                    </a:lnT>
+                    <a:lnB w="12700" cap="flat" cmpd="sng" algn="ctr">
+                      <a:solidFill>
+                        <a:srgbClr val="000000"/>
+                      </a:solidFill>
+                      <a:prstDash val="solid"/>
+                      <a:round/>
+                      <a:headEnd type="none" w="med" len="med"/>
+                      <a:tailEnd type="none" w="med" len="med"/>
+                    </a:lnB>
+                    <a:solidFill>
+                      <a:srgbClr val="FFFFFF"/>
+                    </a:solidFill>
+                  </a:tcPr>
+                </a:tc>
+                <a:tc>
+                  <a:txBody>
+                    <a:bodyPr/>
+                    <a:lstStyle/>
+                    <a:p>
+                      <a:pPr indent="0">
+                        <a:lnSpc>
+                          <a:spcPct val="115000"/>
+                        </a:lnSpc>
+                        <a:spcAft>
+                          <a:spcPts val="0"/>
+                        </a:spcAft>
+                        <a:buNone/>
+                      </a:pPr>
+                      <a:r>
+                        <a:rPr lang="en-US" sz="1600" b="1" kern="100">
+                          <a:solidFill>
+                            <a:srgbClr val="FF0000"/>
+                          </a:solidFill>
+                          <a:effectLst/>
+                          <a:latin typeface="Calibri" panose="020F0502020204030204" pitchFamily="34" charset="0"/>
+                          <a:ea typeface="Times New Roman" panose="02020603050405020304" pitchFamily="18" charset="0"/>
+                          <a:cs typeface="Times New Roman" panose="02020603050405020304" pitchFamily="18" charset="0"/>
+                        </a:rPr>
+                        <a:t>1</a:t>
+                      </a:r>
+                      <a:endParaRPr lang="en-US" sz="1800" kern="100">
+                        <a:effectLst/>
+                        <a:latin typeface="Aptos" panose="020B0004020202020204" pitchFamily="34" charset="0"/>
+                        <a:ea typeface="DengXian" panose="02010600030101010101" pitchFamily="2" charset="-122"/>
+                        <a:cs typeface="Times New Roman" panose="02020603050405020304" pitchFamily="18" charset="0"/>
+                      </a:endParaRPr>
+                    </a:p>
+                  </a:txBody>
+                  <a:tcPr marL="68580" marR="68580" marT="0" marB="0" anchor="ctr">
+                    <a:lnL w="12700" cap="flat" cmpd="sng" algn="ctr">
+                      <a:solidFill>
+                        <a:srgbClr val="000000"/>
+                      </a:solidFill>
+                      <a:prstDash val="solid"/>
+                      <a:round/>
+                      <a:headEnd type="none" w="med" len="med"/>
+                      <a:tailEnd type="none" w="med" len="med"/>
+                    </a:lnL>
+                    <a:lnR w="12700" cap="flat" cmpd="sng" algn="ctr">
+                      <a:solidFill>
+                        <a:srgbClr val="000000"/>
+                      </a:solidFill>
+                      <a:prstDash val="solid"/>
+                      <a:round/>
+                      <a:headEnd type="none" w="med" len="med"/>
+                      <a:tailEnd type="none" w="med" len="med"/>
+                    </a:lnR>
+                    <a:lnT w="12700" cap="flat" cmpd="sng" algn="ctr">
+                      <a:solidFill>
+                        <a:srgbClr val="000000"/>
+                      </a:solidFill>
+                      <a:prstDash val="solid"/>
+                      <a:round/>
+                      <a:headEnd type="none" w="med" len="med"/>
+                      <a:tailEnd type="none" w="med" len="med"/>
+                    </a:lnT>
+                    <a:lnB w="12700" cap="flat" cmpd="sng" algn="ctr">
+                      <a:solidFill>
+                        <a:srgbClr val="000000"/>
+                      </a:solidFill>
+                      <a:prstDash val="solid"/>
+                      <a:round/>
+                      <a:headEnd type="none" w="med" len="med"/>
+                      <a:tailEnd type="none" w="med" len="med"/>
+                    </a:lnB>
+                    <a:solidFill>
+                      <a:srgbClr val="FFFFFF"/>
+                    </a:solidFill>
+                  </a:tcPr>
+                </a:tc>
+                <a:tc>
+                  <a:txBody>
+                    <a:bodyPr/>
+                    <a:lstStyle/>
+                    <a:p>
+                      <a:pPr indent="0">
+                        <a:lnSpc>
+                          <a:spcPct val="115000"/>
+                        </a:lnSpc>
+                        <a:spcAft>
+                          <a:spcPts val="0"/>
+                        </a:spcAft>
+                        <a:buNone/>
+                      </a:pPr>
+                      <a:r>
+                        <a:rPr lang="en-US" sz="1600" b="1" kern="100" dirty="0">
+                          <a:solidFill>
+                            <a:srgbClr val="FF0000"/>
+                          </a:solidFill>
+                          <a:effectLst/>
+                          <a:latin typeface="Calibri" panose="020F0502020204030204" pitchFamily="34" charset="0"/>
+                          <a:ea typeface="Times New Roman" panose="02020603050405020304" pitchFamily="18" charset="0"/>
+                          <a:cs typeface="Times New Roman" panose="02020603050405020304" pitchFamily="18" charset="0"/>
+                        </a:rPr>
+                        <a:t>N / N</a:t>
+                      </a:r>
+                      <a:endParaRPr lang="en-US" sz="1800" kern="100" dirty="0">
+                        <a:effectLst/>
+                        <a:latin typeface="Aptos" panose="020B0004020202020204" pitchFamily="34" charset="0"/>
+                        <a:ea typeface="DengXian" panose="02010600030101010101" pitchFamily="2" charset="-122"/>
+                        <a:cs typeface="Times New Roman" panose="02020603050405020304" pitchFamily="18" charset="0"/>
+                      </a:endParaRPr>
+                    </a:p>
+                  </a:txBody>
+                  <a:tcPr marL="68580" marR="68580" marT="0" marB="0" anchor="ctr">
+                    <a:lnL w="12700" cap="flat" cmpd="sng" algn="ctr">
+                      <a:solidFill>
+                        <a:srgbClr val="000000"/>
+                      </a:solidFill>
+                      <a:prstDash val="solid"/>
+                      <a:round/>
+                      <a:headEnd type="none" w="med" len="med"/>
+                      <a:tailEnd type="none" w="med" len="med"/>
+                    </a:lnL>
+                    <a:lnR w="12700" cap="flat" cmpd="sng" algn="ctr">
+                      <a:solidFill>
+                        <a:srgbClr val="000000"/>
+                      </a:solidFill>
+                      <a:prstDash val="solid"/>
+                      <a:round/>
+                      <a:headEnd type="none" w="med" len="med"/>
+                      <a:tailEnd type="none" w="med" len="med"/>
+                    </a:lnR>
+                    <a:lnT w="12700" cap="flat" cmpd="sng" algn="ctr">
+                      <a:solidFill>
+                        <a:srgbClr val="000000"/>
+                      </a:solidFill>
+                      <a:prstDash val="solid"/>
+                      <a:round/>
+                      <a:headEnd type="none" w="med" len="med"/>
+                      <a:tailEnd type="none" w="med" len="med"/>
+                    </a:lnT>
+                    <a:lnB w="12700" cap="flat" cmpd="sng" algn="ctr">
+                      <a:solidFill>
+                        <a:srgbClr val="000000"/>
+                      </a:solidFill>
+                      <a:prstDash val="solid"/>
+                      <a:round/>
+                      <a:headEnd type="none" w="med" len="med"/>
+                      <a:tailEnd type="none" w="med" len="med"/>
+                    </a:lnB>
+                    <a:solidFill>
+                      <a:srgbClr val="FFFFFF"/>
+                    </a:solidFill>
+                  </a:tcPr>
+                </a:tc>
+                <a:tc>
+                  <a:txBody>
+                    <a:bodyPr/>
+                    <a:lstStyle/>
+                    <a:p>
+                      <a:pPr marL="0" indent="0" algn="l" rtl="0" eaLnBrk="1" latinLnBrk="0" hangingPunct="1">
+                        <a:lnSpc>
+                          <a:spcPct val="115000"/>
+                        </a:lnSpc>
+                        <a:spcAft>
+                          <a:spcPts val="0"/>
+                        </a:spcAft>
+                        <a:buNone/>
+                      </a:pPr>
+                      <a:r>
+                        <a:rPr kumimoji="0" lang="en-US" sz="1600" b="1" kern="100" dirty="0">
+                          <a:solidFill>
+                            <a:srgbClr val="FF0000"/>
+                          </a:solidFill>
+                          <a:effectLst/>
+                          <a:latin typeface="Calibri" panose="020F0502020204030204" pitchFamily="34" charset="0"/>
+                          <a:ea typeface="DengXian" panose="02010600030101010101" pitchFamily="2" charset="-122"/>
+                          <a:cs typeface="Times New Roman" panose="02020603050405020304" pitchFamily="18" charset="0"/>
+                        </a:rPr>
+                        <a:t>12 + 10 = 6  (GT 22)</a:t>
+                      </a:r>
+                    </a:p>
+                  </a:txBody>
+                  <a:tcPr marL="68580" marR="68580" marT="0" marB="0" anchor="ctr">
+                    <a:lnL w="12700" cap="flat" cmpd="sng" algn="ctr">
+                      <a:solidFill>
+                        <a:srgbClr val="000000"/>
+                      </a:solidFill>
+                      <a:prstDash val="solid"/>
+                      <a:round/>
+                      <a:headEnd type="none" w="med" len="med"/>
+                      <a:tailEnd type="none" w="med" len="med"/>
+                    </a:lnL>
+                    <a:lnR w="12700" cap="flat" cmpd="sng" algn="ctr">
+                      <a:solidFill>
+                        <a:srgbClr val="000000"/>
+                      </a:solidFill>
+                      <a:prstDash val="solid"/>
+                      <a:round/>
+                      <a:headEnd type="none" w="med" len="med"/>
+                      <a:tailEnd type="none" w="med" len="med"/>
+                    </a:lnR>
+                    <a:lnT w="12700" cap="flat" cmpd="sng" algn="ctr">
+                      <a:solidFill>
+                        <a:srgbClr val="000000"/>
+                      </a:solidFill>
+                      <a:prstDash val="solid"/>
+                      <a:round/>
+                      <a:headEnd type="none" w="med" len="med"/>
+                      <a:tailEnd type="none" w="med" len="med"/>
+                    </a:lnT>
+                    <a:lnB w="12700" cap="flat" cmpd="sng" algn="ctr">
+                      <a:solidFill>
+                        <a:srgbClr val="000000"/>
+                      </a:solidFill>
+                      <a:prstDash val="solid"/>
+                      <a:round/>
+                      <a:headEnd type="none" w="med" len="med"/>
+                      <a:tailEnd type="none" w="med" len="med"/>
+                    </a:lnB>
+                    <a:solidFill>
+                      <a:srgbClr val="FFFFFF"/>
+                    </a:solidFill>
+                  </a:tcPr>
+                </a:tc>
+                <a:tc>
+                  <a:txBody>
+                    <a:bodyPr/>
+                    <a:lstStyle/>
+                    <a:p>
+                      <a:pPr marL="0" indent="0" algn="l" rtl="0" eaLnBrk="1" latinLnBrk="0" hangingPunct="1">
+                        <a:lnSpc>
+                          <a:spcPct val="115000"/>
+                        </a:lnSpc>
+                        <a:spcAft>
+                          <a:spcPts val="0"/>
+                        </a:spcAft>
+                        <a:buNone/>
+                      </a:pPr>
+                      <a:r>
+                        <a:rPr kumimoji="0" lang="en-US" sz="1600" b="1" kern="100" dirty="0">
+                          <a:solidFill>
+                            <a:srgbClr val="FF0000"/>
+                          </a:solidFill>
+                          <a:effectLst/>
+                          <a:latin typeface="Calibri" panose="020F0502020204030204" pitchFamily="34" charset="0"/>
+                          <a:ea typeface="DengXian" panose="02010600030101010101" pitchFamily="2" charset="-122"/>
+                          <a:cs typeface="Times New Roman" panose="02020603050405020304" pitchFamily="18" charset="0"/>
+                        </a:rPr>
+                        <a:t>-4 + (–6) =  6 (GT -10)</a:t>
+                      </a:r>
+                    </a:p>
+                  </a:txBody>
+                  <a:tcPr marL="68580" marR="68580" marT="0" marB="0" anchor="ctr">
+                    <a:lnL w="12700" cap="flat" cmpd="sng" algn="ctr">
+                      <a:solidFill>
+                        <a:srgbClr val="000000"/>
+                      </a:solidFill>
+                      <a:prstDash val="solid"/>
+                      <a:round/>
+                      <a:headEnd type="none" w="med" len="med"/>
+                      <a:tailEnd type="none" w="med" len="med"/>
+                    </a:lnL>
+                    <a:lnR w="12700" cap="flat" cmpd="sng" algn="ctr">
+                      <a:solidFill>
+                        <a:srgbClr val="000000"/>
+                      </a:solidFill>
+                      <a:prstDash val="solid"/>
+                      <a:round/>
+                      <a:headEnd type="none" w="med" len="med"/>
+                      <a:tailEnd type="none" w="med" len="med"/>
+                    </a:lnR>
+                    <a:lnT w="12700" cap="flat" cmpd="sng" algn="ctr">
+                      <a:solidFill>
+                        <a:srgbClr val="000000"/>
+                      </a:solidFill>
+                      <a:prstDash val="solid"/>
+                      <a:round/>
+                      <a:headEnd type="none" w="med" len="med"/>
+                      <a:tailEnd type="none" w="med" len="med"/>
+                    </a:lnT>
+                    <a:lnB w="12700" cap="flat" cmpd="sng" algn="ctr">
+                      <a:solidFill>
+                        <a:srgbClr val="000000"/>
+                      </a:solidFill>
+                      <a:prstDash val="solid"/>
+                      <a:round/>
+                      <a:headEnd type="none" w="med" len="med"/>
+                      <a:tailEnd type="none" w="med" len="med"/>
+                    </a:lnB>
+                    <a:solidFill>
+                      <a:srgbClr val="FFFFFF"/>
+                    </a:solidFill>
+                  </a:tcPr>
+                </a:tc>
+                <a:extLst>
+                  <a:ext uri="{0D108BD9-81ED-4DB2-BD59-A6C34878D82A}">
+                    <a16:rowId xmlns:a16="http://schemas.microsoft.com/office/drawing/2014/main" val="2157277809"/>
+                  </a:ext>
+                </a:extLst>
+              </a:tr>
+              <a:tr h="332105">
+                <a:tc>
+                  <a:txBody>
+                    <a:bodyPr/>
+                    <a:lstStyle/>
+                    <a:p>
+                      <a:pPr indent="0">
+                        <a:lnSpc>
+                          <a:spcPct val="115000"/>
+                        </a:lnSpc>
+                        <a:spcAft>
+                          <a:spcPts val="0"/>
+                        </a:spcAft>
+                        <a:buNone/>
+                      </a:pPr>
+                      <a:r>
+                        <a:rPr lang="en-US" sz="1600" b="1" kern="100">
+                          <a:solidFill>
+                            <a:srgbClr val="000000"/>
+                          </a:solidFill>
+                          <a:effectLst/>
+                          <a:latin typeface="Consolas" panose="020B0609020204030204" pitchFamily="49" charset="0"/>
+                          <a:ea typeface="Times New Roman" panose="02020603050405020304" pitchFamily="18" charset="0"/>
+                          <a:cs typeface="Consolas" panose="020B0609020204030204" pitchFamily="49" charset="0"/>
+                        </a:rPr>
+                        <a:t>0100 - 0010</a:t>
+                      </a:r>
+                      <a:endParaRPr lang="en-US" sz="1800" kern="100">
+                        <a:effectLst/>
+                        <a:latin typeface="Aptos" panose="020B0004020202020204" pitchFamily="34" charset="0"/>
+                        <a:ea typeface="DengXian" panose="02010600030101010101" pitchFamily="2" charset="-122"/>
+                        <a:cs typeface="Times New Roman" panose="02020603050405020304" pitchFamily="18" charset="0"/>
+                      </a:endParaRPr>
+                    </a:p>
+                  </a:txBody>
+                  <a:tcPr marL="68580" marR="68580" marT="0" marB="0" anchor="ctr">
+                    <a:lnL w="12700" cap="flat" cmpd="sng" algn="ctr">
+                      <a:solidFill>
+                        <a:srgbClr val="000000"/>
+                      </a:solidFill>
+                      <a:prstDash val="solid"/>
+                      <a:round/>
+                      <a:headEnd type="none" w="med" len="med"/>
+                      <a:tailEnd type="none" w="med" len="med"/>
+                    </a:lnL>
+                    <a:lnR w="12700" cap="flat" cmpd="sng" algn="ctr">
+                      <a:solidFill>
+                        <a:srgbClr val="000000"/>
+                      </a:solidFill>
+                      <a:prstDash val="solid"/>
+                      <a:round/>
+                      <a:headEnd type="none" w="med" len="med"/>
+                      <a:tailEnd type="none" w="med" len="med"/>
+                    </a:lnR>
+                    <a:lnT w="12700" cap="flat" cmpd="sng" algn="ctr">
+                      <a:solidFill>
+                        <a:srgbClr val="000000"/>
+                      </a:solidFill>
+                      <a:prstDash val="solid"/>
+                      <a:round/>
+                      <a:headEnd type="none" w="med" len="med"/>
+                      <a:tailEnd type="none" w="med" len="med"/>
+                    </a:lnT>
+                    <a:lnB w="12700" cap="flat" cmpd="sng" algn="ctr">
+                      <a:solidFill>
+                        <a:srgbClr val="000000"/>
+                      </a:solidFill>
+                      <a:prstDash val="solid"/>
+                      <a:round/>
+                      <a:headEnd type="none" w="med" len="med"/>
+                      <a:tailEnd type="none" w="med" len="med"/>
+                    </a:lnB>
+                    <a:solidFill>
+                      <a:srgbClr val="FFFFFF"/>
+                    </a:solidFill>
+                  </a:tcPr>
+                </a:tc>
+                <a:tc>
+                  <a:txBody>
+                    <a:bodyPr/>
+                    <a:lstStyle/>
+                    <a:p>
+                      <a:pPr indent="0">
+                        <a:lnSpc>
+                          <a:spcPct val="115000"/>
+                        </a:lnSpc>
+                        <a:spcAft>
+                          <a:spcPts val="0"/>
+                        </a:spcAft>
+                        <a:buNone/>
+                      </a:pPr>
+                      <a:r>
+                        <a:rPr lang="en-US" sz="1600" b="1" kern="100">
+                          <a:solidFill>
+                            <a:srgbClr val="000000"/>
+                          </a:solidFill>
+                          <a:effectLst/>
+                          <a:latin typeface="Consolas" panose="020B0609020204030204" pitchFamily="49" charset="0"/>
+                          <a:ea typeface="Times New Roman" panose="02020603050405020304" pitchFamily="18" charset="0"/>
+                          <a:cs typeface="Consolas" panose="020B0609020204030204" pitchFamily="49" charset="0"/>
+                        </a:rPr>
+                        <a:t>0010</a:t>
+                      </a:r>
+                      <a:endParaRPr lang="en-US" sz="1800" kern="100">
+                        <a:effectLst/>
+                        <a:latin typeface="Aptos" panose="020B0004020202020204" pitchFamily="34" charset="0"/>
+                        <a:ea typeface="DengXian" panose="02010600030101010101" pitchFamily="2" charset="-122"/>
+                        <a:cs typeface="Times New Roman" panose="02020603050405020304" pitchFamily="18" charset="0"/>
+                      </a:endParaRPr>
+                    </a:p>
+                  </a:txBody>
+                  <a:tcPr marL="68580" marR="68580" marT="0" marB="0" anchor="ctr">
+                    <a:lnL w="12700" cap="flat" cmpd="sng" algn="ctr">
+                      <a:solidFill>
+                        <a:srgbClr val="000000"/>
+                      </a:solidFill>
+                      <a:prstDash val="solid"/>
+                      <a:round/>
+                      <a:headEnd type="none" w="med" len="med"/>
+                      <a:tailEnd type="none" w="med" len="med"/>
+                    </a:lnL>
+                    <a:lnR w="12700" cap="flat" cmpd="sng" algn="ctr">
+                      <a:solidFill>
+                        <a:srgbClr val="000000"/>
+                      </a:solidFill>
+                      <a:prstDash val="solid"/>
+                      <a:round/>
+                      <a:headEnd type="none" w="med" len="med"/>
+                      <a:tailEnd type="none" w="med" len="med"/>
+                    </a:lnR>
+                    <a:lnT w="12700" cap="flat" cmpd="sng" algn="ctr">
+                      <a:solidFill>
+                        <a:srgbClr val="000000"/>
+                      </a:solidFill>
+                      <a:prstDash val="solid"/>
+                      <a:round/>
+                      <a:headEnd type="none" w="med" len="med"/>
+                      <a:tailEnd type="none" w="med" len="med"/>
+                    </a:lnT>
+                    <a:lnB w="12700" cap="flat" cmpd="sng" algn="ctr">
+                      <a:solidFill>
+                        <a:srgbClr val="000000"/>
+                      </a:solidFill>
+                      <a:prstDash val="solid"/>
+                      <a:round/>
+                      <a:headEnd type="none" w="med" len="med"/>
+                      <a:tailEnd type="none" w="med" len="med"/>
+                    </a:lnB>
+                    <a:solidFill>
+                      <a:srgbClr val="FFFFFF"/>
+                    </a:solidFill>
+                  </a:tcPr>
+                </a:tc>
+                <a:tc>
+                  <a:txBody>
+                    <a:bodyPr/>
+                    <a:lstStyle/>
+                    <a:p>
+                      <a:pPr indent="0">
+                        <a:lnSpc>
+                          <a:spcPct val="115000"/>
+                        </a:lnSpc>
+                        <a:spcAft>
+                          <a:spcPts val="0"/>
+                        </a:spcAft>
+                        <a:buNone/>
+                      </a:pPr>
+                      <a:r>
+                        <a:rPr lang="en-US" sz="1600" b="1" kern="100">
+                          <a:solidFill>
+                            <a:srgbClr val="FF0000"/>
+                          </a:solidFill>
+                          <a:effectLst/>
+                          <a:latin typeface="Calibri" panose="020F0502020204030204" pitchFamily="34" charset="0"/>
+                          <a:ea typeface="Times New Roman" panose="02020603050405020304" pitchFamily="18" charset="0"/>
+                          <a:cs typeface="Times New Roman" panose="02020603050405020304" pitchFamily="18" charset="0"/>
+                        </a:rPr>
+                        <a:t>1</a:t>
+                      </a:r>
+                      <a:endParaRPr lang="en-US" sz="1800" kern="100">
+                        <a:effectLst/>
+                        <a:latin typeface="Aptos" panose="020B0004020202020204" pitchFamily="34" charset="0"/>
+                        <a:ea typeface="DengXian" panose="02010600030101010101" pitchFamily="2" charset="-122"/>
+                        <a:cs typeface="Times New Roman" panose="02020603050405020304" pitchFamily="18" charset="0"/>
+                      </a:endParaRPr>
+                    </a:p>
+                  </a:txBody>
+                  <a:tcPr marL="68580" marR="68580" marT="0" marB="0" anchor="ctr">
+                    <a:lnL w="12700" cap="flat" cmpd="sng" algn="ctr">
+                      <a:solidFill>
+                        <a:srgbClr val="000000"/>
+                      </a:solidFill>
+                      <a:prstDash val="solid"/>
+                      <a:round/>
+                      <a:headEnd type="none" w="med" len="med"/>
+                      <a:tailEnd type="none" w="med" len="med"/>
+                    </a:lnL>
+                    <a:lnR w="12700" cap="flat" cmpd="sng" algn="ctr">
+                      <a:solidFill>
+                        <a:srgbClr val="000000"/>
+                      </a:solidFill>
+                      <a:prstDash val="solid"/>
+                      <a:round/>
+                      <a:headEnd type="none" w="med" len="med"/>
+                      <a:tailEnd type="none" w="med" len="med"/>
+                    </a:lnR>
+                    <a:lnT w="12700" cap="flat" cmpd="sng" algn="ctr">
+                      <a:solidFill>
+                        <a:srgbClr val="000000"/>
+                      </a:solidFill>
+                      <a:prstDash val="solid"/>
+                      <a:round/>
+                      <a:headEnd type="none" w="med" len="med"/>
+                      <a:tailEnd type="none" w="med" len="med"/>
+                    </a:lnT>
+                    <a:lnB w="12700" cap="flat" cmpd="sng" algn="ctr">
+                      <a:solidFill>
+                        <a:srgbClr val="000000"/>
+                      </a:solidFill>
+                      <a:prstDash val="solid"/>
+                      <a:round/>
+                      <a:headEnd type="none" w="med" len="med"/>
+                      <a:tailEnd type="none" w="med" len="med"/>
+                    </a:lnB>
+                    <a:solidFill>
+                      <a:srgbClr val="FFFFFF"/>
+                    </a:solidFill>
+                  </a:tcPr>
+                </a:tc>
+                <a:tc>
+                  <a:txBody>
+                    <a:bodyPr/>
+                    <a:lstStyle/>
+                    <a:p>
+                      <a:pPr indent="0">
+                        <a:lnSpc>
+                          <a:spcPct val="115000"/>
+                        </a:lnSpc>
+                        <a:spcAft>
+                          <a:spcPts val="0"/>
                         </a:spcAft>
                         <a:buNone/>
                       </a:pPr>
@@ -26008,12 +28755,539 @@
                     <a:bodyPr/>
                     <a:lstStyle/>
                     <a:p>
-                      <a:pPr indent="140335">
+                      <a:pPr indent="0">
                         <a:lnSpc>
                           <a:spcPct val="115000"/>
                         </a:lnSpc>
                         <a:spcAft>
-                          <a:spcPts val="800"/>
+                          <a:spcPts val="0"/>
+                        </a:spcAft>
+                        <a:buNone/>
+                      </a:pPr>
+                      <a:r>
+                        <a:rPr lang="en-US" sz="1600" b="1" kern="100" dirty="0">
+                          <a:solidFill>
+                            <a:srgbClr val="FF0000"/>
+                          </a:solidFill>
+                          <a:effectLst/>
+                          <a:latin typeface="Calibri" panose="020F0502020204030204" pitchFamily="34" charset="0"/>
+                          <a:ea typeface="Times New Roman" panose="02020603050405020304" pitchFamily="18" charset="0"/>
+                          <a:cs typeface="Times New Roman" panose="02020603050405020304" pitchFamily="18" charset="0"/>
+                        </a:rPr>
+                        <a:t>Y / Y</a:t>
+                      </a:r>
+                      <a:endParaRPr lang="en-US" sz="1800" kern="100" dirty="0">
+                        <a:effectLst/>
+                        <a:latin typeface="Aptos" panose="020B0004020202020204" pitchFamily="34" charset="0"/>
+                        <a:ea typeface="DengXian" panose="02010600030101010101" pitchFamily="2" charset="-122"/>
+                        <a:cs typeface="Times New Roman" panose="02020603050405020304" pitchFamily="18" charset="0"/>
+                      </a:endParaRPr>
+                    </a:p>
+                  </a:txBody>
+                  <a:tcPr marL="68580" marR="68580" marT="0" marB="0" anchor="ctr">
+                    <a:lnL w="12700" cap="flat" cmpd="sng" algn="ctr">
+                      <a:solidFill>
+                        <a:srgbClr val="000000"/>
+                      </a:solidFill>
+                      <a:prstDash val="solid"/>
+                      <a:round/>
+                      <a:headEnd type="none" w="med" len="med"/>
+                      <a:tailEnd type="none" w="med" len="med"/>
+                    </a:lnL>
+                    <a:lnR w="12700" cap="flat" cmpd="sng" algn="ctr">
+                      <a:solidFill>
+                        <a:srgbClr val="000000"/>
+                      </a:solidFill>
+                      <a:prstDash val="solid"/>
+                      <a:round/>
+                      <a:headEnd type="none" w="med" len="med"/>
+                      <a:tailEnd type="none" w="med" len="med"/>
+                    </a:lnR>
+                    <a:lnT w="12700" cap="flat" cmpd="sng" algn="ctr">
+                      <a:solidFill>
+                        <a:srgbClr val="000000"/>
+                      </a:solidFill>
+                      <a:prstDash val="solid"/>
+                      <a:round/>
+                      <a:headEnd type="none" w="med" len="med"/>
+                      <a:tailEnd type="none" w="med" len="med"/>
+                    </a:lnT>
+                    <a:lnB w="12700" cap="flat" cmpd="sng" algn="ctr">
+                      <a:solidFill>
+                        <a:srgbClr val="000000"/>
+                      </a:solidFill>
+                      <a:prstDash val="solid"/>
+                      <a:round/>
+                      <a:headEnd type="none" w="med" len="med"/>
+                      <a:tailEnd type="none" w="med" len="med"/>
+                    </a:lnB>
+                    <a:solidFill>
+                      <a:srgbClr val="FFFFFF"/>
+                    </a:solidFill>
+                  </a:tcPr>
+                </a:tc>
+                <a:tc>
+                  <a:txBody>
+                    <a:bodyPr/>
+                    <a:lstStyle/>
+                    <a:p>
+                      <a:pPr indent="0">
+                        <a:lnSpc>
+                          <a:spcPct val="115000"/>
+                        </a:lnSpc>
+                        <a:spcAft>
+                          <a:spcPts val="0"/>
+                        </a:spcAft>
+                        <a:buNone/>
+                      </a:pPr>
+                      <a:r>
+                        <a:rPr kumimoji="0" lang="en-US" sz="1600" b="1" kern="100" dirty="0">
+                          <a:solidFill>
+                            <a:srgbClr val="FF0000"/>
+                          </a:solidFill>
+                          <a:effectLst/>
+                          <a:latin typeface="Calibri" panose="020F0502020204030204" pitchFamily="34" charset="0"/>
+                          <a:ea typeface="DengXian" panose="02010600030101010101" pitchFamily="2" charset="-122"/>
+                          <a:cs typeface="Times New Roman" panose="02020603050405020304" pitchFamily="18" charset="0"/>
+                        </a:rPr>
+                        <a:t>4 – 2 = 2</a:t>
+                      </a:r>
+                    </a:p>
+                  </a:txBody>
+                  <a:tcPr marL="68580" marR="68580" marT="0" marB="0" anchor="ctr">
+                    <a:lnL w="12700" cap="flat" cmpd="sng" algn="ctr">
+                      <a:solidFill>
+                        <a:srgbClr val="000000"/>
+                      </a:solidFill>
+                      <a:prstDash val="solid"/>
+                      <a:round/>
+                      <a:headEnd type="none" w="med" len="med"/>
+                      <a:tailEnd type="none" w="med" len="med"/>
+                    </a:lnL>
+                    <a:lnR w="12700" cap="flat" cmpd="sng" algn="ctr">
+                      <a:solidFill>
+                        <a:srgbClr val="000000"/>
+                      </a:solidFill>
+                      <a:prstDash val="solid"/>
+                      <a:round/>
+                      <a:headEnd type="none" w="med" len="med"/>
+                      <a:tailEnd type="none" w="med" len="med"/>
+                    </a:lnR>
+                    <a:lnT w="12700" cap="flat" cmpd="sng" algn="ctr">
+                      <a:solidFill>
+                        <a:srgbClr val="000000"/>
+                      </a:solidFill>
+                      <a:prstDash val="solid"/>
+                      <a:round/>
+                      <a:headEnd type="none" w="med" len="med"/>
+                      <a:tailEnd type="none" w="med" len="med"/>
+                    </a:lnT>
+                    <a:lnB w="12700" cap="flat" cmpd="sng" algn="ctr">
+                      <a:solidFill>
+                        <a:srgbClr val="000000"/>
+                      </a:solidFill>
+                      <a:prstDash val="solid"/>
+                      <a:round/>
+                      <a:headEnd type="none" w="med" len="med"/>
+                      <a:tailEnd type="none" w="med" len="med"/>
+                    </a:lnB>
+                    <a:solidFill>
+                      <a:srgbClr val="FFFFFF"/>
+                    </a:solidFill>
+                  </a:tcPr>
+                </a:tc>
+                <a:tc>
+                  <a:txBody>
+                    <a:bodyPr/>
+                    <a:lstStyle/>
+                    <a:p>
+                      <a:pPr indent="0">
+                        <a:lnSpc>
+                          <a:spcPct val="115000"/>
+                        </a:lnSpc>
+                        <a:spcAft>
+                          <a:spcPts val="0"/>
+                        </a:spcAft>
+                        <a:buNone/>
+                      </a:pPr>
+                      <a:r>
+                        <a:rPr kumimoji="0" lang="en-US" sz="1600" b="1" kern="100" dirty="0">
+                          <a:solidFill>
+                            <a:srgbClr val="FF0000"/>
+                          </a:solidFill>
+                          <a:effectLst/>
+                          <a:latin typeface="Calibri" panose="020F0502020204030204" pitchFamily="34" charset="0"/>
+                          <a:ea typeface="DengXian" panose="02010600030101010101" pitchFamily="2" charset="-122"/>
+                          <a:cs typeface="Times New Roman" panose="02020603050405020304" pitchFamily="18" charset="0"/>
+                        </a:rPr>
+                        <a:t>4 – 2 = 2</a:t>
+                      </a:r>
+                    </a:p>
+                  </a:txBody>
+                  <a:tcPr marL="68580" marR="68580" marT="0" marB="0" anchor="ctr">
+                    <a:lnL w="12700" cap="flat" cmpd="sng" algn="ctr">
+                      <a:solidFill>
+                        <a:srgbClr val="000000"/>
+                      </a:solidFill>
+                      <a:prstDash val="solid"/>
+                      <a:round/>
+                      <a:headEnd type="none" w="med" len="med"/>
+                      <a:tailEnd type="none" w="med" len="med"/>
+                    </a:lnL>
+                    <a:lnR w="12700" cap="flat" cmpd="sng" algn="ctr">
+                      <a:solidFill>
+                        <a:srgbClr val="000000"/>
+                      </a:solidFill>
+                      <a:prstDash val="solid"/>
+                      <a:round/>
+                      <a:headEnd type="none" w="med" len="med"/>
+                      <a:tailEnd type="none" w="med" len="med"/>
+                    </a:lnR>
+                    <a:lnT w="12700" cap="flat" cmpd="sng" algn="ctr">
+                      <a:solidFill>
+                        <a:srgbClr val="000000"/>
+                      </a:solidFill>
+                      <a:prstDash val="solid"/>
+                      <a:round/>
+                      <a:headEnd type="none" w="med" len="med"/>
+                      <a:tailEnd type="none" w="med" len="med"/>
+                    </a:lnT>
+                    <a:lnB w="12700" cap="flat" cmpd="sng" algn="ctr">
+                      <a:solidFill>
+                        <a:srgbClr val="000000"/>
+                      </a:solidFill>
+                      <a:prstDash val="solid"/>
+                      <a:round/>
+                      <a:headEnd type="none" w="med" len="med"/>
+                      <a:tailEnd type="none" w="med" len="med"/>
+                    </a:lnB>
+                    <a:solidFill>
+                      <a:srgbClr val="FFFFFF"/>
+                    </a:solidFill>
+                  </a:tcPr>
+                </a:tc>
+                <a:extLst>
+                  <a:ext uri="{0D108BD9-81ED-4DB2-BD59-A6C34878D82A}">
+                    <a16:rowId xmlns:a16="http://schemas.microsoft.com/office/drawing/2014/main" val="584716115"/>
+                  </a:ext>
+                </a:extLst>
+              </a:tr>
+              <a:tr h="332105">
+                <a:tc>
+                  <a:txBody>
+                    <a:bodyPr/>
+                    <a:lstStyle/>
+                    <a:p>
+                      <a:pPr indent="0">
+                        <a:lnSpc>
+                          <a:spcPct val="115000"/>
+                        </a:lnSpc>
+                        <a:spcAft>
+                          <a:spcPts val="0"/>
+                        </a:spcAft>
+                        <a:buNone/>
+                      </a:pPr>
+                      <a:r>
+                        <a:rPr lang="en-US" sz="1600" b="1" kern="100">
+                          <a:solidFill>
+                            <a:srgbClr val="000000"/>
+                          </a:solidFill>
+                          <a:effectLst/>
+                          <a:latin typeface="Consolas" panose="020B0609020204030204" pitchFamily="49" charset="0"/>
+                          <a:ea typeface="Times New Roman" panose="02020603050405020304" pitchFamily="18" charset="0"/>
+                          <a:cs typeface="Consolas" panose="020B0609020204030204" pitchFamily="49" charset="0"/>
+                        </a:rPr>
+                        <a:t>0100 - 0110</a:t>
+                      </a:r>
+                      <a:endParaRPr lang="en-US" sz="1800" kern="100">
+                        <a:effectLst/>
+                        <a:latin typeface="Aptos" panose="020B0004020202020204" pitchFamily="34" charset="0"/>
+                        <a:ea typeface="DengXian" panose="02010600030101010101" pitchFamily="2" charset="-122"/>
+                        <a:cs typeface="Times New Roman" panose="02020603050405020304" pitchFamily="18" charset="0"/>
+                      </a:endParaRPr>
+                    </a:p>
+                  </a:txBody>
+                  <a:tcPr marL="68580" marR="68580" marT="0" marB="0" anchor="ctr">
+                    <a:lnL w="12700" cap="flat" cmpd="sng" algn="ctr">
+                      <a:solidFill>
+                        <a:srgbClr val="000000"/>
+                      </a:solidFill>
+                      <a:prstDash val="solid"/>
+                      <a:round/>
+                      <a:headEnd type="none" w="med" len="med"/>
+                      <a:tailEnd type="none" w="med" len="med"/>
+                    </a:lnL>
+                    <a:lnR w="12700" cap="flat" cmpd="sng" algn="ctr">
+                      <a:solidFill>
+                        <a:srgbClr val="000000"/>
+                      </a:solidFill>
+                      <a:prstDash val="solid"/>
+                      <a:round/>
+                      <a:headEnd type="none" w="med" len="med"/>
+                      <a:tailEnd type="none" w="med" len="med"/>
+                    </a:lnR>
+                    <a:lnT w="12700" cap="flat" cmpd="sng" algn="ctr">
+                      <a:solidFill>
+                        <a:srgbClr val="000000"/>
+                      </a:solidFill>
+                      <a:prstDash val="solid"/>
+                      <a:round/>
+                      <a:headEnd type="none" w="med" len="med"/>
+                      <a:tailEnd type="none" w="med" len="med"/>
+                    </a:lnT>
+                    <a:lnB w="12700" cap="flat" cmpd="sng" algn="ctr">
+                      <a:solidFill>
+                        <a:srgbClr val="000000"/>
+                      </a:solidFill>
+                      <a:prstDash val="solid"/>
+                      <a:round/>
+                      <a:headEnd type="none" w="med" len="med"/>
+                      <a:tailEnd type="none" w="med" len="med"/>
+                    </a:lnB>
+                    <a:solidFill>
+                      <a:srgbClr val="FFFFFF"/>
+                    </a:solidFill>
+                  </a:tcPr>
+                </a:tc>
+                <a:tc>
+                  <a:txBody>
+                    <a:bodyPr/>
+                    <a:lstStyle/>
+                    <a:p>
+                      <a:pPr indent="0">
+                        <a:lnSpc>
+                          <a:spcPct val="115000"/>
+                        </a:lnSpc>
+                        <a:spcAft>
+                          <a:spcPts val="0"/>
+                        </a:spcAft>
+                        <a:buNone/>
+                      </a:pPr>
+                      <a:r>
+                        <a:rPr lang="en-US" sz="1600" b="1" kern="100">
+                          <a:solidFill>
+                            <a:srgbClr val="000000"/>
+                          </a:solidFill>
+                          <a:effectLst/>
+                          <a:latin typeface="Consolas" panose="020B0609020204030204" pitchFamily="49" charset="0"/>
+                          <a:ea typeface="Times New Roman" panose="02020603050405020304" pitchFamily="18" charset="0"/>
+                          <a:cs typeface="Consolas" panose="020B0609020204030204" pitchFamily="49" charset="0"/>
+                        </a:rPr>
+                        <a:t>1110</a:t>
+                      </a:r>
+                      <a:endParaRPr lang="en-US" sz="1800" kern="100">
+                        <a:effectLst/>
+                        <a:latin typeface="Aptos" panose="020B0004020202020204" pitchFamily="34" charset="0"/>
+                        <a:ea typeface="DengXian" panose="02010600030101010101" pitchFamily="2" charset="-122"/>
+                        <a:cs typeface="Times New Roman" panose="02020603050405020304" pitchFamily="18" charset="0"/>
+                      </a:endParaRPr>
+                    </a:p>
+                  </a:txBody>
+                  <a:tcPr marL="68580" marR="68580" marT="0" marB="0" anchor="ctr">
+                    <a:lnL w="12700" cap="flat" cmpd="sng" algn="ctr">
+                      <a:solidFill>
+                        <a:srgbClr val="000000"/>
+                      </a:solidFill>
+                      <a:prstDash val="solid"/>
+                      <a:round/>
+                      <a:headEnd type="none" w="med" len="med"/>
+                      <a:tailEnd type="none" w="med" len="med"/>
+                    </a:lnL>
+                    <a:lnR w="12700" cap="flat" cmpd="sng" algn="ctr">
+                      <a:solidFill>
+                        <a:srgbClr val="000000"/>
+                      </a:solidFill>
+                      <a:prstDash val="solid"/>
+                      <a:round/>
+                      <a:headEnd type="none" w="med" len="med"/>
+                      <a:tailEnd type="none" w="med" len="med"/>
+                    </a:lnR>
+                    <a:lnT w="12700" cap="flat" cmpd="sng" algn="ctr">
+                      <a:solidFill>
+                        <a:srgbClr val="000000"/>
+                      </a:solidFill>
+                      <a:prstDash val="solid"/>
+                      <a:round/>
+                      <a:headEnd type="none" w="med" len="med"/>
+                      <a:tailEnd type="none" w="med" len="med"/>
+                    </a:lnT>
+                    <a:lnB w="12700" cap="flat" cmpd="sng" algn="ctr">
+                      <a:solidFill>
+                        <a:srgbClr val="000000"/>
+                      </a:solidFill>
+                      <a:prstDash val="solid"/>
+                      <a:round/>
+                      <a:headEnd type="none" w="med" len="med"/>
+                      <a:tailEnd type="none" w="med" len="med"/>
+                    </a:lnB>
+                    <a:solidFill>
+                      <a:srgbClr val="FFFFFF"/>
+                    </a:solidFill>
+                  </a:tcPr>
+                </a:tc>
+                <a:tc>
+                  <a:txBody>
+                    <a:bodyPr/>
+                    <a:lstStyle/>
+                    <a:p>
+                      <a:pPr indent="0">
+                        <a:lnSpc>
+                          <a:spcPct val="115000"/>
+                        </a:lnSpc>
+                        <a:spcAft>
+                          <a:spcPts val="0"/>
+                        </a:spcAft>
+                        <a:buNone/>
+                      </a:pPr>
+                      <a:r>
+                        <a:rPr lang="en-US" sz="1600" b="1" kern="100">
+                          <a:solidFill>
+                            <a:srgbClr val="FF0000"/>
+                          </a:solidFill>
+                          <a:effectLst/>
+                          <a:latin typeface="Calibri" panose="020F0502020204030204" pitchFamily="34" charset="0"/>
+                          <a:ea typeface="Times New Roman" panose="02020603050405020304" pitchFamily="18" charset="0"/>
+                          <a:cs typeface="Times New Roman" panose="02020603050405020304" pitchFamily="18" charset="0"/>
+                        </a:rPr>
+                        <a:t>0</a:t>
+                      </a:r>
+                      <a:endParaRPr lang="en-US" sz="1800" kern="100">
+                        <a:effectLst/>
+                        <a:latin typeface="Aptos" panose="020B0004020202020204" pitchFamily="34" charset="0"/>
+                        <a:ea typeface="DengXian" panose="02010600030101010101" pitchFamily="2" charset="-122"/>
+                        <a:cs typeface="Times New Roman" panose="02020603050405020304" pitchFamily="18" charset="0"/>
+                      </a:endParaRPr>
+                    </a:p>
+                  </a:txBody>
+                  <a:tcPr marL="68580" marR="68580" marT="0" marB="0" anchor="ctr">
+                    <a:lnL w="12700" cap="flat" cmpd="sng" algn="ctr">
+                      <a:solidFill>
+                        <a:srgbClr val="000000"/>
+                      </a:solidFill>
+                      <a:prstDash val="solid"/>
+                      <a:round/>
+                      <a:headEnd type="none" w="med" len="med"/>
+                      <a:tailEnd type="none" w="med" len="med"/>
+                    </a:lnL>
+                    <a:lnR w="12700" cap="flat" cmpd="sng" algn="ctr">
+                      <a:solidFill>
+                        <a:srgbClr val="000000"/>
+                      </a:solidFill>
+                      <a:prstDash val="solid"/>
+                      <a:round/>
+                      <a:headEnd type="none" w="med" len="med"/>
+                      <a:tailEnd type="none" w="med" len="med"/>
+                    </a:lnR>
+                    <a:lnT w="12700" cap="flat" cmpd="sng" algn="ctr">
+                      <a:solidFill>
+                        <a:srgbClr val="000000"/>
+                      </a:solidFill>
+                      <a:prstDash val="solid"/>
+                      <a:round/>
+                      <a:headEnd type="none" w="med" len="med"/>
+                      <a:tailEnd type="none" w="med" len="med"/>
+                    </a:lnT>
+                    <a:lnB w="12700" cap="flat" cmpd="sng" algn="ctr">
+                      <a:solidFill>
+                        <a:srgbClr val="000000"/>
+                      </a:solidFill>
+                      <a:prstDash val="solid"/>
+                      <a:round/>
+                      <a:headEnd type="none" w="med" len="med"/>
+                      <a:tailEnd type="none" w="med" len="med"/>
+                    </a:lnB>
+                    <a:solidFill>
+                      <a:srgbClr val="FFFFFF"/>
+                    </a:solidFill>
+                  </a:tcPr>
+                </a:tc>
+                <a:tc>
+                  <a:txBody>
+                    <a:bodyPr/>
+                    <a:lstStyle/>
+                    <a:p>
+                      <a:pPr indent="0">
+                        <a:lnSpc>
+                          <a:spcPct val="115000"/>
+                        </a:lnSpc>
+                        <a:spcAft>
+                          <a:spcPts val="0"/>
+                        </a:spcAft>
+                        <a:buNone/>
+                      </a:pPr>
+                      <a:r>
+                        <a:rPr lang="en-US" sz="1600" b="1" kern="100">
+                          <a:solidFill>
+                            <a:srgbClr val="FF0000"/>
+                          </a:solidFill>
+                          <a:effectLst/>
+                          <a:latin typeface="Calibri" panose="020F0502020204030204" pitchFamily="34" charset="0"/>
+                          <a:ea typeface="Times New Roman" panose="02020603050405020304" pitchFamily="18" charset="0"/>
+                          <a:cs typeface="Times New Roman" panose="02020603050405020304" pitchFamily="18" charset="0"/>
+                        </a:rPr>
+                        <a:t>0</a:t>
+                      </a:r>
+                      <a:endParaRPr lang="en-US" sz="1800" kern="100">
+                        <a:effectLst/>
+                        <a:latin typeface="Aptos" panose="020B0004020202020204" pitchFamily="34" charset="0"/>
+                        <a:ea typeface="DengXian" panose="02010600030101010101" pitchFamily="2" charset="-122"/>
+                        <a:cs typeface="Times New Roman" panose="02020603050405020304" pitchFamily="18" charset="0"/>
+                      </a:endParaRPr>
+                    </a:p>
+                  </a:txBody>
+                  <a:tcPr marL="68580" marR="68580" marT="0" marB="0" anchor="ctr">
+                    <a:lnL w="12700" cap="flat" cmpd="sng" algn="ctr">
+                      <a:solidFill>
+                        <a:srgbClr val="000000"/>
+                      </a:solidFill>
+                      <a:prstDash val="solid"/>
+                      <a:round/>
+                      <a:headEnd type="none" w="med" len="med"/>
+                      <a:tailEnd type="none" w="med" len="med"/>
+                    </a:lnL>
+                    <a:lnR w="12700" cap="flat" cmpd="sng" algn="ctr">
+                      <a:solidFill>
+                        <a:srgbClr val="000000"/>
+                      </a:solidFill>
+                      <a:prstDash val="solid"/>
+                      <a:round/>
+                      <a:headEnd type="none" w="med" len="med"/>
+                      <a:tailEnd type="none" w="med" len="med"/>
+                    </a:lnR>
+                    <a:lnT w="12700" cap="flat" cmpd="sng" algn="ctr">
+                      <a:solidFill>
+                        <a:srgbClr val="000000"/>
+                      </a:solidFill>
+                      <a:prstDash val="solid"/>
+                      <a:round/>
+                      <a:headEnd type="none" w="med" len="med"/>
+                      <a:tailEnd type="none" w="med" len="med"/>
+                    </a:lnT>
+                    <a:lnB w="12700" cap="flat" cmpd="sng" algn="ctr">
+                      <a:solidFill>
+                        <a:srgbClr val="000000"/>
+                      </a:solidFill>
+                      <a:prstDash val="solid"/>
+                      <a:round/>
+                      <a:headEnd type="none" w="med" len="med"/>
+                      <a:tailEnd type="none" w="med" len="med"/>
+                    </a:lnB>
+                    <a:solidFill>
+                      <a:srgbClr val="FFFFFF"/>
+                    </a:solidFill>
+                  </a:tcPr>
+                </a:tc>
+                <a:tc>
+                  <a:txBody>
+                    <a:bodyPr/>
+                    <a:lstStyle/>
+                    <a:p>
+                      <a:pPr indent="0">
+                        <a:lnSpc>
+                          <a:spcPct val="115000"/>
+                        </a:lnSpc>
+                        <a:spcAft>
+                          <a:spcPts val="0"/>
                         </a:spcAft>
                         <a:buNone/>
                       </a:pPr>
@@ -26079,9 +29353,149 @@
                     </a:solidFill>
                   </a:tcPr>
                 </a:tc>
+                <a:tc>
+                  <a:txBody>
+                    <a:bodyPr/>
+                    <a:lstStyle/>
+                    <a:p>
+                      <a:pPr indent="0">
+                        <a:lnSpc>
+                          <a:spcPct val="115000"/>
+                        </a:lnSpc>
+                        <a:spcAft>
+                          <a:spcPts val="0"/>
+                        </a:spcAft>
+                        <a:buNone/>
+                      </a:pPr>
+                      <a:r>
+                        <a:rPr kumimoji="0" lang="en-US" sz="1600" b="1" kern="100" dirty="0">
+                          <a:solidFill>
+                            <a:srgbClr val="FF0000"/>
+                          </a:solidFill>
+                          <a:effectLst/>
+                          <a:latin typeface="Calibri" panose="020F0502020204030204" pitchFamily="34" charset="0"/>
+                          <a:ea typeface="DengXian" panose="02010600030101010101" pitchFamily="2" charset="-122"/>
+                          <a:cs typeface="Times New Roman" panose="02020603050405020304" pitchFamily="18" charset="0"/>
+                        </a:rPr>
+                        <a:t>4 – 6 = 14 (GT -2)</a:t>
+                      </a:r>
+                    </a:p>
+                  </a:txBody>
+                  <a:tcPr marL="68580" marR="68580" marT="0" marB="0" anchor="ctr">
+                    <a:lnL w="12700" cap="flat" cmpd="sng" algn="ctr">
+                      <a:solidFill>
+                        <a:srgbClr val="000000"/>
+                      </a:solidFill>
+                      <a:prstDash val="solid"/>
+                      <a:round/>
+                      <a:headEnd type="none" w="med" len="med"/>
+                      <a:tailEnd type="none" w="med" len="med"/>
+                    </a:lnL>
+                    <a:lnR w="12700" cap="flat" cmpd="sng" algn="ctr">
+                      <a:solidFill>
+                        <a:srgbClr val="000000"/>
+                      </a:solidFill>
+                      <a:prstDash val="solid"/>
+                      <a:round/>
+                      <a:headEnd type="none" w="med" len="med"/>
+                      <a:tailEnd type="none" w="med" len="med"/>
+                    </a:lnR>
+                    <a:lnT w="12700" cap="flat" cmpd="sng" algn="ctr">
+                      <a:solidFill>
+                        <a:srgbClr val="000000"/>
+                      </a:solidFill>
+                      <a:prstDash val="solid"/>
+                      <a:round/>
+                      <a:headEnd type="none" w="med" len="med"/>
+                      <a:tailEnd type="none" w="med" len="med"/>
+                    </a:lnT>
+                    <a:lnB w="12700" cap="flat" cmpd="sng" algn="ctr">
+                      <a:solidFill>
+                        <a:srgbClr val="000000"/>
+                      </a:solidFill>
+                      <a:prstDash val="solid"/>
+                      <a:round/>
+                      <a:headEnd type="none" w="med" len="med"/>
+                      <a:tailEnd type="none" w="med" len="med"/>
+                    </a:lnB>
+                    <a:solidFill>
+                      <a:srgbClr val="FFFFFF"/>
+                    </a:solidFill>
+                  </a:tcPr>
+                </a:tc>
+                <a:tc>
+                  <a:txBody>
+                    <a:bodyPr/>
+                    <a:lstStyle/>
+                    <a:p>
+                      <a:pPr indent="0">
+                        <a:lnSpc>
+                          <a:spcPct val="115000"/>
+                        </a:lnSpc>
+                        <a:spcAft>
+                          <a:spcPts val="0"/>
+                        </a:spcAft>
+                        <a:buNone/>
+                      </a:pPr>
+                      <a:r>
+                        <a:rPr kumimoji="0" lang="en-US" sz="1600" b="1" kern="100" dirty="0">
+                          <a:solidFill>
+                            <a:srgbClr val="FF0000"/>
+                          </a:solidFill>
+                          <a:effectLst/>
+                          <a:latin typeface="Calibri" panose="020F0502020204030204" pitchFamily="34" charset="0"/>
+                          <a:ea typeface="DengXian" panose="02010600030101010101" pitchFamily="2" charset="-122"/>
+                          <a:cs typeface="Times New Roman" panose="02020603050405020304" pitchFamily="18" charset="0"/>
+                        </a:rPr>
+                        <a:t>4 – 6 = -2</a:t>
+                      </a:r>
+                    </a:p>
+                  </a:txBody>
+                  <a:tcPr marL="68580" marR="68580" marT="0" marB="0" anchor="ctr">
+                    <a:lnL w="12700" cap="flat" cmpd="sng" algn="ctr">
+                      <a:solidFill>
+                        <a:srgbClr val="000000"/>
+                      </a:solidFill>
+                      <a:prstDash val="solid"/>
+                      <a:round/>
+                      <a:headEnd type="none" w="med" len="med"/>
+                      <a:tailEnd type="none" w="med" len="med"/>
+                    </a:lnL>
+                    <a:lnR w="12700" cap="flat" cmpd="sng" algn="ctr">
+                      <a:solidFill>
+                        <a:srgbClr val="000000"/>
+                      </a:solidFill>
+                      <a:prstDash val="solid"/>
+                      <a:round/>
+                      <a:headEnd type="none" w="med" len="med"/>
+                      <a:tailEnd type="none" w="med" len="med"/>
+                    </a:lnR>
+                    <a:lnT w="12700" cap="flat" cmpd="sng" algn="ctr">
+                      <a:solidFill>
+                        <a:srgbClr val="000000"/>
+                      </a:solidFill>
+                      <a:prstDash val="solid"/>
+                      <a:round/>
+                      <a:headEnd type="none" w="med" len="med"/>
+                      <a:tailEnd type="none" w="med" len="med"/>
+                    </a:lnT>
+                    <a:lnB w="12700" cap="flat" cmpd="sng" algn="ctr">
+                      <a:solidFill>
+                        <a:srgbClr val="000000"/>
+                      </a:solidFill>
+                      <a:prstDash val="solid"/>
+                      <a:round/>
+                      <a:headEnd type="none" w="med" len="med"/>
+                      <a:tailEnd type="none" w="med" len="med"/>
+                    </a:lnB>
+                    <a:solidFill>
+                      <a:srgbClr val="FFFFFF"/>
+                    </a:solidFill>
+                  </a:tcPr>
+                </a:tc>
                 <a:extLst>
                   <a:ext uri="{0D108BD9-81ED-4DB2-BD59-A6C34878D82A}">
-                    <a16:rowId xmlns:a16="http://schemas.microsoft.com/office/drawing/2014/main" val="4096703682"/>
+                    <a16:rowId xmlns:a16="http://schemas.microsoft.com/office/drawing/2014/main" val="3363010056"/>
                   </a:ext>
                 </a:extLst>
               </a:tr>
@@ -26091,12 +29505,12 @@
                     <a:bodyPr/>
                     <a:lstStyle/>
                     <a:p>
-                      <a:pPr indent="140335">
+                      <a:pPr indent="0">
                         <a:lnSpc>
                           <a:spcPct val="115000"/>
                         </a:lnSpc>
                         <a:spcAft>
-                          <a:spcPts val="800"/>
+                          <a:spcPts val="0"/>
                         </a:spcAft>
                         <a:buNone/>
                       </a:pPr>
@@ -26110,7 +29524,7 @@
                           <a:ea typeface="Times New Roman" panose="02020603050405020304" pitchFamily="18" charset="0"/>
                           <a:cs typeface="Consolas" panose="020B0609020204030204" pitchFamily="49" charset="0"/>
                         </a:rPr>
-                        <a:t>1100 + 1010</a:t>
+                        <a:t>1100 - 0110</a:t>
                       </a:r>
                       <a:endParaRPr lang="en-US" sz="1800" kern="100">
                         <a:effectLst/>
@@ -26167,12 +29581,12 @@
                     <a:bodyPr/>
                     <a:lstStyle/>
                     <a:p>
-                      <a:pPr indent="140335">
+                      <a:pPr indent="0">
                         <a:lnSpc>
                           <a:spcPct val="115000"/>
                         </a:lnSpc>
                         <a:spcAft>
-                          <a:spcPts val="800"/>
+                          <a:spcPts val="0"/>
                         </a:spcAft>
                         <a:buNone/>
                       </a:pPr>
@@ -26243,12 +29657,12 @@
                     <a:bodyPr/>
                     <a:lstStyle/>
                     <a:p>
-                      <a:pPr indent="140335">
+                      <a:pPr indent="0">
                         <a:lnSpc>
                           <a:spcPct val="115000"/>
                         </a:lnSpc>
                         <a:spcAft>
-                          <a:spcPts val="800"/>
+                          <a:spcPts val="0"/>
                         </a:spcAft>
                         <a:buNone/>
                       </a:pPr>
@@ -26319,12 +29733,12 @@
                     <a:bodyPr/>
                     <a:lstStyle/>
                     <a:p>
-                      <a:pPr indent="140335">
+                      <a:pPr indent="0">
                         <a:lnSpc>
                           <a:spcPct val="115000"/>
                         </a:lnSpc>
                         <a:spcAft>
-                          <a:spcPts val="800"/>
+                          <a:spcPts val="0"/>
                         </a:spcAft>
                         <a:buNone/>
                       </a:pPr>
@@ -26395,12 +29809,12 @@
                     <a:bodyPr/>
                     <a:lstStyle/>
                     <a:p>
-                      <a:pPr indent="140335">
+                      <a:pPr indent="0">
                         <a:lnSpc>
                           <a:spcPct val="115000"/>
                         </a:lnSpc>
                         <a:spcAft>
-                          <a:spcPts val="800"/>
+                          <a:spcPts val="0"/>
                         </a:spcAft>
                         <a:buNone/>
                       </a:pPr>
@@ -26414,7 +29828,7 @@
                           <a:ea typeface="Times New Roman" panose="02020603050405020304" pitchFamily="18" charset="0"/>
                           <a:cs typeface="Times New Roman" panose="02020603050405020304" pitchFamily="18" charset="0"/>
                         </a:rPr>
-                        <a:t>N / N</a:t>
+                        <a:t>Y / N</a:t>
                       </a:r>
                       <a:endParaRPr lang="en-US" sz="1800" kern="100" dirty="0">
                         <a:effectLst/>
@@ -26466,9 +29880,149 @@
                     </a:solidFill>
                   </a:tcPr>
                 </a:tc>
+                <a:tc>
+                  <a:txBody>
+                    <a:bodyPr/>
+                    <a:lstStyle/>
+                    <a:p>
+                      <a:pPr indent="0">
+                        <a:lnSpc>
+                          <a:spcPct val="115000"/>
+                        </a:lnSpc>
+                        <a:spcAft>
+                          <a:spcPts val="0"/>
+                        </a:spcAft>
+                        <a:buNone/>
+                      </a:pPr>
+                      <a:r>
+                        <a:rPr kumimoji="0" lang="en-US" sz="1600" b="1" kern="100" dirty="0">
+                          <a:solidFill>
+                            <a:srgbClr val="FF0000"/>
+                          </a:solidFill>
+                          <a:effectLst/>
+                          <a:latin typeface="Calibri" panose="020F0502020204030204" pitchFamily="34" charset="0"/>
+                          <a:ea typeface="DengXian" panose="02010600030101010101" pitchFamily="2" charset="-122"/>
+                          <a:cs typeface="Times New Roman" panose="02020603050405020304" pitchFamily="18" charset="0"/>
+                        </a:rPr>
+                        <a:t>12 – 6 = 6</a:t>
+                      </a:r>
+                    </a:p>
+                  </a:txBody>
+                  <a:tcPr marL="68580" marR="68580" marT="0" marB="0" anchor="ctr">
+                    <a:lnL w="12700" cap="flat" cmpd="sng" algn="ctr">
+                      <a:solidFill>
+                        <a:srgbClr val="000000"/>
+                      </a:solidFill>
+                      <a:prstDash val="solid"/>
+                      <a:round/>
+                      <a:headEnd type="none" w="med" len="med"/>
+                      <a:tailEnd type="none" w="med" len="med"/>
+                    </a:lnL>
+                    <a:lnR w="12700" cap="flat" cmpd="sng" algn="ctr">
+                      <a:solidFill>
+                        <a:srgbClr val="000000"/>
+                      </a:solidFill>
+                      <a:prstDash val="solid"/>
+                      <a:round/>
+                      <a:headEnd type="none" w="med" len="med"/>
+                      <a:tailEnd type="none" w="med" len="med"/>
+                    </a:lnR>
+                    <a:lnT w="12700" cap="flat" cmpd="sng" algn="ctr">
+                      <a:solidFill>
+                        <a:srgbClr val="000000"/>
+                      </a:solidFill>
+                      <a:prstDash val="solid"/>
+                      <a:round/>
+                      <a:headEnd type="none" w="med" len="med"/>
+                      <a:tailEnd type="none" w="med" len="med"/>
+                    </a:lnT>
+                    <a:lnB w="12700" cap="flat" cmpd="sng" algn="ctr">
+                      <a:solidFill>
+                        <a:srgbClr val="000000"/>
+                      </a:solidFill>
+                      <a:prstDash val="solid"/>
+                      <a:round/>
+                      <a:headEnd type="none" w="med" len="med"/>
+                      <a:tailEnd type="none" w="med" len="med"/>
+                    </a:lnB>
+                    <a:solidFill>
+                      <a:srgbClr val="FFFFFF"/>
+                    </a:solidFill>
+                  </a:tcPr>
+                </a:tc>
+                <a:tc>
+                  <a:txBody>
+                    <a:bodyPr/>
+                    <a:lstStyle/>
+                    <a:p>
+                      <a:pPr indent="0">
+                        <a:lnSpc>
+                          <a:spcPct val="115000"/>
+                        </a:lnSpc>
+                        <a:spcAft>
+                          <a:spcPts val="0"/>
+                        </a:spcAft>
+                        <a:buNone/>
+                      </a:pPr>
+                      <a:r>
+                        <a:rPr kumimoji="0" lang="en-US" sz="1600" b="1" kern="100" dirty="0">
+                          <a:solidFill>
+                            <a:srgbClr val="FF0000"/>
+                          </a:solidFill>
+                          <a:effectLst/>
+                          <a:latin typeface="Calibri" panose="020F0502020204030204" pitchFamily="34" charset="0"/>
+                          <a:ea typeface="DengXian" panose="02010600030101010101" pitchFamily="2" charset="-122"/>
+                          <a:cs typeface="Times New Roman" panose="02020603050405020304" pitchFamily="18" charset="0"/>
+                        </a:rPr>
+                        <a:t>-4 – 6 = 6 (GT -10)</a:t>
+                      </a:r>
+                    </a:p>
+                  </a:txBody>
+                  <a:tcPr marL="68580" marR="68580" marT="0" marB="0" anchor="ctr">
+                    <a:lnL w="12700" cap="flat" cmpd="sng" algn="ctr">
+                      <a:solidFill>
+                        <a:srgbClr val="000000"/>
+                      </a:solidFill>
+                      <a:prstDash val="solid"/>
+                      <a:round/>
+                      <a:headEnd type="none" w="med" len="med"/>
+                      <a:tailEnd type="none" w="med" len="med"/>
+                    </a:lnL>
+                    <a:lnR w="12700" cap="flat" cmpd="sng" algn="ctr">
+                      <a:solidFill>
+                        <a:srgbClr val="000000"/>
+                      </a:solidFill>
+                      <a:prstDash val="solid"/>
+                      <a:round/>
+                      <a:headEnd type="none" w="med" len="med"/>
+                      <a:tailEnd type="none" w="med" len="med"/>
+                    </a:lnR>
+                    <a:lnT w="12700" cap="flat" cmpd="sng" algn="ctr">
+                      <a:solidFill>
+                        <a:srgbClr val="000000"/>
+                      </a:solidFill>
+                      <a:prstDash val="solid"/>
+                      <a:round/>
+                      <a:headEnd type="none" w="med" len="med"/>
+                      <a:tailEnd type="none" w="med" len="med"/>
+                    </a:lnT>
+                    <a:lnB w="12700" cap="flat" cmpd="sng" algn="ctr">
+                      <a:solidFill>
+                        <a:srgbClr val="000000"/>
+                      </a:solidFill>
+                      <a:prstDash val="solid"/>
+                      <a:round/>
+                      <a:headEnd type="none" w="med" len="med"/>
+                      <a:tailEnd type="none" w="med" len="med"/>
+                    </a:lnB>
+                    <a:solidFill>
+                      <a:srgbClr val="FFFFFF"/>
+                    </a:solidFill>
+                  </a:tcPr>
+                </a:tc>
                 <a:extLst>
                   <a:ext uri="{0D108BD9-81ED-4DB2-BD59-A6C34878D82A}">
-                    <a16:rowId xmlns:a16="http://schemas.microsoft.com/office/drawing/2014/main" val="2157277809"/>
+                    <a16:rowId xmlns:a16="http://schemas.microsoft.com/office/drawing/2014/main" val="1670228422"/>
                   </a:ext>
                 </a:extLst>
               </a:tr>
@@ -26478,12 +30032,12 @@
                     <a:bodyPr/>
                     <a:lstStyle/>
                     <a:p>
-                      <a:pPr indent="140335">
+                      <a:pPr indent="0">
                         <a:lnSpc>
                           <a:spcPct val="115000"/>
                         </a:lnSpc>
                         <a:spcAft>
-                          <a:spcPts val="800"/>
+                          <a:spcPts val="0"/>
                         </a:spcAft>
                         <a:buNone/>
                       </a:pPr>
@@ -26497,7 +30051,7 @@
                           <a:ea typeface="Times New Roman" panose="02020603050405020304" pitchFamily="18" charset="0"/>
                           <a:cs typeface="Consolas" panose="020B0609020204030204" pitchFamily="49" charset="0"/>
                         </a:rPr>
-                        <a:t>0100 - 0010</a:t>
+                        <a:t>0100 - 1110</a:t>
                       </a:r>
                       <a:endParaRPr lang="en-US" sz="1800" kern="100">
                         <a:effectLst/>
@@ -26554,12 +30108,12 @@
                     <a:bodyPr/>
                     <a:lstStyle/>
                     <a:p>
-                      <a:pPr indent="140335">
+                      <a:pPr indent="0">
                         <a:lnSpc>
                           <a:spcPct val="115000"/>
                         </a:lnSpc>
                         <a:spcAft>
-                          <a:spcPts val="800"/>
+                          <a:spcPts val="0"/>
                         </a:spcAft>
                         <a:buNone/>
                       </a:pPr>
@@ -26573,7 +30127,7 @@
                           <a:ea typeface="Times New Roman" panose="02020603050405020304" pitchFamily="18" charset="0"/>
                           <a:cs typeface="Consolas" panose="020B0609020204030204" pitchFamily="49" charset="0"/>
                         </a:rPr>
-                        <a:t>0010</a:t>
+                        <a:t>0110</a:t>
                       </a:r>
                       <a:endParaRPr lang="en-US" sz="1800" kern="100">
                         <a:effectLst/>
@@ -26630,88 +30184,12 @@
                     <a:bodyPr/>
                     <a:lstStyle/>
                     <a:p>
-                      <a:pPr indent="140335">
+                      <a:pPr indent="0">
                         <a:lnSpc>
                           <a:spcPct val="115000"/>
                         </a:lnSpc>
                         <a:spcAft>
-                          <a:spcPts val="800"/>
-                        </a:spcAft>
-                        <a:buNone/>
-                      </a:pPr>
-                      <a:r>
-                        <a:rPr lang="en-US" sz="1600" b="1" kern="100">
-                          <a:solidFill>
-                            <a:srgbClr val="FF0000"/>
-                          </a:solidFill>
-                          <a:effectLst/>
-                          <a:latin typeface="Calibri" panose="020F0502020204030204" pitchFamily="34" charset="0"/>
-                          <a:ea typeface="Times New Roman" panose="02020603050405020304" pitchFamily="18" charset="0"/>
-                          <a:cs typeface="Times New Roman" panose="02020603050405020304" pitchFamily="18" charset="0"/>
-                        </a:rPr>
-                        <a:t>1</a:t>
-                      </a:r>
-                      <a:endParaRPr lang="en-US" sz="1800" kern="100">
-                        <a:effectLst/>
-                        <a:latin typeface="Aptos" panose="020B0004020202020204" pitchFamily="34" charset="0"/>
-                        <a:ea typeface="DengXian" panose="02010600030101010101" pitchFamily="2" charset="-122"/>
-                        <a:cs typeface="Times New Roman" panose="02020603050405020304" pitchFamily="18" charset="0"/>
-                      </a:endParaRPr>
-                    </a:p>
-                  </a:txBody>
-                  <a:tcPr marL="68580" marR="68580" marT="0" marB="0" anchor="ctr">
-                    <a:lnL w="12700" cap="flat" cmpd="sng" algn="ctr">
-                      <a:solidFill>
-                        <a:srgbClr val="000000"/>
-                      </a:solidFill>
-                      <a:prstDash val="solid"/>
-                      <a:round/>
-                      <a:headEnd type="none" w="med" len="med"/>
-                      <a:tailEnd type="none" w="med" len="med"/>
-                    </a:lnL>
-                    <a:lnR w="12700" cap="flat" cmpd="sng" algn="ctr">
-                      <a:solidFill>
-                        <a:srgbClr val="000000"/>
-                      </a:solidFill>
-                      <a:prstDash val="solid"/>
-                      <a:round/>
-                      <a:headEnd type="none" w="med" len="med"/>
-                      <a:tailEnd type="none" w="med" len="med"/>
-                    </a:lnR>
-                    <a:lnT w="12700" cap="flat" cmpd="sng" algn="ctr">
-                      <a:solidFill>
-                        <a:srgbClr val="000000"/>
-                      </a:solidFill>
-                      <a:prstDash val="solid"/>
-                      <a:round/>
-                      <a:headEnd type="none" w="med" len="med"/>
-                      <a:tailEnd type="none" w="med" len="med"/>
-                    </a:lnT>
-                    <a:lnB w="12700" cap="flat" cmpd="sng" algn="ctr">
-                      <a:solidFill>
-                        <a:srgbClr val="000000"/>
-                      </a:solidFill>
-                      <a:prstDash val="solid"/>
-                      <a:round/>
-                      <a:headEnd type="none" w="med" len="med"/>
-                      <a:tailEnd type="none" w="med" len="med"/>
-                    </a:lnB>
-                    <a:solidFill>
-                      <a:srgbClr val="FFFFFF"/>
-                    </a:solidFill>
-                  </a:tcPr>
-                </a:tc>
-                <a:tc>
-                  <a:txBody>
-                    <a:bodyPr/>
-                    <a:lstStyle/>
-                    <a:p>
-                      <a:pPr indent="140335">
-                        <a:lnSpc>
-                          <a:spcPct val="115000"/>
-                        </a:lnSpc>
-                        <a:spcAft>
-                          <a:spcPts val="800"/>
+                          <a:spcPts val="0"/>
                         </a:spcAft>
                         <a:buNone/>
                       </a:pPr>
@@ -26782,247 +30260,12 @@
                     <a:bodyPr/>
                     <a:lstStyle/>
                     <a:p>
-                      <a:pPr indent="140335">
+                      <a:pPr indent="0">
                         <a:lnSpc>
                           <a:spcPct val="115000"/>
                         </a:lnSpc>
                         <a:spcAft>
-                          <a:spcPts val="800"/>
-                        </a:spcAft>
-                        <a:buNone/>
-                      </a:pPr>
-                      <a:r>
-                        <a:rPr lang="en-US" sz="1600" b="1" kern="100" dirty="0">
-                          <a:solidFill>
-                            <a:srgbClr val="FF0000"/>
-                          </a:solidFill>
-                          <a:effectLst/>
-                          <a:latin typeface="Calibri" panose="020F0502020204030204" pitchFamily="34" charset="0"/>
-                          <a:ea typeface="Times New Roman" panose="02020603050405020304" pitchFamily="18" charset="0"/>
-                          <a:cs typeface="Times New Roman" panose="02020603050405020304" pitchFamily="18" charset="0"/>
-                        </a:rPr>
-                        <a:t>Y / Y</a:t>
-                      </a:r>
-                      <a:endParaRPr lang="en-US" sz="1800" kern="100" dirty="0">
-                        <a:effectLst/>
-                        <a:latin typeface="Aptos" panose="020B0004020202020204" pitchFamily="34" charset="0"/>
-                        <a:ea typeface="DengXian" panose="02010600030101010101" pitchFamily="2" charset="-122"/>
-                        <a:cs typeface="Times New Roman" panose="02020603050405020304" pitchFamily="18" charset="0"/>
-                      </a:endParaRPr>
-                    </a:p>
-                  </a:txBody>
-                  <a:tcPr marL="68580" marR="68580" marT="0" marB="0" anchor="ctr">
-                    <a:lnL w="12700" cap="flat" cmpd="sng" algn="ctr">
-                      <a:solidFill>
-                        <a:srgbClr val="000000"/>
-                      </a:solidFill>
-                      <a:prstDash val="solid"/>
-                      <a:round/>
-                      <a:headEnd type="none" w="med" len="med"/>
-                      <a:tailEnd type="none" w="med" len="med"/>
-                    </a:lnL>
-                    <a:lnR w="12700" cap="flat" cmpd="sng" algn="ctr">
-                      <a:solidFill>
-                        <a:srgbClr val="000000"/>
-                      </a:solidFill>
-                      <a:prstDash val="solid"/>
-                      <a:round/>
-                      <a:headEnd type="none" w="med" len="med"/>
-                      <a:tailEnd type="none" w="med" len="med"/>
-                    </a:lnR>
-                    <a:lnT w="12700" cap="flat" cmpd="sng" algn="ctr">
-                      <a:solidFill>
-                        <a:srgbClr val="000000"/>
-                      </a:solidFill>
-                      <a:prstDash val="solid"/>
-                      <a:round/>
-                      <a:headEnd type="none" w="med" len="med"/>
-                      <a:tailEnd type="none" w="med" len="med"/>
-                    </a:lnT>
-                    <a:lnB w="12700" cap="flat" cmpd="sng" algn="ctr">
-                      <a:solidFill>
-                        <a:srgbClr val="000000"/>
-                      </a:solidFill>
-                      <a:prstDash val="solid"/>
-                      <a:round/>
-                      <a:headEnd type="none" w="med" len="med"/>
-                      <a:tailEnd type="none" w="med" len="med"/>
-                    </a:lnB>
-                    <a:solidFill>
-                      <a:srgbClr val="FFFFFF"/>
-                    </a:solidFill>
-                  </a:tcPr>
-                </a:tc>
-                <a:extLst>
-                  <a:ext uri="{0D108BD9-81ED-4DB2-BD59-A6C34878D82A}">
-                    <a16:rowId xmlns:a16="http://schemas.microsoft.com/office/drawing/2014/main" val="584716115"/>
-                  </a:ext>
-                </a:extLst>
-              </a:tr>
-              <a:tr h="332105">
-                <a:tc>
-                  <a:txBody>
-                    <a:bodyPr/>
-                    <a:lstStyle/>
-                    <a:p>
-                      <a:pPr indent="140335">
-                        <a:lnSpc>
-                          <a:spcPct val="115000"/>
-                        </a:lnSpc>
-                        <a:spcAft>
-                          <a:spcPts val="800"/>
-                        </a:spcAft>
-                        <a:buNone/>
-                      </a:pPr>
-                      <a:r>
-                        <a:rPr lang="en-US" sz="1600" b="1" kern="100">
-                          <a:solidFill>
-                            <a:srgbClr val="000000"/>
-                          </a:solidFill>
-                          <a:effectLst/>
-                          <a:latin typeface="Consolas" panose="020B0609020204030204" pitchFamily="49" charset="0"/>
-                          <a:ea typeface="Times New Roman" panose="02020603050405020304" pitchFamily="18" charset="0"/>
-                          <a:cs typeface="Consolas" panose="020B0609020204030204" pitchFamily="49" charset="0"/>
-                        </a:rPr>
-                        <a:t>0100 - 0110</a:t>
-                      </a:r>
-                      <a:endParaRPr lang="en-US" sz="1800" kern="100">
-                        <a:effectLst/>
-                        <a:latin typeface="Aptos" panose="020B0004020202020204" pitchFamily="34" charset="0"/>
-                        <a:ea typeface="DengXian" panose="02010600030101010101" pitchFamily="2" charset="-122"/>
-                        <a:cs typeface="Times New Roman" panose="02020603050405020304" pitchFamily="18" charset="0"/>
-                      </a:endParaRPr>
-                    </a:p>
-                  </a:txBody>
-                  <a:tcPr marL="68580" marR="68580" marT="0" marB="0" anchor="ctr">
-                    <a:lnL w="12700" cap="flat" cmpd="sng" algn="ctr">
-                      <a:solidFill>
-                        <a:srgbClr val="000000"/>
-                      </a:solidFill>
-                      <a:prstDash val="solid"/>
-                      <a:round/>
-                      <a:headEnd type="none" w="med" len="med"/>
-                      <a:tailEnd type="none" w="med" len="med"/>
-                    </a:lnL>
-                    <a:lnR w="12700" cap="flat" cmpd="sng" algn="ctr">
-                      <a:solidFill>
-                        <a:srgbClr val="000000"/>
-                      </a:solidFill>
-                      <a:prstDash val="solid"/>
-                      <a:round/>
-                      <a:headEnd type="none" w="med" len="med"/>
-                      <a:tailEnd type="none" w="med" len="med"/>
-                    </a:lnR>
-                    <a:lnT w="12700" cap="flat" cmpd="sng" algn="ctr">
-                      <a:solidFill>
-                        <a:srgbClr val="000000"/>
-                      </a:solidFill>
-                      <a:prstDash val="solid"/>
-                      <a:round/>
-                      <a:headEnd type="none" w="med" len="med"/>
-                      <a:tailEnd type="none" w="med" len="med"/>
-                    </a:lnT>
-                    <a:lnB w="12700" cap="flat" cmpd="sng" algn="ctr">
-                      <a:solidFill>
-                        <a:srgbClr val="000000"/>
-                      </a:solidFill>
-                      <a:prstDash val="solid"/>
-                      <a:round/>
-                      <a:headEnd type="none" w="med" len="med"/>
-                      <a:tailEnd type="none" w="med" len="med"/>
-                    </a:lnB>
-                    <a:solidFill>
-                      <a:srgbClr val="FFFFFF"/>
-                    </a:solidFill>
-                  </a:tcPr>
-                </a:tc>
-                <a:tc>
-                  <a:txBody>
-                    <a:bodyPr/>
-                    <a:lstStyle/>
-                    <a:p>
-                      <a:pPr indent="140335">
-                        <a:lnSpc>
-                          <a:spcPct val="115000"/>
-                        </a:lnSpc>
-                        <a:spcAft>
-                          <a:spcPts val="800"/>
-                        </a:spcAft>
-                        <a:buNone/>
-                      </a:pPr>
-                      <a:r>
-                        <a:rPr lang="en-US" sz="1600" b="1" kern="100">
-                          <a:solidFill>
-                            <a:srgbClr val="000000"/>
-                          </a:solidFill>
-                          <a:effectLst/>
-                          <a:latin typeface="Consolas" panose="020B0609020204030204" pitchFamily="49" charset="0"/>
-                          <a:ea typeface="Times New Roman" panose="02020603050405020304" pitchFamily="18" charset="0"/>
-                          <a:cs typeface="Consolas" panose="020B0609020204030204" pitchFamily="49" charset="0"/>
-                        </a:rPr>
-                        <a:t>1110</a:t>
-                      </a:r>
-                      <a:endParaRPr lang="en-US" sz="1800" kern="100">
-                        <a:effectLst/>
-                        <a:latin typeface="Aptos" panose="020B0004020202020204" pitchFamily="34" charset="0"/>
-                        <a:ea typeface="DengXian" panose="02010600030101010101" pitchFamily="2" charset="-122"/>
-                        <a:cs typeface="Times New Roman" panose="02020603050405020304" pitchFamily="18" charset="0"/>
-                      </a:endParaRPr>
-                    </a:p>
-                  </a:txBody>
-                  <a:tcPr marL="68580" marR="68580" marT="0" marB="0" anchor="ctr">
-                    <a:lnL w="12700" cap="flat" cmpd="sng" algn="ctr">
-                      <a:solidFill>
-                        <a:srgbClr val="000000"/>
-                      </a:solidFill>
-                      <a:prstDash val="solid"/>
-                      <a:round/>
-                      <a:headEnd type="none" w="med" len="med"/>
-                      <a:tailEnd type="none" w="med" len="med"/>
-                    </a:lnL>
-                    <a:lnR w="12700" cap="flat" cmpd="sng" algn="ctr">
-                      <a:solidFill>
-                        <a:srgbClr val="000000"/>
-                      </a:solidFill>
-                      <a:prstDash val="solid"/>
-                      <a:round/>
-                      <a:headEnd type="none" w="med" len="med"/>
-                      <a:tailEnd type="none" w="med" len="med"/>
-                    </a:lnR>
-                    <a:lnT w="12700" cap="flat" cmpd="sng" algn="ctr">
-                      <a:solidFill>
-                        <a:srgbClr val="000000"/>
-                      </a:solidFill>
-                      <a:prstDash val="solid"/>
-                      <a:round/>
-                      <a:headEnd type="none" w="med" len="med"/>
-                      <a:tailEnd type="none" w="med" len="med"/>
-                    </a:lnT>
-                    <a:lnB w="12700" cap="flat" cmpd="sng" algn="ctr">
-                      <a:solidFill>
-                        <a:srgbClr val="000000"/>
-                      </a:solidFill>
-                      <a:prstDash val="solid"/>
-                      <a:round/>
-                      <a:headEnd type="none" w="med" len="med"/>
-                      <a:tailEnd type="none" w="med" len="med"/>
-                    </a:lnB>
-                    <a:solidFill>
-                      <a:srgbClr val="FFFFFF"/>
-                    </a:solidFill>
-                  </a:tcPr>
-                </a:tc>
-                <a:tc>
-                  <a:txBody>
-                    <a:bodyPr/>
-                    <a:lstStyle/>
-                    <a:p>
-                      <a:pPr indent="140335">
-                        <a:lnSpc>
-                          <a:spcPct val="115000"/>
-                        </a:lnSpc>
-                        <a:spcAft>
-                          <a:spcPts val="800"/>
+                          <a:spcPts val="0"/>
                         </a:spcAft>
                         <a:buNone/>
                       </a:pPr>
@@ -27093,33 +30336,27 @@
                     <a:bodyPr/>
                     <a:lstStyle/>
                     <a:p>
-                      <a:pPr indent="140335">
+                      <a:pPr indent="0">
                         <a:lnSpc>
                           <a:spcPct val="115000"/>
                         </a:lnSpc>
                         <a:spcAft>
-                          <a:spcPts val="800"/>
+                          <a:spcPts val="0"/>
                         </a:spcAft>
                         <a:buNone/>
                       </a:pPr>
                       <a:r>
-                        <a:rPr lang="en-US" sz="1600" b="1" kern="100">
+                        <a:rPr kumimoji="0" lang="en-US" sz="1600" b="1" kern="100" dirty="0">
                           <a:solidFill>
                             <a:srgbClr val="FF0000"/>
                           </a:solidFill>
                           <a:effectLst/>
                           <a:latin typeface="Calibri" panose="020F0502020204030204" pitchFamily="34" charset="0"/>
-                          <a:ea typeface="Times New Roman" panose="02020603050405020304" pitchFamily="18" charset="0"/>
+                          <a:ea typeface="DengXian" panose="02010600030101010101" pitchFamily="2" charset="-122"/>
                           <a:cs typeface="Times New Roman" panose="02020603050405020304" pitchFamily="18" charset="0"/>
                         </a:rPr>
-                        <a:t>0</a:t>
+                        <a:t>N / Y</a:t>
                       </a:r>
-                      <a:endParaRPr lang="en-US" sz="1800" kern="100">
-                        <a:effectLst/>
-                        <a:latin typeface="Aptos" panose="020B0004020202020204" pitchFamily="34" charset="0"/>
-                        <a:ea typeface="DengXian" panose="02010600030101010101" pitchFamily="2" charset="-122"/>
-                        <a:cs typeface="Times New Roman" panose="02020603050405020304" pitchFamily="18" charset="0"/>
-                      </a:endParaRPr>
                     </a:p>
                   </a:txBody>
                   <a:tcPr marL="68580" marR="68580" marT="0" marB="0" anchor="ctr">
@@ -27169,116 +30406,27 @@
                     <a:bodyPr/>
                     <a:lstStyle/>
                     <a:p>
-                      <a:pPr indent="140335">
+                      <a:pPr indent="0">
                         <a:lnSpc>
                           <a:spcPct val="115000"/>
                         </a:lnSpc>
                         <a:spcAft>
-                          <a:spcPts val="800"/>
+                          <a:spcPts val="0"/>
                         </a:spcAft>
                         <a:buNone/>
                       </a:pPr>
                       <a:r>
-                        <a:rPr lang="en-US" sz="1600" b="1" kern="100" dirty="0">
+                        <a:rPr kumimoji="0" lang="en-US" sz="1600" b="1" kern="100" dirty="0">
                           <a:solidFill>
                             <a:srgbClr val="FF0000"/>
                           </a:solidFill>
                           <a:effectLst/>
                           <a:latin typeface="Calibri" panose="020F0502020204030204" pitchFamily="34" charset="0"/>
-                          <a:ea typeface="Times New Roman" panose="02020603050405020304" pitchFamily="18" charset="0"/>
+                          <a:ea typeface="DengXian" panose="02010600030101010101" pitchFamily="2" charset="-122"/>
                           <a:cs typeface="Times New Roman" panose="02020603050405020304" pitchFamily="18" charset="0"/>
                         </a:rPr>
-                        <a:t>N / Y</a:t>
+                        <a:t>4 – 14 = 6 (GT -10) </a:t>
                       </a:r>
-                      <a:endParaRPr lang="en-US" sz="1800" kern="100" dirty="0">
-                        <a:effectLst/>
-                        <a:latin typeface="Aptos" panose="020B0004020202020204" pitchFamily="34" charset="0"/>
-                        <a:ea typeface="DengXian" panose="02010600030101010101" pitchFamily="2" charset="-122"/>
-                        <a:cs typeface="Times New Roman" panose="02020603050405020304" pitchFamily="18" charset="0"/>
-                      </a:endParaRPr>
-                    </a:p>
-                  </a:txBody>
-                  <a:tcPr marL="68580" marR="68580" marT="0" marB="0" anchor="ctr">
-                    <a:lnL w="12700" cap="flat" cmpd="sng" algn="ctr">
-                      <a:solidFill>
-                        <a:srgbClr val="000000"/>
-                      </a:solidFill>
-                      <a:prstDash val="solid"/>
-                      <a:round/>
-                      <a:headEnd type="none" w="med" len="med"/>
-                      <a:tailEnd type="none" w="med" len="med"/>
-                    </a:lnL>
-                    <a:lnR w="12700" cap="flat" cmpd="sng" algn="ctr">
-                      <a:solidFill>
-                        <a:srgbClr val="000000"/>
-                      </a:solidFill>
-                      <a:prstDash val="solid"/>
-                      <a:round/>
-                      <a:headEnd type="none" w="med" len="med"/>
-                      <a:tailEnd type="none" w="med" len="med"/>
-                    </a:lnR>
-                    <a:lnT w="12700" cap="flat" cmpd="sng" algn="ctr">
-                      <a:solidFill>
-                        <a:srgbClr val="000000"/>
-                      </a:solidFill>
-                      <a:prstDash val="solid"/>
-                      <a:round/>
-                      <a:headEnd type="none" w="med" len="med"/>
-                      <a:tailEnd type="none" w="med" len="med"/>
-                    </a:lnT>
-                    <a:lnB w="12700" cap="flat" cmpd="sng" algn="ctr">
-                      <a:solidFill>
-                        <a:srgbClr val="000000"/>
-                      </a:solidFill>
-                      <a:prstDash val="solid"/>
-                      <a:round/>
-                      <a:headEnd type="none" w="med" len="med"/>
-                      <a:tailEnd type="none" w="med" len="med"/>
-                    </a:lnB>
-                    <a:solidFill>
-                      <a:srgbClr val="FFFFFF"/>
-                    </a:solidFill>
-                  </a:tcPr>
-                </a:tc>
-                <a:extLst>
-                  <a:ext uri="{0D108BD9-81ED-4DB2-BD59-A6C34878D82A}">
-                    <a16:rowId xmlns:a16="http://schemas.microsoft.com/office/drawing/2014/main" val="3363010056"/>
-                  </a:ext>
-                </a:extLst>
-              </a:tr>
-              <a:tr h="332105">
-                <a:tc>
-                  <a:txBody>
-                    <a:bodyPr/>
-                    <a:lstStyle/>
-                    <a:p>
-                      <a:pPr indent="140335">
-                        <a:lnSpc>
-                          <a:spcPct val="115000"/>
-                        </a:lnSpc>
-                        <a:spcAft>
-                          <a:spcPts val="800"/>
-                        </a:spcAft>
-                        <a:buNone/>
-                      </a:pPr>
-                      <a:r>
-                        <a:rPr lang="en-US" sz="1600" b="1" kern="100">
-                          <a:solidFill>
-                            <a:srgbClr val="000000"/>
-                          </a:solidFill>
-                          <a:effectLst/>
-                          <a:latin typeface="Consolas" panose="020B0609020204030204" pitchFamily="49" charset="0"/>
-                          <a:ea typeface="Times New Roman" panose="02020603050405020304" pitchFamily="18" charset="0"/>
-                          <a:cs typeface="Consolas" panose="020B0609020204030204" pitchFamily="49" charset="0"/>
-                        </a:rPr>
-                        <a:t>1100 - 0110</a:t>
-                      </a:r>
-                      <a:endParaRPr lang="en-US" sz="1800" kern="100">
-                        <a:effectLst/>
-                        <a:latin typeface="Aptos" panose="020B0004020202020204" pitchFamily="34" charset="0"/>
-                        <a:ea typeface="DengXian" panose="02010600030101010101" pitchFamily="2" charset="-122"/>
-                        <a:cs typeface="Times New Roman" panose="02020603050405020304" pitchFamily="18" charset="0"/>
-                      </a:endParaRPr>
                     </a:p>
                   </a:txBody>
                   <a:tcPr marL="68580" marR="68580" marT="0" marB="0" anchor="ctr">
@@ -27328,648 +30476,27 @@
                     <a:bodyPr/>
                     <a:lstStyle/>
                     <a:p>
-                      <a:pPr indent="140335">
+                      <a:pPr indent="0">
                         <a:lnSpc>
                           <a:spcPct val="115000"/>
                         </a:lnSpc>
                         <a:spcAft>
-                          <a:spcPts val="800"/>
+                          <a:spcPts val="0"/>
                         </a:spcAft>
                         <a:buNone/>
                       </a:pPr>
                       <a:r>
-                        <a:rPr lang="en-US" sz="1600" b="1" kern="100">
-                          <a:solidFill>
-                            <a:srgbClr val="000000"/>
-                          </a:solidFill>
-                          <a:effectLst/>
-                          <a:latin typeface="Consolas" panose="020B0609020204030204" pitchFamily="49" charset="0"/>
-                          <a:ea typeface="Times New Roman" panose="02020603050405020304" pitchFamily="18" charset="0"/>
-                          <a:cs typeface="Consolas" panose="020B0609020204030204" pitchFamily="49" charset="0"/>
-                        </a:rPr>
-                        <a:t>0110</a:t>
-                      </a:r>
-                      <a:endParaRPr lang="en-US" sz="1800" kern="100">
-                        <a:effectLst/>
-                        <a:latin typeface="Aptos" panose="020B0004020202020204" pitchFamily="34" charset="0"/>
-                        <a:ea typeface="DengXian" panose="02010600030101010101" pitchFamily="2" charset="-122"/>
-                        <a:cs typeface="Times New Roman" panose="02020603050405020304" pitchFamily="18" charset="0"/>
-                      </a:endParaRPr>
-                    </a:p>
-                  </a:txBody>
-                  <a:tcPr marL="68580" marR="68580" marT="0" marB="0" anchor="ctr">
-                    <a:lnL w="12700" cap="flat" cmpd="sng" algn="ctr">
-                      <a:solidFill>
-                        <a:srgbClr val="000000"/>
-                      </a:solidFill>
-                      <a:prstDash val="solid"/>
-                      <a:round/>
-                      <a:headEnd type="none" w="med" len="med"/>
-                      <a:tailEnd type="none" w="med" len="med"/>
-                    </a:lnL>
-                    <a:lnR w="12700" cap="flat" cmpd="sng" algn="ctr">
-                      <a:solidFill>
-                        <a:srgbClr val="000000"/>
-                      </a:solidFill>
-                      <a:prstDash val="solid"/>
-                      <a:round/>
-                      <a:headEnd type="none" w="med" len="med"/>
-                      <a:tailEnd type="none" w="med" len="med"/>
-                    </a:lnR>
-                    <a:lnT w="12700" cap="flat" cmpd="sng" algn="ctr">
-                      <a:solidFill>
-                        <a:srgbClr val="000000"/>
-                      </a:solidFill>
-                      <a:prstDash val="solid"/>
-                      <a:round/>
-                      <a:headEnd type="none" w="med" len="med"/>
-                      <a:tailEnd type="none" w="med" len="med"/>
-                    </a:lnT>
-                    <a:lnB w="12700" cap="flat" cmpd="sng" algn="ctr">
-                      <a:solidFill>
-                        <a:srgbClr val="000000"/>
-                      </a:solidFill>
-                      <a:prstDash val="solid"/>
-                      <a:round/>
-                      <a:headEnd type="none" w="med" len="med"/>
-                      <a:tailEnd type="none" w="med" len="med"/>
-                    </a:lnB>
-                    <a:solidFill>
-                      <a:srgbClr val="FFFFFF"/>
-                    </a:solidFill>
-                  </a:tcPr>
-                </a:tc>
-                <a:tc>
-                  <a:txBody>
-                    <a:bodyPr/>
-                    <a:lstStyle/>
-                    <a:p>
-                      <a:pPr indent="140335">
-                        <a:lnSpc>
-                          <a:spcPct val="115000"/>
-                        </a:lnSpc>
-                        <a:spcAft>
-                          <a:spcPts val="800"/>
-                        </a:spcAft>
-                        <a:buNone/>
-                      </a:pPr>
-                      <a:r>
-                        <a:rPr lang="en-US" sz="1600" b="1" kern="100">
+                        <a:rPr kumimoji="0" lang="en-US" sz="1600" b="1" kern="100" dirty="0">
                           <a:solidFill>
                             <a:srgbClr val="FF0000"/>
                           </a:solidFill>
                           <a:effectLst/>
                           <a:latin typeface="Calibri" panose="020F0502020204030204" pitchFamily="34" charset="0"/>
-                          <a:ea typeface="Times New Roman" panose="02020603050405020304" pitchFamily="18" charset="0"/>
+                          <a:ea typeface="DengXian" panose="02010600030101010101" pitchFamily="2" charset="-122"/>
                           <a:cs typeface="Times New Roman" panose="02020603050405020304" pitchFamily="18" charset="0"/>
                         </a:rPr>
-                        <a:t>1</a:t>
+                        <a:t>4 – (-2) = 6 </a:t>
                       </a:r>
-                      <a:endParaRPr lang="en-US" sz="1800" kern="100">
-                        <a:effectLst/>
-                        <a:latin typeface="Aptos" panose="020B0004020202020204" pitchFamily="34" charset="0"/>
-                        <a:ea typeface="DengXian" panose="02010600030101010101" pitchFamily="2" charset="-122"/>
-                        <a:cs typeface="Times New Roman" panose="02020603050405020304" pitchFamily="18" charset="0"/>
-                      </a:endParaRPr>
-                    </a:p>
-                  </a:txBody>
-                  <a:tcPr marL="68580" marR="68580" marT="0" marB="0" anchor="ctr">
-                    <a:lnL w="12700" cap="flat" cmpd="sng" algn="ctr">
-                      <a:solidFill>
-                        <a:srgbClr val="000000"/>
-                      </a:solidFill>
-                      <a:prstDash val="solid"/>
-                      <a:round/>
-                      <a:headEnd type="none" w="med" len="med"/>
-                      <a:tailEnd type="none" w="med" len="med"/>
-                    </a:lnL>
-                    <a:lnR w="12700" cap="flat" cmpd="sng" algn="ctr">
-                      <a:solidFill>
-                        <a:srgbClr val="000000"/>
-                      </a:solidFill>
-                      <a:prstDash val="solid"/>
-                      <a:round/>
-                      <a:headEnd type="none" w="med" len="med"/>
-                      <a:tailEnd type="none" w="med" len="med"/>
-                    </a:lnR>
-                    <a:lnT w="12700" cap="flat" cmpd="sng" algn="ctr">
-                      <a:solidFill>
-                        <a:srgbClr val="000000"/>
-                      </a:solidFill>
-                      <a:prstDash val="solid"/>
-                      <a:round/>
-                      <a:headEnd type="none" w="med" len="med"/>
-                      <a:tailEnd type="none" w="med" len="med"/>
-                    </a:lnT>
-                    <a:lnB w="12700" cap="flat" cmpd="sng" algn="ctr">
-                      <a:solidFill>
-                        <a:srgbClr val="000000"/>
-                      </a:solidFill>
-                      <a:prstDash val="solid"/>
-                      <a:round/>
-                      <a:headEnd type="none" w="med" len="med"/>
-                      <a:tailEnd type="none" w="med" len="med"/>
-                    </a:lnB>
-                    <a:solidFill>
-                      <a:srgbClr val="FFFFFF"/>
-                    </a:solidFill>
-                  </a:tcPr>
-                </a:tc>
-                <a:tc>
-                  <a:txBody>
-                    <a:bodyPr/>
-                    <a:lstStyle/>
-                    <a:p>
-                      <a:pPr indent="140335">
-                        <a:lnSpc>
-                          <a:spcPct val="115000"/>
-                        </a:lnSpc>
-                        <a:spcAft>
-                          <a:spcPts val="800"/>
-                        </a:spcAft>
-                        <a:buNone/>
-                      </a:pPr>
-                      <a:r>
-                        <a:rPr lang="en-US" sz="1600" b="1" kern="100">
-                          <a:solidFill>
-                            <a:srgbClr val="FF0000"/>
-                          </a:solidFill>
-                          <a:effectLst/>
-                          <a:latin typeface="Calibri" panose="020F0502020204030204" pitchFamily="34" charset="0"/>
-                          <a:ea typeface="Times New Roman" panose="02020603050405020304" pitchFamily="18" charset="0"/>
-                          <a:cs typeface="Times New Roman" panose="02020603050405020304" pitchFamily="18" charset="0"/>
-                        </a:rPr>
-                        <a:t>1</a:t>
-                      </a:r>
-                      <a:endParaRPr lang="en-US" sz="1800" kern="100">
-                        <a:effectLst/>
-                        <a:latin typeface="Aptos" panose="020B0004020202020204" pitchFamily="34" charset="0"/>
-                        <a:ea typeface="DengXian" panose="02010600030101010101" pitchFamily="2" charset="-122"/>
-                        <a:cs typeface="Times New Roman" panose="02020603050405020304" pitchFamily="18" charset="0"/>
-                      </a:endParaRPr>
-                    </a:p>
-                  </a:txBody>
-                  <a:tcPr marL="68580" marR="68580" marT="0" marB="0" anchor="ctr">
-                    <a:lnL w="12700" cap="flat" cmpd="sng" algn="ctr">
-                      <a:solidFill>
-                        <a:srgbClr val="000000"/>
-                      </a:solidFill>
-                      <a:prstDash val="solid"/>
-                      <a:round/>
-                      <a:headEnd type="none" w="med" len="med"/>
-                      <a:tailEnd type="none" w="med" len="med"/>
-                    </a:lnL>
-                    <a:lnR w="12700" cap="flat" cmpd="sng" algn="ctr">
-                      <a:solidFill>
-                        <a:srgbClr val="000000"/>
-                      </a:solidFill>
-                      <a:prstDash val="solid"/>
-                      <a:round/>
-                      <a:headEnd type="none" w="med" len="med"/>
-                      <a:tailEnd type="none" w="med" len="med"/>
-                    </a:lnR>
-                    <a:lnT w="12700" cap="flat" cmpd="sng" algn="ctr">
-                      <a:solidFill>
-                        <a:srgbClr val="000000"/>
-                      </a:solidFill>
-                      <a:prstDash val="solid"/>
-                      <a:round/>
-                      <a:headEnd type="none" w="med" len="med"/>
-                      <a:tailEnd type="none" w="med" len="med"/>
-                    </a:lnT>
-                    <a:lnB w="12700" cap="flat" cmpd="sng" algn="ctr">
-                      <a:solidFill>
-                        <a:srgbClr val="000000"/>
-                      </a:solidFill>
-                      <a:prstDash val="solid"/>
-                      <a:round/>
-                      <a:headEnd type="none" w="med" len="med"/>
-                      <a:tailEnd type="none" w="med" len="med"/>
-                    </a:lnB>
-                    <a:solidFill>
-                      <a:srgbClr val="FFFFFF"/>
-                    </a:solidFill>
-                  </a:tcPr>
-                </a:tc>
-                <a:tc>
-                  <a:txBody>
-                    <a:bodyPr/>
-                    <a:lstStyle/>
-                    <a:p>
-                      <a:pPr indent="140335">
-                        <a:lnSpc>
-                          <a:spcPct val="115000"/>
-                        </a:lnSpc>
-                        <a:spcAft>
-                          <a:spcPts val="800"/>
-                        </a:spcAft>
-                        <a:buNone/>
-                      </a:pPr>
-                      <a:r>
-                        <a:rPr lang="en-US" sz="1600" b="1" kern="100" dirty="0">
-                          <a:solidFill>
-                            <a:srgbClr val="FF0000"/>
-                          </a:solidFill>
-                          <a:effectLst/>
-                          <a:latin typeface="Calibri" panose="020F0502020204030204" pitchFamily="34" charset="0"/>
-                          <a:ea typeface="Times New Roman" panose="02020603050405020304" pitchFamily="18" charset="0"/>
-                          <a:cs typeface="Times New Roman" panose="02020603050405020304" pitchFamily="18" charset="0"/>
-                        </a:rPr>
-                        <a:t>Y / N</a:t>
-                      </a:r>
-                      <a:endParaRPr lang="en-US" sz="1800" kern="100" dirty="0">
-                        <a:effectLst/>
-                        <a:latin typeface="Aptos" panose="020B0004020202020204" pitchFamily="34" charset="0"/>
-                        <a:ea typeface="DengXian" panose="02010600030101010101" pitchFamily="2" charset="-122"/>
-                        <a:cs typeface="Times New Roman" panose="02020603050405020304" pitchFamily="18" charset="0"/>
-                      </a:endParaRPr>
-                    </a:p>
-                  </a:txBody>
-                  <a:tcPr marL="68580" marR="68580" marT="0" marB="0" anchor="ctr">
-                    <a:lnL w="12700" cap="flat" cmpd="sng" algn="ctr">
-                      <a:solidFill>
-                        <a:srgbClr val="000000"/>
-                      </a:solidFill>
-                      <a:prstDash val="solid"/>
-                      <a:round/>
-                      <a:headEnd type="none" w="med" len="med"/>
-                      <a:tailEnd type="none" w="med" len="med"/>
-                    </a:lnL>
-                    <a:lnR w="12700" cap="flat" cmpd="sng" algn="ctr">
-                      <a:solidFill>
-                        <a:srgbClr val="000000"/>
-                      </a:solidFill>
-                      <a:prstDash val="solid"/>
-                      <a:round/>
-                      <a:headEnd type="none" w="med" len="med"/>
-                      <a:tailEnd type="none" w="med" len="med"/>
-                    </a:lnR>
-                    <a:lnT w="12700" cap="flat" cmpd="sng" algn="ctr">
-                      <a:solidFill>
-                        <a:srgbClr val="000000"/>
-                      </a:solidFill>
-                      <a:prstDash val="solid"/>
-                      <a:round/>
-                      <a:headEnd type="none" w="med" len="med"/>
-                      <a:tailEnd type="none" w="med" len="med"/>
-                    </a:lnT>
-                    <a:lnB w="12700" cap="flat" cmpd="sng" algn="ctr">
-                      <a:solidFill>
-                        <a:srgbClr val="000000"/>
-                      </a:solidFill>
-                      <a:prstDash val="solid"/>
-                      <a:round/>
-                      <a:headEnd type="none" w="med" len="med"/>
-                      <a:tailEnd type="none" w="med" len="med"/>
-                    </a:lnB>
-                    <a:solidFill>
-                      <a:srgbClr val="FFFFFF"/>
-                    </a:solidFill>
-                  </a:tcPr>
-                </a:tc>
-                <a:extLst>
-                  <a:ext uri="{0D108BD9-81ED-4DB2-BD59-A6C34878D82A}">
-                    <a16:rowId xmlns:a16="http://schemas.microsoft.com/office/drawing/2014/main" val="1670228422"/>
-                  </a:ext>
-                </a:extLst>
-              </a:tr>
-              <a:tr h="332105">
-                <a:tc>
-                  <a:txBody>
-                    <a:bodyPr/>
-                    <a:lstStyle/>
-                    <a:p>
-                      <a:pPr indent="140335">
-                        <a:lnSpc>
-                          <a:spcPct val="115000"/>
-                        </a:lnSpc>
-                        <a:spcAft>
-                          <a:spcPts val="800"/>
-                        </a:spcAft>
-                        <a:buNone/>
-                      </a:pPr>
-                      <a:r>
-                        <a:rPr lang="en-US" sz="1600" b="1" kern="100">
-                          <a:solidFill>
-                            <a:srgbClr val="000000"/>
-                          </a:solidFill>
-                          <a:effectLst/>
-                          <a:latin typeface="Consolas" panose="020B0609020204030204" pitchFamily="49" charset="0"/>
-                          <a:ea typeface="Times New Roman" panose="02020603050405020304" pitchFamily="18" charset="0"/>
-                          <a:cs typeface="Consolas" panose="020B0609020204030204" pitchFamily="49" charset="0"/>
-                        </a:rPr>
-                        <a:t>0100 - 1110</a:t>
-                      </a:r>
-                      <a:endParaRPr lang="en-US" sz="1800" kern="100">
-                        <a:effectLst/>
-                        <a:latin typeface="Aptos" panose="020B0004020202020204" pitchFamily="34" charset="0"/>
-                        <a:ea typeface="DengXian" panose="02010600030101010101" pitchFamily="2" charset="-122"/>
-                        <a:cs typeface="Times New Roman" panose="02020603050405020304" pitchFamily="18" charset="0"/>
-                      </a:endParaRPr>
-                    </a:p>
-                  </a:txBody>
-                  <a:tcPr marL="68580" marR="68580" marT="0" marB="0" anchor="ctr">
-                    <a:lnL w="12700" cap="flat" cmpd="sng" algn="ctr">
-                      <a:solidFill>
-                        <a:srgbClr val="000000"/>
-                      </a:solidFill>
-                      <a:prstDash val="solid"/>
-                      <a:round/>
-                      <a:headEnd type="none" w="med" len="med"/>
-                      <a:tailEnd type="none" w="med" len="med"/>
-                    </a:lnL>
-                    <a:lnR w="12700" cap="flat" cmpd="sng" algn="ctr">
-                      <a:solidFill>
-                        <a:srgbClr val="000000"/>
-                      </a:solidFill>
-                      <a:prstDash val="solid"/>
-                      <a:round/>
-                      <a:headEnd type="none" w="med" len="med"/>
-                      <a:tailEnd type="none" w="med" len="med"/>
-                    </a:lnR>
-                    <a:lnT w="12700" cap="flat" cmpd="sng" algn="ctr">
-                      <a:solidFill>
-                        <a:srgbClr val="000000"/>
-                      </a:solidFill>
-                      <a:prstDash val="solid"/>
-                      <a:round/>
-                      <a:headEnd type="none" w="med" len="med"/>
-                      <a:tailEnd type="none" w="med" len="med"/>
-                    </a:lnT>
-                    <a:lnB w="12700" cap="flat" cmpd="sng" algn="ctr">
-                      <a:solidFill>
-                        <a:srgbClr val="000000"/>
-                      </a:solidFill>
-                      <a:prstDash val="solid"/>
-                      <a:round/>
-                      <a:headEnd type="none" w="med" len="med"/>
-                      <a:tailEnd type="none" w="med" len="med"/>
-                    </a:lnB>
-                    <a:solidFill>
-                      <a:srgbClr val="FFFFFF"/>
-                    </a:solidFill>
-                  </a:tcPr>
-                </a:tc>
-                <a:tc>
-                  <a:txBody>
-                    <a:bodyPr/>
-                    <a:lstStyle/>
-                    <a:p>
-                      <a:pPr indent="140335">
-                        <a:lnSpc>
-                          <a:spcPct val="115000"/>
-                        </a:lnSpc>
-                        <a:spcAft>
-                          <a:spcPts val="800"/>
-                        </a:spcAft>
-                        <a:buNone/>
-                      </a:pPr>
-                      <a:r>
-                        <a:rPr lang="en-US" sz="1600" b="1" kern="100">
-                          <a:solidFill>
-                            <a:srgbClr val="000000"/>
-                          </a:solidFill>
-                          <a:effectLst/>
-                          <a:latin typeface="Consolas" panose="020B0609020204030204" pitchFamily="49" charset="0"/>
-                          <a:ea typeface="Times New Roman" panose="02020603050405020304" pitchFamily="18" charset="0"/>
-                          <a:cs typeface="Consolas" panose="020B0609020204030204" pitchFamily="49" charset="0"/>
-                        </a:rPr>
-                        <a:t>0110</a:t>
-                      </a:r>
-                      <a:endParaRPr lang="en-US" sz="1800" kern="100">
-                        <a:effectLst/>
-                        <a:latin typeface="Aptos" panose="020B0004020202020204" pitchFamily="34" charset="0"/>
-                        <a:ea typeface="DengXian" panose="02010600030101010101" pitchFamily="2" charset="-122"/>
-                        <a:cs typeface="Times New Roman" panose="02020603050405020304" pitchFamily="18" charset="0"/>
-                      </a:endParaRPr>
-                    </a:p>
-                  </a:txBody>
-                  <a:tcPr marL="68580" marR="68580" marT="0" marB="0" anchor="ctr">
-                    <a:lnL w="12700" cap="flat" cmpd="sng" algn="ctr">
-                      <a:solidFill>
-                        <a:srgbClr val="000000"/>
-                      </a:solidFill>
-                      <a:prstDash val="solid"/>
-                      <a:round/>
-                      <a:headEnd type="none" w="med" len="med"/>
-                      <a:tailEnd type="none" w="med" len="med"/>
-                    </a:lnL>
-                    <a:lnR w="12700" cap="flat" cmpd="sng" algn="ctr">
-                      <a:solidFill>
-                        <a:srgbClr val="000000"/>
-                      </a:solidFill>
-                      <a:prstDash val="solid"/>
-                      <a:round/>
-                      <a:headEnd type="none" w="med" len="med"/>
-                      <a:tailEnd type="none" w="med" len="med"/>
-                    </a:lnR>
-                    <a:lnT w="12700" cap="flat" cmpd="sng" algn="ctr">
-                      <a:solidFill>
-                        <a:srgbClr val="000000"/>
-                      </a:solidFill>
-                      <a:prstDash val="solid"/>
-                      <a:round/>
-                      <a:headEnd type="none" w="med" len="med"/>
-                      <a:tailEnd type="none" w="med" len="med"/>
-                    </a:lnT>
-                    <a:lnB w="12700" cap="flat" cmpd="sng" algn="ctr">
-                      <a:solidFill>
-                        <a:srgbClr val="000000"/>
-                      </a:solidFill>
-                      <a:prstDash val="solid"/>
-                      <a:round/>
-                      <a:headEnd type="none" w="med" len="med"/>
-                      <a:tailEnd type="none" w="med" len="med"/>
-                    </a:lnB>
-                    <a:solidFill>
-                      <a:srgbClr val="FFFFFF"/>
-                    </a:solidFill>
-                  </a:tcPr>
-                </a:tc>
-                <a:tc>
-                  <a:txBody>
-                    <a:bodyPr/>
-                    <a:lstStyle/>
-                    <a:p>
-                      <a:pPr indent="140335">
-                        <a:lnSpc>
-                          <a:spcPct val="115000"/>
-                        </a:lnSpc>
-                        <a:spcAft>
-                          <a:spcPts val="800"/>
-                        </a:spcAft>
-                        <a:buNone/>
-                      </a:pPr>
-                      <a:r>
-                        <a:rPr lang="en-US" sz="1600" b="1" kern="100">
-                          <a:solidFill>
-                            <a:srgbClr val="FF0000"/>
-                          </a:solidFill>
-                          <a:effectLst/>
-                          <a:latin typeface="Calibri" panose="020F0502020204030204" pitchFamily="34" charset="0"/>
-                          <a:ea typeface="Times New Roman" panose="02020603050405020304" pitchFamily="18" charset="0"/>
-                          <a:cs typeface="Times New Roman" panose="02020603050405020304" pitchFamily="18" charset="0"/>
-                        </a:rPr>
-                        <a:t>0</a:t>
-                      </a:r>
-                      <a:endParaRPr lang="en-US" sz="1800" kern="100">
-                        <a:effectLst/>
-                        <a:latin typeface="Aptos" panose="020B0004020202020204" pitchFamily="34" charset="0"/>
-                        <a:ea typeface="DengXian" panose="02010600030101010101" pitchFamily="2" charset="-122"/>
-                        <a:cs typeface="Times New Roman" panose="02020603050405020304" pitchFamily="18" charset="0"/>
-                      </a:endParaRPr>
-                    </a:p>
-                  </a:txBody>
-                  <a:tcPr marL="68580" marR="68580" marT="0" marB="0" anchor="ctr">
-                    <a:lnL w="12700" cap="flat" cmpd="sng" algn="ctr">
-                      <a:solidFill>
-                        <a:srgbClr val="000000"/>
-                      </a:solidFill>
-                      <a:prstDash val="solid"/>
-                      <a:round/>
-                      <a:headEnd type="none" w="med" len="med"/>
-                      <a:tailEnd type="none" w="med" len="med"/>
-                    </a:lnL>
-                    <a:lnR w="12700" cap="flat" cmpd="sng" algn="ctr">
-                      <a:solidFill>
-                        <a:srgbClr val="000000"/>
-                      </a:solidFill>
-                      <a:prstDash val="solid"/>
-                      <a:round/>
-                      <a:headEnd type="none" w="med" len="med"/>
-                      <a:tailEnd type="none" w="med" len="med"/>
-                    </a:lnR>
-                    <a:lnT w="12700" cap="flat" cmpd="sng" algn="ctr">
-                      <a:solidFill>
-                        <a:srgbClr val="000000"/>
-                      </a:solidFill>
-                      <a:prstDash val="solid"/>
-                      <a:round/>
-                      <a:headEnd type="none" w="med" len="med"/>
-                      <a:tailEnd type="none" w="med" len="med"/>
-                    </a:lnT>
-                    <a:lnB w="12700" cap="flat" cmpd="sng" algn="ctr">
-                      <a:solidFill>
-                        <a:srgbClr val="000000"/>
-                      </a:solidFill>
-                      <a:prstDash val="solid"/>
-                      <a:round/>
-                      <a:headEnd type="none" w="med" len="med"/>
-                      <a:tailEnd type="none" w="med" len="med"/>
-                    </a:lnB>
-                    <a:solidFill>
-                      <a:srgbClr val="FFFFFF"/>
-                    </a:solidFill>
-                  </a:tcPr>
-                </a:tc>
-                <a:tc>
-                  <a:txBody>
-                    <a:bodyPr/>
-                    <a:lstStyle/>
-                    <a:p>
-                      <a:pPr indent="140335">
-                        <a:lnSpc>
-                          <a:spcPct val="115000"/>
-                        </a:lnSpc>
-                        <a:spcAft>
-                          <a:spcPts val="800"/>
-                        </a:spcAft>
-                        <a:buNone/>
-                      </a:pPr>
-                      <a:r>
-                        <a:rPr lang="en-US" sz="1600" b="1" kern="100">
-                          <a:solidFill>
-                            <a:srgbClr val="FF0000"/>
-                          </a:solidFill>
-                          <a:effectLst/>
-                          <a:latin typeface="Calibri" panose="020F0502020204030204" pitchFamily="34" charset="0"/>
-                          <a:ea typeface="Times New Roman" panose="02020603050405020304" pitchFamily="18" charset="0"/>
-                          <a:cs typeface="Times New Roman" panose="02020603050405020304" pitchFamily="18" charset="0"/>
-                        </a:rPr>
-                        <a:t>0</a:t>
-                      </a:r>
-                      <a:endParaRPr lang="en-US" sz="1800" kern="100">
-                        <a:effectLst/>
-                        <a:latin typeface="Aptos" panose="020B0004020202020204" pitchFamily="34" charset="0"/>
-                        <a:ea typeface="DengXian" panose="02010600030101010101" pitchFamily="2" charset="-122"/>
-                        <a:cs typeface="Times New Roman" panose="02020603050405020304" pitchFamily="18" charset="0"/>
-                      </a:endParaRPr>
-                    </a:p>
-                  </a:txBody>
-                  <a:tcPr marL="68580" marR="68580" marT="0" marB="0" anchor="ctr">
-                    <a:lnL w="12700" cap="flat" cmpd="sng" algn="ctr">
-                      <a:solidFill>
-                        <a:srgbClr val="000000"/>
-                      </a:solidFill>
-                      <a:prstDash val="solid"/>
-                      <a:round/>
-                      <a:headEnd type="none" w="med" len="med"/>
-                      <a:tailEnd type="none" w="med" len="med"/>
-                    </a:lnL>
-                    <a:lnR w="12700" cap="flat" cmpd="sng" algn="ctr">
-                      <a:solidFill>
-                        <a:srgbClr val="000000"/>
-                      </a:solidFill>
-                      <a:prstDash val="solid"/>
-                      <a:round/>
-                      <a:headEnd type="none" w="med" len="med"/>
-                      <a:tailEnd type="none" w="med" len="med"/>
-                    </a:lnR>
-                    <a:lnT w="12700" cap="flat" cmpd="sng" algn="ctr">
-                      <a:solidFill>
-                        <a:srgbClr val="000000"/>
-                      </a:solidFill>
-                      <a:prstDash val="solid"/>
-                      <a:round/>
-                      <a:headEnd type="none" w="med" len="med"/>
-                      <a:tailEnd type="none" w="med" len="med"/>
-                    </a:lnT>
-                    <a:lnB w="12700" cap="flat" cmpd="sng" algn="ctr">
-                      <a:solidFill>
-                        <a:srgbClr val="000000"/>
-                      </a:solidFill>
-                      <a:prstDash val="solid"/>
-                      <a:round/>
-                      <a:headEnd type="none" w="med" len="med"/>
-                      <a:tailEnd type="none" w="med" len="med"/>
-                    </a:lnB>
-                    <a:solidFill>
-                      <a:srgbClr val="FFFFFF"/>
-                    </a:solidFill>
-                  </a:tcPr>
-                </a:tc>
-                <a:tc>
-                  <a:txBody>
-                    <a:bodyPr/>
-                    <a:lstStyle/>
-                    <a:p>
-                      <a:pPr indent="140335">
-                        <a:lnSpc>
-                          <a:spcPct val="115000"/>
-                        </a:lnSpc>
-                        <a:spcAft>
-                          <a:spcPts val="800"/>
-                        </a:spcAft>
-                        <a:buNone/>
-                      </a:pPr>
-                      <a:r>
-                        <a:rPr lang="en-US" sz="1600" b="1" kern="100" dirty="0">
-                          <a:solidFill>
-                            <a:srgbClr val="FF0000"/>
-                          </a:solidFill>
-                          <a:effectLst/>
-                          <a:latin typeface="Calibri" panose="020F0502020204030204" pitchFamily="34" charset="0"/>
-                          <a:ea typeface="Times New Roman" panose="02020603050405020304" pitchFamily="18" charset="0"/>
-                          <a:cs typeface="Times New Roman" panose="02020603050405020304" pitchFamily="18" charset="0"/>
-                        </a:rPr>
-                        <a:t>N / Y</a:t>
-                      </a:r>
-                      <a:endParaRPr lang="en-US" sz="1800" kern="100" dirty="0">
-                        <a:effectLst/>
-                        <a:latin typeface="Aptos" panose="020B0004020202020204" pitchFamily="34" charset="0"/>
-                        <a:ea typeface="DengXian" panose="02010600030101010101" pitchFamily="2" charset="-122"/>
-                        <a:cs typeface="Times New Roman" panose="02020603050405020304" pitchFamily="18" charset="0"/>
-                      </a:endParaRPr>
                     </a:p>
                   </a:txBody>
                   <a:tcPr marL="68580" marR="68580" marT="0" marB="0" anchor="ctr">
@@ -28043,16 +30570,25 @@
         <p:spPr>
           <a:xfrm>
             <a:off x="457200" y="1219200"/>
-            <a:ext cx="8229600" cy="4937760"/>
+            <a:ext cx="8229600" cy="838200"/>
           </a:xfrm>
         </p:spPr>
         <p:txBody>
-          <a:bodyPr/>
+          <a:bodyPr>
+            <a:normAutofit fontScale="77500" lnSpcReduction="20000"/>
+          </a:bodyPr>
           <a:lstStyle/>
           <a:p>
             <a:r>
               <a:rPr lang="en-US" dirty="0"/>
               <a:t>For a 4-bit system, calculate the result of summation, setting C and V flags</a:t>
+            </a:r>
+          </a:p>
+          <a:p>
+            <a:pPr lvl="1"/>
+            <a:r>
+              <a:rPr lang="en-US" dirty="0"/>
+              <a:t>For a 4-bit system, unsigned range is [0, 15], signed range is [-8, 7]</a:t>
             </a:r>
           </a:p>
         </p:txBody>
@@ -30096,7 +32632,7 @@
           <p:nvPr>
             <p:extLst>
               <p:ext uri="{D42A27DB-BD31-4B8C-83A1-F6EECF244321}">
-                <p14:modId xmlns:p14="http://schemas.microsoft.com/office/powerpoint/2010/main" val="2951171038"/>
+                <p14:modId xmlns:p14="http://schemas.microsoft.com/office/powerpoint/2010/main" val="525682783"/>
               </p:ext>
             </p:extLst>
           </p:nvPr>
@@ -30353,7 +32889,7 @@
                       <a:pPr algn="ctr"/>
                       <a:r>
                         <a:rPr lang="en-US" sz="2800" dirty="0"/>
-                        <a:t>0</a:t>
+                        <a:t>1</a:t>
                       </a:r>
                     </a:p>
                   </a:txBody>
@@ -30473,6 +33009,146 @@
             <a:r>
               <a:rPr lang="en-US" sz="2800" dirty="0"/>
               <a:t>V = 1</a:t>
+            </a:r>
+          </a:p>
+        </p:txBody>
+      </p:sp>
+      <p:sp>
+        <p:nvSpPr>
+          <p:cNvPr id="8" name="TextBox 7">
+            <a:extLst>
+              <a:ext uri="{FF2B5EF4-FFF2-40B4-BE49-F238E27FC236}">
+                <a16:creationId xmlns:a16="http://schemas.microsoft.com/office/drawing/2014/main" id="{BCCAC2F7-7B48-A7B1-D707-D63B0BCE4A2D}"/>
+              </a:ext>
+            </a:extLst>
+          </p:cNvPr>
+          <p:cNvSpPr txBox="1"/>
+          <p:nvPr/>
+        </p:nvSpPr>
+        <p:spPr>
+          <a:xfrm>
+            <a:off x="8149434" y="1358604"/>
+            <a:ext cx="794128" cy="400110"/>
+          </a:xfrm>
+          <a:prstGeom prst="rect">
+            <a:avLst/>
+          </a:prstGeom>
+          <a:noFill/>
+        </p:spPr>
+        <p:txBody>
+          <a:bodyPr wrap="none" rtlCol="0">
+            <a:spAutoFit/>
+          </a:bodyPr>
+          <a:lstStyle/>
+          <a:p>
+            <a:r>
+              <a:rPr lang="en-US" sz="2000" dirty="0"/>
+              <a:t>Carry</a:t>
+            </a:r>
+          </a:p>
+        </p:txBody>
+      </p:sp>
+      <p:sp>
+        <p:nvSpPr>
+          <p:cNvPr id="9" name="TextBox 8">
+            <a:extLst>
+              <a:ext uri="{FF2B5EF4-FFF2-40B4-BE49-F238E27FC236}">
+                <a16:creationId xmlns:a16="http://schemas.microsoft.com/office/drawing/2014/main" id="{E691C844-4BC0-0B20-B37E-D78145261753}"/>
+              </a:ext>
+            </a:extLst>
+          </p:cNvPr>
+          <p:cNvSpPr txBox="1"/>
+          <p:nvPr/>
+        </p:nvSpPr>
+        <p:spPr>
+          <a:xfrm>
+            <a:off x="3972576" y="1358604"/>
+            <a:ext cx="794128" cy="400110"/>
+          </a:xfrm>
+          <a:prstGeom prst="rect">
+            <a:avLst/>
+          </a:prstGeom>
+          <a:noFill/>
+        </p:spPr>
+        <p:txBody>
+          <a:bodyPr wrap="none" rtlCol="0">
+            <a:spAutoFit/>
+          </a:bodyPr>
+          <a:lstStyle/>
+          <a:p>
+            <a:r>
+              <a:rPr lang="en-US" sz="2000" dirty="0"/>
+              <a:t>Carry</a:t>
+            </a:r>
+          </a:p>
+        </p:txBody>
+      </p:sp>
+      <p:sp>
+        <p:nvSpPr>
+          <p:cNvPr id="10" name="TextBox 9">
+            <a:extLst>
+              <a:ext uri="{FF2B5EF4-FFF2-40B4-BE49-F238E27FC236}">
+                <a16:creationId xmlns:a16="http://schemas.microsoft.com/office/drawing/2014/main" id="{EDCEFAB5-9995-5D1A-7108-FE6877E0AFFF}"/>
+              </a:ext>
+            </a:extLst>
+          </p:cNvPr>
+          <p:cNvSpPr txBox="1"/>
+          <p:nvPr/>
+        </p:nvSpPr>
+        <p:spPr>
+          <a:xfrm>
+            <a:off x="3972576" y="3937849"/>
+            <a:ext cx="794128" cy="400110"/>
+          </a:xfrm>
+          <a:prstGeom prst="rect">
+            <a:avLst/>
+          </a:prstGeom>
+          <a:noFill/>
+        </p:spPr>
+        <p:txBody>
+          <a:bodyPr wrap="none" rtlCol="0">
+            <a:spAutoFit/>
+          </a:bodyPr>
+          <a:lstStyle/>
+          <a:p>
+            <a:r>
+              <a:rPr lang="en-US" sz="2000" dirty="0"/>
+              <a:t>Carry</a:t>
+            </a:r>
+          </a:p>
+        </p:txBody>
+      </p:sp>
+      <p:sp>
+        <p:nvSpPr>
+          <p:cNvPr id="11" name="TextBox 10">
+            <a:extLst>
+              <a:ext uri="{FF2B5EF4-FFF2-40B4-BE49-F238E27FC236}">
+                <a16:creationId xmlns:a16="http://schemas.microsoft.com/office/drawing/2014/main" id="{91BA33C9-48DD-5A86-81ED-82377FB93AD6}"/>
+              </a:ext>
+            </a:extLst>
+          </p:cNvPr>
+          <p:cNvSpPr txBox="1"/>
+          <p:nvPr/>
+        </p:nvSpPr>
+        <p:spPr>
+          <a:xfrm>
+            <a:off x="8192504" y="3937849"/>
+            <a:ext cx="794128" cy="400110"/>
+          </a:xfrm>
+          <a:prstGeom prst="rect">
+            <a:avLst/>
+          </a:prstGeom>
+          <a:noFill/>
+        </p:spPr>
+        <p:txBody>
+          <a:bodyPr wrap="none" rtlCol="0">
+            <a:spAutoFit/>
+          </a:bodyPr>
+          <a:lstStyle/>
+          <a:p>
+            <a:r>
+              <a:rPr lang="en-US" sz="2000" dirty="0"/>
+              <a:t>Carry</a:t>
             </a:r>
           </a:p>
         </p:txBody>
@@ -30955,7 +33631,7 @@
           <p:nvPr>
             <p:extLst>
               <p:ext uri="{D42A27DB-BD31-4B8C-83A1-F6EECF244321}">
-                <p14:modId xmlns:p14="http://schemas.microsoft.com/office/powerpoint/2010/main" val="448797181"/>
+                <p14:modId xmlns:p14="http://schemas.microsoft.com/office/powerpoint/2010/main" val="2757729020"/>
               </p:ext>
             </p:extLst>
           </p:nvPr>
@@ -31212,7 +33888,7 @@
                       <a:pPr algn="ctr"/>
                       <a:r>
                         <a:rPr lang="en-US" sz="2800" dirty="0"/>
-                        <a:t>0</a:t>
+                        <a:t>1</a:t>
                       </a:r>
                     </a:p>
                   </a:txBody>
@@ -32305,6 +34981,146 @@
             <a:r>
               <a:rPr lang="en-US" dirty="0"/>
               <a:t>Addition &amp; Subtraction ANS</a:t>
+            </a:r>
+          </a:p>
+        </p:txBody>
+      </p:sp>
+      <p:sp>
+        <p:nvSpPr>
+          <p:cNvPr id="2" name="TextBox 1">
+            <a:extLst>
+              <a:ext uri="{FF2B5EF4-FFF2-40B4-BE49-F238E27FC236}">
+                <a16:creationId xmlns:a16="http://schemas.microsoft.com/office/drawing/2014/main" id="{59936A83-1579-8CB9-0726-27085A2456A7}"/>
+              </a:ext>
+            </a:extLst>
+          </p:cNvPr>
+          <p:cNvSpPr txBox="1"/>
+          <p:nvPr/>
+        </p:nvSpPr>
+        <p:spPr>
+          <a:xfrm>
+            <a:off x="8149434" y="1358604"/>
+            <a:ext cx="794128" cy="400110"/>
+          </a:xfrm>
+          <a:prstGeom prst="rect">
+            <a:avLst/>
+          </a:prstGeom>
+          <a:noFill/>
+        </p:spPr>
+        <p:txBody>
+          <a:bodyPr wrap="none" rtlCol="0">
+            <a:spAutoFit/>
+          </a:bodyPr>
+          <a:lstStyle/>
+          <a:p>
+            <a:r>
+              <a:rPr lang="en-US" sz="2000" dirty="0"/>
+              <a:t>Carry</a:t>
+            </a:r>
+          </a:p>
+        </p:txBody>
+      </p:sp>
+      <p:sp>
+        <p:nvSpPr>
+          <p:cNvPr id="23" name="TextBox 22">
+            <a:extLst>
+              <a:ext uri="{FF2B5EF4-FFF2-40B4-BE49-F238E27FC236}">
+                <a16:creationId xmlns:a16="http://schemas.microsoft.com/office/drawing/2014/main" id="{7D1CF86A-D4ED-E25F-19E3-E1F021E47C8F}"/>
+              </a:ext>
+            </a:extLst>
+          </p:cNvPr>
+          <p:cNvSpPr txBox="1"/>
+          <p:nvPr/>
+        </p:nvSpPr>
+        <p:spPr>
+          <a:xfrm>
+            <a:off x="3972576" y="1358604"/>
+            <a:ext cx="794128" cy="400110"/>
+          </a:xfrm>
+          <a:prstGeom prst="rect">
+            <a:avLst/>
+          </a:prstGeom>
+          <a:noFill/>
+        </p:spPr>
+        <p:txBody>
+          <a:bodyPr wrap="none" rtlCol="0">
+            <a:spAutoFit/>
+          </a:bodyPr>
+          <a:lstStyle/>
+          <a:p>
+            <a:r>
+              <a:rPr lang="en-US" sz="2000" dirty="0"/>
+              <a:t>Carry</a:t>
+            </a:r>
+          </a:p>
+        </p:txBody>
+      </p:sp>
+      <p:sp>
+        <p:nvSpPr>
+          <p:cNvPr id="24" name="TextBox 23">
+            <a:extLst>
+              <a:ext uri="{FF2B5EF4-FFF2-40B4-BE49-F238E27FC236}">
+                <a16:creationId xmlns:a16="http://schemas.microsoft.com/office/drawing/2014/main" id="{8F7C7F06-67DF-7BC1-E659-4759B0125435}"/>
+              </a:ext>
+            </a:extLst>
+          </p:cNvPr>
+          <p:cNvSpPr txBox="1"/>
+          <p:nvPr/>
+        </p:nvSpPr>
+        <p:spPr>
+          <a:xfrm>
+            <a:off x="3972576" y="3937849"/>
+            <a:ext cx="794128" cy="400110"/>
+          </a:xfrm>
+          <a:prstGeom prst="rect">
+            <a:avLst/>
+          </a:prstGeom>
+          <a:noFill/>
+        </p:spPr>
+        <p:txBody>
+          <a:bodyPr wrap="none" rtlCol="0">
+            <a:spAutoFit/>
+          </a:bodyPr>
+          <a:lstStyle/>
+          <a:p>
+            <a:r>
+              <a:rPr lang="en-US" sz="2000" dirty="0"/>
+              <a:t>Carry</a:t>
+            </a:r>
+          </a:p>
+        </p:txBody>
+      </p:sp>
+      <p:sp>
+        <p:nvSpPr>
+          <p:cNvPr id="25" name="TextBox 24">
+            <a:extLst>
+              <a:ext uri="{FF2B5EF4-FFF2-40B4-BE49-F238E27FC236}">
+                <a16:creationId xmlns:a16="http://schemas.microsoft.com/office/drawing/2014/main" id="{0BE27724-9882-64E4-9FA6-DF613F1C77AE}"/>
+              </a:ext>
+            </a:extLst>
+          </p:cNvPr>
+          <p:cNvSpPr txBox="1"/>
+          <p:nvPr/>
+        </p:nvSpPr>
+        <p:spPr>
+          <a:xfrm>
+            <a:off x="8192504" y="3937849"/>
+            <a:ext cx="794128" cy="400110"/>
+          </a:xfrm>
+          <a:prstGeom prst="rect">
+            <a:avLst/>
+          </a:prstGeom>
+          <a:noFill/>
+        </p:spPr>
+        <p:txBody>
+          <a:bodyPr wrap="none" rtlCol="0">
+            <a:spAutoFit/>
+          </a:bodyPr>
+          <a:lstStyle/>
+          <a:p>
+            <a:r>
+              <a:rPr lang="en-US" sz="2000" dirty="0"/>
+              <a:t>Carry</a:t>
             </a:r>
           </a:p>
         </p:txBody>

--- a/PPTs/Ch4_ARM_Arithmetic_Logic_Exercises_ANS.pptx
+++ b/PPTs/Ch4_ARM_Arithmetic_Logic_Exercises_ANS.pptx
@@ -179,7 +179,7 @@
 <file path=ppt/revisionInfo.xml><?xml version="1.0" encoding="utf-8"?>
 <p1510:revInfo xmlns:a="http://schemas.openxmlformats.org/drawingml/2006/main" xmlns:r="http://schemas.openxmlformats.org/officeDocument/2006/relationships" xmlns:p1510="http://schemas.microsoft.com/office/powerpoint/2015/10/main">
   <p1510:revLst>
-    <p1510:client id="{949F66C0-3357-40C2-B5B1-DCDAC1289C61}" v="65" dt="2025-10-17T12:08:44.111"/>
+    <p1510:client id="{949F66C0-3357-40C2-B5B1-DCDAC1289C61}" v="70" dt="2025-10-25T23:40:54.265"/>
   </p1510:revLst>
 </p1510:revInfo>
 </file>
@@ -189,53 +189,10 @@
   <pc:docChgLst>
     <pc:chgData name="Zonghua Gu" userId="9a7e1853e1951ef5" providerId="LiveId" clId="{CF1FAA12-072C-4ED5-BA76-0FFFAEFDB88A}"/>
     <pc:docChg chg="undo redo custSel addSld delSld modSld sldOrd modNotesMaster">
-      <pc:chgData name="Zonghua Gu" userId="9a7e1853e1951ef5" providerId="LiveId" clId="{CF1FAA12-072C-4ED5-BA76-0FFFAEFDB88A}" dt="2025-10-17T12:08:57.755" v="5791" actId="47"/>
+      <pc:chgData name="Zonghua Gu" userId="9a7e1853e1951ef5" providerId="LiveId" clId="{CF1FAA12-072C-4ED5-BA76-0FFFAEFDB88A}" dt="2025-10-25T23:40:58.206" v="5815" actId="20577"/>
       <pc:docMkLst>
         <pc:docMk/>
       </pc:docMkLst>
-      <pc:sldChg chg="addSp modSp mod">
-        <pc:chgData name="Zonghua Gu" userId="9a7e1853e1951ef5" providerId="LiveId" clId="{CF1FAA12-072C-4ED5-BA76-0FFFAEFDB88A}" dt="2025-09-18T00:01:33.595" v="35" actId="20577"/>
-        <pc:sldMkLst>
-          <pc:docMk/>
-          <pc:sldMk cId="1227639730" sldId="256"/>
-        </pc:sldMkLst>
-        <pc:spChg chg="mod">
-          <ac:chgData name="Zonghua Gu" userId="9a7e1853e1951ef5" providerId="LiveId" clId="{CF1FAA12-072C-4ED5-BA76-0FFFAEFDB88A}" dt="2025-09-18T00:01:33.595" v="35" actId="20577"/>
-          <ac:spMkLst>
-            <pc:docMk/>
-            <pc:sldMk cId="1227639730" sldId="256"/>
-            <ac:spMk id="2" creationId="{00000000-0000-0000-0000-000000000000}"/>
-          </ac:spMkLst>
-        </pc:spChg>
-      </pc:sldChg>
-      <pc:sldChg chg="add">
-        <pc:chgData name="Zonghua Gu" userId="9a7e1853e1951ef5" providerId="LiveId" clId="{CF1FAA12-072C-4ED5-BA76-0FFFAEFDB88A}" dt="2025-09-24T02:20:36.355" v="3261"/>
-        <pc:sldMkLst>
-          <pc:docMk/>
-          <pc:sldMk cId="409396528" sldId="257"/>
-        </pc:sldMkLst>
-      </pc:sldChg>
-      <pc:sldChg chg="addSp delSp modSp new add del mod">
-        <pc:chgData name="Zonghua Gu" userId="9a7e1853e1951ef5" providerId="LiveId" clId="{CF1FAA12-072C-4ED5-BA76-0FFFAEFDB88A}" dt="2025-09-24T02:20:27.869" v="3260" actId="2696"/>
-        <pc:sldMkLst>
-          <pc:docMk/>
-          <pc:sldMk cId="868372046" sldId="257"/>
-        </pc:sldMkLst>
-      </pc:sldChg>
-      <pc:sldChg chg="add del">
-        <pc:chgData name="Zonghua Gu" userId="9a7e1853e1951ef5" providerId="LiveId" clId="{CF1FAA12-072C-4ED5-BA76-0FFFAEFDB88A}" dt="2025-09-24T02:19:57.725" v="3258"/>
-        <pc:sldMkLst>
-          <pc:docMk/>
-          <pc:sldMk cId="2855792496" sldId="257"/>
-        </pc:sldMkLst>
-      </pc:sldChg>
-      <pc:sldChg chg="add del">
-        <pc:chgData name="Zonghua Gu" userId="9a7e1853e1951ef5" providerId="LiveId" clId="{CF1FAA12-072C-4ED5-BA76-0FFFAEFDB88A}" dt="2025-09-24T02:19:57.725" v="3258"/>
-        <pc:sldMkLst>
-          <pc:docMk/>
-          <pc:sldMk cId="461519423" sldId="258"/>
-        </pc:sldMkLst>
-      </pc:sldChg>
       <pc:sldChg chg="modSp add mod">
         <pc:chgData name="Zonghua Gu" userId="9a7e1853e1951ef5" providerId="LiveId" clId="{CF1FAA12-072C-4ED5-BA76-0FFFAEFDB88A}" dt="2025-10-16T22:18:35.499" v="4996" actId="20577"/>
         <pc:sldMkLst>
@@ -251,501 +208,11 @@
           </ac:spMkLst>
         </pc:spChg>
       </pc:sldChg>
-      <pc:sldChg chg="modSp add del mod">
-        <pc:chgData name="Zonghua Gu" userId="9a7e1853e1951ef5" providerId="LiveId" clId="{CF1FAA12-072C-4ED5-BA76-0FFFAEFDB88A}" dt="2025-09-24T02:20:27.869" v="3260" actId="2696"/>
-        <pc:sldMkLst>
-          <pc:docMk/>
-          <pc:sldMk cId="3884576026" sldId="258"/>
-        </pc:sldMkLst>
-      </pc:sldChg>
-      <pc:sldChg chg="add del">
-        <pc:chgData name="Zonghua Gu" userId="9a7e1853e1951ef5" providerId="LiveId" clId="{CF1FAA12-072C-4ED5-BA76-0FFFAEFDB88A}" dt="2025-09-24T02:19:57.725" v="3258"/>
-        <pc:sldMkLst>
-          <pc:docMk/>
-          <pc:sldMk cId="819414722" sldId="259"/>
-        </pc:sldMkLst>
-      </pc:sldChg>
-      <pc:sldChg chg="modSp add del mod">
-        <pc:chgData name="Zonghua Gu" userId="9a7e1853e1951ef5" providerId="LiveId" clId="{CF1FAA12-072C-4ED5-BA76-0FFFAEFDB88A}" dt="2025-09-24T02:20:27.869" v="3260" actId="2696"/>
-        <pc:sldMkLst>
-          <pc:docMk/>
-          <pc:sldMk cId="2205104917" sldId="259"/>
-        </pc:sldMkLst>
-      </pc:sldChg>
-      <pc:sldChg chg="add">
-        <pc:chgData name="Zonghua Gu" userId="9a7e1853e1951ef5" providerId="LiveId" clId="{CF1FAA12-072C-4ED5-BA76-0FFFAEFDB88A}" dt="2025-09-24T02:20:36.355" v="3261"/>
-        <pc:sldMkLst>
-          <pc:docMk/>
-          <pc:sldMk cId="2350803268" sldId="259"/>
-        </pc:sldMkLst>
-      </pc:sldChg>
-      <pc:sldChg chg="add del">
-        <pc:chgData name="Zonghua Gu" userId="9a7e1853e1951ef5" providerId="LiveId" clId="{CF1FAA12-072C-4ED5-BA76-0FFFAEFDB88A}" dt="2025-09-24T02:19:57.725" v="3258"/>
-        <pc:sldMkLst>
-          <pc:docMk/>
-          <pc:sldMk cId="1028930370" sldId="260"/>
-        </pc:sldMkLst>
-      </pc:sldChg>
-      <pc:sldChg chg="modSp new add del mod">
-        <pc:chgData name="Zonghua Gu" userId="9a7e1853e1951ef5" providerId="LiveId" clId="{CF1FAA12-072C-4ED5-BA76-0FFFAEFDB88A}" dt="2025-09-24T02:20:27.869" v="3260" actId="2696"/>
-        <pc:sldMkLst>
-          <pc:docMk/>
-          <pc:sldMk cId="2309965032" sldId="260"/>
-        </pc:sldMkLst>
-      </pc:sldChg>
-      <pc:sldChg chg="add">
-        <pc:chgData name="Zonghua Gu" userId="9a7e1853e1951ef5" providerId="LiveId" clId="{CF1FAA12-072C-4ED5-BA76-0FFFAEFDB88A}" dt="2025-09-24T02:20:36.355" v="3261"/>
-        <pc:sldMkLst>
-          <pc:docMk/>
-          <pc:sldMk cId="3642733396" sldId="260"/>
-        </pc:sldMkLst>
-      </pc:sldChg>
-      <pc:sldChg chg="add del">
-        <pc:chgData name="Zonghua Gu" userId="9a7e1853e1951ef5" providerId="LiveId" clId="{CF1FAA12-072C-4ED5-BA76-0FFFAEFDB88A}" dt="2025-09-24T02:19:57.725" v="3258"/>
-        <pc:sldMkLst>
-          <pc:docMk/>
-          <pc:sldMk cId="2602997527" sldId="261"/>
-        </pc:sldMkLst>
-      </pc:sldChg>
-      <pc:sldChg chg="add">
-        <pc:chgData name="Zonghua Gu" userId="9a7e1853e1951ef5" providerId="LiveId" clId="{CF1FAA12-072C-4ED5-BA76-0FFFAEFDB88A}" dt="2025-09-24T02:20:36.355" v="3261"/>
-        <pc:sldMkLst>
-          <pc:docMk/>
-          <pc:sldMk cId="3881216825" sldId="261"/>
-        </pc:sldMkLst>
-      </pc:sldChg>
-      <pc:sldChg chg="modSp new add del mod">
-        <pc:chgData name="Zonghua Gu" userId="9a7e1853e1951ef5" providerId="LiveId" clId="{CF1FAA12-072C-4ED5-BA76-0FFFAEFDB88A}" dt="2025-09-24T02:20:27.869" v="3260" actId="2696"/>
-        <pc:sldMkLst>
-          <pc:docMk/>
-          <pc:sldMk cId="3895715509" sldId="261"/>
-        </pc:sldMkLst>
-      </pc:sldChg>
-      <pc:sldChg chg="add del">
-        <pc:chgData name="Zonghua Gu" userId="9a7e1853e1951ef5" providerId="LiveId" clId="{CF1FAA12-072C-4ED5-BA76-0FFFAEFDB88A}" dt="2025-09-24T02:19:57.725" v="3258"/>
-        <pc:sldMkLst>
-          <pc:docMk/>
-          <pc:sldMk cId="1358582707" sldId="262"/>
-        </pc:sldMkLst>
-      </pc:sldChg>
-      <pc:sldChg chg="add">
-        <pc:chgData name="Zonghua Gu" userId="9a7e1853e1951ef5" providerId="LiveId" clId="{CF1FAA12-072C-4ED5-BA76-0FFFAEFDB88A}" dt="2025-09-24T02:20:36.355" v="3261"/>
-        <pc:sldMkLst>
-          <pc:docMk/>
-          <pc:sldMk cId="2531244333" sldId="262"/>
-        </pc:sldMkLst>
-      </pc:sldChg>
-      <pc:sldChg chg="modSp add del mod">
-        <pc:chgData name="Zonghua Gu" userId="9a7e1853e1951ef5" providerId="LiveId" clId="{CF1FAA12-072C-4ED5-BA76-0FFFAEFDB88A}" dt="2025-09-24T02:20:27.869" v="3260" actId="2696"/>
-        <pc:sldMkLst>
-          <pc:docMk/>
-          <pc:sldMk cId="3348230435" sldId="262"/>
-        </pc:sldMkLst>
-      </pc:sldChg>
-      <pc:sldChg chg="del">
-        <pc:chgData name="Zonghua Gu" userId="9a7e1853e1951ef5" providerId="LiveId" clId="{CF1FAA12-072C-4ED5-BA76-0FFFAEFDB88A}" dt="2025-09-16T21:32:05.630" v="31" actId="47"/>
-        <pc:sldMkLst>
-          <pc:docMk/>
-          <pc:sldMk cId="3420550765" sldId="272"/>
-        </pc:sldMkLst>
-      </pc:sldChg>
-      <pc:sldChg chg="del">
-        <pc:chgData name="Zonghua Gu" userId="9a7e1853e1951ef5" providerId="LiveId" clId="{CF1FAA12-072C-4ED5-BA76-0FFFAEFDB88A}" dt="2025-09-16T21:32:05.630" v="31" actId="47"/>
-        <pc:sldMkLst>
-          <pc:docMk/>
-          <pc:sldMk cId="2059043100" sldId="277"/>
-        </pc:sldMkLst>
-      </pc:sldChg>
-      <pc:sldChg chg="del">
-        <pc:chgData name="Zonghua Gu" userId="9a7e1853e1951ef5" providerId="LiveId" clId="{CF1FAA12-072C-4ED5-BA76-0FFFAEFDB88A}" dt="2025-09-16T21:32:05.630" v="31" actId="47"/>
-        <pc:sldMkLst>
-          <pc:docMk/>
-          <pc:sldMk cId="2290796456" sldId="279"/>
-        </pc:sldMkLst>
-      </pc:sldChg>
-      <pc:sldChg chg="del">
-        <pc:chgData name="Zonghua Gu" userId="9a7e1853e1951ef5" providerId="LiveId" clId="{CF1FAA12-072C-4ED5-BA76-0FFFAEFDB88A}" dt="2025-09-16T21:32:05.630" v="31" actId="47"/>
-        <pc:sldMkLst>
-          <pc:docMk/>
-          <pc:sldMk cId="3012842885" sldId="281"/>
-        </pc:sldMkLst>
-      </pc:sldChg>
-      <pc:sldChg chg="del">
-        <pc:chgData name="Zonghua Gu" userId="9a7e1853e1951ef5" providerId="LiveId" clId="{CF1FAA12-072C-4ED5-BA76-0FFFAEFDB88A}" dt="2025-09-16T21:32:05.630" v="31" actId="47"/>
-        <pc:sldMkLst>
-          <pc:docMk/>
-          <pc:sldMk cId="2511335096" sldId="282"/>
-        </pc:sldMkLst>
-      </pc:sldChg>
-      <pc:sldChg chg="del">
-        <pc:chgData name="Zonghua Gu" userId="9a7e1853e1951ef5" providerId="LiveId" clId="{CF1FAA12-072C-4ED5-BA76-0FFFAEFDB88A}" dt="2025-09-16T21:32:05.630" v="31" actId="47"/>
-        <pc:sldMkLst>
-          <pc:docMk/>
-          <pc:sldMk cId="3668909280" sldId="283"/>
-        </pc:sldMkLst>
-      </pc:sldChg>
-      <pc:sldChg chg="del">
-        <pc:chgData name="Zonghua Gu" userId="9a7e1853e1951ef5" providerId="LiveId" clId="{CF1FAA12-072C-4ED5-BA76-0FFFAEFDB88A}" dt="2025-09-16T21:32:05.630" v="31" actId="47"/>
-        <pc:sldMkLst>
-          <pc:docMk/>
-          <pc:sldMk cId="271435320" sldId="284"/>
-        </pc:sldMkLst>
-      </pc:sldChg>
-      <pc:sldChg chg="del">
-        <pc:chgData name="Zonghua Gu" userId="9a7e1853e1951ef5" providerId="LiveId" clId="{CF1FAA12-072C-4ED5-BA76-0FFFAEFDB88A}" dt="2025-09-16T21:32:05.630" v="31" actId="47"/>
-        <pc:sldMkLst>
-          <pc:docMk/>
-          <pc:sldMk cId="3704552365" sldId="285"/>
-        </pc:sldMkLst>
-      </pc:sldChg>
-      <pc:sldChg chg="del">
-        <pc:chgData name="Zonghua Gu" userId="9a7e1853e1951ef5" providerId="LiveId" clId="{CF1FAA12-072C-4ED5-BA76-0FFFAEFDB88A}" dt="2025-09-16T21:32:05.630" v="31" actId="47"/>
-        <pc:sldMkLst>
-          <pc:docMk/>
-          <pc:sldMk cId="3106604463" sldId="286"/>
-        </pc:sldMkLst>
-      </pc:sldChg>
-      <pc:sldChg chg="del">
-        <pc:chgData name="Zonghua Gu" userId="9a7e1853e1951ef5" providerId="LiveId" clId="{CF1FAA12-072C-4ED5-BA76-0FFFAEFDB88A}" dt="2025-09-16T21:32:05.630" v="31" actId="47"/>
-        <pc:sldMkLst>
-          <pc:docMk/>
-          <pc:sldMk cId="3646693943" sldId="287"/>
-        </pc:sldMkLst>
-      </pc:sldChg>
-      <pc:sldChg chg="del">
-        <pc:chgData name="Zonghua Gu" userId="9a7e1853e1951ef5" providerId="LiveId" clId="{CF1FAA12-072C-4ED5-BA76-0FFFAEFDB88A}" dt="2025-09-16T21:32:05.630" v="31" actId="47"/>
-        <pc:sldMkLst>
-          <pc:docMk/>
-          <pc:sldMk cId="2844324683" sldId="288"/>
-        </pc:sldMkLst>
-      </pc:sldChg>
-      <pc:sldChg chg="del">
-        <pc:chgData name="Zonghua Gu" userId="9a7e1853e1951ef5" providerId="LiveId" clId="{CF1FAA12-072C-4ED5-BA76-0FFFAEFDB88A}" dt="2025-09-16T21:32:05.630" v="31" actId="47"/>
-        <pc:sldMkLst>
-          <pc:docMk/>
-          <pc:sldMk cId="1884958220" sldId="289"/>
-        </pc:sldMkLst>
-      </pc:sldChg>
-      <pc:sldChg chg="del">
-        <pc:chgData name="Zonghua Gu" userId="9a7e1853e1951ef5" providerId="LiveId" clId="{CF1FAA12-072C-4ED5-BA76-0FFFAEFDB88A}" dt="2025-09-16T21:32:05.630" v="31" actId="47"/>
-        <pc:sldMkLst>
-          <pc:docMk/>
-          <pc:sldMk cId="29255324" sldId="291"/>
-        </pc:sldMkLst>
-      </pc:sldChg>
-      <pc:sldChg chg="del">
-        <pc:chgData name="Zonghua Gu" userId="9a7e1853e1951ef5" providerId="LiveId" clId="{CF1FAA12-072C-4ED5-BA76-0FFFAEFDB88A}" dt="2025-09-16T21:32:05.630" v="31" actId="47"/>
-        <pc:sldMkLst>
-          <pc:docMk/>
-          <pc:sldMk cId="1771709229" sldId="292"/>
-        </pc:sldMkLst>
-      </pc:sldChg>
-      <pc:sldChg chg="modSp del mod">
-        <pc:chgData name="Zonghua Gu" userId="9a7e1853e1951ef5" providerId="LiveId" clId="{CF1FAA12-072C-4ED5-BA76-0FFFAEFDB88A}" dt="2025-09-16T21:32:05.630" v="31" actId="47"/>
-        <pc:sldMkLst>
-          <pc:docMk/>
-          <pc:sldMk cId="1337576135" sldId="293"/>
-        </pc:sldMkLst>
-      </pc:sldChg>
-      <pc:sldChg chg="del">
-        <pc:chgData name="Zonghua Gu" userId="9a7e1853e1951ef5" providerId="LiveId" clId="{CF1FAA12-072C-4ED5-BA76-0FFFAEFDB88A}" dt="2025-09-16T21:32:05.630" v="31" actId="47"/>
-        <pc:sldMkLst>
-          <pc:docMk/>
-          <pc:sldMk cId="1459654649" sldId="295"/>
-        </pc:sldMkLst>
-      </pc:sldChg>
-      <pc:sldChg chg="del">
-        <pc:chgData name="Zonghua Gu" userId="9a7e1853e1951ef5" providerId="LiveId" clId="{CF1FAA12-072C-4ED5-BA76-0FFFAEFDB88A}" dt="2025-09-16T21:32:05.630" v="31" actId="47"/>
-        <pc:sldMkLst>
-          <pc:docMk/>
-          <pc:sldMk cId="1274838406" sldId="306"/>
-        </pc:sldMkLst>
-      </pc:sldChg>
-      <pc:sldChg chg="del">
-        <pc:chgData name="Zonghua Gu" userId="9a7e1853e1951ef5" providerId="LiveId" clId="{CF1FAA12-072C-4ED5-BA76-0FFFAEFDB88A}" dt="2025-09-16T21:32:05.630" v="31" actId="47"/>
-        <pc:sldMkLst>
-          <pc:docMk/>
-          <pc:sldMk cId="2785807384" sldId="307"/>
-        </pc:sldMkLst>
-      </pc:sldChg>
-      <pc:sldChg chg="del">
-        <pc:chgData name="Zonghua Gu" userId="9a7e1853e1951ef5" providerId="LiveId" clId="{CF1FAA12-072C-4ED5-BA76-0FFFAEFDB88A}" dt="2025-09-16T21:32:05.630" v="31" actId="47"/>
-        <pc:sldMkLst>
-          <pc:docMk/>
-          <pc:sldMk cId="2644265921" sldId="312"/>
-        </pc:sldMkLst>
-      </pc:sldChg>
-      <pc:sldChg chg="del">
-        <pc:chgData name="Zonghua Gu" userId="9a7e1853e1951ef5" providerId="LiveId" clId="{CF1FAA12-072C-4ED5-BA76-0FFFAEFDB88A}" dt="2025-09-16T21:32:05.630" v="31" actId="47"/>
-        <pc:sldMkLst>
-          <pc:docMk/>
-          <pc:sldMk cId="1277304446" sldId="313"/>
-        </pc:sldMkLst>
-      </pc:sldChg>
-      <pc:sldChg chg="del">
-        <pc:chgData name="Zonghua Gu" userId="9a7e1853e1951ef5" providerId="LiveId" clId="{CF1FAA12-072C-4ED5-BA76-0FFFAEFDB88A}" dt="2025-09-16T21:32:05.630" v="31" actId="47"/>
-        <pc:sldMkLst>
-          <pc:docMk/>
-          <pc:sldMk cId="2099586659" sldId="314"/>
-        </pc:sldMkLst>
-      </pc:sldChg>
-      <pc:sldChg chg="del">
-        <pc:chgData name="Zonghua Gu" userId="9a7e1853e1951ef5" providerId="LiveId" clId="{CF1FAA12-072C-4ED5-BA76-0FFFAEFDB88A}" dt="2025-09-16T21:32:05.630" v="31" actId="47"/>
-        <pc:sldMkLst>
-          <pc:docMk/>
-          <pc:sldMk cId="430688265" sldId="315"/>
-        </pc:sldMkLst>
-      </pc:sldChg>
-      <pc:sldChg chg="del">
-        <pc:chgData name="Zonghua Gu" userId="9a7e1853e1951ef5" providerId="LiveId" clId="{CF1FAA12-072C-4ED5-BA76-0FFFAEFDB88A}" dt="2025-09-16T21:32:05.630" v="31" actId="47"/>
-        <pc:sldMkLst>
-          <pc:docMk/>
-          <pc:sldMk cId="2128225317" sldId="316"/>
-        </pc:sldMkLst>
-      </pc:sldChg>
-      <pc:sldChg chg="del">
-        <pc:chgData name="Zonghua Gu" userId="9a7e1853e1951ef5" providerId="LiveId" clId="{CF1FAA12-072C-4ED5-BA76-0FFFAEFDB88A}" dt="2025-09-16T21:32:05.630" v="31" actId="47"/>
-        <pc:sldMkLst>
-          <pc:docMk/>
-          <pc:sldMk cId="1703302262" sldId="317"/>
-        </pc:sldMkLst>
-      </pc:sldChg>
-      <pc:sldChg chg="del">
-        <pc:chgData name="Zonghua Gu" userId="9a7e1853e1951ef5" providerId="LiveId" clId="{CF1FAA12-072C-4ED5-BA76-0FFFAEFDB88A}" dt="2025-09-16T21:32:05.630" v="31" actId="47"/>
-        <pc:sldMkLst>
-          <pc:docMk/>
-          <pc:sldMk cId="2321944581" sldId="318"/>
-        </pc:sldMkLst>
-      </pc:sldChg>
-      <pc:sldChg chg="del">
-        <pc:chgData name="Zonghua Gu" userId="9a7e1853e1951ef5" providerId="LiveId" clId="{CF1FAA12-072C-4ED5-BA76-0FFFAEFDB88A}" dt="2025-09-16T21:32:05.630" v="31" actId="47"/>
-        <pc:sldMkLst>
-          <pc:docMk/>
-          <pc:sldMk cId="3152283833" sldId="320"/>
-        </pc:sldMkLst>
-      </pc:sldChg>
-      <pc:sldChg chg="del">
-        <pc:chgData name="Zonghua Gu" userId="9a7e1853e1951ef5" providerId="LiveId" clId="{CF1FAA12-072C-4ED5-BA76-0FFFAEFDB88A}" dt="2025-09-16T21:32:05.630" v="31" actId="47"/>
-        <pc:sldMkLst>
-          <pc:docMk/>
-          <pc:sldMk cId="1720761071" sldId="322"/>
-        </pc:sldMkLst>
-      </pc:sldChg>
-      <pc:sldChg chg="del">
-        <pc:chgData name="Zonghua Gu" userId="9a7e1853e1951ef5" providerId="LiveId" clId="{CF1FAA12-072C-4ED5-BA76-0FFFAEFDB88A}" dt="2025-09-16T21:32:05.630" v="31" actId="47"/>
-        <pc:sldMkLst>
-          <pc:docMk/>
-          <pc:sldMk cId="4133200898" sldId="323"/>
-        </pc:sldMkLst>
-      </pc:sldChg>
-      <pc:sldChg chg="del">
-        <pc:chgData name="Zonghua Gu" userId="9a7e1853e1951ef5" providerId="LiveId" clId="{CF1FAA12-072C-4ED5-BA76-0FFFAEFDB88A}" dt="2025-09-16T21:32:05.630" v="31" actId="47"/>
-        <pc:sldMkLst>
-          <pc:docMk/>
-          <pc:sldMk cId="2177597633" sldId="324"/>
-        </pc:sldMkLst>
-      </pc:sldChg>
-      <pc:sldChg chg="del">
-        <pc:chgData name="Zonghua Gu" userId="9a7e1853e1951ef5" providerId="LiveId" clId="{CF1FAA12-072C-4ED5-BA76-0FFFAEFDB88A}" dt="2025-09-16T21:32:05.630" v="31" actId="47"/>
-        <pc:sldMkLst>
-          <pc:docMk/>
-          <pc:sldMk cId="2177597633" sldId="325"/>
-        </pc:sldMkLst>
-      </pc:sldChg>
-      <pc:sldChg chg="del">
-        <pc:chgData name="Zonghua Gu" userId="9a7e1853e1951ef5" providerId="LiveId" clId="{CF1FAA12-072C-4ED5-BA76-0FFFAEFDB88A}" dt="2025-09-16T21:32:05.630" v="31" actId="47"/>
-        <pc:sldMkLst>
-          <pc:docMk/>
-          <pc:sldMk cId="975851832" sldId="326"/>
-        </pc:sldMkLst>
-      </pc:sldChg>
-      <pc:sldChg chg="del">
-        <pc:chgData name="Zonghua Gu" userId="9a7e1853e1951ef5" providerId="LiveId" clId="{CF1FAA12-072C-4ED5-BA76-0FFFAEFDB88A}" dt="2025-09-16T21:32:05.630" v="31" actId="47"/>
-        <pc:sldMkLst>
-          <pc:docMk/>
-          <pc:sldMk cId="342584573" sldId="328"/>
-        </pc:sldMkLst>
-      </pc:sldChg>
-      <pc:sldChg chg="del">
-        <pc:chgData name="Zonghua Gu" userId="9a7e1853e1951ef5" providerId="LiveId" clId="{CF1FAA12-072C-4ED5-BA76-0FFFAEFDB88A}" dt="2025-09-16T21:32:05.630" v="31" actId="47"/>
-        <pc:sldMkLst>
-          <pc:docMk/>
-          <pc:sldMk cId="2148212839" sldId="329"/>
-        </pc:sldMkLst>
-      </pc:sldChg>
-      <pc:sldChg chg="del">
-        <pc:chgData name="Zonghua Gu" userId="9a7e1853e1951ef5" providerId="LiveId" clId="{CF1FAA12-072C-4ED5-BA76-0FFFAEFDB88A}" dt="2025-09-16T21:32:05.630" v="31" actId="47"/>
-        <pc:sldMkLst>
-          <pc:docMk/>
-          <pc:sldMk cId="1380735846" sldId="330"/>
-        </pc:sldMkLst>
-      </pc:sldChg>
-      <pc:sldChg chg="del">
-        <pc:chgData name="Zonghua Gu" userId="9a7e1853e1951ef5" providerId="LiveId" clId="{CF1FAA12-072C-4ED5-BA76-0FFFAEFDB88A}" dt="2025-09-16T21:32:05.630" v="31" actId="47"/>
-        <pc:sldMkLst>
-          <pc:docMk/>
-          <pc:sldMk cId="1640407279" sldId="331"/>
-        </pc:sldMkLst>
-      </pc:sldChg>
-      <pc:sldChg chg="del">
-        <pc:chgData name="Zonghua Gu" userId="9a7e1853e1951ef5" providerId="LiveId" clId="{CF1FAA12-072C-4ED5-BA76-0FFFAEFDB88A}" dt="2025-09-16T21:32:05.630" v="31" actId="47"/>
-        <pc:sldMkLst>
-          <pc:docMk/>
-          <pc:sldMk cId="4134758979" sldId="332"/>
-        </pc:sldMkLst>
-      </pc:sldChg>
-      <pc:sldChg chg="del">
-        <pc:chgData name="Zonghua Gu" userId="9a7e1853e1951ef5" providerId="LiveId" clId="{CF1FAA12-072C-4ED5-BA76-0FFFAEFDB88A}" dt="2025-09-16T21:32:05.630" v="31" actId="47"/>
-        <pc:sldMkLst>
-          <pc:docMk/>
-          <pc:sldMk cId="45956393" sldId="333"/>
-        </pc:sldMkLst>
-      </pc:sldChg>
-      <pc:sldChg chg="del">
-        <pc:chgData name="Zonghua Gu" userId="9a7e1853e1951ef5" providerId="LiveId" clId="{CF1FAA12-072C-4ED5-BA76-0FFFAEFDB88A}" dt="2025-09-16T21:32:05.630" v="31" actId="47"/>
-        <pc:sldMkLst>
-          <pc:docMk/>
-          <pc:sldMk cId="1913135421" sldId="334"/>
-        </pc:sldMkLst>
-      </pc:sldChg>
-      <pc:sldChg chg="del">
-        <pc:chgData name="Zonghua Gu" userId="9a7e1853e1951ef5" providerId="LiveId" clId="{CF1FAA12-072C-4ED5-BA76-0FFFAEFDB88A}" dt="2025-09-16T21:32:05.630" v="31" actId="47"/>
-        <pc:sldMkLst>
-          <pc:docMk/>
-          <pc:sldMk cId="3816386607" sldId="335"/>
-        </pc:sldMkLst>
-      </pc:sldChg>
-      <pc:sldChg chg="del">
-        <pc:chgData name="Zonghua Gu" userId="9a7e1853e1951ef5" providerId="LiveId" clId="{CF1FAA12-072C-4ED5-BA76-0FFFAEFDB88A}" dt="2025-09-16T21:32:05.630" v="31" actId="47"/>
-        <pc:sldMkLst>
-          <pc:docMk/>
-          <pc:sldMk cId="3525808290" sldId="336"/>
-        </pc:sldMkLst>
-      </pc:sldChg>
-      <pc:sldChg chg="del">
-        <pc:chgData name="Zonghua Gu" userId="9a7e1853e1951ef5" providerId="LiveId" clId="{CF1FAA12-072C-4ED5-BA76-0FFFAEFDB88A}" dt="2025-09-16T21:32:05.630" v="31" actId="47"/>
-        <pc:sldMkLst>
-          <pc:docMk/>
-          <pc:sldMk cId="1861246248" sldId="337"/>
-        </pc:sldMkLst>
-      </pc:sldChg>
-      <pc:sldChg chg="del">
-        <pc:chgData name="Zonghua Gu" userId="9a7e1853e1951ef5" providerId="LiveId" clId="{CF1FAA12-072C-4ED5-BA76-0FFFAEFDB88A}" dt="2025-09-16T21:32:05.630" v="31" actId="47"/>
-        <pc:sldMkLst>
-          <pc:docMk/>
-          <pc:sldMk cId="2476710942" sldId="338"/>
-        </pc:sldMkLst>
-      </pc:sldChg>
-      <pc:sldChg chg="del">
-        <pc:chgData name="Zonghua Gu" userId="9a7e1853e1951ef5" providerId="LiveId" clId="{CF1FAA12-072C-4ED5-BA76-0FFFAEFDB88A}" dt="2025-09-16T21:32:05.630" v="31" actId="47"/>
-        <pc:sldMkLst>
-          <pc:docMk/>
-          <pc:sldMk cId="4270472410" sldId="341"/>
-        </pc:sldMkLst>
-      </pc:sldChg>
-      <pc:sldChg chg="del">
-        <pc:chgData name="Zonghua Gu" userId="9a7e1853e1951ef5" providerId="LiveId" clId="{CF1FAA12-072C-4ED5-BA76-0FFFAEFDB88A}" dt="2025-09-16T21:32:05.630" v="31" actId="47"/>
-        <pc:sldMkLst>
-          <pc:docMk/>
-          <pc:sldMk cId="3897190462" sldId="342"/>
-        </pc:sldMkLst>
-      </pc:sldChg>
-      <pc:sldChg chg="del">
-        <pc:chgData name="Zonghua Gu" userId="9a7e1853e1951ef5" providerId="LiveId" clId="{CF1FAA12-072C-4ED5-BA76-0FFFAEFDB88A}" dt="2025-09-16T21:32:05.630" v="31" actId="47"/>
-        <pc:sldMkLst>
-          <pc:docMk/>
-          <pc:sldMk cId="3398840445" sldId="343"/>
-        </pc:sldMkLst>
-      </pc:sldChg>
-      <pc:sldChg chg="del">
-        <pc:chgData name="Zonghua Gu" userId="9a7e1853e1951ef5" providerId="LiveId" clId="{CF1FAA12-072C-4ED5-BA76-0FFFAEFDB88A}" dt="2025-09-16T21:32:05.630" v="31" actId="47"/>
-        <pc:sldMkLst>
-          <pc:docMk/>
-          <pc:sldMk cId="1330855799" sldId="344"/>
-        </pc:sldMkLst>
-      </pc:sldChg>
-      <pc:sldChg chg="del">
-        <pc:chgData name="Zonghua Gu" userId="9a7e1853e1951ef5" providerId="LiveId" clId="{CF1FAA12-072C-4ED5-BA76-0FFFAEFDB88A}" dt="2025-09-16T21:32:05.630" v="31" actId="47"/>
-        <pc:sldMkLst>
-          <pc:docMk/>
-          <pc:sldMk cId="3251034726" sldId="345"/>
-        </pc:sldMkLst>
-      </pc:sldChg>
-      <pc:sldChg chg="del">
-        <pc:chgData name="Zonghua Gu" userId="9a7e1853e1951ef5" providerId="LiveId" clId="{CF1FAA12-072C-4ED5-BA76-0FFFAEFDB88A}" dt="2025-09-16T21:32:05.630" v="31" actId="47"/>
-        <pc:sldMkLst>
-          <pc:docMk/>
-          <pc:sldMk cId="3132066556" sldId="346"/>
-        </pc:sldMkLst>
-      </pc:sldChg>
-      <pc:sldChg chg="add del">
-        <pc:chgData name="Zonghua Gu" userId="9a7e1853e1951ef5" providerId="LiveId" clId="{CF1FAA12-072C-4ED5-BA76-0FFFAEFDB88A}" dt="2025-09-24T02:19:57.725" v="3258"/>
-        <pc:sldMkLst>
-          <pc:docMk/>
-          <pc:sldMk cId="612384028" sldId="351"/>
-        </pc:sldMkLst>
-      </pc:sldChg>
-      <pc:sldChg chg="add del">
-        <pc:chgData name="Zonghua Gu" userId="9a7e1853e1951ef5" providerId="LiveId" clId="{CF1FAA12-072C-4ED5-BA76-0FFFAEFDB88A}" dt="2025-10-09T21:56:52.699" v="4345" actId="2696"/>
-        <pc:sldMkLst>
-          <pc:docMk/>
-          <pc:sldMk cId="2716811776" sldId="351"/>
-        </pc:sldMkLst>
-      </pc:sldChg>
-      <pc:sldChg chg="addSp delSp modSp add del mod">
-        <pc:chgData name="Zonghua Gu" userId="9a7e1853e1951ef5" providerId="LiveId" clId="{CF1FAA12-072C-4ED5-BA76-0FFFAEFDB88A}" dt="2025-09-24T02:20:27.869" v="3260" actId="2696"/>
-        <pc:sldMkLst>
-          <pc:docMk/>
-          <pc:sldMk cId="2996946337" sldId="351"/>
-        </pc:sldMkLst>
-      </pc:sldChg>
       <pc:sldChg chg="add">
         <pc:chgData name="Zonghua Gu" userId="9a7e1853e1951ef5" providerId="LiveId" clId="{CF1FAA12-072C-4ED5-BA76-0FFFAEFDB88A}" dt="2025-10-09T21:56:54.308" v="4346"/>
         <pc:sldMkLst>
           <pc:docMk/>
           <pc:sldMk cId="3279631536" sldId="351"/>
-        </pc:sldMkLst>
-      </pc:sldChg>
-      <pc:sldChg chg="modSp new add del mod">
-        <pc:chgData name="Zonghua Gu" userId="9a7e1853e1951ef5" providerId="LiveId" clId="{CF1FAA12-072C-4ED5-BA76-0FFFAEFDB88A}" dt="2025-09-24T02:20:27.869" v="3260" actId="2696"/>
-        <pc:sldMkLst>
-          <pc:docMk/>
-          <pc:sldMk cId="544675658" sldId="352"/>
-        </pc:sldMkLst>
-      </pc:sldChg>
-      <pc:sldChg chg="add">
-        <pc:chgData name="Zonghua Gu" userId="9a7e1853e1951ef5" providerId="LiveId" clId="{CF1FAA12-072C-4ED5-BA76-0FFFAEFDB88A}" dt="2025-09-24T02:20:36.355" v="3261"/>
-        <pc:sldMkLst>
-          <pc:docMk/>
-          <pc:sldMk cId="1087481199" sldId="352"/>
-        </pc:sldMkLst>
-      </pc:sldChg>
-      <pc:sldChg chg="add del">
-        <pc:chgData name="Zonghua Gu" userId="9a7e1853e1951ef5" providerId="LiveId" clId="{CF1FAA12-072C-4ED5-BA76-0FFFAEFDB88A}" dt="2025-09-24T02:19:57.725" v="3258"/>
-        <pc:sldMkLst>
-          <pc:docMk/>
-          <pc:sldMk cId="2721358592" sldId="352"/>
-        </pc:sldMkLst>
-      </pc:sldChg>
-      <pc:sldChg chg="modSp new add del mod">
-        <pc:chgData name="Zonghua Gu" userId="9a7e1853e1951ef5" providerId="LiveId" clId="{CF1FAA12-072C-4ED5-BA76-0FFFAEFDB88A}" dt="2025-09-24T02:20:27.869" v="3260" actId="2696"/>
-        <pc:sldMkLst>
-          <pc:docMk/>
-          <pc:sldMk cId="188395404" sldId="353"/>
-        </pc:sldMkLst>
-      </pc:sldChg>
-      <pc:sldChg chg="add">
-        <pc:chgData name="Zonghua Gu" userId="9a7e1853e1951ef5" providerId="LiveId" clId="{CF1FAA12-072C-4ED5-BA76-0FFFAEFDB88A}" dt="2025-09-24T02:20:36.355" v="3261"/>
-        <pc:sldMkLst>
-          <pc:docMk/>
-          <pc:sldMk cId="3254334378" sldId="353"/>
-        </pc:sldMkLst>
-      </pc:sldChg>
-      <pc:sldChg chg="add del">
-        <pc:chgData name="Zonghua Gu" userId="9a7e1853e1951ef5" providerId="LiveId" clId="{CF1FAA12-072C-4ED5-BA76-0FFFAEFDB88A}" dt="2025-09-24T02:19:57.725" v="3258"/>
-        <pc:sldMkLst>
-          <pc:docMk/>
-          <pc:sldMk cId="3476543109" sldId="353"/>
         </pc:sldMkLst>
       </pc:sldChg>
       <pc:sldChg chg="addSp delSp modSp new mod">
@@ -754,22 +221,6 @@
           <pc:docMk/>
           <pc:sldMk cId="2291445225" sldId="354"/>
         </pc:sldMkLst>
-        <pc:spChg chg="mod">
-          <ac:chgData name="Zonghua Gu" userId="9a7e1853e1951ef5" providerId="LiveId" clId="{CF1FAA12-072C-4ED5-BA76-0FFFAEFDB88A}" dt="2025-09-22T01:30:33.790" v="1120" actId="20577"/>
-          <ac:spMkLst>
-            <pc:docMk/>
-            <pc:sldMk cId="2291445225" sldId="354"/>
-            <ac:spMk id="2" creationId="{11B52526-FDDF-35FA-A44E-1A2334442F74}"/>
-          </ac:spMkLst>
-        </pc:spChg>
-        <pc:spChg chg="mod">
-          <ac:chgData name="Zonghua Gu" userId="9a7e1853e1951ef5" providerId="LiveId" clId="{CF1FAA12-072C-4ED5-BA76-0FFFAEFDB88A}" dt="2025-09-22T01:34:53.799" v="1274" actId="20577"/>
-          <ac:spMkLst>
-            <pc:docMk/>
-            <pc:sldMk cId="2291445225" sldId="354"/>
-            <ac:spMk id="4" creationId="{43995D49-573C-6129-4E24-762AAEB6BD07}"/>
-          </ac:spMkLst>
-        </pc:spChg>
         <pc:spChg chg="add mod">
           <ac:chgData name="Zonghua Gu" userId="9a7e1853e1951ef5" providerId="LiveId" clId="{CF1FAA12-072C-4ED5-BA76-0FFFAEFDB88A}" dt="2025-10-16T23:50:46.662" v="5760" actId="20577"/>
           <ac:spMkLst>
@@ -779,27 +230,12 @@
           </ac:spMkLst>
         </pc:spChg>
       </pc:sldChg>
-      <pc:sldChg chg="modSp new del mod">
-        <pc:chgData name="Zonghua Gu" userId="9a7e1853e1951ef5" providerId="LiveId" clId="{CF1FAA12-072C-4ED5-BA76-0FFFAEFDB88A}" dt="2025-09-21T20:35:19.056" v="1107" actId="47"/>
-        <pc:sldMkLst>
-          <pc:docMk/>
-          <pc:sldMk cId="3325406462" sldId="355"/>
-        </pc:sldMkLst>
-      </pc:sldChg>
       <pc:sldChg chg="addSp delSp modSp add mod">
         <pc:chgData name="Zonghua Gu" userId="9a7e1853e1951ef5" providerId="LiveId" clId="{CF1FAA12-072C-4ED5-BA76-0FFFAEFDB88A}" dt="2025-10-16T23:50:40.281" v="5758" actId="6549"/>
         <pc:sldMkLst>
           <pc:docMk/>
           <pc:sldMk cId="3592227053" sldId="356"/>
         </pc:sldMkLst>
-        <pc:spChg chg="mod">
-          <ac:chgData name="Zonghua Gu" userId="9a7e1853e1951ef5" providerId="LiveId" clId="{CF1FAA12-072C-4ED5-BA76-0FFFAEFDB88A}" dt="2025-09-22T01:30:35.864" v="1121" actId="20577"/>
-          <ac:spMkLst>
-            <pc:docMk/>
-            <pc:sldMk cId="3592227053" sldId="356"/>
-            <ac:spMk id="2" creationId="{64E3212C-AC3A-BD60-BBB1-8FEACA89464F}"/>
-          </ac:spMkLst>
-        </pc:spChg>
         <pc:spChg chg="mod">
           <ac:chgData name="Zonghua Gu" userId="9a7e1853e1951ef5" providerId="LiveId" clId="{CF1FAA12-072C-4ED5-BA76-0FFFAEFDB88A}" dt="2025-10-16T23:22:01.678" v="5566" actId="404"/>
           <ac:spMkLst>
@@ -831,14 +267,6 @@
           <pc:docMk/>
           <pc:sldMk cId="1401545001" sldId="357"/>
         </pc:sldMkLst>
-        <pc:spChg chg="mod">
-          <ac:chgData name="Zonghua Gu" userId="9a7e1853e1951ef5" providerId="LiveId" clId="{CF1FAA12-072C-4ED5-BA76-0FFFAEFDB88A}" dt="2025-09-22T01:30:42.060" v="1124" actId="20577"/>
-          <ac:spMkLst>
-            <pc:docMk/>
-            <pc:sldMk cId="1401545001" sldId="357"/>
-            <ac:spMk id="2" creationId="{E3C709F9-4905-FD89-18E1-B8EB2F602C94}"/>
-          </ac:spMkLst>
-        </pc:spChg>
         <pc:spChg chg="add mod">
           <ac:chgData name="Zonghua Gu" userId="9a7e1853e1951ef5" providerId="LiveId" clId="{CF1FAA12-072C-4ED5-BA76-0FFFAEFDB88A}" dt="2025-10-16T23:20:37.088" v="5532" actId="404"/>
           <ac:spMkLst>
@@ -862,14 +290,6 @@
           <pc:docMk/>
           <pc:sldMk cId="1087692432" sldId="358"/>
         </pc:sldMkLst>
-        <pc:spChg chg="mod">
-          <ac:chgData name="Zonghua Gu" userId="9a7e1853e1951ef5" providerId="LiveId" clId="{CF1FAA12-072C-4ED5-BA76-0FFFAEFDB88A}" dt="2025-09-22T01:30:45.532" v="1130" actId="20577"/>
-          <ac:spMkLst>
-            <pc:docMk/>
-            <pc:sldMk cId="1087692432" sldId="358"/>
-            <ac:spMk id="2" creationId="{2F6691BF-E76C-EDC4-020F-C2C90681E1C6}"/>
-          </ac:spMkLst>
-        </pc:spChg>
         <pc:spChg chg="add mod">
           <ac:chgData name="Zonghua Gu" userId="9a7e1853e1951ef5" providerId="LiveId" clId="{CF1FAA12-072C-4ED5-BA76-0FFFAEFDB88A}" dt="2025-10-16T23:25:10.584" v="5657" actId="20577"/>
           <ac:spMkLst>
@@ -895,27 +315,12 @@
           </ac:spMkLst>
         </pc:spChg>
       </pc:sldChg>
-      <pc:sldChg chg="modSp add del mod">
-        <pc:chgData name="Zonghua Gu" userId="9a7e1853e1951ef5" providerId="LiveId" clId="{CF1FAA12-072C-4ED5-BA76-0FFFAEFDB88A}" dt="2025-10-07T21:15:02.945" v="3909" actId="47"/>
-        <pc:sldMkLst>
-          <pc:docMk/>
-          <pc:sldMk cId="2623990252" sldId="383"/>
-        </pc:sldMkLst>
-      </pc:sldChg>
       <pc:sldChg chg="addSp delSp modSp add mod modNotes">
         <pc:chgData name="Zonghua Gu" userId="9a7e1853e1951ef5" providerId="LiveId" clId="{CF1FAA12-072C-4ED5-BA76-0FFFAEFDB88A}" dt="2025-10-16T23:21:29.466" v="5557" actId="20577"/>
         <pc:sldMkLst>
           <pc:docMk/>
           <pc:sldMk cId="1456166100" sldId="384"/>
         </pc:sldMkLst>
-        <pc:spChg chg="mod">
-          <ac:chgData name="Zonghua Gu" userId="9a7e1853e1951ef5" providerId="LiveId" clId="{CF1FAA12-072C-4ED5-BA76-0FFFAEFDB88A}" dt="2025-09-22T01:30:49.455" v="1131" actId="20577"/>
-          <ac:spMkLst>
-            <pc:docMk/>
-            <pc:sldMk cId="1456166100" sldId="384"/>
-            <ac:spMk id="2" creationId="{F03CE9CC-DEC3-BC36-FF0A-FD088EB33CA9}"/>
-          </ac:spMkLst>
-        </pc:spChg>
         <pc:spChg chg="mod">
           <ac:chgData name="Zonghua Gu" userId="9a7e1853e1951ef5" providerId="LiveId" clId="{CF1FAA12-072C-4ED5-BA76-0FFFAEFDB88A}" dt="2025-10-16T23:21:29.466" v="5557" actId="20577"/>
           <ac:spMkLst>
@@ -940,14 +345,6 @@
           <pc:sldMk cId="3808152940" sldId="385"/>
         </pc:sldMkLst>
         <pc:spChg chg="mod">
-          <ac:chgData name="Zonghua Gu" userId="9a7e1853e1951ef5" providerId="LiveId" clId="{CF1FAA12-072C-4ED5-BA76-0FFFAEFDB88A}" dt="2025-09-22T01:44:39.972" v="1352" actId="20577"/>
-          <ac:spMkLst>
-            <pc:docMk/>
-            <pc:sldMk cId="3808152940" sldId="385"/>
-            <ac:spMk id="2" creationId="{864E7231-82FF-C0A5-9383-A83CE2517596}"/>
-          </ac:spMkLst>
-        </pc:spChg>
-        <pc:spChg chg="mod">
           <ac:chgData name="Zonghua Gu" userId="9a7e1853e1951ef5" providerId="LiveId" clId="{CF1FAA12-072C-4ED5-BA76-0FFFAEFDB88A}" dt="2025-10-16T23:24:23.268" v="5627" actId="20577"/>
           <ac:spMkLst>
             <pc:docMk/>
@@ -963,13 +360,6 @@
             <ac:graphicFrameMk id="6" creationId="{9F3E2C1E-31D7-D8FB-CE9D-0E062ADEFB6A}"/>
           </ac:graphicFrameMkLst>
         </pc:graphicFrameChg>
-      </pc:sldChg>
-      <pc:sldChg chg="new del">
-        <pc:chgData name="Zonghua Gu" userId="9a7e1853e1951ef5" providerId="LiveId" clId="{CF1FAA12-072C-4ED5-BA76-0FFFAEFDB88A}" dt="2025-09-22T02:41:34.751" v="1619" actId="47"/>
-        <pc:sldMkLst>
-          <pc:docMk/>
-          <pc:sldMk cId="2474693556" sldId="386"/>
-        </pc:sldMkLst>
       </pc:sldChg>
       <pc:sldChg chg="addSp delSp modSp add mod">
         <pc:chgData name="Zonghua Gu" userId="9a7e1853e1951ef5" providerId="LiveId" clId="{CF1FAA12-072C-4ED5-BA76-0FFFAEFDB88A}" dt="2025-10-08T01:21:20.761" v="4283" actId="20577"/>
@@ -993,13 +383,6 @@
             <ac:graphicFrameMk id="5" creationId="{9BFC7784-AC7A-8159-74B8-C94D84BE48E4}"/>
           </ac:graphicFrameMkLst>
         </pc:graphicFrameChg>
-      </pc:sldChg>
-      <pc:sldChg chg="addSp modSp add del mod">
-        <pc:chgData name="Zonghua Gu" userId="9a7e1853e1951ef5" providerId="LiveId" clId="{CF1FAA12-072C-4ED5-BA76-0FFFAEFDB88A}" dt="2025-10-09T21:56:52.699" v="4345" actId="2696"/>
-        <pc:sldMkLst>
-          <pc:docMk/>
-          <pc:sldMk cId="1202265337" sldId="553"/>
-        </pc:sldMkLst>
       </pc:sldChg>
       <pc:sldChg chg="modSp add mod">
         <pc:chgData name="Zonghua Gu" userId="9a7e1853e1951ef5" providerId="LiveId" clId="{CF1FAA12-072C-4ED5-BA76-0FFFAEFDB88A}" dt="2025-10-09T21:59:29.534" v="4352" actId="403"/>
@@ -1056,27 +439,12 @@
           </ac:inkMkLst>
         </pc:inkChg>
       </pc:sldChg>
-      <pc:sldChg chg="addSp modSp add del mod">
-        <pc:chgData name="Zonghua Gu" userId="9a7e1853e1951ef5" providerId="LiveId" clId="{CF1FAA12-072C-4ED5-BA76-0FFFAEFDB88A}" dt="2025-10-07T21:15:02.945" v="3909" actId="47"/>
-        <pc:sldMkLst>
-          <pc:docMk/>
-          <pc:sldMk cId="4009754153" sldId="554"/>
-        </pc:sldMkLst>
-      </pc:sldChg>
       <pc:sldChg chg="modSp new mod">
         <pc:chgData name="Zonghua Gu" userId="9a7e1853e1951ef5" providerId="LiveId" clId="{CF1FAA12-072C-4ED5-BA76-0FFFAEFDB88A}" dt="2025-10-16T23:43:30.900" v="5674" actId="20577"/>
         <pc:sldMkLst>
           <pc:docMk/>
           <pc:sldMk cId="1248622466" sldId="555"/>
         </pc:sldMkLst>
-        <pc:spChg chg="mod">
-          <ac:chgData name="Zonghua Gu" userId="9a7e1853e1951ef5" providerId="LiveId" clId="{CF1FAA12-072C-4ED5-BA76-0FFFAEFDB88A}" dt="2025-09-23T00:46:25.426" v="1969"/>
-          <ac:spMkLst>
-            <pc:docMk/>
-            <pc:sldMk cId="1248622466" sldId="555"/>
-            <ac:spMk id="2" creationId="{6BA372BA-4E36-5939-EA5D-65E91EDB30B3}"/>
-          </ac:spMkLst>
-        </pc:spChg>
         <pc:spChg chg="mod">
           <ac:chgData name="Zonghua Gu" userId="9a7e1853e1951ef5" providerId="LiveId" clId="{CF1FAA12-072C-4ED5-BA76-0FFFAEFDB88A}" dt="2025-10-16T23:43:30.900" v="5674" actId="20577"/>
           <ac:spMkLst>
@@ -1093,14 +461,6 @@
           <pc:sldMk cId="3198797166" sldId="556"/>
         </pc:sldMkLst>
         <pc:spChg chg="mod">
-          <ac:chgData name="Zonghua Gu" userId="9a7e1853e1951ef5" providerId="LiveId" clId="{CF1FAA12-072C-4ED5-BA76-0FFFAEFDB88A}" dt="2025-09-23T00:46:29.484" v="1971" actId="20577"/>
-          <ac:spMkLst>
-            <pc:docMk/>
-            <pc:sldMk cId="3198797166" sldId="556"/>
-            <ac:spMk id="2" creationId="{92206104-88B9-F7DD-C7CF-BD3C5A8DDA25}"/>
-          </ac:spMkLst>
-        </pc:spChg>
-        <pc:spChg chg="mod">
           <ac:chgData name="Zonghua Gu" userId="9a7e1853e1951ef5" providerId="LiveId" clId="{CF1FAA12-072C-4ED5-BA76-0FFFAEFDB88A}" dt="2025-10-16T23:43:35.841" v="5676" actId="20577"/>
           <ac:spMkLst>
             <pc:docMk/>
@@ -1116,37 +476,6 @@
             <ac:spMk id="5" creationId="{F62F52E9-C913-0809-7AFE-FB9B6517BE16}"/>
           </ac:spMkLst>
         </pc:spChg>
-        <pc:spChg chg="add mod">
-          <ac:chgData name="Zonghua Gu" userId="9a7e1853e1951ef5" providerId="LiveId" clId="{CF1FAA12-072C-4ED5-BA76-0FFFAEFDB88A}" dt="2025-09-23T00:42:54.420" v="1905" actId="1076"/>
-          <ac:spMkLst>
-            <pc:docMk/>
-            <pc:sldMk cId="3198797166" sldId="556"/>
-            <ac:spMk id="6" creationId="{A362AD7A-A16D-A5D7-1F8E-3C4D2AEFE54C}"/>
-          </ac:spMkLst>
-        </pc:spChg>
-      </pc:sldChg>
-      <pc:sldChg chg="modSp new mod">
-        <pc:chgData name="Zonghua Gu" userId="9a7e1853e1951ef5" providerId="LiveId" clId="{CF1FAA12-072C-4ED5-BA76-0FFFAEFDB88A}" dt="2025-09-23T00:46:22.658" v="1968" actId="20577"/>
-        <pc:sldMkLst>
-          <pc:docMk/>
-          <pc:sldMk cId="3231632688" sldId="557"/>
-        </pc:sldMkLst>
-        <pc:spChg chg="mod">
-          <ac:chgData name="Zonghua Gu" userId="9a7e1853e1951ef5" providerId="LiveId" clId="{CF1FAA12-072C-4ED5-BA76-0FFFAEFDB88A}" dt="2025-09-23T00:46:22.658" v="1968" actId="20577"/>
-          <ac:spMkLst>
-            <pc:docMk/>
-            <pc:sldMk cId="3231632688" sldId="557"/>
-            <ac:spMk id="2" creationId="{FB628AA0-0F84-7DF4-92EB-BAB974776EB4}"/>
-          </ac:spMkLst>
-        </pc:spChg>
-        <pc:spChg chg="mod">
-          <ac:chgData name="Zonghua Gu" userId="9a7e1853e1951ef5" providerId="LiveId" clId="{CF1FAA12-072C-4ED5-BA76-0FFFAEFDB88A}" dt="2025-09-23T00:46:09.449" v="1939" actId="20577"/>
-          <ac:spMkLst>
-            <pc:docMk/>
-            <pc:sldMk cId="3231632688" sldId="557"/>
-            <ac:spMk id="4" creationId="{DCB60A19-0F6C-A6C2-28CD-C5006FC4799E}"/>
-          </ac:spMkLst>
-        </pc:spChg>
       </pc:sldChg>
       <pc:sldChg chg="modSp add mod">
         <pc:chgData name="Zonghua Gu" userId="9a7e1853e1951ef5" providerId="LiveId" clId="{CF1FAA12-072C-4ED5-BA76-0FFFAEFDB88A}" dt="2025-10-16T23:49:22.171" v="5754" actId="20577"/>
@@ -1155,42 +484,11 @@
           <pc:sldMk cId="3001218416" sldId="558"/>
         </pc:sldMkLst>
         <pc:spChg chg="mod">
-          <ac:chgData name="Zonghua Gu" userId="9a7e1853e1951ef5" providerId="LiveId" clId="{CF1FAA12-072C-4ED5-BA76-0FFFAEFDB88A}" dt="2025-09-23T00:46:34.747" v="1976" actId="20577"/>
-          <ac:spMkLst>
-            <pc:docMk/>
-            <pc:sldMk cId="3001218416" sldId="558"/>
-            <ac:spMk id="2" creationId="{8E96AA65-B209-1287-7606-ED7A0C24505B}"/>
-          </ac:spMkLst>
-        </pc:spChg>
-        <pc:spChg chg="mod">
           <ac:chgData name="Zonghua Gu" userId="9a7e1853e1951ef5" providerId="LiveId" clId="{CF1FAA12-072C-4ED5-BA76-0FFFAEFDB88A}" dt="2025-10-16T23:49:22.171" v="5754" actId="20577"/>
           <ac:spMkLst>
             <pc:docMk/>
             <pc:sldMk cId="3001218416" sldId="558"/>
             <ac:spMk id="4" creationId="{65B1C0D2-DA1A-E3F6-EAF4-BA1DF53BEE99}"/>
-          </ac:spMkLst>
-        </pc:spChg>
-      </pc:sldChg>
-      <pc:sldChg chg="modSp new del mod">
-        <pc:chgData name="Zonghua Gu" userId="9a7e1853e1951ef5" providerId="LiveId" clId="{CF1FAA12-072C-4ED5-BA76-0FFFAEFDB88A}" dt="2025-10-17T12:08:49.988" v="5790" actId="47"/>
-        <pc:sldMkLst>
-          <pc:docMk/>
-          <pc:sldMk cId="1899289889" sldId="559"/>
-        </pc:sldMkLst>
-        <pc:spChg chg="mod">
-          <ac:chgData name="Zonghua Gu" userId="9a7e1853e1951ef5" providerId="LiveId" clId="{CF1FAA12-072C-4ED5-BA76-0FFFAEFDB88A}" dt="2025-09-23T01:06:50.883" v="2199" actId="20577"/>
-          <ac:spMkLst>
-            <pc:docMk/>
-            <pc:sldMk cId="1899289889" sldId="559"/>
-            <ac:spMk id="2" creationId="{629A276C-A661-6DC1-DE38-563A3E2C7AF2}"/>
-          </ac:spMkLst>
-        </pc:spChg>
-        <pc:spChg chg="mod">
-          <ac:chgData name="Zonghua Gu" userId="9a7e1853e1951ef5" providerId="LiveId" clId="{CF1FAA12-072C-4ED5-BA76-0FFFAEFDB88A}" dt="2025-10-16T22:22:22.164" v="5006" actId="20577"/>
-          <ac:spMkLst>
-            <pc:docMk/>
-            <pc:sldMk cId="1899289889" sldId="559"/>
-            <ac:spMk id="4" creationId="{3CAEC62D-8983-5B00-CA77-5B8D7EF4098B}"/>
           </ac:spMkLst>
         </pc:spChg>
       </pc:sldChg>
@@ -1201,14 +499,6 @@
           <pc:sldMk cId="1329116476" sldId="560"/>
         </pc:sldMkLst>
         <pc:spChg chg="mod">
-          <ac:chgData name="Zonghua Gu" userId="9a7e1853e1951ef5" providerId="LiveId" clId="{CF1FAA12-072C-4ED5-BA76-0FFFAEFDB88A}" dt="2025-09-23T01:06:54.735" v="2203" actId="20577"/>
-          <ac:spMkLst>
-            <pc:docMk/>
-            <pc:sldMk cId="1329116476" sldId="560"/>
-            <ac:spMk id="2" creationId="{AF60BD31-36DB-8B14-43C7-875373D2BC3D}"/>
-          </ac:spMkLst>
-        </pc:spChg>
-        <pc:spChg chg="mod">
           <ac:chgData name="Zonghua Gu" userId="9a7e1853e1951ef5" providerId="LiveId" clId="{CF1FAA12-072C-4ED5-BA76-0FFFAEFDB88A}" dt="2025-10-17T12:08:46.152" v="5789" actId="14100"/>
           <ac:spMkLst>
             <pc:docMk/>
@@ -1217,36 +507,6 @@
           </ac:spMkLst>
         </pc:spChg>
       </pc:sldChg>
-      <pc:sldChg chg="modSp add mod modNotesTx">
-        <pc:chgData name="Zonghua Gu" userId="9a7e1853e1951ef5" providerId="LiveId" clId="{CF1FAA12-072C-4ED5-BA76-0FFFAEFDB88A}" dt="2025-09-23T01:19:15.565" v="2321" actId="5793"/>
-        <pc:sldMkLst>
-          <pc:docMk/>
-          <pc:sldMk cId="3280752258" sldId="561"/>
-        </pc:sldMkLst>
-        <pc:spChg chg="mod">
-          <ac:chgData name="Zonghua Gu" userId="9a7e1853e1951ef5" providerId="LiveId" clId="{CF1FAA12-072C-4ED5-BA76-0FFFAEFDB88A}" dt="2025-09-23T01:11:04.512" v="2274" actId="20577"/>
-          <ac:spMkLst>
-            <pc:docMk/>
-            <pc:sldMk cId="3280752258" sldId="561"/>
-            <ac:spMk id="2" creationId="{3C452DBC-650F-2FD6-D799-9D9632A6EF51}"/>
-          </ac:spMkLst>
-        </pc:spChg>
-        <pc:spChg chg="mod">
-          <ac:chgData name="Zonghua Gu" userId="9a7e1853e1951ef5" providerId="LiveId" clId="{CF1FAA12-072C-4ED5-BA76-0FFFAEFDB88A}" dt="2025-09-23T01:19:15.565" v="2321" actId="5793"/>
-          <ac:spMkLst>
-            <pc:docMk/>
-            <pc:sldMk cId="3280752258" sldId="561"/>
-            <ac:spMk id="4" creationId="{8B96A0C6-9296-BA88-C598-6B260416FC42}"/>
-          </ac:spMkLst>
-        </pc:spChg>
-      </pc:sldChg>
-      <pc:sldChg chg="modSp new del mod">
-        <pc:chgData name="Zonghua Gu" userId="9a7e1853e1951ef5" providerId="LiveId" clId="{CF1FAA12-072C-4ED5-BA76-0FFFAEFDB88A}" dt="2025-10-17T12:05:36.897" v="5783" actId="2696"/>
-        <pc:sldMkLst>
-          <pc:docMk/>
-          <pc:sldMk cId="2226504781" sldId="562"/>
-        </pc:sldMkLst>
-      </pc:sldChg>
       <pc:sldChg chg="add">
         <pc:chgData name="Zonghua Gu" userId="9a7e1853e1951ef5" providerId="LiveId" clId="{CF1FAA12-072C-4ED5-BA76-0FFFAEFDB88A}" dt="2025-10-17T12:05:52.117" v="5784"/>
         <pc:sldMkLst>
@@ -1254,284 +514,18 @@
           <pc:sldMk cId="4168816101" sldId="562"/>
         </pc:sldMkLst>
       </pc:sldChg>
-      <pc:sldChg chg="modSp add del mod">
-        <pc:chgData name="Zonghua Gu" userId="9a7e1853e1951ef5" providerId="LiveId" clId="{CF1FAA12-072C-4ED5-BA76-0FFFAEFDB88A}" dt="2025-10-17T12:05:36.897" v="5783" actId="2696"/>
-        <pc:sldMkLst>
-          <pc:docMk/>
-          <pc:sldMk cId="1151160017" sldId="563"/>
-        </pc:sldMkLst>
-      </pc:sldChg>
-      <pc:sldChg chg="add del">
-        <pc:chgData name="Zonghua Gu" userId="9a7e1853e1951ef5" providerId="LiveId" clId="{CF1FAA12-072C-4ED5-BA76-0FFFAEFDB88A}" dt="2025-10-17T12:08:57.755" v="5791" actId="47"/>
-        <pc:sldMkLst>
-          <pc:docMk/>
-          <pc:sldMk cId="3649951717" sldId="563"/>
-        </pc:sldMkLst>
-      </pc:sldChg>
-      <pc:sldChg chg="modSp new mod">
-        <pc:chgData name="Zonghua Gu" userId="9a7e1853e1951ef5" providerId="LiveId" clId="{CF1FAA12-072C-4ED5-BA76-0FFFAEFDB88A}" dt="2025-09-24T01:12:03.612" v="2476" actId="20577"/>
-        <pc:sldMkLst>
-          <pc:docMk/>
-          <pc:sldMk cId="791286695" sldId="564"/>
-        </pc:sldMkLst>
-        <pc:spChg chg="mod">
-          <ac:chgData name="Zonghua Gu" userId="9a7e1853e1951ef5" providerId="LiveId" clId="{CF1FAA12-072C-4ED5-BA76-0FFFAEFDB88A}" dt="2025-09-24T01:11:45.788" v="2464" actId="20577"/>
-          <ac:spMkLst>
-            <pc:docMk/>
-            <pc:sldMk cId="791286695" sldId="564"/>
-            <ac:spMk id="2" creationId="{2D58574D-6CB2-432B-DAD7-C3017391DD19}"/>
-          </ac:spMkLst>
-        </pc:spChg>
-        <pc:spChg chg="mod">
-          <ac:chgData name="Zonghua Gu" userId="9a7e1853e1951ef5" providerId="LiveId" clId="{CF1FAA12-072C-4ED5-BA76-0FFFAEFDB88A}" dt="2025-09-24T01:12:03.612" v="2476" actId="20577"/>
-          <ac:spMkLst>
-            <pc:docMk/>
-            <pc:sldMk cId="791286695" sldId="564"/>
-            <ac:spMk id="4" creationId="{563E4A31-F545-9835-7A37-FDD37464641E}"/>
-          </ac:spMkLst>
-        </pc:spChg>
-      </pc:sldChg>
       <pc:sldChg chg="addSp delSp modSp add mod">
-        <pc:chgData name="Zonghua Gu" userId="9a7e1853e1951ef5" providerId="LiveId" clId="{CF1FAA12-072C-4ED5-BA76-0FFFAEFDB88A}" dt="2025-09-24T02:05:08.635" v="3087" actId="478"/>
+        <pc:chgData name="Zonghua Gu" userId="9a7e1853e1951ef5" providerId="LiveId" clId="{CF1FAA12-072C-4ED5-BA76-0FFFAEFDB88A}" dt="2025-10-25T23:40:58.206" v="5815" actId="20577"/>
         <pc:sldMkLst>
           <pc:docMk/>
           <pc:sldMk cId="3678485956" sldId="565"/>
         </pc:sldMkLst>
         <pc:spChg chg="mod">
-          <ac:chgData name="Zonghua Gu" userId="9a7e1853e1951ef5" providerId="LiveId" clId="{CF1FAA12-072C-4ED5-BA76-0FFFAEFDB88A}" dt="2025-09-24T01:11:56.923" v="2475" actId="20577"/>
+          <ac:chgData name="Zonghua Gu" userId="9a7e1853e1951ef5" providerId="LiveId" clId="{CF1FAA12-072C-4ED5-BA76-0FFFAEFDB88A}" dt="2025-10-25T23:40:58.206" v="5815" actId="20577"/>
           <ac:spMkLst>
             <pc:docMk/>
             <pc:sldMk cId="3678485956" sldId="565"/>
-            <ac:spMk id="2" creationId="{AA489A8F-E6AE-D7A6-6FBF-16368A2F65FD}"/>
-          </ac:spMkLst>
-        </pc:spChg>
-      </pc:sldChg>
-      <pc:sldChg chg="modSp new mod">
-        <pc:chgData name="Zonghua Gu" userId="9a7e1853e1951ef5" providerId="LiveId" clId="{CF1FAA12-072C-4ED5-BA76-0FFFAEFDB88A}" dt="2025-09-24T01:21:53.250" v="2491"/>
-        <pc:sldMkLst>
-          <pc:docMk/>
-          <pc:sldMk cId="4213128627" sldId="566"/>
-        </pc:sldMkLst>
-        <pc:spChg chg="mod">
-          <ac:chgData name="Zonghua Gu" userId="9a7e1853e1951ef5" providerId="LiveId" clId="{CF1FAA12-072C-4ED5-BA76-0FFFAEFDB88A}" dt="2025-09-24T01:21:53.250" v="2491"/>
-          <ac:spMkLst>
-            <pc:docMk/>
-            <pc:sldMk cId="4213128627" sldId="566"/>
-            <ac:spMk id="2" creationId="{2F38FA36-801E-6E7F-57F4-2BD21817F1E5}"/>
-          </ac:spMkLst>
-        </pc:spChg>
-        <pc:spChg chg="mod">
-          <ac:chgData name="Zonghua Gu" userId="9a7e1853e1951ef5" providerId="LiveId" clId="{CF1FAA12-072C-4ED5-BA76-0FFFAEFDB88A}" dt="2025-09-24T01:21:42.746" v="2483" actId="20577"/>
-          <ac:spMkLst>
-            <pc:docMk/>
-            <pc:sldMk cId="4213128627" sldId="566"/>
-            <ac:spMk id="4" creationId="{2EC864E1-964B-A3AB-442A-DD3628D6986C}"/>
-          </ac:spMkLst>
-        </pc:spChg>
-      </pc:sldChg>
-      <pc:sldChg chg="modSp add mod">
-        <pc:chgData name="Zonghua Gu" userId="9a7e1853e1951ef5" providerId="LiveId" clId="{CF1FAA12-072C-4ED5-BA76-0FFFAEFDB88A}" dt="2025-09-24T01:22:24.584" v="2507" actId="15"/>
-        <pc:sldMkLst>
-          <pc:docMk/>
-          <pc:sldMk cId="4150398855" sldId="567"/>
-        </pc:sldMkLst>
-        <pc:spChg chg="mod">
-          <ac:chgData name="Zonghua Gu" userId="9a7e1853e1951ef5" providerId="LiveId" clId="{CF1FAA12-072C-4ED5-BA76-0FFFAEFDB88A}" dt="2025-09-24T01:22:01.929" v="2496" actId="20577"/>
-          <ac:spMkLst>
-            <pc:docMk/>
-            <pc:sldMk cId="4150398855" sldId="567"/>
-            <ac:spMk id="2" creationId="{90E3EADC-BA4A-4303-25AD-FB3AC0C918E5}"/>
-          </ac:spMkLst>
-        </pc:spChg>
-        <pc:spChg chg="mod">
-          <ac:chgData name="Zonghua Gu" userId="9a7e1853e1951ef5" providerId="LiveId" clId="{CF1FAA12-072C-4ED5-BA76-0FFFAEFDB88A}" dt="2025-09-24T01:22:24.584" v="2507" actId="15"/>
-          <ac:spMkLst>
-            <pc:docMk/>
-            <pc:sldMk cId="4150398855" sldId="567"/>
-            <ac:spMk id="4" creationId="{BA646EEC-0834-DAC4-3147-4F3D501AA71A}"/>
-          </ac:spMkLst>
-        </pc:spChg>
-      </pc:sldChg>
-      <pc:sldChg chg="modSp new mod">
-        <pc:chgData name="Zonghua Gu" userId="9a7e1853e1951ef5" providerId="LiveId" clId="{CF1FAA12-072C-4ED5-BA76-0FFFAEFDB88A}" dt="2025-09-24T02:24:00.725" v="3262"/>
-        <pc:sldMkLst>
-          <pc:docMk/>
-          <pc:sldMk cId="570184693" sldId="568"/>
-        </pc:sldMkLst>
-        <pc:spChg chg="mod">
-          <ac:chgData name="Zonghua Gu" userId="9a7e1853e1951ef5" providerId="LiveId" clId="{CF1FAA12-072C-4ED5-BA76-0FFFAEFDB88A}" dt="2025-09-24T01:29:26.912" v="2542" actId="20577"/>
-          <ac:spMkLst>
-            <pc:docMk/>
-            <pc:sldMk cId="570184693" sldId="568"/>
-            <ac:spMk id="2" creationId="{0C2E5212-EBBF-507A-8939-5B24EAC68025}"/>
-          </ac:spMkLst>
-        </pc:spChg>
-        <pc:spChg chg="mod">
-          <ac:chgData name="Zonghua Gu" userId="9a7e1853e1951ef5" providerId="LiveId" clId="{CF1FAA12-072C-4ED5-BA76-0FFFAEFDB88A}" dt="2025-09-24T02:24:00.725" v="3262"/>
-          <ac:spMkLst>
-            <pc:docMk/>
-            <pc:sldMk cId="570184693" sldId="568"/>
-            <ac:spMk id="4" creationId="{90B6A678-F78A-5E7F-A0E9-3A3B773CE733}"/>
-          </ac:spMkLst>
-        </pc:spChg>
-      </pc:sldChg>
-      <pc:sldChg chg="modSp add del mod">
-        <pc:chgData name="Zonghua Gu" userId="9a7e1853e1951ef5" providerId="LiveId" clId="{CF1FAA12-072C-4ED5-BA76-0FFFAEFDB88A}" dt="2025-09-24T02:24:17.929" v="3263" actId="47"/>
-        <pc:sldMkLst>
-          <pc:docMk/>
-          <pc:sldMk cId="979784967" sldId="569"/>
-        </pc:sldMkLst>
-      </pc:sldChg>
-      <pc:sldChg chg="modSp add mod">
-        <pc:chgData name="Zonghua Gu" userId="9a7e1853e1951ef5" providerId="LiveId" clId="{CF1FAA12-072C-4ED5-BA76-0FFFAEFDB88A}" dt="2025-09-24T01:42:22.327" v="2758" actId="20577"/>
-        <pc:sldMkLst>
-          <pc:docMk/>
-          <pc:sldMk cId="210341446" sldId="570"/>
-        </pc:sldMkLst>
-        <pc:spChg chg="mod">
-          <ac:chgData name="Zonghua Gu" userId="9a7e1853e1951ef5" providerId="LiveId" clId="{CF1FAA12-072C-4ED5-BA76-0FFFAEFDB88A}" dt="2025-09-24T01:42:22.327" v="2758" actId="20577"/>
-          <ac:spMkLst>
-            <pc:docMk/>
-            <pc:sldMk cId="210341446" sldId="570"/>
-            <ac:spMk id="4" creationId="{E7CAC4D7-2D14-2E25-93CD-623479AB15DB}"/>
-          </ac:spMkLst>
-        </pc:spChg>
-      </pc:sldChg>
-      <pc:sldChg chg="modSp new mod">
-        <pc:chgData name="Zonghua Gu" userId="9a7e1853e1951ef5" providerId="LiveId" clId="{CF1FAA12-072C-4ED5-BA76-0FFFAEFDB88A}" dt="2025-09-24T01:52:50.149" v="2889"/>
-        <pc:sldMkLst>
-          <pc:docMk/>
-          <pc:sldMk cId="498654524" sldId="571"/>
-        </pc:sldMkLst>
-        <pc:spChg chg="mod">
-          <ac:chgData name="Zonghua Gu" userId="9a7e1853e1951ef5" providerId="LiveId" clId="{CF1FAA12-072C-4ED5-BA76-0FFFAEFDB88A}" dt="2025-09-24T01:46:24.602" v="2794" actId="20577"/>
-          <ac:spMkLst>
-            <pc:docMk/>
-            <pc:sldMk cId="498654524" sldId="571"/>
-            <ac:spMk id="2" creationId="{0130680A-E82D-BBE9-C61F-EB0A6FEBF49E}"/>
-          </ac:spMkLst>
-        </pc:spChg>
-        <pc:spChg chg="mod">
-          <ac:chgData name="Zonghua Gu" userId="9a7e1853e1951ef5" providerId="LiveId" clId="{CF1FAA12-072C-4ED5-BA76-0FFFAEFDB88A}" dt="2025-09-24T01:52:50.149" v="2889"/>
-          <ac:spMkLst>
-            <pc:docMk/>
-            <pc:sldMk cId="498654524" sldId="571"/>
-            <ac:spMk id="4" creationId="{00C41A2D-28FB-F7BC-6CAD-42CE944332B1}"/>
-          </ac:spMkLst>
-        </pc:spChg>
-      </pc:sldChg>
-      <pc:sldChg chg="modSp add mod">
-        <pc:chgData name="Zonghua Gu" userId="9a7e1853e1951ef5" providerId="LiveId" clId="{CF1FAA12-072C-4ED5-BA76-0FFFAEFDB88A}" dt="2025-09-24T01:52:46.060" v="2888" actId="20577"/>
-        <pc:sldMkLst>
-          <pc:docMk/>
-          <pc:sldMk cId="1649707196" sldId="572"/>
-        </pc:sldMkLst>
-        <pc:spChg chg="mod">
-          <ac:chgData name="Zonghua Gu" userId="9a7e1853e1951ef5" providerId="LiveId" clId="{CF1FAA12-072C-4ED5-BA76-0FFFAEFDB88A}" dt="2025-09-24T01:52:46.060" v="2888" actId="20577"/>
-          <ac:spMkLst>
-            <pc:docMk/>
-            <pc:sldMk cId="1649707196" sldId="572"/>
-            <ac:spMk id="4" creationId="{0869879D-131C-C42E-D9BE-DA4B7A44B6F3}"/>
-          </ac:spMkLst>
-        </pc:spChg>
-      </pc:sldChg>
-      <pc:sldChg chg="addSp modSp add mod">
-        <pc:chgData name="Zonghua Gu" userId="9a7e1853e1951ef5" providerId="LiveId" clId="{CF1FAA12-072C-4ED5-BA76-0FFFAEFDB88A}" dt="2025-09-24T02:08:01.894" v="3171" actId="6549"/>
-        <pc:sldMkLst>
-          <pc:docMk/>
-          <pc:sldMk cId="4233569648" sldId="573"/>
-        </pc:sldMkLst>
-        <pc:spChg chg="mod">
-          <ac:chgData name="Zonghua Gu" userId="9a7e1853e1951ef5" providerId="LiveId" clId="{CF1FAA12-072C-4ED5-BA76-0FFFAEFDB88A}" dt="2025-09-24T01:46:57.358" v="2802" actId="20577"/>
-          <ac:spMkLst>
-            <pc:docMk/>
-            <pc:sldMk cId="4233569648" sldId="573"/>
-            <ac:spMk id="2" creationId="{8BE76027-E858-BDF6-8FD3-20349087B8B3}"/>
-          </ac:spMkLst>
-        </pc:spChg>
-        <pc:spChg chg="mod">
-          <ac:chgData name="Zonghua Gu" userId="9a7e1853e1951ef5" providerId="LiveId" clId="{CF1FAA12-072C-4ED5-BA76-0FFFAEFDB88A}" dt="2025-09-24T02:08:01.894" v="3171" actId="6549"/>
-          <ac:spMkLst>
-            <pc:docMk/>
-            <pc:sldMk cId="4233569648" sldId="573"/>
-            <ac:spMk id="4" creationId="{9E78F09B-0D79-10B8-9B5A-BD5E2ECFCCE5}"/>
-          </ac:spMkLst>
-        </pc:spChg>
-        <pc:spChg chg="add mod">
-          <ac:chgData name="Zonghua Gu" userId="9a7e1853e1951ef5" providerId="LiveId" clId="{CF1FAA12-072C-4ED5-BA76-0FFFAEFDB88A}" dt="2025-09-24T02:03:03.374" v="3057" actId="1076"/>
-          <ac:spMkLst>
-            <pc:docMk/>
-            <pc:sldMk cId="4233569648" sldId="573"/>
-            <ac:spMk id="5" creationId="{7D9C9950-623A-C446-86E3-ABAF4DE8E5CB}"/>
-          </ac:spMkLst>
-        </pc:spChg>
-      </pc:sldChg>
-      <pc:sldChg chg="delSp modSp add mod">
-        <pc:chgData name="Zonghua Gu" userId="9a7e1853e1951ef5" providerId="LiveId" clId="{CF1FAA12-072C-4ED5-BA76-0FFFAEFDB88A}" dt="2025-09-24T02:08:34.479" v="3172" actId="21"/>
-        <pc:sldMkLst>
-          <pc:docMk/>
-          <pc:sldMk cId="2952282065" sldId="574"/>
-        </pc:sldMkLst>
-        <pc:spChg chg="mod">
-          <ac:chgData name="Zonghua Gu" userId="9a7e1853e1951ef5" providerId="LiveId" clId="{CF1FAA12-072C-4ED5-BA76-0FFFAEFDB88A}" dt="2025-09-24T02:04:08.782" v="3079" actId="20577"/>
-          <ac:spMkLst>
-            <pc:docMk/>
-            <pc:sldMk cId="2952282065" sldId="574"/>
-            <ac:spMk id="2" creationId="{DBC93014-01D8-9E5D-845A-870F048F2095}"/>
-          </ac:spMkLst>
-        </pc:spChg>
-        <pc:spChg chg="mod">
-          <ac:chgData name="Zonghua Gu" userId="9a7e1853e1951ef5" providerId="LiveId" clId="{CF1FAA12-072C-4ED5-BA76-0FFFAEFDB88A}" dt="2025-09-24T02:08:34.479" v="3172" actId="21"/>
-          <ac:spMkLst>
-            <pc:docMk/>
-            <pc:sldMk cId="2952282065" sldId="574"/>
-            <ac:spMk id="4" creationId="{F7E59F7F-A91F-C3AC-6F2E-7E041BC2CCCA}"/>
-          </ac:spMkLst>
-        </pc:spChg>
-      </pc:sldChg>
-      <pc:sldChg chg="modSp new mod">
-        <pc:chgData name="Zonghua Gu" userId="9a7e1853e1951ef5" providerId="LiveId" clId="{CF1FAA12-072C-4ED5-BA76-0FFFAEFDB88A}" dt="2025-09-24T02:14:35.538" v="3219" actId="20577"/>
-        <pc:sldMkLst>
-          <pc:docMk/>
-          <pc:sldMk cId="736856981" sldId="575"/>
-        </pc:sldMkLst>
-        <pc:spChg chg="mod">
-          <ac:chgData name="Zonghua Gu" userId="9a7e1853e1951ef5" providerId="LiveId" clId="{CF1FAA12-072C-4ED5-BA76-0FFFAEFDB88A}" dt="2025-09-24T02:06:09.223" v="3102" actId="20577"/>
-          <ac:spMkLst>
-            <pc:docMk/>
-            <pc:sldMk cId="736856981" sldId="575"/>
-            <ac:spMk id="2" creationId="{C52BA9A8-82E2-4F95-D8FB-0D4CE48628B3}"/>
-          </ac:spMkLst>
-        </pc:spChg>
-        <pc:spChg chg="mod">
-          <ac:chgData name="Zonghua Gu" userId="9a7e1853e1951ef5" providerId="LiveId" clId="{CF1FAA12-072C-4ED5-BA76-0FFFAEFDB88A}" dt="2025-09-24T02:14:35.538" v="3219" actId="20577"/>
-          <ac:spMkLst>
-            <pc:docMk/>
-            <pc:sldMk cId="736856981" sldId="575"/>
-            <ac:spMk id="4" creationId="{51D630C7-7636-313D-8356-C87C2A00863C}"/>
-          </ac:spMkLst>
-        </pc:spChg>
-      </pc:sldChg>
-      <pc:sldChg chg="modSp add mod">
-        <pc:chgData name="Zonghua Gu" userId="9a7e1853e1951ef5" providerId="LiveId" clId="{CF1FAA12-072C-4ED5-BA76-0FFFAEFDB88A}" dt="2025-09-24T02:09:45.627" v="3193" actId="20577"/>
-        <pc:sldMkLst>
-          <pc:docMk/>
-          <pc:sldMk cId="1974797326" sldId="576"/>
-        </pc:sldMkLst>
-        <pc:spChg chg="mod">
-          <ac:chgData name="Zonghua Gu" userId="9a7e1853e1951ef5" providerId="LiveId" clId="{CF1FAA12-072C-4ED5-BA76-0FFFAEFDB88A}" dt="2025-09-24T02:09:29.485" v="3182" actId="20577"/>
-          <ac:spMkLst>
-            <pc:docMk/>
-            <pc:sldMk cId="1974797326" sldId="576"/>
-            <ac:spMk id="2" creationId="{2791E9D1-8834-4A04-E3FB-A8A892930257}"/>
-          </ac:spMkLst>
-        </pc:spChg>
-        <pc:spChg chg="mod">
-          <ac:chgData name="Zonghua Gu" userId="9a7e1853e1951ef5" providerId="LiveId" clId="{CF1FAA12-072C-4ED5-BA76-0FFFAEFDB88A}" dt="2025-09-24T02:09:45.627" v="3193" actId="20577"/>
-          <ac:spMkLst>
-            <pc:docMk/>
-            <pc:sldMk cId="1974797326" sldId="576"/>
-            <ac:spMk id="4" creationId="{050617DE-1F04-17A2-9FAA-2F9FDE23E530}"/>
+            <ac:spMk id="4" creationId="{C3D9501F-592C-5813-E379-F3D65F5F6FEC}"/>
           </ac:spMkLst>
         </pc:spChg>
       </pc:sldChg>
@@ -1542,42 +536,11 @@
           <pc:sldMk cId="183442351" sldId="577"/>
         </pc:sldMkLst>
         <pc:spChg chg="mod">
-          <ac:chgData name="Zonghua Gu" userId="9a7e1853e1951ef5" providerId="LiveId" clId="{CF1FAA12-072C-4ED5-BA76-0FFFAEFDB88A}" dt="2025-09-24T02:15:41.793" v="3227" actId="20577"/>
-          <ac:spMkLst>
-            <pc:docMk/>
-            <pc:sldMk cId="183442351" sldId="577"/>
-            <ac:spMk id="2" creationId="{D8D72A67-D3E0-8D9E-1017-79B664244872}"/>
-          </ac:spMkLst>
-        </pc:spChg>
-        <pc:spChg chg="mod">
           <ac:chgData name="Zonghua Gu" userId="9a7e1853e1951ef5" providerId="LiveId" clId="{CF1FAA12-072C-4ED5-BA76-0FFFAEFDB88A}" dt="2025-10-16T22:15:34.056" v="4992" actId="20577"/>
           <ac:spMkLst>
             <pc:docMk/>
             <pc:sldMk cId="183442351" sldId="577"/>
             <ac:spMk id="4" creationId="{1E92B818-9E8A-D4F7-35C5-0DE946EE802E}"/>
-          </ac:spMkLst>
-        </pc:spChg>
-      </pc:sldChg>
-      <pc:sldChg chg="modSp add mod">
-        <pc:chgData name="Zonghua Gu" userId="9a7e1853e1951ef5" providerId="LiveId" clId="{CF1FAA12-072C-4ED5-BA76-0FFFAEFDB88A}" dt="2025-09-24T02:16:24.045" v="3255" actId="20577"/>
-        <pc:sldMkLst>
-          <pc:docMk/>
-          <pc:sldMk cId="299759429" sldId="578"/>
-        </pc:sldMkLst>
-        <pc:spChg chg="mod">
-          <ac:chgData name="Zonghua Gu" userId="9a7e1853e1951ef5" providerId="LiveId" clId="{CF1FAA12-072C-4ED5-BA76-0FFFAEFDB88A}" dt="2025-09-24T02:16:19.074" v="3252" actId="20577"/>
-          <ac:spMkLst>
-            <pc:docMk/>
-            <pc:sldMk cId="299759429" sldId="578"/>
-            <ac:spMk id="2" creationId="{A7E5474F-F6FD-D4BC-236C-33597AE2951C}"/>
-          </ac:spMkLst>
-        </pc:spChg>
-        <pc:spChg chg="mod">
-          <ac:chgData name="Zonghua Gu" userId="9a7e1853e1951ef5" providerId="LiveId" clId="{CF1FAA12-072C-4ED5-BA76-0FFFAEFDB88A}" dt="2025-09-24T02:16:24.045" v="3255" actId="20577"/>
-          <ac:spMkLst>
-            <pc:docMk/>
-            <pc:sldMk cId="299759429" sldId="578"/>
-            <ac:spMk id="4" creationId="{F81B9F09-071E-CC84-8518-D0A895AF2677}"/>
           </ac:spMkLst>
         </pc:spChg>
       </pc:sldChg>
@@ -1651,13 +614,6 @@
           </ac:graphicFrameMkLst>
         </pc:graphicFrameChg>
       </pc:sldChg>
-      <pc:sldChg chg="addSp delSp modSp new del mod">
-        <pc:chgData name="Zonghua Gu" userId="9a7e1853e1951ef5" providerId="LiveId" clId="{CF1FAA12-072C-4ED5-BA76-0FFFAEFDB88A}" dt="2025-09-25T01:46:33.923" v="3590" actId="47"/>
-        <pc:sldMkLst>
-          <pc:docMk/>
-          <pc:sldMk cId="4257322909" sldId="581"/>
-        </pc:sldMkLst>
-      </pc:sldChg>
       <pc:sldChg chg="addSp delSp modSp add mod ord">
         <pc:chgData name="Zonghua Gu" userId="9a7e1853e1951ef5" providerId="LiveId" clId="{CF1FAA12-072C-4ED5-BA76-0FFFAEFDB88A}" dt="2025-09-25T01:45:52.206" v="3581"/>
         <pc:sldMkLst>
@@ -1719,13 +675,6 @@
             <ac:graphicFrameMk id="6" creationId="{9B855329-644D-B313-F6DA-A77E9B02AAE4}"/>
           </ac:graphicFrameMkLst>
         </pc:graphicFrameChg>
-      </pc:sldChg>
-      <pc:sldChg chg="modSp new del mod">
-        <pc:chgData name="Zonghua Gu" userId="9a7e1853e1951ef5" providerId="LiveId" clId="{CF1FAA12-072C-4ED5-BA76-0FFFAEFDB88A}" dt="2025-10-07T21:15:42.525" v="3910" actId="47"/>
-        <pc:sldMkLst>
-          <pc:docMk/>
-          <pc:sldMk cId="10749404" sldId="584"/>
-        </pc:sldMkLst>
       </pc:sldChg>
       <pc:sldChg chg="addSp delSp modSp new mod">
         <pc:chgData name="Zonghua Gu" userId="9a7e1853e1951ef5" providerId="LiveId" clId="{CF1FAA12-072C-4ED5-BA76-0FFFAEFDB88A}" dt="2025-10-15T00:15:20.072" v="4862" actId="571"/>
@@ -2036,13 +985,6 @@
           </ac:graphicFrameMkLst>
         </pc:graphicFrameChg>
       </pc:sldChg>
-      <pc:sldChg chg="modSp new del mod ord">
-        <pc:chgData name="Zonghua Gu" userId="9a7e1853e1951ef5" providerId="LiveId" clId="{CF1FAA12-072C-4ED5-BA76-0FFFAEFDB88A}" dt="2025-10-08T01:03:54.128" v="4054" actId="47"/>
-        <pc:sldMkLst>
-          <pc:docMk/>
-          <pc:sldMk cId="2666113646" sldId="588"/>
-        </pc:sldMkLst>
-      </pc:sldChg>
       <pc:sldChg chg="addSp delSp modSp add mod">
         <pc:chgData name="Zonghua Gu" userId="9a7e1853e1951ef5" providerId="LiveId" clId="{CF1FAA12-072C-4ED5-BA76-0FFFAEFDB88A}" dt="2025-10-08T01:23:45.059" v="4321" actId="20577"/>
         <pc:sldMkLst>
@@ -2150,13 +1092,6 @@
           </ac:spMkLst>
         </pc:spChg>
       </pc:sldChg>
-      <pc:sldChg chg="add del">
-        <pc:chgData name="Zonghua Gu" userId="9a7e1853e1951ef5" providerId="LiveId" clId="{CF1FAA12-072C-4ED5-BA76-0FFFAEFDB88A}" dt="2025-10-17T12:06:39.541" v="5786"/>
-        <pc:sldMkLst>
-          <pc:docMk/>
-          <pc:sldMk cId="1297110017" sldId="594"/>
-        </pc:sldMkLst>
-      </pc:sldChg>
     </pc:docChg>
   </pc:docChgLst>
 </pc:chgInfo>
@@ -2297,7 +1232,7 @@
             <a:fld id="{3AC3A17A-95E8-4381-B66B-5D6DE2B3048A}" type="datetimeFigureOut">
               <a:rPr lang="en-US" smtClean="0"/>
               <a:pPr/>
-              <a:t>10/17/2025</a:t>
+              <a:t>10/25/2025</a:t>
             </a:fld>
             <a:endParaRPr lang="en-US"/>
           </a:p>
@@ -3482,7 +2417,16 @@
                             </a:solidFill>
                             <a:latin typeface="Cambria Math" panose="02040503050406030204" pitchFamily="18" charset="0"/>
                           </a:rPr>
-                          <m:t>−1</m:t>
+                          <m:t>−</m:t>
+                        </m:r>
+                        <m:r>
+                          <a:rPr lang="en-US" sz="2800" b="0" i="1" smtClean="0">
+                            <a:solidFill>
+                              <a:prstClr val="black"/>
+                            </a:solidFill>
+                            <a:latin typeface="Cambria Math" panose="02040503050406030204" pitchFamily="18" charset="0"/>
+                          </a:rPr>
+                          <m:t>1</m:t>
                         </m:r>
                       </m:sup>
                     </m:sSup>
@@ -3493,7 +2437,16 @@
                         </a:solidFill>
                         <a:latin typeface="Cambria Math"/>
                       </a:rPr>
-                      <m:t>−1</m:t>
+                      <m:t>−</m:t>
+                    </m:r>
+                    <m:r>
+                      <a:rPr lang="en-US" sz="2800" i="1">
+                        <a:solidFill>
+                          <a:prstClr val="black"/>
+                        </a:solidFill>
+                        <a:latin typeface="Cambria Math"/>
+                      </a:rPr>
+                      <m:t>1</m:t>
                     </m:r>
                   </m:oMath>
                 </a14:m>
@@ -3587,7 +2540,16 @@
                             </a:solidFill>
                             <a:latin typeface="Cambria Math" panose="02040503050406030204" pitchFamily="18" charset="0"/>
                           </a:rPr>
-                          <m:t>−1</m:t>
+                          <m:t>−</m:t>
+                        </m:r>
+                        <m:r>
+                          <a:rPr lang="en-US" sz="2800" b="0" i="1" smtClean="0">
+                            <a:solidFill>
+                              <a:prstClr val="black"/>
+                            </a:solidFill>
+                            <a:latin typeface="Cambria Math" panose="02040503050406030204" pitchFamily="18" charset="0"/>
+                          </a:rPr>
+                          <m:t>1</m:t>
                         </m:r>
                       </m:sup>
                     </m:sSup>
@@ -5669,7 +4631,7 @@
             <a:fld id="{966FEA0E-C2DF-4252-97AD-54F2B7E07EAC}" type="datetime1">
               <a:rPr lang="en-US" smtClean="0"/>
               <a:pPr eaLnBrk="1" latinLnBrk="0" hangingPunct="1"/>
-              <a:t>10/17/2025</a:t>
+              <a:t>10/25/2025</a:t>
             </a:fld>
             <a:endParaRPr lang="en-US" sz="1600" dirty="0"/>
           </a:p>
@@ -6030,7 +4992,7 @@
             <a:fld id="{69EF9524-0CAA-4F98-BAC2-CE6B712F5E94}" type="datetime1">
               <a:rPr lang="en-US" smtClean="0"/>
               <a:pPr eaLnBrk="1" latinLnBrk="0" hangingPunct="1"/>
-              <a:t>10/17/2025</a:t>
+              <a:t>10/25/2025</a:t>
             </a:fld>
             <a:endParaRPr lang="en-US"/>
           </a:p>
@@ -6207,7 +5169,7 @@
             <a:fld id="{CB20516D-6F89-4C89-8307-32A716E22875}" type="datetime1">
               <a:rPr lang="en-US" smtClean="0"/>
               <a:pPr eaLnBrk="1" latinLnBrk="0" hangingPunct="1"/>
-              <a:t>10/17/2025</a:t>
+              <a:t>10/25/2025</a:t>
             </a:fld>
             <a:endParaRPr lang="en-US"/>
           </a:p>
@@ -6444,7 +5406,7 @@
             <a:fld id="{0CD88620-7329-4FC3-B65D-4EA691138F1B}" type="datetime1">
               <a:rPr lang="en-US" smtClean="0"/>
               <a:pPr eaLnBrk="1" latinLnBrk="0" hangingPunct="1"/>
-              <a:t>10/17/2025</a:t>
+              <a:t>10/25/2025</a:t>
             </a:fld>
             <a:endParaRPr lang="en-US" dirty="0"/>
           </a:p>
@@ -6715,7 +5677,7 @@
             <a:fld id="{0E46F3A1-5653-427D-9F78-56077401431A}" type="datetime1">
               <a:rPr lang="en-US" smtClean="0"/>
               <a:pPr eaLnBrk="1" latinLnBrk="0" hangingPunct="1"/>
-              <a:t>10/17/2025</a:t>
+              <a:t>10/25/2025</a:t>
             </a:fld>
             <a:endParaRPr lang="en-US" dirty="0"/>
           </a:p>
@@ -6937,7 +5899,7 @@
             <a:fld id="{CB67FC03-415A-45F0-B002-DF181377F7DC}" type="datetime1">
               <a:rPr lang="en-US" smtClean="0"/>
               <a:pPr eaLnBrk="1" latinLnBrk="0" hangingPunct="1"/>
-              <a:t>10/17/2025</a:t>
+              <a:t>10/25/2025</a:t>
             </a:fld>
             <a:endParaRPr lang="en-US"/>
           </a:p>
@@ -7291,7 +6253,7 @@
             <a:fld id="{1B6FC726-A0B4-4FC7-90F5-F17415A5C1A3}" type="datetime1">
               <a:rPr lang="en-US" smtClean="0"/>
               <a:pPr eaLnBrk="1" latinLnBrk="0" hangingPunct="1"/>
-              <a:t>10/17/2025</a:t>
+              <a:t>10/25/2025</a:t>
             </a:fld>
             <a:endParaRPr lang="en-US"/>
           </a:p>
@@ -7525,7 +6487,7 @@
             <a:fld id="{BE217211-C3F9-4892-9CC3-C7105638567D}" type="datetime1">
               <a:rPr lang="en-US" smtClean="0"/>
               <a:pPr eaLnBrk="1" latinLnBrk="0" hangingPunct="1"/>
-              <a:t>10/17/2025</a:t>
+              <a:t>10/25/2025</a:t>
             </a:fld>
             <a:endParaRPr lang="en-US"/>
           </a:p>
@@ -7668,7 +6630,7 @@
             <a:fld id="{BA713E6A-6B26-4373-A75B-EF395DC64F9E}" type="datetime1">
               <a:rPr lang="en-US" smtClean="0"/>
               <a:pPr eaLnBrk="1" latinLnBrk="0" hangingPunct="1"/>
-              <a:t>10/17/2025</a:t>
+              <a:t>10/25/2025</a:t>
             </a:fld>
             <a:endParaRPr lang="en-US"/>
           </a:p>
@@ -7947,7 +6909,7 @@
             <a:fld id="{57EB41EF-4260-415A-8DD6-FEDCC46E7EFC}" type="datetime1">
               <a:rPr lang="en-US" smtClean="0"/>
               <a:pPr eaLnBrk="1" latinLnBrk="0" hangingPunct="1"/>
-              <a:t>10/17/2025</a:t>
+              <a:t>10/25/2025</a:t>
             </a:fld>
             <a:endParaRPr lang="en-US"/>
           </a:p>
@@ -8356,7 +7318,7 @@
             <a:fld id="{6BDA80A0-06CC-4492-94A0-E8516751045E}" type="datetime1">
               <a:rPr lang="en-US" smtClean="0"/>
               <a:pPr eaLnBrk="1" latinLnBrk="0" hangingPunct="1"/>
-              <a:t>10/17/2025</a:t>
+              <a:t>10/25/2025</a:t>
             </a:fld>
             <a:endParaRPr lang="en-US"/>
           </a:p>
@@ -8695,7 +7657,7 @@
             <a:fld id="{A25B5B4B-57EE-495D-8E74-A657CFD8BB6C}" type="datetime1">
               <a:rPr lang="en-US" smtClean="0"/>
               <a:pPr eaLnBrk="1" latinLnBrk="0" hangingPunct="1"/>
-              <a:t>10/17/2025</a:t>
+              <a:t>10/25/2025</a:t>
             </a:fld>
             <a:endParaRPr lang="en-US" sz="1400" dirty="0">
               <a:solidFill>
@@ -31539,17 +30501,17 @@
           <a:ln/>
           <a:extLst>
             <a:ext uri="{FAA26D3D-D897-4be2-8F04-BA451C77F1D7}">
-              <ma14:placeholderFlag xmlns="" xmlns:ma14="http://schemas.microsoft.com/office/mac/drawingml/2011/main" val="1"/>
+              <ma14:placeholderFlag xmlns:ma14="http://schemas.microsoft.com/office/mac/drawingml/2011/main" xmlns="" val="1"/>
             </a:ext>
             <a:ext uri="{909E8E84-426E-40dd-AFC4-6F175D3DCCD1}">
-              <a14:hiddenFill xmlns="" xmlns:a14="http://schemas.microsoft.com/office/drawing/2010/main">
+              <a14:hiddenFill xmlns:a14="http://schemas.microsoft.com/office/drawing/2010/main" xmlns="">
                 <a:solidFill>
                   <a:schemeClr val="bg1"/>
                 </a:solidFill>
               </a14:hiddenFill>
             </a:ext>
             <a:ext uri="{91240B29-F687-4f45-9708-019B960494DF}">
-              <a14:hiddenLine xmlns="" xmlns:a14="http://schemas.microsoft.com/office/drawing/2010/main" w="12700">
+              <a14:hiddenLine xmlns:a14="http://schemas.microsoft.com/office/drawing/2010/main" xmlns="" w="12700">
                 <a:pattFill prst="narHorz">
                   <a:fgClr>
                     <a:schemeClr val="tx1"/>
@@ -31564,7 +30526,7 @@
               </a14:hiddenLine>
             </a:ext>
             <a:ext uri="{AF507438-7753-43e0-B8FC-AC1667EBCBE1}">
-              <a14:hiddenEffects xmlns="" xmlns:a14="http://schemas.microsoft.com/office/drawing/2010/main">
+              <a14:hiddenEffects xmlns:a14="http://schemas.microsoft.com/office/drawing/2010/main" xmlns="">
                 <a:effectLst>
                   <a:outerShdw blurRad="63500" dist="38099" dir="2700000" algn="ctr" rotWithShape="0">
                     <a:schemeClr val="bg2">
@@ -36187,7 +35149,7 @@
         <p:spPr/>
         <p:txBody>
           <a:bodyPr>
-            <a:normAutofit/>
+            <a:normAutofit fontScale="85000" lnSpcReduction="20000"/>
           </a:bodyPr>
           <a:lstStyle/>
           <a:p>
@@ -36249,6 +35211,34 @@
             </a:r>
           </a:p>
           <a:p>
+            <a:r>
+              <a:rPr lang="en-US" dirty="0"/>
+              <a:t>Method 5: Clear 32 bits in r12 starting from bit 0</a:t>
+            </a:r>
+          </a:p>
+          <a:p>
+            <a:pPr lvl="1"/>
+            <a:r>
+              <a:rPr lang="en-US" dirty="0"/>
+              <a:t>BFC r12, #0, #32</a:t>
+            </a:r>
+          </a:p>
+          <a:p>
+            <a:r>
+              <a:rPr lang="en-US" dirty="0"/>
+              <a:t>Method 6: r12 = r12 AND NOT r12 (bitwise clear)</a:t>
+            </a:r>
+          </a:p>
+          <a:p>
+            <a:pPr lvl="1"/>
+            <a:r>
+              <a:rPr lang="en-US" dirty="0"/>
+              <a:t>BIC r12, r12</a:t>
+            </a:r>
+            <a:r>
+              <a:rPr lang="en-US"/>
+              <a:t>, r12</a:t>
+            </a:r>
             <a:endParaRPr lang="en-US" dirty="0"/>
           </a:p>
         </p:txBody>

--- a/PPTs/Ch4_ARM_Arithmetic_Logic_Exercises_ANS.pptx
+++ b/PPTs/Ch4_ARM_Arithmetic_Logic_Exercises_ANS.pptx
@@ -189,7 +189,7 @@
   <pc:docChgLst>
     <pc:chgData name="Zonghua Gu" userId="9a7e1853e1951ef5" providerId="LiveId" clId="{CF1FAA12-072C-4ED5-BA76-0FFFAEFDB88A}"/>
     <pc:docChg chg="undo redo custSel addSld delSld modSld sldOrd modNotesMaster">
-      <pc:chgData name="Zonghua Gu" userId="9a7e1853e1951ef5" providerId="LiveId" clId="{CF1FAA12-072C-4ED5-BA76-0FFFAEFDB88A}" dt="2025-10-25T23:40:58.206" v="5815" actId="20577"/>
+      <pc:chgData name="Zonghua Gu" userId="9a7e1853e1951ef5" providerId="LiveId" clId="{CF1FAA12-072C-4ED5-BA76-0FFFAEFDB88A}" dt="2025-10-26T17:14:17.918" v="5949" actId="20577"/>
       <pc:docMkLst>
         <pc:docMk/>
       </pc:docMkLst>
@@ -231,7 +231,7 @@
         </pc:spChg>
       </pc:sldChg>
       <pc:sldChg chg="addSp delSp modSp add mod">
-        <pc:chgData name="Zonghua Gu" userId="9a7e1853e1951ef5" providerId="LiveId" clId="{CF1FAA12-072C-4ED5-BA76-0FFFAEFDB88A}" dt="2025-10-16T23:50:40.281" v="5758" actId="6549"/>
+        <pc:chgData name="Zonghua Gu" userId="9a7e1853e1951ef5" providerId="LiveId" clId="{CF1FAA12-072C-4ED5-BA76-0FFFAEFDB88A}" dt="2025-10-26T17:14:17.918" v="5949" actId="20577"/>
         <pc:sldMkLst>
           <pc:docMk/>
           <pc:sldMk cId="3592227053" sldId="356"/>
@@ -245,7 +245,7 @@
           </ac:spMkLst>
         </pc:spChg>
         <pc:spChg chg="add mod">
-          <ac:chgData name="Zonghua Gu" userId="9a7e1853e1951ef5" providerId="LiveId" clId="{CF1FAA12-072C-4ED5-BA76-0FFFAEFDB88A}" dt="2025-10-16T23:22:45.485" v="5586" actId="20577"/>
+          <ac:chgData name="Zonghua Gu" userId="9a7e1853e1951ef5" providerId="LiveId" clId="{CF1FAA12-072C-4ED5-BA76-0FFFAEFDB88A}" dt="2025-10-26T17:14:17.918" v="5949" actId="20577"/>
           <ac:spMkLst>
             <pc:docMk/>
             <pc:sldMk cId="3592227053" sldId="356"/>
@@ -285,13 +285,13 @@
         </pc:spChg>
       </pc:sldChg>
       <pc:sldChg chg="addSp modSp add mod">
-        <pc:chgData name="Zonghua Gu" userId="9a7e1853e1951ef5" providerId="LiveId" clId="{CF1FAA12-072C-4ED5-BA76-0FFFAEFDB88A}" dt="2025-10-16T23:25:10.584" v="5657" actId="20577"/>
+        <pc:chgData name="Zonghua Gu" userId="9a7e1853e1951ef5" providerId="LiveId" clId="{CF1FAA12-072C-4ED5-BA76-0FFFAEFDB88A}" dt="2025-10-26T17:13:19.938" v="5945" actId="20577"/>
         <pc:sldMkLst>
           <pc:docMk/>
           <pc:sldMk cId="1087692432" sldId="358"/>
         </pc:sldMkLst>
         <pc:spChg chg="add mod">
-          <ac:chgData name="Zonghua Gu" userId="9a7e1853e1951ef5" providerId="LiveId" clId="{CF1FAA12-072C-4ED5-BA76-0FFFAEFDB88A}" dt="2025-10-16T23:25:10.584" v="5657" actId="20577"/>
+          <ac:chgData name="Zonghua Gu" userId="9a7e1853e1951ef5" providerId="LiveId" clId="{CF1FAA12-072C-4ED5-BA76-0FFFAEFDB88A}" dt="2025-10-26T17:13:19.938" v="5945" actId="20577"/>
           <ac:spMkLst>
             <pc:docMk/>
             <pc:sldMk cId="1087692432" sldId="358"/>
@@ -543,107 +543,6 @@
             <ac:spMk id="4" creationId="{1E92B818-9E8A-D4F7-35C5-0DE946EE802E}"/>
           </ac:spMkLst>
         </pc:spChg>
-      </pc:sldChg>
-      <pc:sldChg chg="modSp new mod">
-        <pc:chgData name="Zonghua Gu" userId="9a7e1853e1951ef5" providerId="LiveId" clId="{CF1FAA12-072C-4ED5-BA76-0FFFAEFDB88A}" dt="2025-09-25T01:44:27.267" v="3518" actId="20577"/>
-        <pc:sldMkLst>
-          <pc:docMk/>
-          <pc:sldMk cId="714092882" sldId="579"/>
-        </pc:sldMkLst>
-        <pc:spChg chg="mod">
-          <ac:chgData name="Zonghua Gu" userId="9a7e1853e1951ef5" providerId="LiveId" clId="{CF1FAA12-072C-4ED5-BA76-0FFFAEFDB88A}" dt="2025-09-25T01:24:21.032" v="3296" actId="20577"/>
-          <ac:spMkLst>
-            <pc:docMk/>
-            <pc:sldMk cId="714092882" sldId="579"/>
-            <ac:spMk id="2" creationId="{8F9008DE-522A-498D-6E3F-C54CB6A4D536}"/>
-          </ac:spMkLst>
-        </pc:spChg>
-        <pc:spChg chg="mod">
-          <ac:chgData name="Zonghua Gu" userId="9a7e1853e1951ef5" providerId="LiveId" clId="{CF1FAA12-072C-4ED5-BA76-0FFFAEFDB88A}" dt="2025-09-25T01:44:27.267" v="3518" actId="20577"/>
-          <ac:spMkLst>
-            <pc:docMk/>
-            <pc:sldMk cId="714092882" sldId="579"/>
-            <ac:spMk id="4" creationId="{4E668C4B-C7E5-9534-B165-9B7E9107CB94}"/>
-          </ac:spMkLst>
-        </pc:spChg>
-      </pc:sldChg>
-      <pc:sldChg chg="addSp delSp modSp new mod">
-        <pc:chgData name="Zonghua Gu" userId="9a7e1853e1951ef5" providerId="LiveId" clId="{CF1FAA12-072C-4ED5-BA76-0FFFAEFDB88A}" dt="2025-09-25T01:46:20.890" v="3589" actId="20577"/>
-        <pc:sldMkLst>
-          <pc:docMk/>
-          <pc:sldMk cId="2592113441" sldId="580"/>
-        </pc:sldMkLst>
-        <pc:spChg chg="mod">
-          <ac:chgData name="Zonghua Gu" userId="9a7e1853e1951ef5" providerId="LiveId" clId="{CF1FAA12-072C-4ED5-BA76-0FFFAEFDB88A}" dt="2025-09-25T01:30:48.786" v="3378" actId="1076"/>
-          <ac:spMkLst>
-            <pc:docMk/>
-            <pc:sldMk cId="2592113441" sldId="580"/>
-            <ac:spMk id="3" creationId="{6E3554BE-2738-205C-F3A8-BC35BC861743}"/>
-          </ac:spMkLst>
-        </pc:spChg>
-        <pc:spChg chg="add mod">
-          <ac:chgData name="Zonghua Gu" userId="9a7e1853e1951ef5" providerId="LiveId" clId="{CF1FAA12-072C-4ED5-BA76-0FFFAEFDB88A}" dt="2025-09-25T01:46:01.007" v="3584"/>
-          <ac:spMkLst>
-            <pc:docMk/>
-            <pc:sldMk cId="2592113441" sldId="580"/>
-            <ac:spMk id="13" creationId="{99AD0913-B118-F87E-249C-6E68B0892D1C}"/>
-          </ac:spMkLst>
-        </pc:spChg>
-        <pc:graphicFrameChg chg="add mod modGraphic">
-          <ac:chgData name="Zonghua Gu" userId="9a7e1853e1951ef5" providerId="LiveId" clId="{CF1FAA12-072C-4ED5-BA76-0FFFAEFDB88A}" dt="2025-09-25T01:46:17.337" v="3588" actId="20577"/>
-          <ac:graphicFrameMkLst>
-            <pc:docMk/>
-            <pc:sldMk cId="2592113441" sldId="580"/>
-            <ac:graphicFrameMk id="6" creationId="{9AFCFA25-F4A6-2026-7853-D78B19A985A7}"/>
-          </ac:graphicFrameMkLst>
-        </pc:graphicFrameChg>
-        <pc:graphicFrameChg chg="add mod modGraphic">
-          <ac:chgData name="Zonghua Gu" userId="9a7e1853e1951ef5" providerId="LiveId" clId="{CF1FAA12-072C-4ED5-BA76-0FFFAEFDB88A}" dt="2025-09-25T01:46:11.706" v="3587" actId="20577"/>
-          <ac:graphicFrameMkLst>
-            <pc:docMk/>
-            <pc:sldMk cId="2592113441" sldId="580"/>
-            <ac:graphicFrameMk id="7" creationId="{BEE53F05-AEE5-4C73-59D1-FB738C8FC371}"/>
-          </ac:graphicFrameMkLst>
-        </pc:graphicFrameChg>
-        <pc:graphicFrameChg chg="add mod modGraphic">
-          <ac:chgData name="Zonghua Gu" userId="9a7e1853e1951ef5" providerId="LiveId" clId="{CF1FAA12-072C-4ED5-BA76-0FFFAEFDB88A}" dt="2025-09-25T01:46:20.890" v="3589" actId="20577"/>
-          <ac:graphicFrameMkLst>
-            <pc:docMk/>
-            <pc:sldMk cId="2592113441" sldId="580"/>
-            <ac:graphicFrameMk id="8" creationId="{90108726-902A-C6CC-1647-A81D62B61243}"/>
-          </ac:graphicFrameMkLst>
-        </pc:graphicFrameChg>
-      </pc:sldChg>
-      <pc:sldChg chg="addSp delSp modSp add mod ord">
-        <pc:chgData name="Zonghua Gu" userId="9a7e1853e1951ef5" providerId="LiveId" clId="{CF1FAA12-072C-4ED5-BA76-0FFFAEFDB88A}" dt="2025-09-25T01:45:52.206" v="3581"/>
-        <pc:sldMkLst>
-          <pc:docMk/>
-          <pc:sldMk cId="1535224969" sldId="582"/>
-        </pc:sldMkLst>
-        <pc:spChg chg="add mod">
-          <ac:chgData name="Zonghua Gu" userId="9a7e1853e1951ef5" providerId="LiveId" clId="{CF1FAA12-072C-4ED5-BA76-0FFFAEFDB88A}" dt="2025-09-25T01:45:38.633" v="3574" actId="1076"/>
-          <ac:spMkLst>
-            <pc:docMk/>
-            <pc:sldMk cId="1535224969" sldId="582"/>
-            <ac:spMk id="4" creationId="{8C172DA9-F89E-86B9-22FF-347E4B139A9D}"/>
-          </ac:spMkLst>
-        </pc:spChg>
-        <pc:spChg chg="add mod">
-          <ac:chgData name="Zonghua Gu" userId="9a7e1853e1951ef5" providerId="LiveId" clId="{CF1FAA12-072C-4ED5-BA76-0FFFAEFDB88A}" dt="2025-09-25T01:45:49.543" v="3579"/>
-          <ac:spMkLst>
-            <pc:docMk/>
-            <pc:sldMk cId="1535224969" sldId="582"/>
-            <ac:spMk id="11" creationId="{BE83309C-FA8B-6F99-8A51-4E5D49379006}"/>
-          </ac:spMkLst>
-        </pc:spChg>
-        <pc:graphicFrameChg chg="mod modGraphic">
-          <ac:chgData name="Zonghua Gu" userId="9a7e1853e1951ef5" providerId="LiveId" clId="{CF1FAA12-072C-4ED5-BA76-0FFFAEFDB88A}" dt="2025-09-25T01:44:24.186" v="3516" actId="20577"/>
-          <ac:graphicFrameMkLst>
-            <pc:docMk/>
-            <pc:sldMk cId="1535224969" sldId="582"/>
-            <ac:graphicFrameMk id="7" creationId="{473EDD55-4B34-E9B0-90CE-5D12E387F5DE}"/>
-          </ac:graphicFrameMkLst>
-        </pc:graphicFrameChg>
       </pc:sldChg>
       <pc:sldChg chg="addSp delSp modSp new mod">
         <pc:chgData name="Zonghua Gu" userId="9a7e1853e1951ef5" providerId="LiveId" clId="{CF1FAA12-072C-4ED5-BA76-0FFFAEFDB88A}" dt="2025-10-15T00:22:35.321" v="4949" actId="1076"/>
@@ -1232,7 +1131,7 @@
             <a:fld id="{3AC3A17A-95E8-4381-B66B-5D6DE2B3048A}" type="datetimeFigureOut">
               <a:rPr lang="en-US" smtClean="0"/>
               <a:pPr/>
-              <a:t>10/25/2025</a:t>
+              <a:t>10/26/2025</a:t>
             </a:fld>
             <a:endParaRPr lang="en-US"/>
           </a:p>
@@ -2417,16 +2316,7 @@
                             </a:solidFill>
                             <a:latin typeface="Cambria Math" panose="02040503050406030204" pitchFamily="18" charset="0"/>
                           </a:rPr>
-                          <m:t>−</m:t>
-                        </m:r>
-                        <m:r>
-                          <a:rPr lang="en-US" sz="2800" b="0" i="1" smtClean="0">
-                            <a:solidFill>
-                              <a:prstClr val="black"/>
-                            </a:solidFill>
-                            <a:latin typeface="Cambria Math" panose="02040503050406030204" pitchFamily="18" charset="0"/>
-                          </a:rPr>
-                          <m:t>1</m:t>
+                          <m:t>−1</m:t>
                         </m:r>
                       </m:sup>
                     </m:sSup>
@@ -2437,16 +2327,7 @@
                         </a:solidFill>
                         <a:latin typeface="Cambria Math"/>
                       </a:rPr>
-                      <m:t>−</m:t>
-                    </m:r>
-                    <m:r>
-                      <a:rPr lang="en-US" sz="2800" i="1">
-                        <a:solidFill>
-                          <a:prstClr val="black"/>
-                        </a:solidFill>
-                        <a:latin typeface="Cambria Math"/>
-                      </a:rPr>
-                      <m:t>1</m:t>
+                      <m:t>−1</m:t>
                     </m:r>
                   </m:oMath>
                 </a14:m>
@@ -2540,16 +2421,7 @@
                             </a:solidFill>
                             <a:latin typeface="Cambria Math" panose="02040503050406030204" pitchFamily="18" charset="0"/>
                           </a:rPr>
-                          <m:t>−</m:t>
-                        </m:r>
-                        <m:r>
-                          <a:rPr lang="en-US" sz="2800" b="0" i="1" smtClean="0">
-                            <a:solidFill>
-                              <a:prstClr val="black"/>
-                            </a:solidFill>
-                            <a:latin typeface="Cambria Math" panose="02040503050406030204" pitchFamily="18" charset="0"/>
-                          </a:rPr>
-                          <m:t>1</m:t>
+                          <m:t>−1</m:t>
                         </m:r>
                       </m:sup>
                     </m:sSup>
@@ -4631,7 +4503,7 @@
             <a:fld id="{966FEA0E-C2DF-4252-97AD-54F2B7E07EAC}" type="datetime1">
               <a:rPr lang="en-US" smtClean="0"/>
               <a:pPr eaLnBrk="1" latinLnBrk="0" hangingPunct="1"/>
-              <a:t>10/25/2025</a:t>
+              <a:t>10/26/2025</a:t>
             </a:fld>
             <a:endParaRPr lang="en-US" sz="1600" dirty="0"/>
           </a:p>
@@ -4992,7 +4864,7 @@
             <a:fld id="{69EF9524-0CAA-4F98-BAC2-CE6B712F5E94}" type="datetime1">
               <a:rPr lang="en-US" smtClean="0"/>
               <a:pPr eaLnBrk="1" latinLnBrk="0" hangingPunct="1"/>
-              <a:t>10/25/2025</a:t>
+              <a:t>10/26/2025</a:t>
             </a:fld>
             <a:endParaRPr lang="en-US"/>
           </a:p>
@@ -5169,7 +5041,7 @@
             <a:fld id="{CB20516D-6F89-4C89-8307-32A716E22875}" type="datetime1">
               <a:rPr lang="en-US" smtClean="0"/>
               <a:pPr eaLnBrk="1" latinLnBrk="0" hangingPunct="1"/>
-              <a:t>10/25/2025</a:t>
+              <a:t>10/26/2025</a:t>
             </a:fld>
             <a:endParaRPr lang="en-US"/>
           </a:p>
@@ -5406,7 +5278,7 @@
             <a:fld id="{0CD88620-7329-4FC3-B65D-4EA691138F1B}" type="datetime1">
               <a:rPr lang="en-US" smtClean="0"/>
               <a:pPr eaLnBrk="1" latinLnBrk="0" hangingPunct="1"/>
-              <a:t>10/25/2025</a:t>
+              <a:t>10/26/2025</a:t>
             </a:fld>
             <a:endParaRPr lang="en-US" dirty="0"/>
           </a:p>
@@ -5677,7 +5549,7 @@
             <a:fld id="{0E46F3A1-5653-427D-9F78-56077401431A}" type="datetime1">
               <a:rPr lang="en-US" smtClean="0"/>
               <a:pPr eaLnBrk="1" latinLnBrk="0" hangingPunct="1"/>
-              <a:t>10/25/2025</a:t>
+              <a:t>10/26/2025</a:t>
             </a:fld>
             <a:endParaRPr lang="en-US" dirty="0"/>
           </a:p>
@@ -5899,7 +5771,7 @@
             <a:fld id="{CB67FC03-415A-45F0-B002-DF181377F7DC}" type="datetime1">
               <a:rPr lang="en-US" smtClean="0"/>
               <a:pPr eaLnBrk="1" latinLnBrk="0" hangingPunct="1"/>
-              <a:t>10/25/2025</a:t>
+              <a:t>10/26/2025</a:t>
             </a:fld>
             <a:endParaRPr lang="en-US"/>
           </a:p>
@@ -6253,7 +6125,7 @@
             <a:fld id="{1B6FC726-A0B4-4FC7-90F5-F17415A5C1A3}" type="datetime1">
               <a:rPr lang="en-US" smtClean="0"/>
               <a:pPr eaLnBrk="1" latinLnBrk="0" hangingPunct="1"/>
-              <a:t>10/25/2025</a:t>
+              <a:t>10/26/2025</a:t>
             </a:fld>
             <a:endParaRPr lang="en-US"/>
           </a:p>
@@ -6487,7 +6359,7 @@
             <a:fld id="{BE217211-C3F9-4892-9CC3-C7105638567D}" type="datetime1">
               <a:rPr lang="en-US" smtClean="0"/>
               <a:pPr eaLnBrk="1" latinLnBrk="0" hangingPunct="1"/>
-              <a:t>10/25/2025</a:t>
+              <a:t>10/26/2025</a:t>
             </a:fld>
             <a:endParaRPr lang="en-US"/>
           </a:p>
@@ -6630,7 +6502,7 @@
             <a:fld id="{BA713E6A-6B26-4373-A75B-EF395DC64F9E}" type="datetime1">
               <a:rPr lang="en-US" smtClean="0"/>
               <a:pPr eaLnBrk="1" latinLnBrk="0" hangingPunct="1"/>
-              <a:t>10/25/2025</a:t>
+              <a:t>10/26/2025</a:t>
             </a:fld>
             <a:endParaRPr lang="en-US"/>
           </a:p>
@@ -6909,7 +6781,7 @@
             <a:fld id="{57EB41EF-4260-415A-8DD6-FEDCC46E7EFC}" type="datetime1">
               <a:rPr lang="en-US" smtClean="0"/>
               <a:pPr eaLnBrk="1" latinLnBrk="0" hangingPunct="1"/>
-              <a:t>10/25/2025</a:t>
+              <a:t>10/26/2025</a:t>
             </a:fld>
             <a:endParaRPr lang="en-US"/>
           </a:p>
@@ -7318,7 +7190,7 @@
             <a:fld id="{6BDA80A0-06CC-4492-94A0-E8516751045E}" type="datetime1">
               <a:rPr lang="en-US" smtClean="0"/>
               <a:pPr eaLnBrk="1" latinLnBrk="0" hangingPunct="1"/>
-              <a:t>10/25/2025</a:t>
+              <a:t>10/26/2025</a:t>
             </a:fld>
             <a:endParaRPr lang="en-US"/>
           </a:p>
@@ -7657,7 +7529,7 @@
             <a:fld id="{A25B5B4B-57EE-495D-8E74-A657CFD8BB6C}" type="datetime1">
               <a:rPr lang="en-US" smtClean="0"/>
               <a:pPr eaLnBrk="1" latinLnBrk="0" hangingPunct="1"/>
-              <a:t>10/25/2025</a:t>
+              <a:t>10/26/2025</a:t>
             </a:fld>
             <a:endParaRPr lang="en-US" sz="1400" dirty="0">
               <a:solidFill>
@@ -16973,8 +16845,21 @@
           <a:p>
             <a:r>
               <a:rPr lang="en-US" sz="1600" dirty="0"/>
-              <a:t>C (Carry flag): Set to 1.  The last bit shifted out was 1.</a:t>
-            </a:r>
+              <a:t>C (Carry flag): Set to 1.  The last bit shifted out was 1.  </a:t>
+            </a:r>
+            <a:r>
+              <a:rPr lang="en-US" sz="1600"/>
+              <a:t>(ANDS </a:t>
+            </a:r>
+            <a:r>
+              <a:rPr lang="en-US" sz="1600" dirty="0"/>
+              <a:t>does not affect C </a:t>
+            </a:r>
+            <a:r>
+              <a:rPr lang="en-US" sz="1600"/>
+              <a:t>flag.)</a:t>
+            </a:r>
+            <a:endParaRPr lang="en-US" sz="1600" dirty="0"/>
           </a:p>
           <a:p>
             <a:r>
@@ -17572,8 +17457,8 @@
           </a:p>
         </p:txBody>
       </p:sp>
-      <mc:AlternateContent xmlns:mc="http://schemas.openxmlformats.org/markup-compatibility/2006" xmlns:a14="http://schemas.microsoft.com/office/drawing/2010/main">
-        <mc:Choice Requires="a14">
+      <mc:AlternateContent xmlns:mc="http://schemas.openxmlformats.org/markup-compatibility/2006">
+        <mc:Choice xmlns:a14="http://schemas.microsoft.com/office/drawing/2010/main" Requires="a14">
           <p:sp>
             <p:nvSpPr>
               <p:cNvPr id="4" name="Content Placeholder 3">
@@ -17590,8 +17475,8 @@
             </p:nvSpPr>
             <p:spPr>
               <a:xfrm>
-                <a:off x="457200" y="3452191"/>
-                <a:ext cx="8229600" cy="3191594"/>
+                <a:off x="304800" y="3452190"/>
+                <a:ext cx="8610600" cy="3269919"/>
               </a:xfrm>
               <a:prstGeom prst="rect">
                 <a:avLst/>
@@ -17791,17 +17676,7 @@
                       <a:schemeClr val="tx1"/>
                     </a:solidFill>
                   </a:rPr>
-                  <a:t>ANS:</a:t>
-                </a:r>
-              </a:p>
-              <a:p>
-                <a:r>
-                  <a:rPr lang="en-US" dirty="0">
-                    <a:solidFill>
-                      <a:schemeClr val="tx1"/>
-                    </a:solidFill>
-                  </a:rPr>
-                  <a:t>Left shift (LSL #1) moves the bits in r0 left by 1 bit, so r0 = 0xFFFFFFE00. ADDS is then computed: r2 = r1 + (r0 &lt;&lt; 1) = 0xFFFFFFE01</a:t>
+                  <a:t>ANS: Left shift (LSL #1) moves the bits in r0 left by 1 bit, so r0 = 0xFFFFFFE00. ADDS is then computed: r2 = r1 + (r0 &lt;&lt; 1) = 0xFFFFFFE01</a:t>
                 </a:r>
               </a:p>
               <a:p>
@@ -17812,21 +17687,8 @@
                       <a:schemeClr val="tx1"/>
                     </a:solidFill>
                   </a:rPr>
-                  <a:t>LSL does not update flags; ADDS </a:t>
+                  <a:t>LSL does not update flags; ADDS updates flags</a:t>
                 </a:r>
-                <a:r>
-                  <a:rPr lang="en-US">
-                    <a:solidFill>
-                      <a:schemeClr val="tx1"/>
-                    </a:solidFill>
-                  </a:rPr>
-                  <a:t>updates flags</a:t>
-                </a:r>
-                <a:endParaRPr lang="en-US" dirty="0">
-                  <a:solidFill>
-                    <a:schemeClr val="tx1"/>
-                  </a:solidFill>
-                </a:endParaRPr>
               </a:p>
               <a:p>
                 <a:r>
@@ -17867,7 +17729,18 @@
                       <a:schemeClr val="tx1"/>
                     </a:solidFill>
                   </a:rPr>
-                  <a:t>C (Carry): Carry is set if there is an unsigned overflow. Here carry flag C = 0.</a:t>
+                  <a:t>C (Carry): for ADDS, C is the carry-out from the addition (unsigned overflow). Since 0x0000_0001 + 0xFFFF_FE00 &lt; 2^32, there is no carry-out → C = 0.</a:t>
+                </a:r>
+              </a:p>
+              <a:p>
+                <a:pPr lvl="1"/>
+                <a:r>
+                  <a:rPr lang="en-US" dirty="0">
+                    <a:solidFill>
+                      <a:schemeClr val="tx1"/>
+                    </a:solidFill>
+                  </a:rPr>
+                  <a:t>Note: the shift’s carry-out was 1, but ADDS overwrites the flags; the final C is the addition carry-out (0).</a:t>
                 </a:r>
               </a:p>
               <a:p>
@@ -17975,7 +17848,7 @@
             </p:txBody>
           </p:sp>
         </mc:Choice>
-        <mc:Fallback xmlns="">
+        <mc:Fallback>
           <p:sp>
             <p:nvSpPr>
               <p:cNvPr id="4" name="Content Placeholder 3">
@@ -17992,8 +17865,8 @@
             </p:nvSpPr>
             <p:spPr>
               <a:xfrm>
-                <a:off x="457200" y="3452191"/>
-                <a:ext cx="8229600" cy="3191594"/>
+                <a:off x="304800" y="3452190"/>
+                <a:ext cx="8610600" cy="3269919"/>
               </a:xfrm>
               <a:prstGeom prst="rect">
                 <a:avLst/>
@@ -18001,7 +17874,7 @@
               <a:blipFill>
                 <a:blip r:embed="rId3"/>
                 <a:stretch>
-                  <a:fillRect t="-2099" r="-222"/>
+                  <a:fillRect t="-2048" r="-778"/>
                 </a:stretch>
               </a:blipFill>
             </p:spPr>
@@ -30501,17 +30374,17 @@
           <a:ln/>
           <a:extLst>
             <a:ext uri="{FAA26D3D-D897-4be2-8F04-BA451C77F1D7}">
-              <ma14:placeholderFlag xmlns:ma14="http://schemas.microsoft.com/office/mac/drawingml/2011/main" xmlns="" val="1"/>
+              <ma14:placeholderFlag xmlns="" xmlns:ma14="http://schemas.microsoft.com/office/mac/drawingml/2011/main" val="1"/>
             </a:ext>
             <a:ext uri="{909E8E84-426E-40dd-AFC4-6F175D3DCCD1}">
-              <a14:hiddenFill xmlns:a14="http://schemas.microsoft.com/office/drawing/2010/main" xmlns="">
+              <a14:hiddenFill xmlns="" xmlns:a14="http://schemas.microsoft.com/office/drawing/2010/main">
                 <a:solidFill>
                   <a:schemeClr val="bg1"/>
                 </a:solidFill>
               </a14:hiddenFill>
             </a:ext>
             <a:ext uri="{91240B29-F687-4f45-9708-019B960494DF}">
-              <a14:hiddenLine xmlns:a14="http://schemas.microsoft.com/office/drawing/2010/main" xmlns="" w="12700">
+              <a14:hiddenLine xmlns="" xmlns:a14="http://schemas.microsoft.com/office/drawing/2010/main" w="12700">
                 <a:pattFill prst="narHorz">
                   <a:fgClr>
                     <a:schemeClr val="tx1"/>
@@ -30526,7 +30399,7 @@
               </a14:hiddenLine>
             </a:ext>
             <a:ext uri="{AF507438-7753-43e0-B8FC-AC1667EBCBE1}">
-              <a14:hiddenEffects xmlns:a14="http://schemas.microsoft.com/office/drawing/2010/main" xmlns="">
+              <a14:hiddenEffects xmlns="" xmlns:a14="http://schemas.microsoft.com/office/drawing/2010/main">
                 <a:effectLst>
                   <a:outerShdw blurRad="63500" dist="38099" dir="2700000" algn="ctr" rotWithShape="0">
                     <a:schemeClr val="bg2">
